--- a/python class/Python Class.pptx
+++ b/python class/Python Class.pptx
@@ -5,7 +5,7 @@
     <p:sldMasterId id="2147483660" r:id="rId1"/>
   </p:sldMasterIdLst>
   <p:notesMasterIdLst>
-    <p:notesMasterId r:id="rId15"/>
+    <p:notesMasterId r:id="rId16"/>
   </p:notesMasterIdLst>
   <p:sldIdLst>
     <p:sldId id="256" r:id="rId2"/>
@@ -19,8 +19,9 @@
     <p:sldId id="265" r:id="rId10"/>
     <p:sldId id="268" r:id="rId11"/>
     <p:sldId id="263" r:id="rId12"/>
-    <p:sldId id="266" r:id="rId13"/>
-    <p:sldId id="267" r:id="rId14"/>
+    <p:sldId id="269" r:id="rId13"/>
+    <p:sldId id="266" r:id="rId14"/>
+    <p:sldId id="267" r:id="rId15"/>
   </p:sldIdLst>
   <p:sldSz cx="12192000" cy="6858000"/>
   <p:notesSz cx="7104063" cy="10234613"/>
@@ -209,7 +210,7 @@
           <a:p>
             <a:fld id="{C7300FFE-222E-424B-A24A-B86ADB1660A8}" type="datetimeFigureOut">
               <a:rPr lang="en-IN" smtClean="0"/>
-              <a:t>17-06-2026</a:t>
+              <a:t>19-06-2026</a:t>
             </a:fld>
             <a:endParaRPr lang="en-IN" dirty="0"/>
           </a:p>
@@ -637,7 +638,7 @@
           <a:p>
             <a:fld id="{AD501974-91E0-4A6C-BF4F-18DDA0DBE697}" type="datetime1">
               <a:rPr lang="en-IN" smtClean="0"/>
-              <a:t>17-06-2026</a:t>
+              <a:t>19-06-2026</a:t>
             </a:fld>
             <a:endParaRPr lang="en-IN" dirty="0"/>
           </a:p>
@@ -762,7 +763,7 @@
           <a:p>
             <a:fld id="{340C70EA-229A-4802-A7BC-A1799783BDD3}" type="datetime1">
               <a:rPr lang="en-IN" smtClean="0"/>
-              <a:t>17-06-2026</a:t>
+              <a:t>19-06-2026</a:t>
             </a:fld>
             <a:endParaRPr lang="en-IN" dirty="0"/>
           </a:p>
@@ -1049,7 +1050,7 @@
           <a:p>
             <a:fld id="{BD944048-9929-4BB2-BADE-62F9A707015B}" type="datetime1">
               <a:rPr lang="en-IN" smtClean="0"/>
-              <a:t>17-06-2026</a:t>
+              <a:t>19-06-2026</a:t>
             </a:fld>
             <a:endParaRPr lang="en-IN" dirty="0"/>
           </a:p>
@@ -1355,7 +1356,7 @@
           <a:p>
             <a:fld id="{09A388D1-7504-45FD-847C-EF9E921E08DF}" type="datetime1">
               <a:rPr lang="en-IN" smtClean="0"/>
-              <a:t>17-06-2026</a:t>
+              <a:t>19-06-2026</a:t>
             </a:fld>
             <a:endParaRPr lang="en-IN" dirty="0"/>
           </a:p>
@@ -1584,7 +1585,7 @@
           <a:p>
             <a:fld id="{6015BE80-B03C-48AB-B3E2-19C5F4D60D3C}" type="datetime1">
               <a:rPr lang="en-IN" smtClean="0"/>
-              <a:t>17-06-2026</a:t>
+              <a:t>19-06-2026</a:t>
             </a:fld>
             <a:endParaRPr lang="en-IN" dirty="0"/>
           </a:p>
@@ -1855,7 +1856,7 @@
           <a:p>
             <a:fld id="{450E9977-AF0E-4B1A-B2BF-2416B4828E95}" type="datetime1">
               <a:rPr lang="en-IN" smtClean="0"/>
-              <a:t>17-06-2026</a:t>
+              <a:t>19-06-2026</a:t>
             </a:fld>
             <a:endParaRPr lang="en-IN" dirty="0"/>
           </a:p>
@@ -2082,7 +2083,7 @@
           <a:p>
             <a:fld id="{972A712B-80AB-4FDB-AFE5-C959280677B9}" type="datetime1">
               <a:rPr lang="en-IN" smtClean="0"/>
-              <a:t>17-06-2026</a:t>
+              <a:t>19-06-2026</a:t>
             </a:fld>
             <a:endParaRPr lang="en-IN" dirty="0"/>
           </a:p>
@@ -2373,7 +2374,7 @@
           <a:p>
             <a:fld id="{78FC1D50-5769-4793-A6D0-4C61D943385E}" type="datetime1">
               <a:rPr lang="en-IN" smtClean="0"/>
-              <a:t>17-06-2026</a:t>
+              <a:t>19-06-2026</a:t>
             </a:fld>
             <a:endParaRPr lang="en-IN" dirty="0"/>
           </a:p>
@@ -2638,7 +2639,7 @@
           <a:p>
             <a:fld id="{1093E9E7-66F0-49C7-87AF-7A91F126A0CA}" type="datetime1">
               <a:rPr lang="en-IN" smtClean="0"/>
-              <a:t>17-06-2026</a:t>
+              <a:t>19-06-2026</a:t>
             </a:fld>
             <a:endParaRPr lang="en-IN" dirty="0"/>
           </a:p>
@@ -3084,7 +3085,7 @@
           <a:p>
             <a:fld id="{4802E001-56FE-4C01-9545-A69D840AB1F5}" type="datetime1">
               <a:rPr lang="en-IN" smtClean="0"/>
-              <a:t>17-06-2026</a:t>
+              <a:t>19-06-2026</a:t>
             </a:fld>
             <a:endParaRPr lang="en-IN" dirty="0"/>
           </a:p>
@@ -3248,7 +3249,7 @@
           <a:p>
             <a:fld id="{FC628212-ABC2-4EAF-BB21-53D61AEEEA49}" type="datetime1">
               <a:rPr lang="en-IN" smtClean="0"/>
-              <a:t>17-06-2026</a:t>
+              <a:t>19-06-2026</a:t>
             </a:fld>
             <a:endParaRPr lang="en-IN" dirty="0"/>
           </a:p>
@@ -3412,7 +3413,7 @@
           <a:p>
             <a:fld id="{83F0C27E-97BD-4ACD-AFDF-13985BE88ECF}" type="datetime1">
               <a:rPr lang="en-IN" smtClean="0"/>
-              <a:t>17-06-2026</a:t>
+              <a:t>19-06-2026</a:t>
             </a:fld>
             <a:endParaRPr lang="en-IN" dirty="0"/>
           </a:p>
@@ -3610,7 +3611,7 @@
           <a:p>
             <a:fld id="{10A04BDC-9A72-4B08-81B7-A336A5B4E254}" type="datetime1">
               <a:rPr lang="en-IN" smtClean="0"/>
-              <a:t>17-06-2026</a:t>
+              <a:t>19-06-2026</a:t>
             </a:fld>
             <a:endParaRPr lang="en-IN" dirty="0"/>
           </a:p>
@@ -3808,7 +3809,7 @@
           <a:p>
             <a:fld id="{2E5D08A3-D96A-4309-8AF3-C610782BB2D3}" type="datetime1">
               <a:rPr lang="en-IN" smtClean="0"/>
-              <a:t>17-06-2026</a:t>
+              <a:t>19-06-2026</a:t>
             </a:fld>
             <a:endParaRPr lang="en-IN" dirty="0"/>
           </a:p>
@@ -5168,7 +5169,7 @@
             <a:pPr lvl="1"/>
             <a:r>
               <a:rPr lang="en-IN" dirty="0"/>
-              <a:t> split(string) , capitalize() , capitalize() , </a:t>
+              <a:t> split(string) , capitalize() , </a:t>
             </a:r>
             <a:r>
               <a:rPr lang="en-IN" dirty="0" err="1"/>
@@ -5306,7 +5307,7 @@
           <p:cNvPr id="2" name="Title 1">
             <a:extLst>
               <a:ext uri="{FF2B5EF4-FFF2-40B4-BE49-F238E27FC236}">
-                <a16:creationId xmlns:a16="http://schemas.microsoft.com/office/drawing/2014/main" id="{CDFED4A0-085D-A9E8-4607-7501E6F3FB8A}"/>
+                <a16:creationId xmlns:a16="http://schemas.microsoft.com/office/drawing/2014/main" id="{CB7B6AA8-60AC-8A2C-4715-F7E009380593}"/>
               </a:ext>
             </a:extLst>
           </p:cNvPr>
@@ -5324,7 +5325,7 @@
           <a:p>
             <a:r>
               <a:rPr lang="en-IN" dirty="0"/>
-              <a:t>Dictionary</a:t>
+              <a:t>Problems</a:t>
             </a:r>
           </a:p>
         </p:txBody>
@@ -5334,7 +5335,7 @@
           <p:cNvPr id="3" name="Content Placeholder 2">
             <a:extLst>
               <a:ext uri="{FF2B5EF4-FFF2-40B4-BE49-F238E27FC236}">
-                <a16:creationId xmlns:a16="http://schemas.microsoft.com/office/drawing/2014/main" id="{31C4A63C-5EB5-3F88-22DB-F24ADFAE6A94}"/>
+                <a16:creationId xmlns:a16="http://schemas.microsoft.com/office/drawing/2014/main" id="{9BF98D36-22AB-663B-51A9-37C097B7D52E}"/>
               </a:ext>
             </a:extLst>
           </p:cNvPr>
@@ -5352,70 +5353,101 @@
           <a:p>
             <a:r>
               <a:rPr lang="en-IN" dirty="0"/>
-              <a:t> key-value pairs.</a:t>
-            </a:r>
-          </a:p>
-          <a:p>
-            <a:r>
-              <a:rPr lang="en-IN" dirty="0"/>
+              <a:t> Check Anagram. (Example : listen – silent)</a:t>
+            </a:r>
+          </a:p>
+          <a:p>
+            <a:r>
+              <a:rPr lang="en-IN" dirty="0"/>
+              <a:t> Find Longest Word. (Example : Java is a powerful language, powerful)</a:t>
+            </a:r>
+          </a:p>
+          <a:p>
+            <a:r>
+              <a:rPr lang="en-IN" dirty="0"/>
+              <a:t> Count Digits, Alphabets, and Special Characters.</a:t>
+            </a:r>
+          </a:p>
+          <a:p>
+            <a:pPr lvl="1"/>
+            <a:r>
+              <a:rPr lang="en-IN" dirty="0"/>
+              <a:t> Example : Java@123 , </a:t>
+            </a:r>
+            <a:r>
+              <a:rPr lang="en-IN" b="1" dirty="0"/>
+              <a:t>o/p : </a:t>
+            </a:r>
+            <a:r>
+              <a:rPr lang="en-IN" dirty="0"/>
+              <a:t>Letters: 4,Digits: 3,Special: 1</a:t>
+            </a:r>
+            <a:endParaRPr lang="en-IN" b="1" dirty="0"/>
+          </a:p>
+          <a:p>
+            <a:r>
+              <a:rPr lang="en-IN" b="1" dirty="0"/>
               <a:t> </a:t>
             </a:r>
             <a:r>
+              <a:rPr lang="en-IN" dirty="0"/>
+              <a:t>Compress a String. (Example : </a:t>
+            </a:r>
+            <a:r>
+              <a:rPr lang="en-IN" dirty="0" err="1"/>
+              <a:t>aaabbcccc</a:t>
+            </a:r>
+            <a:r>
+              <a:rPr lang="en-IN" dirty="0"/>
+              <a:t> , a3b2c4)</a:t>
+            </a:r>
+          </a:p>
+          <a:p>
+            <a:r>
+              <a:rPr lang="en-IN" dirty="0"/>
+              <a:t> Check Rotation. (Example : ABCD,CDAB , Rotation)</a:t>
+            </a:r>
+          </a:p>
+          <a:p>
+            <a:r>
+              <a:rPr lang="en-IN" dirty="0"/>
+              <a:t> Reverse Words in a Sentence. </a:t>
+            </a:r>
+          </a:p>
+          <a:p>
+            <a:pPr lvl="1"/>
+            <a:r>
+              <a:rPr lang="en-IN" dirty="0"/>
+              <a:t> Example : Java is awesome , </a:t>
+            </a:r>
+            <a:r>
               <a:rPr lang="en-IN" b="1" dirty="0"/>
-              <a:t>Syntax : </a:t>
-            </a:r>
-            <a:r>
-              <a:rPr lang="en-IN" dirty="0"/>
-              <a:t>{key (datatype) : value (datatype)}</a:t>
-            </a:r>
-          </a:p>
-          <a:p>
-            <a:r>
-              <a:rPr lang="en-IN" dirty="0"/>
-              <a:t> </a:t>
+              <a:t>o/p : </a:t>
+            </a:r>
+            <a:r>
+              <a:rPr lang="en-IN" dirty="0"/>
+              <a:t>awesome is Java</a:t>
+            </a:r>
+          </a:p>
+          <a:p>
+            <a:r>
+              <a:rPr lang="en-IN" dirty="0"/>
+              <a:t> Check Whether Two Strings Differ by One Character.</a:t>
+            </a:r>
+          </a:p>
+          <a:p>
+            <a:pPr lvl="1"/>
+            <a:r>
+              <a:rPr lang="en-IN" dirty="0"/>
+              <a:t> Example : book , </a:t>
             </a:r>
             <a:r>
               <a:rPr lang="en-IN" b="1" dirty="0"/>
-              <a:t>Initialization : </a:t>
-            </a:r>
-          </a:p>
-          <a:p>
-            <a:pPr lvl="1"/>
-            <a:r>
-              <a:rPr lang="en-IN" dirty="0"/>
-              <a:t> stream = </a:t>
-            </a:r>
-            <a:r>
-              <a:rPr lang="en-IN" dirty="0" err="1"/>
-              <a:t>dict</a:t>
-            </a:r>
-            <a:r>
-              <a:rPr lang="en-IN" dirty="0"/>
-              <a:t>()	or stream = {}		# Empty dictionary</a:t>
-            </a:r>
-          </a:p>
-          <a:p>
-            <a:pPr lvl="1"/>
-            <a:r>
-              <a:rPr lang="en-IN" dirty="0"/>
-              <a:t> stream = {‘a’:1,’b’:2,’c’:3}		# dictionary with values</a:t>
-            </a:r>
-          </a:p>
-          <a:p>
-            <a:r>
-              <a:rPr lang="en-IN" dirty="0"/>
-              <a:t> </a:t>
-            </a:r>
-            <a:r>
-              <a:rPr lang="en-IN" b="1" dirty="0"/>
-              <a:t>Operations : </a:t>
-            </a:r>
-          </a:p>
-          <a:p>
-            <a:pPr lvl="1"/>
-            <a:r>
-              <a:rPr lang="en-IN" dirty="0"/>
-              <a:t> keys() , values() , items() , get(key) , update() , pop()</a:t>
+              <a:t>o/p : </a:t>
+            </a:r>
+            <a:r>
+              <a:rPr lang="en-IN" dirty="0"/>
+              <a:t>books</a:t>
             </a:r>
           </a:p>
         </p:txBody>
@@ -5425,7 +5457,7 @@
           <p:cNvPr id="4" name="Footer Placeholder 3">
             <a:extLst>
               <a:ext uri="{FF2B5EF4-FFF2-40B4-BE49-F238E27FC236}">
-                <a16:creationId xmlns:a16="http://schemas.microsoft.com/office/drawing/2014/main" id="{015DD2A2-7326-6ED7-0DEF-45C5E25920D9}"/>
+                <a16:creationId xmlns:a16="http://schemas.microsoft.com/office/drawing/2014/main" id="{AE042985-39AA-441E-137E-DB4FB5A210D6}"/>
               </a:ext>
             </a:extLst>
           </p:cNvPr>
@@ -5454,7 +5486,7 @@
           <p:cNvPr id="5" name="Slide Number Placeholder 4">
             <a:extLst>
               <a:ext uri="{FF2B5EF4-FFF2-40B4-BE49-F238E27FC236}">
-                <a16:creationId xmlns:a16="http://schemas.microsoft.com/office/drawing/2014/main" id="{0E1BB4E1-0FFB-85C6-8032-8CB80494D044}"/>
+                <a16:creationId xmlns:a16="http://schemas.microsoft.com/office/drawing/2014/main" id="{E76F60E8-0891-C424-B367-8BD89DB37DE6}"/>
               </a:ext>
             </a:extLst>
           </p:cNvPr>
@@ -5481,7 +5513,7 @@
     </p:spTree>
     <p:extLst>
       <p:ext uri="{BB962C8B-B14F-4D97-AF65-F5344CB8AC3E}">
-        <p14:creationId xmlns:p14="http://schemas.microsoft.com/office/powerpoint/2010/main" val="439917030"/>
+        <p14:creationId xmlns:p14="http://schemas.microsoft.com/office/powerpoint/2010/main" val="4062296641"/>
       </p:ext>
     </p:extLst>
   </p:cSld>
@@ -5513,7 +5545,7 @@
           <p:cNvPr id="2" name="Title 1">
             <a:extLst>
               <a:ext uri="{FF2B5EF4-FFF2-40B4-BE49-F238E27FC236}">
-                <a16:creationId xmlns:a16="http://schemas.microsoft.com/office/drawing/2014/main" id="{CCFDECB5-3B44-1721-6745-EAFF6CB54045}"/>
+                <a16:creationId xmlns:a16="http://schemas.microsoft.com/office/drawing/2014/main" id="{CDFED4A0-085D-A9E8-4607-7501E6F3FB8A}"/>
               </a:ext>
             </a:extLst>
           </p:cNvPr>
@@ -5531,7 +5563,7 @@
           <a:p>
             <a:r>
               <a:rPr lang="en-IN" dirty="0"/>
-              <a:t>Set</a:t>
+              <a:t>Dictionary</a:t>
             </a:r>
           </a:p>
         </p:txBody>
@@ -5541,7 +5573,7 @@
           <p:cNvPr id="3" name="Content Placeholder 2">
             <a:extLst>
               <a:ext uri="{FF2B5EF4-FFF2-40B4-BE49-F238E27FC236}">
-                <a16:creationId xmlns:a16="http://schemas.microsoft.com/office/drawing/2014/main" id="{C92BFAB8-0061-3D68-E7A1-657D65A7DE7D}"/>
+                <a16:creationId xmlns:a16="http://schemas.microsoft.com/office/drawing/2014/main" id="{31C4A63C-5EB5-3F88-22DB-F24ADFAE6A94}"/>
               </a:ext>
             </a:extLst>
           </p:cNvPr>
@@ -5559,7 +5591,21 @@
           <a:p>
             <a:r>
               <a:rPr lang="en-IN" dirty="0"/>
-              <a:t> Unordered unique elements.</a:t>
+              <a:t> key-value pairs.</a:t>
+            </a:r>
+          </a:p>
+          <a:p>
+            <a:r>
+              <a:rPr lang="en-IN" dirty="0"/>
+              <a:t> </a:t>
+            </a:r>
+            <a:r>
+              <a:rPr lang="en-IN" b="1" dirty="0"/>
+              <a:t>Syntax : </a:t>
+            </a:r>
+            <a:r>
+              <a:rPr lang="en-IN" dirty="0"/>
+              <a:t>{key (datatype) : value (datatype)}</a:t>
             </a:r>
           </a:p>
           <a:p>
@@ -5575,19 +5621,23 @@
           <a:p>
             <a:pPr lvl="1"/>
             <a:r>
-              <a:rPr lang="en-IN" b="1" dirty="0"/>
-              <a:t> </a:t>
-            </a:r>
-            <a:r>
-              <a:rPr lang="en-IN" dirty="0"/>
-              <a:t>stream = set()			# Empty set</a:t>
+              <a:rPr lang="en-IN" dirty="0"/>
+              <a:t> stream = </a:t>
+            </a:r>
+            <a:r>
+              <a:rPr lang="en-IN" dirty="0" err="1"/>
+              <a:t>dict</a:t>
+            </a:r>
+            <a:r>
+              <a:rPr lang="en-IN" dirty="0"/>
+              <a:t>()	or stream = {}		# Empty dictionary</a:t>
             </a:r>
           </a:p>
           <a:p>
             <a:pPr lvl="1"/>
             <a:r>
               <a:rPr lang="en-IN" dirty="0"/>
-              <a:t> stream = {1,2,3}		# With values</a:t>
+              <a:t> stream = {‘a’:1,’b’:2,’c’:3}		# dictionary with values</a:t>
             </a:r>
           </a:p>
           <a:p>
@@ -5604,39 +5654,7 @@
             <a:pPr lvl="1"/>
             <a:r>
               <a:rPr lang="en-IN" dirty="0"/>
-              <a:t> add(value) , union(</a:t>
-            </a:r>
-            <a:r>
-              <a:rPr lang="en-IN" dirty="0" err="1"/>
-              <a:t>iterable</a:t>
-            </a:r>
-            <a:r>
-              <a:rPr lang="en-IN" dirty="0"/>
-              <a:t>) , update(</a:t>
-            </a:r>
-            <a:r>
-              <a:rPr lang="en-IN" dirty="0" err="1"/>
-              <a:t>iterable</a:t>
-            </a:r>
-            <a:r>
-              <a:rPr lang="en-IN" dirty="0"/>
-              <a:t>) , difference(</a:t>
-            </a:r>
-            <a:r>
-              <a:rPr lang="en-IN" dirty="0" err="1"/>
-              <a:t>iterable</a:t>
-            </a:r>
-            <a:r>
-              <a:rPr lang="en-IN" dirty="0"/>
-              <a:t>) , intersection(</a:t>
-            </a:r>
-            <a:r>
-              <a:rPr lang="en-IN" dirty="0" err="1"/>
-              <a:t>iterable</a:t>
-            </a:r>
-            <a:r>
-              <a:rPr lang="en-IN" dirty="0"/>
-              <a:t>)  , </a:t>
+              <a:t> keys() , values() , items() , get(key) , update() , pop()</a:t>
             </a:r>
           </a:p>
         </p:txBody>
@@ -5646,7 +5664,7 @@
           <p:cNvPr id="4" name="Footer Placeholder 3">
             <a:extLst>
               <a:ext uri="{FF2B5EF4-FFF2-40B4-BE49-F238E27FC236}">
-                <a16:creationId xmlns:a16="http://schemas.microsoft.com/office/drawing/2014/main" id="{D0D8C437-7815-F07B-3128-C04DAF18CF41}"/>
+                <a16:creationId xmlns:a16="http://schemas.microsoft.com/office/drawing/2014/main" id="{015DD2A2-7326-6ED7-0DEF-45C5E25920D9}"/>
               </a:ext>
             </a:extLst>
           </p:cNvPr>
@@ -5675,7 +5693,7 @@
           <p:cNvPr id="5" name="Slide Number Placeholder 4">
             <a:extLst>
               <a:ext uri="{FF2B5EF4-FFF2-40B4-BE49-F238E27FC236}">
-                <a16:creationId xmlns:a16="http://schemas.microsoft.com/office/drawing/2014/main" id="{B33B0E4C-8022-5F71-3192-A1311D2F3AE2}"/>
+                <a16:creationId xmlns:a16="http://schemas.microsoft.com/office/drawing/2014/main" id="{0E1BB4E1-0FFB-85C6-8032-8CB80494D044}"/>
               </a:ext>
             </a:extLst>
           </p:cNvPr>
@@ -5694,6 +5712,227 @@
             <a:fld id="{F904C42B-FE65-422C-989C-AD3E5E2A1A20}" type="slidenum">
               <a:rPr lang="en-IN" smtClean="0"/>
               <a:t>13</a:t>
+            </a:fld>
+            <a:endParaRPr lang="en-IN" dirty="0"/>
+          </a:p>
+        </p:txBody>
+      </p:sp>
+    </p:spTree>
+    <p:extLst>
+      <p:ext uri="{BB962C8B-B14F-4D97-AF65-F5344CB8AC3E}">
+        <p14:creationId xmlns:p14="http://schemas.microsoft.com/office/powerpoint/2010/main" val="439917030"/>
+      </p:ext>
+    </p:extLst>
+  </p:cSld>
+  <p:clrMapOvr>
+    <a:masterClrMapping/>
+  </p:clrMapOvr>
+</p:sld>
+</file>
+
+<file path=ppt/slides/slide14.xml><?xml version="1.0" encoding="utf-8"?>
+<p:sld xmlns:a="http://schemas.openxmlformats.org/drawingml/2006/main" xmlns:r="http://schemas.openxmlformats.org/officeDocument/2006/relationships" xmlns:p="http://schemas.openxmlformats.org/presentationml/2006/main">
+  <p:cSld>
+    <p:spTree>
+      <p:nvGrpSpPr>
+        <p:cNvPr id="1" name=""/>
+        <p:cNvGrpSpPr/>
+        <p:nvPr/>
+      </p:nvGrpSpPr>
+      <p:grpSpPr>
+        <a:xfrm>
+          <a:off x="0" y="0"/>
+          <a:ext cx="0" cy="0"/>
+          <a:chOff x="0" y="0"/>
+          <a:chExt cx="0" cy="0"/>
+        </a:xfrm>
+      </p:grpSpPr>
+      <p:sp>
+        <p:nvSpPr>
+          <p:cNvPr id="2" name="Title 1">
+            <a:extLst>
+              <a:ext uri="{FF2B5EF4-FFF2-40B4-BE49-F238E27FC236}">
+                <a16:creationId xmlns:a16="http://schemas.microsoft.com/office/drawing/2014/main" id="{CCFDECB5-3B44-1721-6745-EAFF6CB54045}"/>
+              </a:ext>
+            </a:extLst>
+          </p:cNvPr>
+          <p:cNvSpPr>
+            <a:spLocks noGrp="1"/>
+          </p:cNvSpPr>
+          <p:nvPr>
+            <p:ph type="title"/>
+          </p:nvPr>
+        </p:nvSpPr>
+        <p:spPr/>
+        <p:txBody>
+          <a:bodyPr/>
+          <a:lstStyle/>
+          <a:p>
+            <a:r>
+              <a:rPr lang="en-IN" dirty="0"/>
+              <a:t>Set</a:t>
+            </a:r>
+          </a:p>
+        </p:txBody>
+      </p:sp>
+      <p:sp>
+        <p:nvSpPr>
+          <p:cNvPr id="3" name="Content Placeholder 2">
+            <a:extLst>
+              <a:ext uri="{FF2B5EF4-FFF2-40B4-BE49-F238E27FC236}">
+                <a16:creationId xmlns:a16="http://schemas.microsoft.com/office/drawing/2014/main" id="{C92BFAB8-0061-3D68-E7A1-657D65A7DE7D}"/>
+              </a:ext>
+            </a:extLst>
+          </p:cNvPr>
+          <p:cNvSpPr>
+            <a:spLocks noGrp="1"/>
+          </p:cNvSpPr>
+          <p:nvPr>
+            <p:ph idx="1"/>
+          </p:nvPr>
+        </p:nvSpPr>
+        <p:spPr/>
+        <p:txBody>
+          <a:bodyPr/>
+          <a:lstStyle/>
+          <a:p>
+            <a:r>
+              <a:rPr lang="en-IN" dirty="0"/>
+              <a:t> Unordered unique elements.</a:t>
+            </a:r>
+          </a:p>
+          <a:p>
+            <a:r>
+              <a:rPr lang="en-IN" dirty="0"/>
+              <a:t> </a:t>
+            </a:r>
+            <a:r>
+              <a:rPr lang="en-IN" b="1" dirty="0"/>
+              <a:t>Initialization : </a:t>
+            </a:r>
+          </a:p>
+          <a:p>
+            <a:pPr lvl="1"/>
+            <a:r>
+              <a:rPr lang="en-IN" b="1" dirty="0"/>
+              <a:t> </a:t>
+            </a:r>
+            <a:r>
+              <a:rPr lang="en-IN" dirty="0"/>
+              <a:t>stream = set()			# Empty set</a:t>
+            </a:r>
+          </a:p>
+          <a:p>
+            <a:pPr lvl="1"/>
+            <a:r>
+              <a:rPr lang="en-IN" dirty="0"/>
+              <a:t> stream = {1,2,3}		# With values</a:t>
+            </a:r>
+          </a:p>
+          <a:p>
+            <a:r>
+              <a:rPr lang="en-IN" dirty="0"/>
+              <a:t> </a:t>
+            </a:r>
+            <a:r>
+              <a:rPr lang="en-IN" b="1" dirty="0"/>
+              <a:t>Operations : </a:t>
+            </a:r>
+          </a:p>
+          <a:p>
+            <a:pPr lvl="1"/>
+            <a:r>
+              <a:rPr lang="en-IN" dirty="0"/>
+              <a:t> add(value) , union(</a:t>
+            </a:r>
+            <a:r>
+              <a:rPr lang="en-IN" dirty="0" err="1"/>
+              <a:t>iterable</a:t>
+            </a:r>
+            <a:r>
+              <a:rPr lang="en-IN" dirty="0"/>
+              <a:t>) , update(</a:t>
+            </a:r>
+            <a:r>
+              <a:rPr lang="en-IN" dirty="0" err="1"/>
+              <a:t>iterable</a:t>
+            </a:r>
+            <a:r>
+              <a:rPr lang="en-IN" dirty="0"/>
+              <a:t>) , difference(</a:t>
+            </a:r>
+            <a:r>
+              <a:rPr lang="en-IN" dirty="0" err="1"/>
+              <a:t>iterable</a:t>
+            </a:r>
+            <a:r>
+              <a:rPr lang="en-IN" dirty="0"/>
+              <a:t>) , intersection(</a:t>
+            </a:r>
+            <a:r>
+              <a:rPr lang="en-IN" dirty="0" err="1"/>
+              <a:t>iterable</a:t>
+            </a:r>
+            <a:r>
+              <a:rPr lang="en-IN" dirty="0"/>
+              <a:t>)  , </a:t>
+            </a:r>
+          </a:p>
+        </p:txBody>
+      </p:sp>
+      <p:sp>
+        <p:nvSpPr>
+          <p:cNvPr id="4" name="Footer Placeholder 3">
+            <a:extLst>
+              <a:ext uri="{FF2B5EF4-FFF2-40B4-BE49-F238E27FC236}">
+                <a16:creationId xmlns:a16="http://schemas.microsoft.com/office/drawing/2014/main" id="{D0D8C437-7815-F07B-3128-C04DAF18CF41}"/>
+              </a:ext>
+            </a:extLst>
+          </p:cNvPr>
+          <p:cNvSpPr>
+            <a:spLocks noGrp="1"/>
+          </p:cNvSpPr>
+          <p:nvPr>
+            <p:ph type="ftr" sz="quarter" idx="11"/>
+          </p:nvPr>
+        </p:nvSpPr>
+        <p:spPr/>
+        <p:txBody>
+          <a:bodyPr/>
+          <a:lstStyle/>
+          <a:p>
+            <a:r>
+              <a:rPr lang="it-IT"/>
+              <a:t>Agnie Consulting India Pvt Limited</a:t>
+            </a:r>
+            <a:endParaRPr lang="en-IN" dirty="0"/>
+          </a:p>
+        </p:txBody>
+      </p:sp>
+      <p:sp>
+        <p:nvSpPr>
+          <p:cNvPr id="5" name="Slide Number Placeholder 4">
+            <a:extLst>
+              <a:ext uri="{FF2B5EF4-FFF2-40B4-BE49-F238E27FC236}">
+                <a16:creationId xmlns:a16="http://schemas.microsoft.com/office/drawing/2014/main" id="{B33B0E4C-8022-5F71-3192-A1311D2F3AE2}"/>
+              </a:ext>
+            </a:extLst>
+          </p:cNvPr>
+          <p:cNvSpPr>
+            <a:spLocks noGrp="1"/>
+          </p:cNvSpPr>
+          <p:nvPr>
+            <p:ph type="sldNum" sz="quarter" idx="12"/>
+          </p:nvPr>
+        </p:nvSpPr>
+        <p:spPr/>
+        <p:txBody>
+          <a:bodyPr/>
+          <a:lstStyle/>
+          <a:p>
+            <a:fld id="{F904C42B-FE65-422C-989C-AD3E5E2A1A20}" type="slidenum">
+              <a:rPr lang="en-IN" smtClean="0"/>
+              <a:t>14</a:t>
             </a:fld>
             <a:endParaRPr lang="en-IN" dirty="0"/>
           </a:p>

--- a/python class/Python Class.pptx
+++ b/python class/Python Class.pptx
@@ -5,7 +5,7 @@
     <p:sldMasterId id="2147483660" r:id="rId1"/>
   </p:sldMasterIdLst>
   <p:notesMasterIdLst>
-    <p:notesMasterId r:id="rId16"/>
+    <p:notesMasterId r:id="rId19"/>
   </p:notesMasterIdLst>
   <p:sldIdLst>
     <p:sldId id="256" r:id="rId2"/>
@@ -20,8 +20,11 @@
     <p:sldId id="268" r:id="rId11"/>
     <p:sldId id="263" r:id="rId12"/>
     <p:sldId id="269" r:id="rId13"/>
-    <p:sldId id="266" r:id="rId14"/>
-    <p:sldId id="267" r:id="rId15"/>
+    <p:sldId id="270" r:id="rId14"/>
+    <p:sldId id="266" r:id="rId15"/>
+    <p:sldId id="271" r:id="rId16"/>
+    <p:sldId id="267" r:id="rId17"/>
+    <p:sldId id="272" r:id="rId18"/>
   </p:sldIdLst>
   <p:sldSz cx="12192000" cy="6858000"/>
   <p:notesSz cx="7104063" cy="10234613"/>
@@ -210,7 +213,7 @@
           <a:p>
             <a:fld id="{C7300FFE-222E-424B-A24A-B86ADB1660A8}" type="datetimeFigureOut">
               <a:rPr lang="en-IN" smtClean="0"/>
-              <a:t>19-06-2026</a:t>
+              <a:t>21-06-2026</a:t>
             </a:fld>
             <a:endParaRPr lang="en-IN" dirty="0"/>
           </a:p>
@@ -638,7 +641,7 @@
           <a:p>
             <a:fld id="{AD501974-91E0-4A6C-BF4F-18DDA0DBE697}" type="datetime1">
               <a:rPr lang="en-IN" smtClean="0"/>
-              <a:t>19-06-2026</a:t>
+              <a:t>21-06-2026</a:t>
             </a:fld>
             <a:endParaRPr lang="en-IN" dirty="0"/>
           </a:p>
@@ -763,7 +766,7 @@
           <a:p>
             <a:fld id="{340C70EA-229A-4802-A7BC-A1799783BDD3}" type="datetime1">
               <a:rPr lang="en-IN" smtClean="0"/>
-              <a:t>19-06-2026</a:t>
+              <a:t>21-06-2026</a:t>
             </a:fld>
             <a:endParaRPr lang="en-IN" dirty="0"/>
           </a:p>
@@ -1050,7 +1053,7 @@
           <a:p>
             <a:fld id="{BD944048-9929-4BB2-BADE-62F9A707015B}" type="datetime1">
               <a:rPr lang="en-IN" smtClean="0"/>
-              <a:t>19-06-2026</a:t>
+              <a:t>21-06-2026</a:t>
             </a:fld>
             <a:endParaRPr lang="en-IN" dirty="0"/>
           </a:p>
@@ -1356,7 +1359,7 @@
           <a:p>
             <a:fld id="{09A388D1-7504-45FD-847C-EF9E921E08DF}" type="datetime1">
               <a:rPr lang="en-IN" smtClean="0"/>
-              <a:t>19-06-2026</a:t>
+              <a:t>21-06-2026</a:t>
             </a:fld>
             <a:endParaRPr lang="en-IN" dirty="0"/>
           </a:p>
@@ -1585,7 +1588,7 @@
           <a:p>
             <a:fld id="{6015BE80-B03C-48AB-B3E2-19C5F4D60D3C}" type="datetime1">
               <a:rPr lang="en-IN" smtClean="0"/>
-              <a:t>19-06-2026</a:t>
+              <a:t>21-06-2026</a:t>
             </a:fld>
             <a:endParaRPr lang="en-IN" dirty="0"/>
           </a:p>
@@ -1856,7 +1859,7 @@
           <a:p>
             <a:fld id="{450E9977-AF0E-4B1A-B2BF-2416B4828E95}" type="datetime1">
               <a:rPr lang="en-IN" smtClean="0"/>
-              <a:t>19-06-2026</a:t>
+              <a:t>21-06-2026</a:t>
             </a:fld>
             <a:endParaRPr lang="en-IN" dirty="0"/>
           </a:p>
@@ -2083,7 +2086,7 @@
           <a:p>
             <a:fld id="{972A712B-80AB-4FDB-AFE5-C959280677B9}" type="datetime1">
               <a:rPr lang="en-IN" smtClean="0"/>
-              <a:t>19-06-2026</a:t>
+              <a:t>21-06-2026</a:t>
             </a:fld>
             <a:endParaRPr lang="en-IN" dirty="0"/>
           </a:p>
@@ -2374,7 +2377,7 @@
           <a:p>
             <a:fld id="{78FC1D50-5769-4793-A6D0-4C61D943385E}" type="datetime1">
               <a:rPr lang="en-IN" smtClean="0"/>
-              <a:t>19-06-2026</a:t>
+              <a:t>21-06-2026</a:t>
             </a:fld>
             <a:endParaRPr lang="en-IN" dirty="0"/>
           </a:p>
@@ -2639,7 +2642,7 @@
           <a:p>
             <a:fld id="{1093E9E7-66F0-49C7-87AF-7A91F126A0CA}" type="datetime1">
               <a:rPr lang="en-IN" smtClean="0"/>
-              <a:t>19-06-2026</a:t>
+              <a:t>21-06-2026</a:t>
             </a:fld>
             <a:endParaRPr lang="en-IN" dirty="0"/>
           </a:p>
@@ -3085,7 +3088,7 @@
           <a:p>
             <a:fld id="{4802E001-56FE-4C01-9545-A69D840AB1F5}" type="datetime1">
               <a:rPr lang="en-IN" smtClean="0"/>
-              <a:t>19-06-2026</a:t>
+              <a:t>21-06-2026</a:t>
             </a:fld>
             <a:endParaRPr lang="en-IN" dirty="0"/>
           </a:p>
@@ -3249,7 +3252,7 @@
           <a:p>
             <a:fld id="{FC628212-ABC2-4EAF-BB21-53D61AEEEA49}" type="datetime1">
               <a:rPr lang="en-IN" smtClean="0"/>
-              <a:t>19-06-2026</a:t>
+              <a:t>21-06-2026</a:t>
             </a:fld>
             <a:endParaRPr lang="en-IN" dirty="0"/>
           </a:p>
@@ -3413,7 +3416,7 @@
           <a:p>
             <a:fld id="{83F0C27E-97BD-4ACD-AFDF-13985BE88ECF}" type="datetime1">
               <a:rPr lang="en-IN" smtClean="0"/>
-              <a:t>19-06-2026</a:t>
+              <a:t>21-06-2026</a:t>
             </a:fld>
             <a:endParaRPr lang="en-IN" dirty="0"/>
           </a:p>
@@ -3611,7 +3614,7 @@
           <a:p>
             <a:fld id="{10A04BDC-9A72-4B08-81B7-A336A5B4E254}" type="datetime1">
               <a:rPr lang="en-IN" smtClean="0"/>
-              <a:t>19-06-2026</a:t>
+              <a:t>21-06-2026</a:t>
             </a:fld>
             <a:endParaRPr lang="en-IN" dirty="0"/>
           </a:p>
@@ -3809,7 +3812,7 @@
           <a:p>
             <a:fld id="{2E5D08A3-D96A-4309-8AF3-C610782BB2D3}" type="datetime1">
               <a:rPr lang="en-IN" smtClean="0"/>
-              <a:t>19-06-2026</a:t>
+              <a:t>21-06-2026</a:t>
             </a:fld>
             <a:endParaRPr lang="en-IN" dirty="0"/>
           </a:p>
@@ -5348,7 +5351,9 @@
         </p:nvSpPr>
         <p:spPr/>
         <p:txBody>
-          <a:bodyPr/>
+          <a:bodyPr>
+            <a:normAutofit lnSpcReduction="10000"/>
+          </a:bodyPr>
           <a:lstStyle/>
           <a:p>
             <a:r>
@@ -5449,6 +5454,21 @@
               <a:rPr lang="en-IN" dirty="0"/>
               <a:t>books</a:t>
             </a:r>
+          </a:p>
+          <a:p>
+            <a:r>
+              <a:rPr lang="en-IN" dirty="0"/>
+              <a:t> First Non-Repeating Character. (Example : </a:t>
+            </a:r>
+            <a:r>
+              <a:rPr lang="en-IN" dirty="0" err="1"/>
+              <a:t>swiss</a:t>
+            </a:r>
+            <a:r>
+              <a:rPr lang="en-IN"/>
+              <a:t> , w)</a:t>
+            </a:r>
+            <a:endParaRPr lang="en-IN" dirty="0"/>
           </a:p>
         </p:txBody>
       </p:sp>
@@ -5545,7 +5565,7 @@
           <p:cNvPr id="2" name="Title 1">
             <a:extLst>
               <a:ext uri="{FF2B5EF4-FFF2-40B4-BE49-F238E27FC236}">
-                <a16:creationId xmlns:a16="http://schemas.microsoft.com/office/drawing/2014/main" id="{CDFED4A0-085D-A9E8-4607-7501E6F3FB8A}"/>
+                <a16:creationId xmlns:a16="http://schemas.microsoft.com/office/drawing/2014/main" id="{FC9E576D-E0EF-4A9A-A497-B1168902983E}"/>
               </a:ext>
             </a:extLst>
           </p:cNvPr>
@@ -5563,7 +5583,7 @@
           <a:p>
             <a:r>
               <a:rPr lang="en-IN" dirty="0"/>
-              <a:t>Dictionary</a:t>
+              <a:t>Problems</a:t>
             </a:r>
           </a:p>
         </p:txBody>
@@ -5573,7 +5593,7 @@
           <p:cNvPr id="3" name="Content Placeholder 2">
             <a:extLst>
               <a:ext uri="{FF2B5EF4-FFF2-40B4-BE49-F238E27FC236}">
-                <a16:creationId xmlns:a16="http://schemas.microsoft.com/office/drawing/2014/main" id="{31C4A63C-5EB5-3F88-22DB-F24ADFAE6A94}"/>
+                <a16:creationId xmlns:a16="http://schemas.microsoft.com/office/drawing/2014/main" id="{A77904B2-BB45-7DD4-98DA-444E7EA08A5C}"/>
               </a:ext>
             </a:extLst>
           </p:cNvPr>
@@ -5591,71 +5611,69 @@
           <a:p>
             <a:r>
               <a:rPr lang="en-IN" dirty="0"/>
-              <a:t> key-value pairs.</a:t>
-            </a:r>
-          </a:p>
-          <a:p>
-            <a:r>
-              <a:rPr lang="en-IN" dirty="0"/>
               <a:t> </a:t>
             </a:r>
             <a:r>
               <a:rPr lang="en-IN" b="1" dirty="0"/>
-              <a:t>Syntax : </a:t>
-            </a:r>
-            <a:r>
-              <a:rPr lang="en-IN" dirty="0"/>
-              <a:t>{key (datatype) : value (datatype)}</a:t>
-            </a:r>
-          </a:p>
-          <a:p>
-            <a:r>
-              <a:rPr lang="en-IN" dirty="0"/>
-              <a:t> </a:t>
-            </a:r>
-            <a:r>
-              <a:rPr lang="en-IN" b="1" dirty="0"/>
-              <a:t>Initialization : </a:t>
+              <a:t>Patterns : </a:t>
+            </a:r>
+            <a:r>
+              <a:rPr lang="en-IN" dirty="0"/>
+              <a:t>Square Pattern , </a:t>
+            </a:r>
+            <a:r>
+              <a:rPr lang="en-IN" dirty="0" err="1"/>
+              <a:t>Right&amp;Left</a:t>
+            </a:r>
+            <a:r>
+              <a:rPr lang="en-IN" dirty="0"/>
+              <a:t> Triangle , Inverted Right Triangle , Pyramid , Diamond , Hollow Square , Binary Triangle , Butterfly Pattern , X Pattern , Palindrome Triangle , Sandglass Pattern , Concentric Number Pattern</a:t>
             </a:r>
           </a:p>
           <a:p>
             <a:pPr lvl="1"/>
             <a:r>
               <a:rPr lang="en-IN" dirty="0"/>
-              <a:t> stream = </a:t>
-            </a:r>
-            <a:r>
-              <a:rPr lang="en-IN" dirty="0" err="1"/>
-              <a:t>dict</a:t>
-            </a:r>
-            <a:r>
-              <a:rPr lang="en-IN" dirty="0"/>
-              <a:t>()	or stream = {}		# Empty dictionary</a:t>
-            </a:r>
-          </a:p>
-          <a:p>
-            <a:pPr lvl="1"/>
-            <a:r>
-              <a:rPr lang="en-IN" dirty="0"/>
-              <a:t> stream = {‘a’:1,’b’:2,’c’:3}		# dictionary with values</a:t>
-            </a:r>
-          </a:p>
-          <a:p>
-            <a:r>
-              <a:rPr lang="en-IN" dirty="0"/>
-              <a:t> </a:t>
-            </a:r>
-            <a:r>
-              <a:rPr lang="en-IN" b="1" dirty="0"/>
-              <a:t>Operations : </a:t>
-            </a:r>
-          </a:p>
-          <a:p>
-            <a:pPr lvl="1"/>
-            <a:r>
-              <a:rPr lang="en-IN" dirty="0"/>
-              <a:t> keys() , values() , items() , get(key) , update() , pop()</a:t>
-            </a:r>
+              <a:t>Jagged Number Pattern :</a:t>
+            </a:r>
+            <a:br>
+              <a:rPr lang="en-IN" dirty="0"/>
+            </a:br>
+            <a:r>
+              <a:rPr lang="en-IN" dirty="0"/>
+              <a:t>1</a:t>
+            </a:r>
+            <a:br>
+              <a:rPr lang="en-IN" dirty="0"/>
+            </a:br>
+            <a:r>
+              <a:rPr lang="en-IN" dirty="0"/>
+              <a:t>2 6</a:t>
+            </a:r>
+            <a:br>
+              <a:rPr lang="en-IN" dirty="0"/>
+            </a:br>
+            <a:r>
+              <a:rPr lang="en-IN" dirty="0"/>
+              <a:t>3 7 10</a:t>
+            </a:r>
+            <a:br>
+              <a:rPr lang="en-IN" dirty="0"/>
+            </a:br>
+            <a:r>
+              <a:rPr lang="en-IN" dirty="0"/>
+              <a:t>4 8 11 13</a:t>
+            </a:r>
+            <a:br>
+              <a:rPr lang="en-IN" dirty="0"/>
+            </a:br>
+            <a:r>
+              <a:rPr lang="en-IN" dirty="0"/>
+              <a:t>5 9 12 14 15</a:t>
+            </a:r>
+          </a:p>
+          <a:p>
+            <a:endParaRPr lang="en-IN" dirty="0"/>
           </a:p>
         </p:txBody>
       </p:sp>
@@ -5664,7 +5682,7 @@
           <p:cNvPr id="4" name="Footer Placeholder 3">
             <a:extLst>
               <a:ext uri="{FF2B5EF4-FFF2-40B4-BE49-F238E27FC236}">
-                <a16:creationId xmlns:a16="http://schemas.microsoft.com/office/drawing/2014/main" id="{015DD2A2-7326-6ED7-0DEF-45C5E25920D9}"/>
+                <a16:creationId xmlns:a16="http://schemas.microsoft.com/office/drawing/2014/main" id="{46EC9D5C-7E60-BFC2-E039-64E50C535558}"/>
               </a:ext>
             </a:extLst>
           </p:cNvPr>
@@ -5693,7 +5711,7 @@
           <p:cNvPr id="5" name="Slide Number Placeholder 4">
             <a:extLst>
               <a:ext uri="{FF2B5EF4-FFF2-40B4-BE49-F238E27FC236}">
-                <a16:creationId xmlns:a16="http://schemas.microsoft.com/office/drawing/2014/main" id="{0E1BB4E1-0FFB-85C6-8032-8CB80494D044}"/>
+                <a16:creationId xmlns:a16="http://schemas.microsoft.com/office/drawing/2014/main" id="{7A2E6ECD-A1A0-5B01-634C-6C2B4A39873F}"/>
               </a:ext>
             </a:extLst>
           </p:cNvPr>
@@ -5720,7 +5738,7 @@
     </p:spTree>
     <p:extLst>
       <p:ext uri="{BB962C8B-B14F-4D97-AF65-F5344CB8AC3E}">
-        <p14:creationId xmlns:p14="http://schemas.microsoft.com/office/powerpoint/2010/main" val="439917030"/>
+        <p14:creationId xmlns:p14="http://schemas.microsoft.com/office/powerpoint/2010/main" val="325225037"/>
       </p:ext>
     </p:extLst>
   </p:cSld>
@@ -5752,7 +5770,7 @@
           <p:cNvPr id="2" name="Title 1">
             <a:extLst>
               <a:ext uri="{FF2B5EF4-FFF2-40B4-BE49-F238E27FC236}">
-                <a16:creationId xmlns:a16="http://schemas.microsoft.com/office/drawing/2014/main" id="{CCFDECB5-3B44-1721-6745-EAFF6CB54045}"/>
+                <a16:creationId xmlns:a16="http://schemas.microsoft.com/office/drawing/2014/main" id="{CDFED4A0-085D-A9E8-4607-7501E6F3FB8A}"/>
               </a:ext>
             </a:extLst>
           </p:cNvPr>
@@ -5770,7 +5788,7 @@
           <a:p>
             <a:r>
               <a:rPr lang="en-IN" dirty="0"/>
-              <a:t>Set</a:t>
+              <a:t>Dictionary</a:t>
             </a:r>
           </a:p>
         </p:txBody>
@@ -5780,7 +5798,7 @@
           <p:cNvPr id="3" name="Content Placeholder 2">
             <a:extLst>
               <a:ext uri="{FF2B5EF4-FFF2-40B4-BE49-F238E27FC236}">
-                <a16:creationId xmlns:a16="http://schemas.microsoft.com/office/drawing/2014/main" id="{C92BFAB8-0061-3D68-E7A1-657D65A7DE7D}"/>
+                <a16:creationId xmlns:a16="http://schemas.microsoft.com/office/drawing/2014/main" id="{31C4A63C-5EB5-3F88-22DB-F24ADFAE6A94}"/>
               </a:ext>
             </a:extLst>
           </p:cNvPr>
@@ -5798,7 +5816,21 @@
           <a:p>
             <a:r>
               <a:rPr lang="en-IN" dirty="0"/>
-              <a:t> Unordered unique elements.</a:t>
+              <a:t> key-value pairs.</a:t>
+            </a:r>
+          </a:p>
+          <a:p>
+            <a:r>
+              <a:rPr lang="en-IN" dirty="0"/>
+              <a:t> </a:t>
+            </a:r>
+            <a:r>
+              <a:rPr lang="en-IN" b="1" dirty="0"/>
+              <a:t>Syntax : </a:t>
+            </a:r>
+            <a:r>
+              <a:rPr lang="en-IN" dirty="0"/>
+              <a:t>{key (datatype) : value (datatype)}</a:t>
             </a:r>
           </a:p>
           <a:p>
@@ -5814,19 +5846,23 @@
           <a:p>
             <a:pPr lvl="1"/>
             <a:r>
-              <a:rPr lang="en-IN" b="1" dirty="0"/>
-              <a:t> </a:t>
-            </a:r>
-            <a:r>
-              <a:rPr lang="en-IN" dirty="0"/>
-              <a:t>stream = set()			# Empty set</a:t>
+              <a:rPr lang="en-IN" dirty="0"/>
+              <a:t> stream = </a:t>
+            </a:r>
+            <a:r>
+              <a:rPr lang="en-IN" dirty="0" err="1"/>
+              <a:t>dict</a:t>
+            </a:r>
+            <a:r>
+              <a:rPr lang="en-IN" dirty="0"/>
+              <a:t>()	or stream = {}		# Empty dictionary</a:t>
             </a:r>
           </a:p>
           <a:p>
             <a:pPr lvl="1"/>
             <a:r>
               <a:rPr lang="en-IN" dirty="0"/>
-              <a:t> stream = {1,2,3}		# With values</a:t>
+              <a:t> stream = {‘a’:1,’b’:2,’c’:3}		# dictionary with values</a:t>
             </a:r>
           </a:p>
           <a:p>
@@ -5843,39 +5879,7 @@
             <a:pPr lvl="1"/>
             <a:r>
               <a:rPr lang="en-IN" dirty="0"/>
-              <a:t> add(value) , union(</a:t>
-            </a:r>
-            <a:r>
-              <a:rPr lang="en-IN" dirty="0" err="1"/>
-              <a:t>iterable</a:t>
-            </a:r>
-            <a:r>
-              <a:rPr lang="en-IN" dirty="0"/>
-              <a:t>) , update(</a:t>
-            </a:r>
-            <a:r>
-              <a:rPr lang="en-IN" dirty="0" err="1"/>
-              <a:t>iterable</a:t>
-            </a:r>
-            <a:r>
-              <a:rPr lang="en-IN" dirty="0"/>
-              <a:t>) , difference(</a:t>
-            </a:r>
-            <a:r>
-              <a:rPr lang="en-IN" dirty="0" err="1"/>
-              <a:t>iterable</a:t>
-            </a:r>
-            <a:r>
-              <a:rPr lang="en-IN" dirty="0"/>
-              <a:t>) , intersection(</a:t>
-            </a:r>
-            <a:r>
-              <a:rPr lang="en-IN" dirty="0" err="1"/>
-              <a:t>iterable</a:t>
-            </a:r>
-            <a:r>
-              <a:rPr lang="en-IN" dirty="0"/>
-              <a:t>)  , </a:t>
+              <a:t> keys() , values() , items() , get(key) , update() , pop()</a:t>
             </a:r>
           </a:p>
         </p:txBody>
@@ -5885,7 +5889,7 @@
           <p:cNvPr id="4" name="Footer Placeholder 3">
             <a:extLst>
               <a:ext uri="{FF2B5EF4-FFF2-40B4-BE49-F238E27FC236}">
-                <a16:creationId xmlns:a16="http://schemas.microsoft.com/office/drawing/2014/main" id="{D0D8C437-7815-F07B-3128-C04DAF18CF41}"/>
+                <a16:creationId xmlns:a16="http://schemas.microsoft.com/office/drawing/2014/main" id="{015DD2A2-7326-6ED7-0DEF-45C5E25920D9}"/>
               </a:ext>
             </a:extLst>
           </p:cNvPr>
@@ -5914,7 +5918,7 @@
           <p:cNvPr id="5" name="Slide Number Placeholder 4">
             <a:extLst>
               <a:ext uri="{FF2B5EF4-FFF2-40B4-BE49-F238E27FC236}">
-                <a16:creationId xmlns:a16="http://schemas.microsoft.com/office/drawing/2014/main" id="{B33B0E4C-8022-5F71-3192-A1311D2F3AE2}"/>
+                <a16:creationId xmlns:a16="http://schemas.microsoft.com/office/drawing/2014/main" id="{0E1BB4E1-0FFB-85C6-8032-8CB80494D044}"/>
               </a:ext>
             </a:extLst>
           </p:cNvPr>
@@ -5941,7 +5945,623 @@
     </p:spTree>
     <p:extLst>
       <p:ext uri="{BB962C8B-B14F-4D97-AF65-F5344CB8AC3E}">
+        <p14:creationId xmlns:p14="http://schemas.microsoft.com/office/powerpoint/2010/main" val="439917030"/>
+      </p:ext>
+    </p:extLst>
+  </p:cSld>
+  <p:clrMapOvr>
+    <a:masterClrMapping/>
+  </p:clrMapOvr>
+</p:sld>
+</file>
+
+<file path=ppt/slides/slide15.xml><?xml version="1.0" encoding="utf-8"?>
+<p:sld xmlns:a="http://schemas.openxmlformats.org/drawingml/2006/main" xmlns:r="http://schemas.openxmlformats.org/officeDocument/2006/relationships" xmlns:p="http://schemas.openxmlformats.org/presentationml/2006/main">
+  <p:cSld>
+    <p:spTree>
+      <p:nvGrpSpPr>
+        <p:cNvPr id="1" name=""/>
+        <p:cNvGrpSpPr/>
+        <p:nvPr/>
+      </p:nvGrpSpPr>
+      <p:grpSpPr>
+        <a:xfrm>
+          <a:off x="0" y="0"/>
+          <a:ext cx="0" cy="0"/>
+          <a:chOff x="0" y="0"/>
+          <a:chExt cx="0" cy="0"/>
+        </a:xfrm>
+      </p:grpSpPr>
+      <p:sp>
+        <p:nvSpPr>
+          <p:cNvPr id="2" name="Title 1">
+            <a:extLst>
+              <a:ext uri="{FF2B5EF4-FFF2-40B4-BE49-F238E27FC236}">
+                <a16:creationId xmlns:a16="http://schemas.microsoft.com/office/drawing/2014/main" id="{ED40BA1B-AE30-E9DB-9F42-D518479C4E06}"/>
+              </a:ext>
+            </a:extLst>
+          </p:cNvPr>
+          <p:cNvSpPr>
+            <a:spLocks noGrp="1"/>
+          </p:cNvSpPr>
+          <p:nvPr>
+            <p:ph type="title"/>
+          </p:nvPr>
+        </p:nvSpPr>
+        <p:spPr/>
+        <p:txBody>
+          <a:bodyPr/>
+          <a:lstStyle/>
+          <a:p>
+            <a:r>
+              <a:rPr lang="en-IN" dirty="0"/>
+              <a:t>Problems</a:t>
+            </a:r>
+          </a:p>
+        </p:txBody>
+      </p:sp>
+      <p:sp>
+        <p:nvSpPr>
+          <p:cNvPr id="3" name="Content Placeholder 2">
+            <a:extLst>
+              <a:ext uri="{FF2B5EF4-FFF2-40B4-BE49-F238E27FC236}">
+                <a16:creationId xmlns:a16="http://schemas.microsoft.com/office/drawing/2014/main" id="{B000117B-4C92-2682-BB17-53238FEC8CBC}"/>
+              </a:ext>
+            </a:extLst>
+          </p:cNvPr>
+          <p:cNvSpPr>
+            <a:spLocks noGrp="1"/>
+          </p:cNvSpPr>
+          <p:nvPr>
+            <p:ph idx="1"/>
+          </p:nvPr>
+        </p:nvSpPr>
+        <p:spPr/>
+        <p:txBody>
+          <a:bodyPr/>
+          <a:lstStyle/>
+          <a:p>
+            <a:r>
+              <a:rPr lang="en-IN" dirty="0"/>
+              <a:t> Count Frequency.</a:t>
+            </a:r>
+          </a:p>
+          <a:p>
+            <a:r>
+              <a:rPr lang="en-IN" dirty="0"/>
+              <a:t> Sort String </a:t>
+            </a:r>
+            <a:r>
+              <a:rPr lang="en-IN" dirty="0" err="1"/>
+              <a:t>wrt</a:t>
+            </a:r>
+            <a:r>
+              <a:rPr lang="en-IN" dirty="0"/>
+              <a:t> frequency.</a:t>
+            </a:r>
+          </a:p>
+          <a:p>
+            <a:r>
+              <a:rPr lang="en-IN" dirty="0"/>
+              <a:t> Largest Character with match frequency.</a:t>
+            </a:r>
+          </a:p>
+          <a:p>
+            <a:r>
+              <a:rPr lang="en-IN" dirty="0"/>
+              <a:t> Common Characters . (hello , world – </a:t>
+            </a:r>
+            <a:r>
+              <a:rPr lang="en-IN" dirty="0" err="1"/>
+              <a:t>l,o</a:t>
+            </a:r>
+            <a:r>
+              <a:rPr lang="en-IN" dirty="0"/>
+              <a:t>).</a:t>
+            </a:r>
+          </a:p>
+          <a:p>
+            <a:r>
+              <a:rPr lang="en-IN" dirty="0"/>
+              <a:t> Grouping. Example : </a:t>
+            </a:r>
+            <a:r>
+              <a:rPr lang="en-GB" dirty="0"/>
+              <a:t>{"John":20, "Mary":21, "Tom":20, "Alice":21}; o/p:{ 20:["</a:t>
+            </a:r>
+            <a:r>
+              <a:rPr lang="en-GB" dirty="0" err="1"/>
+              <a:t>John","Tom</a:t>
+            </a:r>
+            <a:r>
+              <a:rPr lang="en-GB" dirty="0"/>
+              <a:t>"], 21:["</a:t>
+            </a:r>
+            <a:r>
+              <a:rPr lang="en-GB" dirty="0" err="1"/>
+              <a:t>Mary","Alice</a:t>
+            </a:r>
+            <a:r>
+              <a:rPr lang="en-GB" dirty="0"/>
+              <a:t>"]}.</a:t>
+            </a:r>
+          </a:p>
+          <a:p>
+            <a:r>
+              <a:rPr lang="en-GB" dirty="0"/>
+              <a:t> Create largest palindrome.</a:t>
+            </a:r>
+          </a:p>
+          <a:p>
+            <a:r>
+              <a:rPr lang="en-GB" dirty="0"/>
+              <a:t> </a:t>
+            </a:r>
+            <a:r>
+              <a:rPr lang="en-IN" dirty="0"/>
+              <a:t>Word Pattern : pattern="abba" , sentence="dog cat </a:t>
+            </a:r>
+            <a:r>
+              <a:rPr lang="en-IN" dirty="0" err="1"/>
+              <a:t>cat</a:t>
+            </a:r>
+            <a:r>
+              <a:rPr lang="en-IN" dirty="0"/>
+              <a:t> dog" . </a:t>
+            </a:r>
+            <a:r>
+              <a:rPr lang="en-IN"/>
+              <a:t>o/p : True.</a:t>
+            </a:r>
+            <a:endParaRPr lang="en-GB" dirty="0"/>
+          </a:p>
+        </p:txBody>
+      </p:sp>
+      <p:sp>
+        <p:nvSpPr>
+          <p:cNvPr id="4" name="Footer Placeholder 3">
+            <a:extLst>
+              <a:ext uri="{FF2B5EF4-FFF2-40B4-BE49-F238E27FC236}">
+                <a16:creationId xmlns:a16="http://schemas.microsoft.com/office/drawing/2014/main" id="{C99FB754-4A0D-1EF4-66F3-7DB15991716F}"/>
+              </a:ext>
+            </a:extLst>
+          </p:cNvPr>
+          <p:cNvSpPr>
+            <a:spLocks noGrp="1"/>
+          </p:cNvSpPr>
+          <p:nvPr>
+            <p:ph type="ftr" sz="quarter" idx="11"/>
+          </p:nvPr>
+        </p:nvSpPr>
+        <p:spPr/>
+        <p:txBody>
+          <a:bodyPr/>
+          <a:lstStyle/>
+          <a:p>
+            <a:r>
+              <a:rPr lang="it-IT"/>
+              <a:t>Agnie Consulting India Pvt Limited</a:t>
+            </a:r>
+            <a:endParaRPr lang="en-IN" dirty="0"/>
+          </a:p>
+        </p:txBody>
+      </p:sp>
+      <p:sp>
+        <p:nvSpPr>
+          <p:cNvPr id="5" name="Slide Number Placeholder 4">
+            <a:extLst>
+              <a:ext uri="{FF2B5EF4-FFF2-40B4-BE49-F238E27FC236}">
+                <a16:creationId xmlns:a16="http://schemas.microsoft.com/office/drawing/2014/main" id="{5F447AD7-B2BB-D192-3D19-5623F6209B52}"/>
+              </a:ext>
+            </a:extLst>
+          </p:cNvPr>
+          <p:cNvSpPr>
+            <a:spLocks noGrp="1"/>
+          </p:cNvSpPr>
+          <p:nvPr>
+            <p:ph type="sldNum" sz="quarter" idx="12"/>
+          </p:nvPr>
+        </p:nvSpPr>
+        <p:spPr/>
+        <p:txBody>
+          <a:bodyPr/>
+          <a:lstStyle/>
+          <a:p>
+            <a:fld id="{F904C42B-FE65-422C-989C-AD3E5E2A1A20}" type="slidenum">
+              <a:rPr lang="en-IN" smtClean="0"/>
+              <a:t>15</a:t>
+            </a:fld>
+            <a:endParaRPr lang="en-IN" dirty="0"/>
+          </a:p>
+        </p:txBody>
+      </p:sp>
+    </p:spTree>
+    <p:extLst>
+      <p:ext uri="{BB962C8B-B14F-4D97-AF65-F5344CB8AC3E}">
+        <p14:creationId xmlns:p14="http://schemas.microsoft.com/office/powerpoint/2010/main" val="949286685"/>
+      </p:ext>
+    </p:extLst>
+  </p:cSld>
+  <p:clrMapOvr>
+    <a:masterClrMapping/>
+  </p:clrMapOvr>
+</p:sld>
+</file>
+
+<file path=ppt/slides/slide16.xml><?xml version="1.0" encoding="utf-8"?>
+<p:sld xmlns:a="http://schemas.openxmlformats.org/drawingml/2006/main" xmlns:r="http://schemas.openxmlformats.org/officeDocument/2006/relationships" xmlns:p="http://schemas.openxmlformats.org/presentationml/2006/main">
+  <p:cSld>
+    <p:spTree>
+      <p:nvGrpSpPr>
+        <p:cNvPr id="1" name=""/>
+        <p:cNvGrpSpPr/>
+        <p:nvPr/>
+      </p:nvGrpSpPr>
+      <p:grpSpPr>
+        <a:xfrm>
+          <a:off x="0" y="0"/>
+          <a:ext cx="0" cy="0"/>
+          <a:chOff x="0" y="0"/>
+          <a:chExt cx="0" cy="0"/>
+        </a:xfrm>
+      </p:grpSpPr>
+      <p:sp>
+        <p:nvSpPr>
+          <p:cNvPr id="2" name="Title 1">
+            <a:extLst>
+              <a:ext uri="{FF2B5EF4-FFF2-40B4-BE49-F238E27FC236}">
+                <a16:creationId xmlns:a16="http://schemas.microsoft.com/office/drawing/2014/main" id="{CCFDECB5-3B44-1721-6745-EAFF6CB54045}"/>
+              </a:ext>
+            </a:extLst>
+          </p:cNvPr>
+          <p:cNvSpPr>
+            <a:spLocks noGrp="1"/>
+          </p:cNvSpPr>
+          <p:nvPr>
+            <p:ph type="title"/>
+          </p:nvPr>
+        </p:nvSpPr>
+        <p:spPr/>
+        <p:txBody>
+          <a:bodyPr/>
+          <a:lstStyle/>
+          <a:p>
+            <a:r>
+              <a:rPr lang="en-IN" dirty="0"/>
+              <a:t>Set</a:t>
+            </a:r>
+          </a:p>
+        </p:txBody>
+      </p:sp>
+      <p:sp>
+        <p:nvSpPr>
+          <p:cNvPr id="3" name="Content Placeholder 2">
+            <a:extLst>
+              <a:ext uri="{FF2B5EF4-FFF2-40B4-BE49-F238E27FC236}">
+                <a16:creationId xmlns:a16="http://schemas.microsoft.com/office/drawing/2014/main" id="{C92BFAB8-0061-3D68-E7A1-657D65A7DE7D}"/>
+              </a:ext>
+            </a:extLst>
+          </p:cNvPr>
+          <p:cNvSpPr>
+            <a:spLocks noGrp="1"/>
+          </p:cNvSpPr>
+          <p:nvPr>
+            <p:ph idx="1"/>
+          </p:nvPr>
+        </p:nvSpPr>
+        <p:spPr/>
+        <p:txBody>
+          <a:bodyPr/>
+          <a:lstStyle/>
+          <a:p>
+            <a:r>
+              <a:rPr lang="en-IN" dirty="0"/>
+              <a:t> Unordered unique elements.</a:t>
+            </a:r>
+          </a:p>
+          <a:p>
+            <a:r>
+              <a:rPr lang="en-IN" dirty="0"/>
+              <a:t> </a:t>
+            </a:r>
+            <a:r>
+              <a:rPr lang="en-IN" b="1" dirty="0"/>
+              <a:t>Initialization : </a:t>
+            </a:r>
+          </a:p>
+          <a:p>
+            <a:pPr lvl="1"/>
+            <a:r>
+              <a:rPr lang="en-IN" b="1" dirty="0"/>
+              <a:t> </a:t>
+            </a:r>
+            <a:r>
+              <a:rPr lang="en-IN" dirty="0"/>
+              <a:t>stream = set()			# Empty set</a:t>
+            </a:r>
+          </a:p>
+          <a:p>
+            <a:pPr lvl="1"/>
+            <a:r>
+              <a:rPr lang="en-IN" dirty="0"/>
+              <a:t> stream = {1,2,3}		# With values</a:t>
+            </a:r>
+          </a:p>
+          <a:p>
+            <a:r>
+              <a:rPr lang="en-IN" dirty="0"/>
+              <a:t> </a:t>
+            </a:r>
+            <a:r>
+              <a:rPr lang="en-IN" b="1" dirty="0"/>
+              <a:t>Operations : </a:t>
+            </a:r>
+          </a:p>
+          <a:p>
+            <a:pPr lvl="1"/>
+            <a:r>
+              <a:rPr lang="en-IN" dirty="0"/>
+              <a:t> add(value) , union(</a:t>
+            </a:r>
+            <a:r>
+              <a:rPr lang="en-IN" dirty="0" err="1"/>
+              <a:t>iterable</a:t>
+            </a:r>
+            <a:r>
+              <a:rPr lang="en-IN" dirty="0"/>
+              <a:t>) , update(</a:t>
+            </a:r>
+            <a:r>
+              <a:rPr lang="en-IN" dirty="0" err="1"/>
+              <a:t>iterable</a:t>
+            </a:r>
+            <a:r>
+              <a:rPr lang="en-IN" dirty="0"/>
+              <a:t>) , difference(</a:t>
+            </a:r>
+            <a:r>
+              <a:rPr lang="en-IN" dirty="0" err="1"/>
+              <a:t>iterable</a:t>
+            </a:r>
+            <a:r>
+              <a:rPr lang="en-IN" dirty="0"/>
+              <a:t>) , intersection(</a:t>
+            </a:r>
+            <a:r>
+              <a:rPr lang="en-IN" dirty="0" err="1"/>
+              <a:t>iterable</a:t>
+            </a:r>
+            <a:r>
+              <a:rPr lang="en-IN" dirty="0"/>
+              <a:t>)  , </a:t>
+            </a:r>
+          </a:p>
+        </p:txBody>
+      </p:sp>
+      <p:sp>
+        <p:nvSpPr>
+          <p:cNvPr id="4" name="Footer Placeholder 3">
+            <a:extLst>
+              <a:ext uri="{FF2B5EF4-FFF2-40B4-BE49-F238E27FC236}">
+                <a16:creationId xmlns:a16="http://schemas.microsoft.com/office/drawing/2014/main" id="{D0D8C437-7815-F07B-3128-C04DAF18CF41}"/>
+              </a:ext>
+            </a:extLst>
+          </p:cNvPr>
+          <p:cNvSpPr>
+            <a:spLocks noGrp="1"/>
+          </p:cNvSpPr>
+          <p:nvPr>
+            <p:ph type="ftr" sz="quarter" idx="11"/>
+          </p:nvPr>
+        </p:nvSpPr>
+        <p:spPr/>
+        <p:txBody>
+          <a:bodyPr/>
+          <a:lstStyle/>
+          <a:p>
+            <a:r>
+              <a:rPr lang="it-IT"/>
+              <a:t>Agnie Consulting India Pvt Limited</a:t>
+            </a:r>
+            <a:endParaRPr lang="en-IN" dirty="0"/>
+          </a:p>
+        </p:txBody>
+      </p:sp>
+      <p:sp>
+        <p:nvSpPr>
+          <p:cNvPr id="5" name="Slide Number Placeholder 4">
+            <a:extLst>
+              <a:ext uri="{FF2B5EF4-FFF2-40B4-BE49-F238E27FC236}">
+                <a16:creationId xmlns:a16="http://schemas.microsoft.com/office/drawing/2014/main" id="{B33B0E4C-8022-5F71-3192-A1311D2F3AE2}"/>
+              </a:ext>
+            </a:extLst>
+          </p:cNvPr>
+          <p:cNvSpPr>
+            <a:spLocks noGrp="1"/>
+          </p:cNvSpPr>
+          <p:nvPr>
+            <p:ph type="sldNum" sz="quarter" idx="12"/>
+          </p:nvPr>
+        </p:nvSpPr>
+        <p:spPr/>
+        <p:txBody>
+          <a:bodyPr/>
+          <a:lstStyle/>
+          <a:p>
+            <a:fld id="{F904C42B-FE65-422C-989C-AD3E5E2A1A20}" type="slidenum">
+              <a:rPr lang="en-IN" smtClean="0"/>
+              <a:t>16</a:t>
+            </a:fld>
+            <a:endParaRPr lang="en-IN" dirty="0"/>
+          </a:p>
+        </p:txBody>
+      </p:sp>
+    </p:spTree>
+    <p:extLst>
+      <p:ext uri="{BB962C8B-B14F-4D97-AF65-F5344CB8AC3E}">
         <p14:creationId xmlns:p14="http://schemas.microsoft.com/office/powerpoint/2010/main" val="1928386398"/>
+      </p:ext>
+    </p:extLst>
+  </p:cSld>
+  <p:clrMapOvr>
+    <a:masterClrMapping/>
+  </p:clrMapOvr>
+</p:sld>
+</file>
+
+<file path=ppt/slides/slide17.xml><?xml version="1.0" encoding="utf-8"?>
+<p:sld xmlns:a="http://schemas.openxmlformats.org/drawingml/2006/main" xmlns:r="http://schemas.openxmlformats.org/officeDocument/2006/relationships" xmlns:p="http://schemas.openxmlformats.org/presentationml/2006/main">
+  <p:cSld>
+    <p:spTree>
+      <p:nvGrpSpPr>
+        <p:cNvPr id="1" name=""/>
+        <p:cNvGrpSpPr/>
+        <p:nvPr/>
+      </p:nvGrpSpPr>
+      <p:grpSpPr>
+        <a:xfrm>
+          <a:off x="0" y="0"/>
+          <a:ext cx="0" cy="0"/>
+          <a:chOff x="0" y="0"/>
+          <a:chExt cx="0" cy="0"/>
+        </a:xfrm>
+      </p:grpSpPr>
+      <p:sp>
+        <p:nvSpPr>
+          <p:cNvPr id="2" name="Title 1">
+            <a:extLst>
+              <a:ext uri="{FF2B5EF4-FFF2-40B4-BE49-F238E27FC236}">
+                <a16:creationId xmlns:a16="http://schemas.microsoft.com/office/drawing/2014/main" id="{368B6DED-16D0-50B6-ACB8-D304DC9ECB97}"/>
+              </a:ext>
+            </a:extLst>
+          </p:cNvPr>
+          <p:cNvSpPr>
+            <a:spLocks noGrp="1"/>
+          </p:cNvSpPr>
+          <p:nvPr>
+            <p:ph type="title"/>
+          </p:nvPr>
+        </p:nvSpPr>
+        <p:spPr/>
+        <p:txBody>
+          <a:bodyPr/>
+          <a:lstStyle/>
+          <a:p>
+            <a:r>
+              <a:rPr lang="en-IN" dirty="0"/>
+              <a:t>Built-In Functions</a:t>
+            </a:r>
+          </a:p>
+        </p:txBody>
+      </p:sp>
+      <p:sp>
+        <p:nvSpPr>
+          <p:cNvPr id="3" name="Content Placeholder 2">
+            <a:extLst>
+              <a:ext uri="{FF2B5EF4-FFF2-40B4-BE49-F238E27FC236}">
+                <a16:creationId xmlns:a16="http://schemas.microsoft.com/office/drawing/2014/main" id="{668E4BA7-A44F-4451-C2CC-A64D0992A332}"/>
+              </a:ext>
+            </a:extLst>
+          </p:cNvPr>
+          <p:cNvSpPr>
+            <a:spLocks noGrp="1"/>
+          </p:cNvSpPr>
+          <p:nvPr>
+            <p:ph idx="1"/>
+          </p:nvPr>
+        </p:nvSpPr>
+        <p:spPr/>
+        <p:txBody>
+          <a:bodyPr/>
+          <a:lstStyle/>
+          <a:p>
+            <a:r>
+              <a:rPr lang="en-IN" dirty="0"/>
+              <a:t> Sorting : sorted()</a:t>
+            </a:r>
+          </a:p>
+          <a:p>
+            <a:r>
+              <a:rPr lang="en-IN" dirty="0"/>
+              <a:t> Maximum : max()</a:t>
+            </a:r>
+          </a:p>
+          <a:p>
+            <a:r>
+              <a:rPr lang="en-IN" dirty="0"/>
+              <a:t> Minimum : min()</a:t>
+            </a:r>
+          </a:p>
+          <a:p>
+            <a:r>
+              <a:rPr lang="en-IN" dirty="0"/>
+              <a:t> </a:t>
+            </a:r>
+          </a:p>
+        </p:txBody>
+      </p:sp>
+      <p:sp>
+        <p:nvSpPr>
+          <p:cNvPr id="4" name="Footer Placeholder 3">
+            <a:extLst>
+              <a:ext uri="{FF2B5EF4-FFF2-40B4-BE49-F238E27FC236}">
+                <a16:creationId xmlns:a16="http://schemas.microsoft.com/office/drawing/2014/main" id="{A1ED2971-6123-D0EB-8C04-2F30F8E81BFE}"/>
+              </a:ext>
+            </a:extLst>
+          </p:cNvPr>
+          <p:cNvSpPr>
+            <a:spLocks noGrp="1"/>
+          </p:cNvSpPr>
+          <p:nvPr>
+            <p:ph type="ftr" sz="quarter" idx="11"/>
+          </p:nvPr>
+        </p:nvSpPr>
+        <p:spPr/>
+        <p:txBody>
+          <a:bodyPr/>
+          <a:lstStyle/>
+          <a:p>
+            <a:r>
+              <a:rPr lang="it-IT"/>
+              <a:t>Agnie Consulting India Pvt Limited</a:t>
+            </a:r>
+            <a:endParaRPr lang="en-IN" dirty="0"/>
+          </a:p>
+        </p:txBody>
+      </p:sp>
+      <p:sp>
+        <p:nvSpPr>
+          <p:cNvPr id="5" name="Slide Number Placeholder 4">
+            <a:extLst>
+              <a:ext uri="{FF2B5EF4-FFF2-40B4-BE49-F238E27FC236}">
+                <a16:creationId xmlns:a16="http://schemas.microsoft.com/office/drawing/2014/main" id="{23D979BA-C9A0-AFAA-B62A-973379D64ECB}"/>
+              </a:ext>
+            </a:extLst>
+          </p:cNvPr>
+          <p:cNvSpPr>
+            <a:spLocks noGrp="1"/>
+          </p:cNvSpPr>
+          <p:nvPr>
+            <p:ph type="sldNum" sz="quarter" idx="12"/>
+          </p:nvPr>
+        </p:nvSpPr>
+        <p:spPr/>
+        <p:txBody>
+          <a:bodyPr/>
+          <a:lstStyle/>
+          <a:p>
+            <a:fld id="{F904C42B-FE65-422C-989C-AD3E5E2A1A20}" type="slidenum">
+              <a:rPr lang="en-IN" smtClean="0"/>
+              <a:t>17</a:t>
+            </a:fld>
+            <a:endParaRPr lang="en-IN" dirty="0"/>
+          </a:p>
+        </p:txBody>
+      </p:sp>
+    </p:spTree>
+    <p:extLst>
+      <p:ext uri="{BB962C8B-B14F-4D97-AF65-F5344CB8AC3E}">
+        <p14:creationId xmlns:p14="http://schemas.microsoft.com/office/powerpoint/2010/main" val="1755475911"/>
       </p:ext>
     </p:extLst>
   </p:cSld>

--- a/python class/Python Class.pptx
+++ b/python class/Python Class.pptx
@@ -5,7 +5,7 @@
     <p:sldMasterId id="2147483660" r:id="rId1"/>
   </p:sldMasterIdLst>
   <p:notesMasterIdLst>
-    <p:notesMasterId r:id="rId19"/>
+    <p:notesMasterId r:id="rId22"/>
   </p:notesMasterIdLst>
   <p:sldIdLst>
     <p:sldId id="256" r:id="rId2"/>
@@ -25,6 +25,9 @@
     <p:sldId id="271" r:id="rId16"/>
     <p:sldId id="267" r:id="rId17"/>
     <p:sldId id="272" r:id="rId18"/>
+    <p:sldId id="273" r:id="rId19"/>
+    <p:sldId id="274" r:id="rId20"/>
+    <p:sldId id="275" r:id="rId21"/>
   </p:sldIdLst>
   <p:sldSz cx="12192000" cy="6858000"/>
   <p:notesSz cx="7104063" cy="10234613"/>
@@ -213,7 +216,7 @@
           <a:p>
             <a:fld id="{C7300FFE-222E-424B-A24A-B86ADB1660A8}" type="datetimeFigureOut">
               <a:rPr lang="en-IN" smtClean="0"/>
-              <a:t>21-06-2026</a:t>
+              <a:t>29-06-2026</a:t>
             </a:fld>
             <a:endParaRPr lang="en-IN" dirty="0"/>
           </a:p>
@@ -641,7 +644,7 @@
           <a:p>
             <a:fld id="{AD501974-91E0-4A6C-BF4F-18DDA0DBE697}" type="datetime1">
               <a:rPr lang="en-IN" smtClean="0"/>
-              <a:t>21-06-2026</a:t>
+              <a:t>29-06-2026</a:t>
             </a:fld>
             <a:endParaRPr lang="en-IN" dirty="0"/>
           </a:p>
@@ -766,7 +769,7 @@
           <a:p>
             <a:fld id="{340C70EA-229A-4802-A7BC-A1799783BDD3}" type="datetime1">
               <a:rPr lang="en-IN" smtClean="0"/>
-              <a:t>21-06-2026</a:t>
+              <a:t>29-06-2026</a:t>
             </a:fld>
             <a:endParaRPr lang="en-IN" dirty="0"/>
           </a:p>
@@ -1053,7 +1056,7 @@
           <a:p>
             <a:fld id="{BD944048-9929-4BB2-BADE-62F9A707015B}" type="datetime1">
               <a:rPr lang="en-IN" smtClean="0"/>
-              <a:t>21-06-2026</a:t>
+              <a:t>29-06-2026</a:t>
             </a:fld>
             <a:endParaRPr lang="en-IN" dirty="0"/>
           </a:p>
@@ -1359,7 +1362,7 @@
           <a:p>
             <a:fld id="{09A388D1-7504-45FD-847C-EF9E921E08DF}" type="datetime1">
               <a:rPr lang="en-IN" smtClean="0"/>
-              <a:t>21-06-2026</a:t>
+              <a:t>29-06-2026</a:t>
             </a:fld>
             <a:endParaRPr lang="en-IN" dirty="0"/>
           </a:p>
@@ -1588,7 +1591,7 @@
           <a:p>
             <a:fld id="{6015BE80-B03C-48AB-B3E2-19C5F4D60D3C}" type="datetime1">
               <a:rPr lang="en-IN" smtClean="0"/>
-              <a:t>21-06-2026</a:t>
+              <a:t>29-06-2026</a:t>
             </a:fld>
             <a:endParaRPr lang="en-IN" dirty="0"/>
           </a:p>
@@ -1859,7 +1862,7 @@
           <a:p>
             <a:fld id="{450E9977-AF0E-4B1A-B2BF-2416B4828E95}" type="datetime1">
               <a:rPr lang="en-IN" smtClean="0"/>
-              <a:t>21-06-2026</a:t>
+              <a:t>29-06-2026</a:t>
             </a:fld>
             <a:endParaRPr lang="en-IN" dirty="0"/>
           </a:p>
@@ -2086,7 +2089,7 @@
           <a:p>
             <a:fld id="{972A712B-80AB-4FDB-AFE5-C959280677B9}" type="datetime1">
               <a:rPr lang="en-IN" smtClean="0"/>
-              <a:t>21-06-2026</a:t>
+              <a:t>29-06-2026</a:t>
             </a:fld>
             <a:endParaRPr lang="en-IN" dirty="0"/>
           </a:p>
@@ -2377,7 +2380,7 @@
           <a:p>
             <a:fld id="{78FC1D50-5769-4793-A6D0-4C61D943385E}" type="datetime1">
               <a:rPr lang="en-IN" smtClean="0"/>
-              <a:t>21-06-2026</a:t>
+              <a:t>29-06-2026</a:t>
             </a:fld>
             <a:endParaRPr lang="en-IN" dirty="0"/>
           </a:p>
@@ -2642,7 +2645,7 @@
           <a:p>
             <a:fld id="{1093E9E7-66F0-49C7-87AF-7A91F126A0CA}" type="datetime1">
               <a:rPr lang="en-IN" smtClean="0"/>
-              <a:t>21-06-2026</a:t>
+              <a:t>29-06-2026</a:t>
             </a:fld>
             <a:endParaRPr lang="en-IN" dirty="0"/>
           </a:p>
@@ -3088,7 +3091,7 @@
           <a:p>
             <a:fld id="{4802E001-56FE-4C01-9545-A69D840AB1F5}" type="datetime1">
               <a:rPr lang="en-IN" smtClean="0"/>
-              <a:t>21-06-2026</a:t>
+              <a:t>29-06-2026</a:t>
             </a:fld>
             <a:endParaRPr lang="en-IN" dirty="0"/>
           </a:p>
@@ -3252,7 +3255,7 @@
           <a:p>
             <a:fld id="{FC628212-ABC2-4EAF-BB21-53D61AEEEA49}" type="datetime1">
               <a:rPr lang="en-IN" smtClean="0"/>
-              <a:t>21-06-2026</a:t>
+              <a:t>29-06-2026</a:t>
             </a:fld>
             <a:endParaRPr lang="en-IN" dirty="0"/>
           </a:p>
@@ -3416,7 +3419,7 @@
           <a:p>
             <a:fld id="{83F0C27E-97BD-4ACD-AFDF-13985BE88ECF}" type="datetime1">
               <a:rPr lang="en-IN" smtClean="0"/>
-              <a:t>21-06-2026</a:t>
+              <a:t>29-06-2026</a:t>
             </a:fld>
             <a:endParaRPr lang="en-IN" dirty="0"/>
           </a:p>
@@ -3614,7 +3617,7 @@
           <a:p>
             <a:fld id="{10A04BDC-9A72-4B08-81B7-A336A5B4E254}" type="datetime1">
               <a:rPr lang="en-IN" smtClean="0"/>
-              <a:t>21-06-2026</a:t>
+              <a:t>29-06-2026</a:t>
             </a:fld>
             <a:endParaRPr lang="en-IN" dirty="0"/>
           </a:p>
@@ -3812,7 +3815,7 @@
           <a:p>
             <a:fld id="{2E5D08A3-D96A-4309-8AF3-C610782BB2D3}" type="datetime1">
               <a:rPr lang="en-IN" smtClean="0"/>
-              <a:t>21-06-2026</a:t>
+              <a:t>29-06-2026</a:t>
             </a:fld>
             <a:endParaRPr lang="en-IN" dirty="0"/>
           </a:p>
@@ -6495,7 +6498,13 @@
           <a:p>
             <a:r>
               <a:rPr lang="en-IN" dirty="0"/>
-              <a:t> </a:t>
+              <a:t> Filtering : filter()</a:t>
+            </a:r>
+          </a:p>
+          <a:p>
+            <a:r>
+              <a:rPr lang="en-IN" dirty="0"/>
+              <a:t> Mapping : map()</a:t>
             </a:r>
           </a:p>
         </p:txBody>
@@ -6562,6 +6571,297 @@
     <p:extLst>
       <p:ext uri="{BB962C8B-B14F-4D97-AF65-F5344CB8AC3E}">
         <p14:creationId xmlns:p14="http://schemas.microsoft.com/office/powerpoint/2010/main" val="1755475911"/>
+      </p:ext>
+    </p:extLst>
+  </p:cSld>
+  <p:clrMapOvr>
+    <a:masterClrMapping/>
+  </p:clrMapOvr>
+</p:sld>
+</file>
+
+<file path=ppt/slides/slide18.xml><?xml version="1.0" encoding="utf-8"?>
+<p:sld xmlns:a="http://schemas.openxmlformats.org/drawingml/2006/main" xmlns:r="http://schemas.openxmlformats.org/officeDocument/2006/relationships" xmlns:p="http://schemas.openxmlformats.org/presentationml/2006/main">
+  <p:cSld>
+    <p:spTree>
+      <p:nvGrpSpPr>
+        <p:cNvPr id="1" name=""/>
+        <p:cNvGrpSpPr/>
+        <p:nvPr/>
+      </p:nvGrpSpPr>
+      <p:grpSpPr>
+        <a:xfrm>
+          <a:off x="0" y="0"/>
+          <a:ext cx="0" cy="0"/>
+          <a:chOff x="0" y="0"/>
+          <a:chExt cx="0" cy="0"/>
+        </a:xfrm>
+      </p:grpSpPr>
+      <p:sp>
+        <p:nvSpPr>
+          <p:cNvPr id="2" name="Title 1">
+            <a:extLst>
+              <a:ext uri="{FF2B5EF4-FFF2-40B4-BE49-F238E27FC236}">
+                <a16:creationId xmlns:a16="http://schemas.microsoft.com/office/drawing/2014/main" id="{5CA56418-8A9A-5805-BCBB-4959E5ABF278}"/>
+              </a:ext>
+            </a:extLst>
+          </p:cNvPr>
+          <p:cNvSpPr>
+            <a:spLocks noGrp="1"/>
+          </p:cNvSpPr>
+          <p:nvPr>
+            <p:ph type="title"/>
+          </p:nvPr>
+        </p:nvSpPr>
+        <p:spPr/>
+        <p:txBody>
+          <a:bodyPr/>
+          <a:lstStyle/>
+          <a:p>
+            <a:r>
+              <a:rPr lang="en-IN" dirty="0"/>
+              <a:t>Collections</a:t>
+            </a:r>
+          </a:p>
+        </p:txBody>
+      </p:sp>
+      <p:sp>
+        <p:nvSpPr>
+          <p:cNvPr id="3" name="Content Placeholder 2">
+            <a:extLst>
+              <a:ext uri="{FF2B5EF4-FFF2-40B4-BE49-F238E27FC236}">
+                <a16:creationId xmlns:a16="http://schemas.microsoft.com/office/drawing/2014/main" id="{03DD4096-0D2C-E2BF-FF90-6117481C3C05}"/>
+              </a:ext>
+            </a:extLst>
+          </p:cNvPr>
+          <p:cNvSpPr>
+            <a:spLocks noGrp="1"/>
+          </p:cNvSpPr>
+          <p:nvPr>
+            <p:ph idx="1"/>
+          </p:nvPr>
+        </p:nvSpPr>
+        <p:spPr/>
+        <p:txBody>
+          <a:bodyPr/>
+          <a:lstStyle/>
+          <a:p>
+            <a:r>
+              <a:rPr lang="en-IN" dirty="0"/>
+              <a:t> </a:t>
+            </a:r>
+            <a:r>
+              <a:rPr lang="en-IN" b="1" dirty="0"/>
+              <a:t>Counter : </a:t>
+            </a:r>
+            <a:r>
+              <a:rPr lang="en-IN"/>
+              <a:t>returns frequency </a:t>
+            </a:r>
+            <a:endParaRPr lang="en-IN" b="1" dirty="0"/>
+          </a:p>
+        </p:txBody>
+      </p:sp>
+      <p:sp>
+        <p:nvSpPr>
+          <p:cNvPr id="4" name="Footer Placeholder 3">
+            <a:extLst>
+              <a:ext uri="{FF2B5EF4-FFF2-40B4-BE49-F238E27FC236}">
+                <a16:creationId xmlns:a16="http://schemas.microsoft.com/office/drawing/2014/main" id="{7551125C-0612-0BB6-4524-77CDC89E331C}"/>
+              </a:ext>
+            </a:extLst>
+          </p:cNvPr>
+          <p:cNvSpPr>
+            <a:spLocks noGrp="1"/>
+          </p:cNvSpPr>
+          <p:nvPr>
+            <p:ph type="ftr" sz="quarter" idx="11"/>
+          </p:nvPr>
+        </p:nvSpPr>
+        <p:spPr/>
+        <p:txBody>
+          <a:bodyPr/>
+          <a:lstStyle/>
+          <a:p>
+            <a:r>
+              <a:rPr lang="it-IT"/>
+              <a:t>Agnie Consulting India Pvt Limited</a:t>
+            </a:r>
+            <a:endParaRPr lang="en-IN" dirty="0"/>
+          </a:p>
+        </p:txBody>
+      </p:sp>
+      <p:sp>
+        <p:nvSpPr>
+          <p:cNvPr id="5" name="Slide Number Placeholder 4">
+            <a:extLst>
+              <a:ext uri="{FF2B5EF4-FFF2-40B4-BE49-F238E27FC236}">
+                <a16:creationId xmlns:a16="http://schemas.microsoft.com/office/drawing/2014/main" id="{31F5E781-B492-4D2E-A425-D3367CBF888C}"/>
+              </a:ext>
+            </a:extLst>
+          </p:cNvPr>
+          <p:cNvSpPr>
+            <a:spLocks noGrp="1"/>
+          </p:cNvSpPr>
+          <p:nvPr>
+            <p:ph type="sldNum" sz="quarter" idx="12"/>
+          </p:nvPr>
+        </p:nvSpPr>
+        <p:spPr/>
+        <p:txBody>
+          <a:bodyPr/>
+          <a:lstStyle/>
+          <a:p>
+            <a:fld id="{F904C42B-FE65-422C-989C-AD3E5E2A1A20}" type="slidenum">
+              <a:rPr lang="en-IN" smtClean="0"/>
+              <a:t>18</a:t>
+            </a:fld>
+            <a:endParaRPr lang="en-IN" dirty="0"/>
+          </a:p>
+        </p:txBody>
+      </p:sp>
+    </p:spTree>
+    <p:extLst>
+      <p:ext uri="{BB962C8B-B14F-4D97-AF65-F5344CB8AC3E}">
+        <p14:creationId xmlns:p14="http://schemas.microsoft.com/office/powerpoint/2010/main" val="2843299797"/>
+      </p:ext>
+    </p:extLst>
+  </p:cSld>
+  <p:clrMapOvr>
+    <a:masterClrMapping/>
+  </p:clrMapOvr>
+</p:sld>
+</file>
+
+<file path=ppt/slides/slide19.xml><?xml version="1.0" encoding="utf-8"?>
+<p:sld xmlns:a="http://schemas.openxmlformats.org/drawingml/2006/main" xmlns:r="http://schemas.openxmlformats.org/officeDocument/2006/relationships" xmlns:p="http://schemas.openxmlformats.org/presentationml/2006/main">
+  <p:cSld>
+    <p:spTree>
+      <p:nvGrpSpPr>
+        <p:cNvPr id="1" name=""/>
+        <p:cNvGrpSpPr/>
+        <p:nvPr/>
+      </p:nvGrpSpPr>
+      <p:grpSpPr>
+        <a:xfrm>
+          <a:off x="0" y="0"/>
+          <a:ext cx="0" cy="0"/>
+          <a:chOff x="0" y="0"/>
+          <a:chExt cx="0" cy="0"/>
+        </a:xfrm>
+      </p:grpSpPr>
+      <p:sp>
+        <p:nvSpPr>
+          <p:cNvPr id="2" name="Title 1">
+            <a:extLst>
+              <a:ext uri="{FF2B5EF4-FFF2-40B4-BE49-F238E27FC236}">
+                <a16:creationId xmlns:a16="http://schemas.microsoft.com/office/drawing/2014/main" id="{D7C7727E-BA08-9FFE-B2E7-811A03FB4BC7}"/>
+              </a:ext>
+            </a:extLst>
+          </p:cNvPr>
+          <p:cNvSpPr>
+            <a:spLocks noGrp="1"/>
+          </p:cNvSpPr>
+          <p:nvPr>
+            <p:ph type="title"/>
+          </p:nvPr>
+        </p:nvSpPr>
+        <p:spPr/>
+        <p:txBody>
+          <a:bodyPr/>
+          <a:lstStyle/>
+          <a:p>
+            <a:endParaRPr lang="en-IN"/>
+          </a:p>
+        </p:txBody>
+      </p:sp>
+      <p:sp>
+        <p:nvSpPr>
+          <p:cNvPr id="3" name="Content Placeholder 2">
+            <a:extLst>
+              <a:ext uri="{FF2B5EF4-FFF2-40B4-BE49-F238E27FC236}">
+                <a16:creationId xmlns:a16="http://schemas.microsoft.com/office/drawing/2014/main" id="{FEBD293C-90DE-DD6D-FE2F-477168D68F96}"/>
+              </a:ext>
+            </a:extLst>
+          </p:cNvPr>
+          <p:cNvSpPr>
+            <a:spLocks noGrp="1"/>
+          </p:cNvSpPr>
+          <p:nvPr>
+            <p:ph idx="1"/>
+          </p:nvPr>
+        </p:nvSpPr>
+        <p:spPr/>
+        <p:txBody>
+          <a:bodyPr/>
+          <a:lstStyle/>
+          <a:p>
+            <a:endParaRPr lang="en-IN"/>
+          </a:p>
+        </p:txBody>
+      </p:sp>
+      <p:sp>
+        <p:nvSpPr>
+          <p:cNvPr id="4" name="Footer Placeholder 3">
+            <a:extLst>
+              <a:ext uri="{FF2B5EF4-FFF2-40B4-BE49-F238E27FC236}">
+                <a16:creationId xmlns:a16="http://schemas.microsoft.com/office/drawing/2014/main" id="{15CDCE1E-D23F-7EB6-AB12-FCD18C2D14CB}"/>
+              </a:ext>
+            </a:extLst>
+          </p:cNvPr>
+          <p:cNvSpPr>
+            <a:spLocks noGrp="1"/>
+          </p:cNvSpPr>
+          <p:nvPr>
+            <p:ph type="ftr" sz="quarter" idx="11"/>
+          </p:nvPr>
+        </p:nvSpPr>
+        <p:spPr/>
+        <p:txBody>
+          <a:bodyPr/>
+          <a:lstStyle/>
+          <a:p>
+            <a:r>
+              <a:rPr lang="it-IT"/>
+              <a:t>Agnie Consulting India Pvt Limited</a:t>
+            </a:r>
+            <a:endParaRPr lang="en-IN" dirty="0"/>
+          </a:p>
+        </p:txBody>
+      </p:sp>
+      <p:sp>
+        <p:nvSpPr>
+          <p:cNvPr id="5" name="Slide Number Placeholder 4">
+            <a:extLst>
+              <a:ext uri="{FF2B5EF4-FFF2-40B4-BE49-F238E27FC236}">
+                <a16:creationId xmlns:a16="http://schemas.microsoft.com/office/drawing/2014/main" id="{563064CC-EA70-EDEF-9E04-1CA92CE3D6D4}"/>
+              </a:ext>
+            </a:extLst>
+          </p:cNvPr>
+          <p:cNvSpPr>
+            <a:spLocks noGrp="1"/>
+          </p:cNvSpPr>
+          <p:nvPr>
+            <p:ph type="sldNum" sz="quarter" idx="12"/>
+          </p:nvPr>
+        </p:nvSpPr>
+        <p:spPr/>
+        <p:txBody>
+          <a:bodyPr/>
+          <a:lstStyle/>
+          <a:p>
+            <a:fld id="{F904C42B-FE65-422C-989C-AD3E5E2A1A20}" type="slidenum">
+              <a:rPr lang="en-IN" smtClean="0"/>
+              <a:t>19</a:t>
+            </a:fld>
+            <a:endParaRPr lang="en-IN" dirty="0"/>
+          </a:p>
+        </p:txBody>
+      </p:sp>
+    </p:spTree>
+    <p:extLst>
+      <p:ext uri="{BB962C8B-B14F-4D97-AF65-F5344CB8AC3E}">
+        <p14:creationId xmlns:p14="http://schemas.microsoft.com/office/powerpoint/2010/main" val="1572786888"/>
       </p:ext>
     </p:extLst>
   </p:cSld>
@@ -6815,6 +7115,144 @@
     <p:extLst>
       <p:ext uri="{BB962C8B-B14F-4D97-AF65-F5344CB8AC3E}">
         <p14:creationId xmlns:p14="http://schemas.microsoft.com/office/powerpoint/2010/main" val="581856434"/>
+      </p:ext>
+    </p:extLst>
+  </p:cSld>
+  <p:clrMapOvr>
+    <a:masterClrMapping/>
+  </p:clrMapOvr>
+</p:sld>
+</file>
+
+<file path=ppt/slides/slide20.xml><?xml version="1.0" encoding="utf-8"?>
+<p:sld xmlns:a="http://schemas.openxmlformats.org/drawingml/2006/main" xmlns:r="http://schemas.openxmlformats.org/officeDocument/2006/relationships" xmlns:p="http://schemas.openxmlformats.org/presentationml/2006/main">
+  <p:cSld>
+    <p:spTree>
+      <p:nvGrpSpPr>
+        <p:cNvPr id="1" name=""/>
+        <p:cNvGrpSpPr/>
+        <p:nvPr/>
+      </p:nvGrpSpPr>
+      <p:grpSpPr>
+        <a:xfrm>
+          <a:off x="0" y="0"/>
+          <a:ext cx="0" cy="0"/>
+          <a:chOff x="0" y="0"/>
+          <a:chExt cx="0" cy="0"/>
+        </a:xfrm>
+      </p:grpSpPr>
+      <p:sp>
+        <p:nvSpPr>
+          <p:cNvPr id="2" name="Title 1">
+            <a:extLst>
+              <a:ext uri="{FF2B5EF4-FFF2-40B4-BE49-F238E27FC236}">
+                <a16:creationId xmlns:a16="http://schemas.microsoft.com/office/drawing/2014/main" id="{7907DEEF-0FBD-20D9-2965-3ED3E721BD53}"/>
+              </a:ext>
+            </a:extLst>
+          </p:cNvPr>
+          <p:cNvSpPr>
+            <a:spLocks noGrp="1"/>
+          </p:cNvSpPr>
+          <p:nvPr>
+            <p:ph type="title"/>
+          </p:nvPr>
+        </p:nvSpPr>
+        <p:spPr/>
+        <p:txBody>
+          <a:bodyPr/>
+          <a:lstStyle/>
+          <a:p>
+            <a:endParaRPr lang="en-IN"/>
+          </a:p>
+        </p:txBody>
+      </p:sp>
+      <p:sp>
+        <p:nvSpPr>
+          <p:cNvPr id="3" name="Content Placeholder 2">
+            <a:extLst>
+              <a:ext uri="{FF2B5EF4-FFF2-40B4-BE49-F238E27FC236}">
+                <a16:creationId xmlns:a16="http://schemas.microsoft.com/office/drawing/2014/main" id="{BD381BC6-08E5-488F-AD25-3B559783886A}"/>
+              </a:ext>
+            </a:extLst>
+          </p:cNvPr>
+          <p:cNvSpPr>
+            <a:spLocks noGrp="1"/>
+          </p:cNvSpPr>
+          <p:nvPr>
+            <p:ph idx="1"/>
+          </p:nvPr>
+        </p:nvSpPr>
+        <p:spPr/>
+        <p:txBody>
+          <a:bodyPr/>
+          <a:lstStyle/>
+          <a:p>
+            <a:endParaRPr lang="en-IN"/>
+          </a:p>
+        </p:txBody>
+      </p:sp>
+      <p:sp>
+        <p:nvSpPr>
+          <p:cNvPr id="4" name="Footer Placeholder 3">
+            <a:extLst>
+              <a:ext uri="{FF2B5EF4-FFF2-40B4-BE49-F238E27FC236}">
+                <a16:creationId xmlns:a16="http://schemas.microsoft.com/office/drawing/2014/main" id="{F48C9E58-D3F1-09C7-FE6C-48D612C2329F}"/>
+              </a:ext>
+            </a:extLst>
+          </p:cNvPr>
+          <p:cNvSpPr>
+            <a:spLocks noGrp="1"/>
+          </p:cNvSpPr>
+          <p:nvPr>
+            <p:ph type="ftr" sz="quarter" idx="11"/>
+          </p:nvPr>
+        </p:nvSpPr>
+        <p:spPr/>
+        <p:txBody>
+          <a:bodyPr/>
+          <a:lstStyle/>
+          <a:p>
+            <a:r>
+              <a:rPr lang="it-IT"/>
+              <a:t>Agnie Consulting India Pvt Limited</a:t>
+            </a:r>
+            <a:endParaRPr lang="en-IN" dirty="0"/>
+          </a:p>
+        </p:txBody>
+      </p:sp>
+      <p:sp>
+        <p:nvSpPr>
+          <p:cNvPr id="5" name="Slide Number Placeholder 4">
+            <a:extLst>
+              <a:ext uri="{FF2B5EF4-FFF2-40B4-BE49-F238E27FC236}">
+                <a16:creationId xmlns:a16="http://schemas.microsoft.com/office/drawing/2014/main" id="{9208607B-2CC6-16D0-6988-4DB6A51DD176}"/>
+              </a:ext>
+            </a:extLst>
+          </p:cNvPr>
+          <p:cNvSpPr>
+            <a:spLocks noGrp="1"/>
+          </p:cNvSpPr>
+          <p:nvPr>
+            <p:ph type="sldNum" sz="quarter" idx="12"/>
+          </p:nvPr>
+        </p:nvSpPr>
+        <p:spPr/>
+        <p:txBody>
+          <a:bodyPr/>
+          <a:lstStyle/>
+          <a:p>
+            <a:fld id="{F904C42B-FE65-422C-989C-AD3E5E2A1A20}" type="slidenum">
+              <a:rPr lang="en-IN" smtClean="0"/>
+              <a:t>20</a:t>
+            </a:fld>
+            <a:endParaRPr lang="en-IN" dirty="0"/>
+          </a:p>
+        </p:txBody>
+      </p:sp>
+    </p:spTree>
+    <p:extLst>
+      <p:ext uri="{BB962C8B-B14F-4D97-AF65-F5344CB8AC3E}">
+        <p14:creationId xmlns:p14="http://schemas.microsoft.com/office/powerpoint/2010/main" val="2713769145"/>
       </p:ext>
     </p:extLst>
   </p:cSld>

--- a/python class/Python Class.pptx
+++ b/python class/Python Class.pptx
@@ -216,7 +216,7 @@
           <a:p>
             <a:fld id="{C7300FFE-222E-424B-A24A-B86ADB1660A8}" type="datetimeFigureOut">
               <a:rPr lang="en-IN" smtClean="0"/>
-              <a:t>29-06-2026</a:t>
+              <a:t>30-06-2026</a:t>
             </a:fld>
             <a:endParaRPr lang="en-IN" dirty="0"/>
           </a:p>
@@ -644,7 +644,7 @@
           <a:p>
             <a:fld id="{AD501974-91E0-4A6C-BF4F-18DDA0DBE697}" type="datetime1">
               <a:rPr lang="en-IN" smtClean="0"/>
-              <a:t>29-06-2026</a:t>
+              <a:t>30-06-2026</a:t>
             </a:fld>
             <a:endParaRPr lang="en-IN" dirty="0"/>
           </a:p>
@@ -769,7 +769,7 @@
           <a:p>
             <a:fld id="{340C70EA-229A-4802-A7BC-A1799783BDD3}" type="datetime1">
               <a:rPr lang="en-IN" smtClean="0"/>
-              <a:t>29-06-2026</a:t>
+              <a:t>30-06-2026</a:t>
             </a:fld>
             <a:endParaRPr lang="en-IN" dirty="0"/>
           </a:p>
@@ -1056,7 +1056,7 @@
           <a:p>
             <a:fld id="{BD944048-9929-4BB2-BADE-62F9A707015B}" type="datetime1">
               <a:rPr lang="en-IN" smtClean="0"/>
-              <a:t>29-06-2026</a:t>
+              <a:t>30-06-2026</a:t>
             </a:fld>
             <a:endParaRPr lang="en-IN" dirty="0"/>
           </a:p>
@@ -1362,7 +1362,7 @@
           <a:p>
             <a:fld id="{09A388D1-7504-45FD-847C-EF9E921E08DF}" type="datetime1">
               <a:rPr lang="en-IN" smtClean="0"/>
-              <a:t>29-06-2026</a:t>
+              <a:t>30-06-2026</a:t>
             </a:fld>
             <a:endParaRPr lang="en-IN" dirty="0"/>
           </a:p>
@@ -1591,7 +1591,7 @@
           <a:p>
             <a:fld id="{6015BE80-B03C-48AB-B3E2-19C5F4D60D3C}" type="datetime1">
               <a:rPr lang="en-IN" smtClean="0"/>
-              <a:t>29-06-2026</a:t>
+              <a:t>30-06-2026</a:t>
             </a:fld>
             <a:endParaRPr lang="en-IN" dirty="0"/>
           </a:p>
@@ -1862,7 +1862,7 @@
           <a:p>
             <a:fld id="{450E9977-AF0E-4B1A-B2BF-2416B4828E95}" type="datetime1">
               <a:rPr lang="en-IN" smtClean="0"/>
-              <a:t>29-06-2026</a:t>
+              <a:t>30-06-2026</a:t>
             </a:fld>
             <a:endParaRPr lang="en-IN" dirty="0"/>
           </a:p>
@@ -2089,7 +2089,7 @@
           <a:p>
             <a:fld id="{972A712B-80AB-4FDB-AFE5-C959280677B9}" type="datetime1">
               <a:rPr lang="en-IN" smtClean="0"/>
-              <a:t>29-06-2026</a:t>
+              <a:t>30-06-2026</a:t>
             </a:fld>
             <a:endParaRPr lang="en-IN" dirty="0"/>
           </a:p>
@@ -2380,7 +2380,7 @@
           <a:p>
             <a:fld id="{78FC1D50-5769-4793-A6D0-4C61D943385E}" type="datetime1">
               <a:rPr lang="en-IN" smtClean="0"/>
-              <a:t>29-06-2026</a:t>
+              <a:t>30-06-2026</a:t>
             </a:fld>
             <a:endParaRPr lang="en-IN" dirty="0"/>
           </a:p>
@@ -2645,7 +2645,7 @@
           <a:p>
             <a:fld id="{1093E9E7-66F0-49C7-87AF-7A91F126A0CA}" type="datetime1">
               <a:rPr lang="en-IN" smtClean="0"/>
-              <a:t>29-06-2026</a:t>
+              <a:t>30-06-2026</a:t>
             </a:fld>
             <a:endParaRPr lang="en-IN" dirty="0"/>
           </a:p>
@@ -3091,7 +3091,7 @@
           <a:p>
             <a:fld id="{4802E001-56FE-4C01-9545-A69D840AB1F5}" type="datetime1">
               <a:rPr lang="en-IN" smtClean="0"/>
-              <a:t>29-06-2026</a:t>
+              <a:t>30-06-2026</a:t>
             </a:fld>
             <a:endParaRPr lang="en-IN" dirty="0"/>
           </a:p>
@@ -3255,7 +3255,7 @@
           <a:p>
             <a:fld id="{FC628212-ABC2-4EAF-BB21-53D61AEEEA49}" type="datetime1">
               <a:rPr lang="en-IN" smtClean="0"/>
-              <a:t>29-06-2026</a:t>
+              <a:t>30-06-2026</a:t>
             </a:fld>
             <a:endParaRPr lang="en-IN" dirty="0"/>
           </a:p>
@@ -3419,7 +3419,7 @@
           <a:p>
             <a:fld id="{83F0C27E-97BD-4ACD-AFDF-13985BE88ECF}" type="datetime1">
               <a:rPr lang="en-IN" smtClean="0"/>
-              <a:t>29-06-2026</a:t>
+              <a:t>30-06-2026</a:t>
             </a:fld>
             <a:endParaRPr lang="en-IN" dirty="0"/>
           </a:p>
@@ -3617,7 +3617,7 @@
           <a:p>
             <a:fld id="{10A04BDC-9A72-4B08-81B7-A336A5B4E254}" type="datetime1">
               <a:rPr lang="en-IN" smtClean="0"/>
-              <a:t>29-06-2026</a:t>
+              <a:t>30-06-2026</a:t>
             </a:fld>
             <a:endParaRPr lang="en-IN" dirty="0"/>
           </a:p>
@@ -3815,7 +3815,7 @@
           <a:p>
             <a:fld id="{2E5D08A3-D96A-4309-8AF3-C610782BB2D3}" type="datetime1">
               <a:rPr lang="en-IN" smtClean="0"/>
-              <a:t>29-06-2026</a:t>
+              <a:t>30-06-2026</a:t>
             </a:fld>
             <a:endParaRPr lang="en-IN" dirty="0"/>
           </a:p>
@@ -5630,7 +5630,15 @@
             </a:r>
             <a:r>
               <a:rPr lang="en-IN" dirty="0"/>
-              <a:t> Triangle , Inverted Right Triangle , Pyramid , Diamond , Hollow Square , Binary Triangle , Butterfly Pattern , X Pattern , Palindrome Triangle , Sandglass Pattern , Concentric Number Pattern</a:t>
+              <a:t> Triangle , Inverted </a:t>
+            </a:r>
+            <a:r>
+              <a:rPr lang="en-IN" dirty="0" err="1"/>
+              <a:t>Right&amp;Left</a:t>
+            </a:r>
+            <a:r>
+              <a:rPr lang="en-IN" dirty="0"/>
+              <a:t> Triangle , Pyramid , Diamond , Binary Triangle , Butterfly Pattern , X Pattern , Palindrome Triangle , Sandglass Pattern , Concentric Number Pattern</a:t>
             </a:r>
           </a:p>
           <a:p>
@@ -6655,10 +6663,33 @@
               <a:t>Counter : </a:t>
             </a:r>
             <a:r>
-              <a:rPr lang="en-IN"/>
-              <a:t>returns frequency </a:t>
-            </a:r>
-            <a:endParaRPr lang="en-IN" b="1" dirty="0"/>
+              <a:rPr lang="en-IN" dirty="0"/>
+              <a:t>returns frequency as a dictionary.</a:t>
+            </a:r>
+          </a:p>
+          <a:p>
+            <a:r>
+              <a:rPr lang="en-IN" b="1" dirty="0"/>
+              <a:t> </a:t>
+            </a:r>
+            <a:r>
+              <a:rPr lang="en-IN" b="1" dirty="0" err="1"/>
+              <a:t>defaultdict</a:t>
+            </a:r>
+            <a:r>
+              <a:rPr lang="en-IN" b="1" dirty="0"/>
+              <a:t> : </a:t>
+            </a:r>
+            <a:r>
+              <a:rPr lang="en-IN" dirty="0"/>
+              <a:t>dictionary with default key as 0.</a:t>
+            </a:r>
+          </a:p>
+          <a:p>
+            <a:r>
+              <a:rPr lang="en-IN" b="1" dirty="0"/>
+              <a:t> </a:t>
+            </a:r>
           </a:p>
         </p:txBody>
       </p:sp>

--- a/python class/Python Class.pptx
+++ b/python class/Python Class.pptx
@@ -216,7 +216,7 @@
           <a:p>
             <a:fld id="{C7300FFE-222E-424B-A24A-B86ADB1660A8}" type="datetimeFigureOut">
               <a:rPr lang="en-IN" smtClean="0"/>
-              <a:t>30-06-2026</a:t>
+              <a:t>01-07-2026</a:t>
             </a:fld>
             <a:endParaRPr lang="en-IN" dirty="0"/>
           </a:p>
@@ -644,7 +644,7 @@
           <a:p>
             <a:fld id="{AD501974-91E0-4A6C-BF4F-18DDA0DBE697}" type="datetime1">
               <a:rPr lang="en-IN" smtClean="0"/>
-              <a:t>30-06-2026</a:t>
+              <a:t>01-07-2026</a:t>
             </a:fld>
             <a:endParaRPr lang="en-IN" dirty="0"/>
           </a:p>
@@ -769,7 +769,7 @@
           <a:p>
             <a:fld id="{340C70EA-229A-4802-A7BC-A1799783BDD3}" type="datetime1">
               <a:rPr lang="en-IN" smtClean="0"/>
-              <a:t>30-06-2026</a:t>
+              <a:t>01-07-2026</a:t>
             </a:fld>
             <a:endParaRPr lang="en-IN" dirty="0"/>
           </a:p>
@@ -1056,7 +1056,7 @@
           <a:p>
             <a:fld id="{BD944048-9929-4BB2-BADE-62F9A707015B}" type="datetime1">
               <a:rPr lang="en-IN" smtClean="0"/>
-              <a:t>30-06-2026</a:t>
+              <a:t>01-07-2026</a:t>
             </a:fld>
             <a:endParaRPr lang="en-IN" dirty="0"/>
           </a:p>
@@ -1362,7 +1362,7 @@
           <a:p>
             <a:fld id="{09A388D1-7504-45FD-847C-EF9E921E08DF}" type="datetime1">
               <a:rPr lang="en-IN" smtClean="0"/>
-              <a:t>30-06-2026</a:t>
+              <a:t>01-07-2026</a:t>
             </a:fld>
             <a:endParaRPr lang="en-IN" dirty="0"/>
           </a:p>
@@ -1591,7 +1591,7 @@
           <a:p>
             <a:fld id="{6015BE80-B03C-48AB-B3E2-19C5F4D60D3C}" type="datetime1">
               <a:rPr lang="en-IN" smtClean="0"/>
-              <a:t>30-06-2026</a:t>
+              <a:t>01-07-2026</a:t>
             </a:fld>
             <a:endParaRPr lang="en-IN" dirty="0"/>
           </a:p>
@@ -1862,7 +1862,7 @@
           <a:p>
             <a:fld id="{450E9977-AF0E-4B1A-B2BF-2416B4828E95}" type="datetime1">
               <a:rPr lang="en-IN" smtClean="0"/>
-              <a:t>30-06-2026</a:t>
+              <a:t>01-07-2026</a:t>
             </a:fld>
             <a:endParaRPr lang="en-IN" dirty="0"/>
           </a:p>
@@ -2089,7 +2089,7 @@
           <a:p>
             <a:fld id="{972A712B-80AB-4FDB-AFE5-C959280677B9}" type="datetime1">
               <a:rPr lang="en-IN" smtClean="0"/>
-              <a:t>30-06-2026</a:t>
+              <a:t>01-07-2026</a:t>
             </a:fld>
             <a:endParaRPr lang="en-IN" dirty="0"/>
           </a:p>
@@ -2380,7 +2380,7 @@
           <a:p>
             <a:fld id="{78FC1D50-5769-4793-A6D0-4C61D943385E}" type="datetime1">
               <a:rPr lang="en-IN" smtClean="0"/>
-              <a:t>30-06-2026</a:t>
+              <a:t>01-07-2026</a:t>
             </a:fld>
             <a:endParaRPr lang="en-IN" dirty="0"/>
           </a:p>
@@ -2645,7 +2645,7 @@
           <a:p>
             <a:fld id="{1093E9E7-66F0-49C7-87AF-7A91F126A0CA}" type="datetime1">
               <a:rPr lang="en-IN" smtClean="0"/>
-              <a:t>30-06-2026</a:t>
+              <a:t>01-07-2026</a:t>
             </a:fld>
             <a:endParaRPr lang="en-IN" dirty="0"/>
           </a:p>
@@ -3091,7 +3091,7 @@
           <a:p>
             <a:fld id="{4802E001-56FE-4C01-9545-A69D840AB1F5}" type="datetime1">
               <a:rPr lang="en-IN" smtClean="0"/>
-              <a:t>30-06-2026</a:t>
+              <a:t>01-07-2026</a:t>
             </a:fld>
             <a:endParaRPr lang="en-IN" dirty="0"/>
           </a:p>
@@ -3255,7 +3255,7 @@
           <a:p>
             <a:fld id="{FC628212-ABC2-4EAF-BB21-53D61AEEEA49}" type="datetime1">
               <a:rPr lang="en-IN" smtClean="0"/>
-              <a:t>30-06-2026</a:t>
+              <a:t>01-07-2026</a:t>
             </a:fld>
             <a:endParaRPr lang="en-IN" dirty="0"/>
           </a:p>
@@ -3419,7 +3419,7 @@
           <a:p>
             <a:fld id="{83F0C27E-97BD-4ACD-AFDF-13985BE88ECF}" type="datetime1">
               <a:rPr lang="en-IN" smtClean="0"/>
-              <a:t>30-06-2026</a:t>
+              <a:t>01-07-2026</a:t>
             </a:fld>
             <a:endParaRPr lang="en-IN" dirty="0"/>
           </a:p>
@@ -3617,7 +3617,7 @@
           <a:p>
             <a:fld id="{10A04BDC-9A72-4B08-81B7-A336A5B4E254}" type="datetime1">
               <a:rPr lang="en-IN" smtClean="0"/>
-              <a:t>30-06-2026</a:t>
+              <a:t>01-07-2026</a:t>
             </a:fld>
             <a:endParaRPr lang="en-IN" dirty="0"/>
           </a:p>
@@ -3815,7 +3815,7 @@
           <a:p>
             <a:fld id="{2E5D08A3-D96A-4309-8AF3-C610782BB2D3}" type="datetime1">
               <a:rPr lang="en-IN" smtClean="0"/>
-              <a:t>30-06-2026</a:t>
+              <a:t>01-07-2026</a:t>
             </a:fld>
             <a:endParaRPr lang="en-IN" dirty="0"/>
           </a:p>

--- a/python class/Python Class.pptx
+++ b/python class/Python Class.pptx
@@ -5,7 +5,7 @@
     <p:sldMasterId id="2147483660" r:id="rId1"/>
   </p:sldMasterIdLst>
   <p:notesMasterIdLst>
-    <p:notesMasterId r:id="rId22"/>
+    <p:notesMasterId r:id="rId35"/>
   </p:notesMasterIdLst>
   <p:sldIdLst>
     <p:sldId id="256" r:id="rId2"/>
@@ -28,6 +28,19 @@
     <p:sldId id="273" r:id="rId19"/>
     <p:sldId id="274" r:id="rId20"/>
     <p:sldId id="275" r:id="rId21"/>
+    <p:sldId id="276" r:id="rId22"/>
+    <p:sldId id="277" r:id="rId23"/>
+    <p:sldId id="286" r:id="rId24"/>
+    <p:sldId id="287" r:id="rId25"/>
+    <p:sldId id="288" r:id="rId26"/>
+    <p:sldId id="278" r:id="rId27"/>
+    <p:sldId id="280" r:id="rId28"/>
+    <p:sldId id="281" r:id="rId29"/>
+    <p:sldId id="282" r:id="rId30"/>
+    <p:sldId id="283" r:id="rId31"/>
+    <p:sldId id="279" r:id="rId32"/>
+    <p:sldId id="284" r:id="rId33"/>
+    <p:sldId id="285" r:id="rId34"/>
   </p:sldIdLst>
   <p:sldSz cx="12192000" cy="6858000"/>
   <p:notesSz cx="7104063" cy="10234613"/>
@@ -216,7 +229,7 @@
           <a:p>
             <a:fld id="{C7300FFE-222E-424B-A24A-B86ADB1660A8}" type="datetimeFigureOut">
               <a:rPr lang="en-IN" smtClean="0"/>
-              <a:t>01-07-2026</a:t>
+              <a:t>03-07-2026</a:t>
             </a:fld>
             <a:endParaRPr lang="en-IN" dirty="0"/>
           </a:p>
@@ -644,7 +657,7 @@
           <a:p>
             <a:fld id="{AD501974-91E0-4A6C-BF4F-18DDA0DBE697}" type="datetime1">
               <a:rPr lang="en-IN" smtClean="0"/>
-              <a:t>01-07-2026</a:t>
+              <a:t>03-07-2026</a:t>
             </a:fld>
             <a:endParaRPr lang="en-IN" dirty="0"/>
           </a:p>
@@ -769,7 +782,7 @@
           <a:p>
             <a:fld id="{340C70EA-229A-4802-A7BC-A1799783BDD3}" type="datetime1">
               <a:rPr lang="en-IN" smtClean="0"/>
-              <a:t>01-07-2026</a:t>
+              <a:t>03-07-2026</a:t>
             </a:fld>
             <a:endParaRPr lang="en-IN" dirty="0"/>
           </a:p>
@@ -1056,7 +1069,7 @@
           <a:p>
             <a:fld id="{BD944048-9929-4BB2-BADE-62F9A707015B}" type="datetime1">
               <a:rPr lang="en-IN" smtClean="0"/>
-              <a:t>01-07-2026</a:t>
+              <a:t>03-07-2026</a:t>
             </a:fld>
             <a:endParaRPr lang="en-IN" dirty="0"/>
           </a:p>
@@ -1362,7 +1375,7 @@
           <a:p>
             <a:fld id="{09A388D1-7504-45FD-847C-EF9E921E08DF}" type="datetime1">
               <a:rPr lang="en-IN" smtClean="0"/>
-              <a:t>01-07-2026</a:t>
+              <a:t>03-07-2026</a:t>
             </a:fld>
             <a:endParaRPr lang="en-IN" dirty="0"/>
           </a:p>
@@ -1591,7 +1604,7 @@
           <a:p>
             <a:fld id="{6015BE80-B03C-48AB-B3E2-19C5F4D60D3C}" type="datetime1">
               <a:rPr lang="en-IN" smtClean="0"/>
-              <a:t>01-07-2026</a:t>
+              <a:t>03-07-2026</a:t>
             </a:fld>
             <a:endParaRPr lang="en-IN" dirty="0"/>
           </a:p>
@@ -1862,7 +1875,7 @@
           <a:p>
             <a:fld id="{450E9977-AF0E-4B1A-B2BF-2416B4828E95}" type="datetime1">
               <a:rPr lang="en-IN" smtClean="0"/>
-              <a:t>01-07-2026</a:t>
+              <a:t>03-07-2026</a:t>
             </a:fld>
             <a:endParaRPr lang="en-IN" dirty="0"/>
           </a:p>
@@ -2089,7 +2102,7 @@
           <a:p>
             <a:fld id="{972A712B-80AB-4FDB-AFE5-C959280677B9}" type="datetime1">
               <a:rPr lang="en-IN" smtClean="0"/>
-              <a:t>01-07-2026</a:t>
+              <a:t>03-07-2026</a:t>
             </a:fld>
             <a:endParaRPr lang="en-IN" dirty="0"/>
           </a:p>
@@ -2380,7 +2393,7 @@
           <a:p>
             <a:fld id="{78FC1D50-5769-4793-A6D0-4C61D943385E}" type="datetime1">
               <a:rPr lang="en-IN" smtClean="0"/>
-              <a:t>01-07-2026</a:t>
+              <a:t>03-07-2026</a:t>
             </a:fld>
             <a:endParaRPr lang="en-IN" dirty="0"/>
           </a:p>
@@ -2645,7 +2658,7 @@
           <a:p>
             <a:fld id="{1093E9E7-66F0-49C7-87AF-7A91F126A0CA}" type="datetime1">
               <a:rPr lang="en-IN" smtClean="0"/>
-              <a:t>01-07-2026</a:t>
+              <a:t>03-07-2026</a:t>
             </a:fld>
             <a:endParaRPr lang="en-IN" dirty="0"/>
           </a:p>
@@ -3091,7 +3104,7 @@
           <a:p>
             <a:fld id="{4802E001-56FE-4C01-9545-A69D840AB1F5}" type="datetime1">
               <a:rPr lang="en-IN" smtClean="0"/>
-              <a:t>01-07-2026</a:t>
+              <a:t>03-07-2026</a:t>
             </a:fld>
             <a:endParaRPr lang="en-IN" dirty="0"/>
           </a:p>
@@ -3255,7 +3268,7 @@
           <a:p>
             <a:fld id="{FC628212-ABC2-4EAF-BB21-53D61AEEEA49}" type="datetime1">
               <a:rPr lang="en-IN" smtClean="0"/>
-              <a:t>01-07-2026</a:t>
+              <a:t>03-07-2026</a:t>
             </a:fld>
             <a:endParaRPr lang="en-IN" dirty="0"/>
           </a:p>
@@ -3419,7 +3432,7 @@
           <a:p>
             <a:fld id="{83F0C27E-97BD-4ACD-AFDF-13985BE88ECF}" type="datetime1">
               <a:rPr lang="en-IN" smtClean="0"/>
-              <a:t>01-07-2026</a:t>
+              <a:t>03-07-2026</a:t>
             </a:fld>
             <a:endParaRPr lang="en-IN" dirty="0"/>
           </a:p>
@@ -3617,7 +3630,7 @@
           <a:p>
             <a:fld id="{10A04BDC-9A72-4B08-81B7-A336A5B4E254}" type="datetime1">
               <a:rPr lang="en-IN" smtClean="0"/>
-              <a:t>01-07-2026</a:t>
+              <a:t>03-07-2026</a:t>
             </a:fld>
             <a:endParaRPr lang="en-IN" dirty="0"/>
           </a:p>
@@ -3815,7 +3828,7 @@
           <a:p>
             <a:fld id="{2E5D08A3-D96A-4309-8AF3-C610782BB2D3}" type="datetime1">
               <a:rPr lang="en-IN" smtClean="0"/>
-              <a:t>01-07-2026</a:t>
+              <a:t>03-07-2026</a:t>
             </a:fld>
             <a:endParaRPr lang="en-IN" dirty="0"/>
           </a:p>
@@ -6054,21 +6067,23 @@
           <a:p>
             <a:r>
               <a:rPr lang="en-IN" dirty="0"/>
-              <a:t> Largest Character with match frequency.</a:t>
-            </a:r>
-          </a:p>
-          <a:p>
-            <a:r>
-              <a:rPr lang="en-IN" dirty="0"/>
-              <a:t> Common Characters . (hello , world – </a:t>
+              <a:t> Group Anagrams : stream = ["eat","tea","tan","ate","</a:t>
             </a:r>
             <a:r>
               <a:rPr lang="en-IN" dirty="0" err="1"/>
-              <a:t>l,o</a:t>
-            </a:r>
-            <a:r>
-              <a:rPr lang="en-IN" dirty="0"/>
-              <a:t>).</a:t>
+              <a:t>nat</a:t>
+            </a:r>
+            <a:r>
+              <a:rPr lang="en-IN" dirty="0"/>
+              <a:t>","bat"] ; o/p: {'a1e1t1': ['eat', 'tea', 'ate'], 'a1n1t1': ['tan', '</a:t>
+            </a:r>
+            <a:r>
+              <a:rPr lang="en-IN" dirty="0" err="1"/>
+              <a:t>nat</a:t>
+            </a:r>
+            <a:r>
+              <a:rPr lang="en-IN" dirty="0"/>
+              <a:t>'], 'a1b1t1': ['bat’]}</a:t>
             </a:r>
           </a:p>
           <a:p>
@@ -6118,11 +6133,7 @@
             </a:r>
             <a:r>
               <a:rPr lang="en-IN" dirty="0"/>
-              <a:t> dog" . </a:t>
-            </a:r>
-            <a:r>
-              <a:rPr lang="en-IN"/>
-              <a:t>o/p : True.</a:t>
+              <a:t> dog" . o/p : True.</a:t>
             </a:r>
             <a:endParaRPr lang="en-GB" dirty="0"/>
           </a:p>
@@ -6515,6 +6526,24 @@
               <a:t> Mapping : map()</a:t>
             </a:r>
           </a:p>
+          <a:p>
+            <a:r>
+              <a:rPr lang="en-IN" dirty="0"/>
+              <a:t> Zip : zip()</a:t>
+            </a:r>
+          </a:p>
+          <a:p>
+            <a:r>
+              <a:rPr lang="en-IN" dirty="0"/>
+              <a:t> All-Filtering : all()</a:t>
+            </a:r>
+          </a:p>
+          <a:p>
+            <a:r>
+              <a:rPr lang="en-IN" dirty="0"/>
+              <a:t> Any-Filtering : any()</a:t>
+            </a:r>
+          </a:p>
         </p:txBody>
       </p:sp>
       <p:sp>
@@ -6802,7 +6831,11 @@
           <a:bodyPr/>
           <a:lstStyle/>
           <a:p>
-            <a:endParaRPr lang="en-IN"/>
+            <a:r>
+              <a:rPr lang="en-GB" dirty="0"/>
+              <a:t>Formatting Strings</a:t>
+            </a:r>
+            <a:endParaRPr lang="en-IN" dirty="0"/>
           </a:p>
         </p:txBody>
       </p:sp>
@@ -7193,7 +7226,11 @@
           <a:bodyPr/>
           <a:lstStyle/>
           <a:p>
-            <a:endParaRPr lang="en-IN"/>
+            <a:r>
+              <a:rPr lang="en-GB" dirty="0"/>
+              <a:t>MYSQL Connection</a:t>
+            </a:r>
+            <a:endParaRPr lang="en-IN" dirty="0"/>
           </a:p>
         </p:txBody>
       </p:sp>
@@ -7284,6 +7321,1308 @@
     <p:extLst>
       <p:ext uri="{BB962C8B-B14F-4D97-AF65-F5344CB8AC3E}">
         <p14:creationId xmlns:p14="http://schemas.microsoft.com/office/powerpoint/2010/main" val="2713769145"/>
+      </p:ext>
+    </p:extLst>
+  </p:cSld>
+  <p:clrMapOvr>
+    <a:masterClrMapping/>
+  </p:clrMapOvr>
+</p:sld>
+</file>
+
+<file path=ppt/slides/slide21.xml><?xml version="1.0" encoding="utf-8"?>
+<p:sld xmlns:a="http://schemas.openxmlformats.org/drawingml/2006/main" xmlns:r="http://schemas.openxmlformats.org/officeDocument/2006/relationships" xmlns:p="http://schemas.openxmlformats.org/presentationml/2006/main">
+  <p:cSld>
+    <p:spTree>
+      <p:nvGrpSpPr>
+        <p:cNvPr id="1" name=""/>
+        <p:cNvGrpSpPr/>
+        <p:nvPr/>
+      </p:nvGrpSpPr>
+      <p:grpSpPr>
+        <a:xfrm>
+          <a:off x="0" y="0"/>
+          <a:ext cx="0" cy="0"/>
+          <a:chOff x="0" y="0"/>
+          <a:chExt cx="0" cy="0"/>
+        </a:xfrm>
+      </p:grpSpPr>
+      <p:sp>
+        <p:nvSpPr>
+          <p:cNvPr id="2" name="Title 1">
+            <a:extLst>
+              <a:ext uri="{FF2B5EF4-FFF2-40B4-BE49-F238E27FC236}">
+                <a16:creationId xmlns:a16="http://schemas.microsoft.com/office/drawing/2014/main" id="{5B4EE579-3042-DE43-FD11-D93F7BFDF048}"/>
+              </a:ext>
+            </a:extLst>
+          </p:cNvPr>
+          <p:cNvSpPr>
+            <a:spLocks noGrp="1"/>
+          </p:cNvSpPr>
+          <p:nvPr>
+            <p:ph type="title"/>
+          </p:nvPr>
+        </p:nvSpPr>
+        <p:spPr/>
+        <p:txBody>
+          <a:bodyPr/>
+          <a:lstStyle/>
+          <a:p>
+            <a:r>
+              <a:rPr lang="en-GB" dirty="0"/>
+              <a:t>Functions</a:t>
+            </a:r>
+            <a:endParaRPr lang="en-IN" dirty="0"/>
+          </a:p>
+        </p:txBody>
+      </p:sp>
+      <p:sp>
+        <p:nvSpPr>
+          <p:cNvPr id="3" name="Content Placeholder 2">
+            <a:extLst>
+              <a:ext uri="{FF2B5EF4-FFF2-40B4-BE49-F238E27FC236}">
+                <a16:creationId xmlns:a16="http://schemas.microsoft.com/office/drawing/2014/main" id="{D8341C3D-D3B8-288E-250F-8BB47531DF72}"/>
+              </a:ext>
+            </a:extLst>
+          </p:cNvPr>
+          <p:cNvSpPr>
+            <a:spLocks noGrp="1"/>
+          </p:cNvSpPr>
+          <p:nvPr>
+            <p:ph idx="1"/>
+          </p:nvPr>
+        </p:nvSpPr>
+        <p:spPr/>
+        <p:txBody>
+          <a:bodyPr/>
+          <a:lstStyle/>
+          <a:p>
+            <a:endParaRPr lang="en-IN"/>
+          </a:p>
+        </p:txBody>
+      </p:sp>
+      <p:sp>
+        <p:nvSpPr>
+          <p:cNvPr id="4" name="Footer Placeholder 3">
+            <a:extLst>
+              <a:ext uri="{FF2B5EF4-FFF2-40B4-BE49-F238E27FC236}">
+                <a16:creationId xmlns:a16="http://schemas.microsoft.com/office/drawing/2014/main" id="{E7AE428B-2B5A-54E8-56DD-D707BD14DD11}"/>
+              </a:ext>
+            </a:extLst>
+          </p:cNvPr>
+          <p:cNvSpPr>
+            <a:spLocks noGrp="1"/>
+          </p:cNvSpPr>
+          <p:nvPr>
+            <p:ph type="ftr" sz="quarter" idx="11"/>
+          </p:nvPr>
+        </p:nvSpPr>
+        <p:spPr/>
+        <p:txBody>
+          <a:bodyPr/>
+          <a:lstStyle/>
+          <a:p>
+            <a:r>
+              <a:rPr lang="it-IT"/>
+              <a:t>Agnie Consulting India Pvt Limited</a:t>
+            </a:r>
+            <a:endParaRPr lang="en-IN" dirty="0"/>
+          </a:p>
+        </p:txBody>
+      </p:sp>
+      <p:sp>
+        <p:nvSpPr>
+          <p:cNvPr id="5" name="Slide Number Placeholder 4">
+            <a:extLst>
+              <a:ext uri="{FF2B5EF4-FFF2-40B4-BE49-F238E27FC236}">
+                <a16:creationId xmlns:a16="http://schemas.microsoft.com/office/drawing/2014/main" id="{83475F66-2B0A-E5D8-323B-C4905E62A4AB}"/>
+              </a:ext>
+            </a:extLst>
+          </p:cNvPr>
+          <p:cNvSpPr>
+            <a:spLocks noGrp="1"/>
+          </p:cNvSpPr>
+          <p:nvPr>
+            <p:ph type="sldNum" sz="quarter" idx="12"/>
+          </p:nvPr>
+        </p:nvSpPr>
+        <p:spPr/>
+        <p:txBody>
+          <a:bodyPr/>
+          <a:lstStyle/>
+          <a:p>
+            <a:fld id="{F904C42B-FE65-422C-989C-AD3E5E2A1A20}" type="slidenum">
+              <a:rPr lang="en-IN" smtClean="0"/>
+              <a:t>21</a:t>
+            </a:fld>
+            <a:endParaRPr lang="en-IN" dirty="0"/>
+          </a:p>
+        </p:txBody>
+      </p:sp>
+    </p:spTree>
+    <p:extLst>
+      <p:ext uri="{BB962C8B-B14F-4D97-AF65-F5344CB8AC3E}">
+        <p14:creationId xmlns:p14="http://schemas.microsoft.com/office/powerpoint/2010/main" val="1659146117"/>
+      </p:ext>
+    </p:extLst>
+  </p:cSld>
+  <p:clrMapOvr>
+    <a:masterClrMapping/>
+  </p:clrMapOvr>
+</p:sld>
+</file>
+
+<file path=ppt/slides/slide22.xml><?xml version="1.0" encoding="utf-8"?>
+<p:sld xmlns:a="http://schemas.openxmlformats.org/drawingml/2006/main" xmlns:r="http://schemas.openxmlformats.org/officeDocument/2006/relationships" xmlns:p="http://schemas.openxmlformats.org/presentationml/2006/main">
+  <p:cSld>
+    <p:spTree>
+      <p:nvGrpSpPr>
+        <p:cNvPr id="1" name=""/>
+        <p:cNvGrpSpPr/>
+        <p:nvPr/>
+      </p:nvGrpSpPr>
+      <p:grpSpPr>
+        <a:xfrm>
+          <a:off x="0" y="0"/>
+          <a:ext cx="0" cy="0"/>
+          <a:chOff x="0" y="0"/>
+          <a:chExt cx="0" cy="0"/>
+        </a:xfrm>
+      </p:grpSpPr>
+      <p:sp>
+        <p:nvSpPr>
+          <p:cNvPr id="2" name="Title 1">
+            <a:extLst>
+              <a:ext uri="{FF2B5EF4-FFF2-40B4-BE49-F238E27FC236}">
+                <a16:creationId xmlns:a16="http://schemas.microsoft.com/office/drawing/2014/main" id="{AC33EE2A-E291-6B6C-4692-69F438D2D122}"/>
+              </a:ext>
+            </a:extLst>
+          </p:cNvPr>
+          <p:cNvSpPr>
+            <a:spLocks noGrp="1"/>
+          </p:cNvSpPr>
+          <p:nvPr>
+            <p:ph type="title"/>
+          </p:nvPr>
+        </p:nvSpPr>
+        <p:spPr/>
+        <p:txBody>
+          <a:bodyPr/>
+          <a:lstStyle/>
+          <a:p>
+            <a:r>
+              <a:rPr lang="en-GB" dirty="0"/>
+              <a:t>Exception Handling</a:t>
+            </a:r>
+            <a:endParaRPr lang="en-IN" dirty="0"/>
+          </a:p>
+        </p:txBody>
+      </p:sp>
+      <p:sp>
+        <p:nvSpPr>
+          <p:cNvPr id="3" name="Content Placeholder 2">
+            <a:extLst>
+              <a:ext uri="{FF2B5EF4-FFF2-40B4-BE49-F238E27FC236}">
+                <a16:creationId xmlns:a16="http://schemas.microsoft.com/office/drawing/2014/main" id="{20DD8D14-6237-1982-4EB8-681E3F06B371}"/>
+              </a:ext>
+            </a:extLst>
+          </p:cNvPr>
+          <p:cNvSpPr>
+            <a:spLocks noGrp="1"/>
+          </p:cNvSpPr>
+          <p:nvPr>
+            <p:ph idx="1"/>
+          </p:nvPr>
+        </p:nvSpPr>
+        <p:spPr/>
+        <p:txBody>
+          <a:bodyPr/>
+          <a:lstStyle/>
+          <a:p>
+            <a:r>
+              <a:rPr lang="en-GB" dirty="0"/>
+              <a:t> </a:t>
+            </a:r>
+          </a:p>
+          <a:p>
+            <a:pPr lvl="1"/>
+            <a:r>
+              <a:rPr lang="en-GB" dirty="0"/>
+              <a:t> try</a:t>
+            </a:r>
+          </a:p>
+          <a:p>
+            <a:pPr lvl="1"/>
+            <a:r>
+              <a:rPr lang="en-GB" dirty="0"/>
+              <a:t> except</a:t>
+            </a:r>
+          </a:p>
+          <a:p>
+            <a:pPr lvl="1"/>
+            <a:r>
+              <a:rPr lang="en-GB" dirty="0"/>
+              <a:t> </a:t>
+            </a:r>
+            <a:endParaRPr lang="en-IN" dirty="0"/>
+          </a:p>
+        </p:txBody>
+      </p:sp>
+      <p:sp>
+        <p:nvSpPr>
+          <p:cNvPr id="4" name="Footer Placeholder 3">
+            <a:extLst>
+              <a:ext uri="{FF2B5EF4-FFF2-40B4-BE49-F238E27FC236}">
+                <a16:creationId xmlns:a16="http://schemas.microsoft.com/office/drawing/2014/main" id="{72BD80CB-A028-534E-3E57-441FF63C0AAD}"/>
+              </a:ext>
+            </a:extLst>
+          </p:cNvPr>
+          <p:cNvSpPr>
+            <a:spLocks noGrp="1"/>
+          </p:cNvSpPr>
+          <p:nvPr>
+            <p:ph type="ftr" sz="quarter" idx="11"/>
+          </p:nvPr>
+        </p:nvSpPr>
+        <p:spPr/>
+        <p:txBody>
+          <a:bodyPr/>
+          <a:lstStyle/>
+          <a:p>
+            <a:r>
+              <a:rPr lang="it-IT"/>
+              <a:t>Agnie Consulting India Pvt Limited</a:t>
+            </a:r>
+            <a:endParaRPr lang="en-IN" dirty="0"/>
+          </a:p>
+        </p:txBody>
+      </p:sp>
+      <p:sp>
+        <p:nvSpPr>
+          <p:cNvPr id="5" name="Slide Number Placeholder 4">
+            <a:extLst>
+              <a:ext uri="{FF2B5EF4-FFF2-40B4-BE49-F238E27FC236}">
+                <a16:creationId xmlns:a16="http://schemas.microsoft.com/office/drawing/2014/main" id="{0E5822AE-D486-BA76-0E08-1D718A0A6BE3}"/>
+              </a:ext>
+            </a:extLst>
+          </p:cNvPr>
+          <p:cNvSpPr>
+            <a:spLocks noGrp="1"/>
+          </p:cNvSpPr>
+          <p:nvPr>
+            <p:ph type="sldNum" sz="quarter" idx="12"/>
+          </p:nvPr>
+        </p:nvSpPr>
+        <p:spPr/>
+        <p:txBody>
+          <a:bodyPr/>
+          <a:lstStyle/>
+          <a:p>
+            <a:fld id="{F904C42B-FE65-422C-989C-AD3E5E2A1A20}" type="slidenum">
+              <a:rPr lang="en-IN" smtClean="0"/>
+              <a:t>22</a:t>
+            </a:fld>
+            <a:endParaRPr lang="en-IN" dirty="0"/>
+          </a:p>
+        </p:txBody>
+      </p:sp>
+    </p:spTree>
+    <p:extLst>
+      <p:ext uri="{BB962C8B-B14F-4D97-AF65-F5344CB8AC3E}">
+        <p14:creationId xmlns:p14="http://schemas.microsoft.com/office/powerpoint/2010/main" val="1480239433"/>
+      </p:ext>
+    </p:extLst>
+  </p:cSld>
+  <p:clrMapOvr>
+    <a:masterClrMapping/>
+  </p:clrMapOvr>
+</p:sld>
+</file>
+
+<file path=ppt/slides/slide23.xml><?xml version="1.0" encoding="utf-8"?>
+<p:sld xmlns:a="http://schemas.openxmlformats.org/drawingml/2006/main" xmlns:r="http://schemas.openxmlformats.org/officeDocument/2006/relationships" xmlns:p="http://schemas.openxmlformats.org/presentationml/2006/main">
+  <p:cSld>
+    <p:spTree>
+      <p:nvGrpSpPr>
+        <p:cNvPr id="1" name=""/>
+        <p:cNvGrpSpPr/>
+        <p:nvPr/>
+      </p:nvGrpSpPr>
+      <p:grpSpPr>
+        <a:xfrm>
+          <a:off x="0" y="0"/>
+          <a:ext cx="0" cy="0"/>
+          <a:chOff x="0" y="0"/>
+          <a:chExt cx="0" cy="0"/>
+        </a:xfrm>
+      </p:grpSpPr>
+      <p:sp>
+        <p:nvSpPr>
+          <p:cNvPr id="2" name="Title 1">
+            <a:extLst>
+              <a:ext uri="{FF2B5EF4-FFF2-40B4-BE49-F238E27FC236}">
+                <a16:creationId xmlns:a16="http://schemas.microsoft.com/office/drawing/2014/main" id="{9E6DD218-3F31-33F2-8CDB-7DA5BBC005B5}"/>
+              </a:ext>
+            </a:extLst>
+          </p:cNvPr>
+          <p:cNvSpPr>
+            <a:spLocks noGrp="1"/>
+          </p:cNvSpPr>
+          <p:nvPr>
+            <p:ph type="title"/>
+          </p:nvPr>
+        </p:nvSpPr>
+        <p:spPr/>
+        <p:txBody>
+          <a:bodyPr/>
+          <a:lstStyle/>
+          <a:p>
+            <a:r>
+              <a:rPr lang="en-GB" dirty="0"/>
+              <a:t>Excel</a:t>
+            </a:r>
+            <a:endParaRPr lang="en-IN" dirty="0"/>
+          </a:p>
+        </p:txBody>
+      </p:sp>
+      <p:sp>
+        <p:nvSpPr>
+          <p:cNvPr id="3" name="Content Placeholder 2">
+            <a:extLst>
+              <a:ext uri="{FF2B5EF4-FFF2-40B4-BE49-F238E27FC236}">
+                <a16:creationId xmlns:a16="http://schemas.microsoft.com/office/drawing/2014/main" id="{500E92CE-D89D-F2AE-C187-40E84467AA4A}"/>
+              </a:ext>
+            </a:extLst>
+          </p:cNvPr>
+          <p:cNvSpPr>
+            <a:spLocks noGrp="1"/>
+          </p:cNvSpPr>
+          <p:nvPr>
+            <p:ph idx="1"/>
+          </p:nvPr>
+        </p:nvSpPr>
+        <p:spPr/>
+        <p:txBody>
+          <a:bodyPr/>
+          <a:lstStyle/>
+          <a:p>
+            <a:endParaRPr lang="en-IN"/>
+          </a:p>
+        </p:txBody>
+      </p:sp>
+      <p:sp>
+        <p:nvSpPr>
+          <p:cNvPr id="4" name="Footer Placeholder 3">
+            <a:extLst>
+              <a:ext uri="{FF2B5EF4-FFF2-40B4-BE49-F238E27FC236}">
+                <a16:creationId xmlns:a16="http://schemas.microsoft.com/office/drawing/2014/main" id="{55C92561-856D-7F47-3708-294C94D9D3BA}"/>
+              </a:ext>
+            </a:extLst>
+          </p:cNvPr>
+          <p:cNvSpPr>
+            <a:spLocks noGrp="1"/>
+          </p:cNvSpPr>
+          <p:nvPr>
+            <p:ph type="ftr" sz="quarter" idx="11"/>
+          </p:nvPr>
+        </p:nvSpPr>
+        <p:spPr/>
+        <p:txBody>
+          <a:bodyPr/>
+          <a:lstStyle/>
+          <a:p>
+            <a:r>
+              <a:rPr lang="it-IT"/>
+              <a:t>Agnie Consulting India Pvt Limited</a:t>
+            </a:r>
+            <a:endParaRPr lang="en-IN" dirty="0"/>
+          </a:p>
+        </p:txBody>
+      </p:sp>
+      <p:sp>
+        <p:nvSpPr>
+          <p:cNvPr id="5" name="Slide Number Placeholder 4">
+            <a:extLst>
+              <a:ext uri="{FF2B5EF4-FFF2-40B4-BE49-F238E27FC236}">
+                <a16:creationId xmlns:a16="http://schemas.microsoft.com/office/drawing/2014/main" id="{5A544846-71AE-4EED-7C71-69CBD266AB5B}"/>
+              </a:ext>
+            </a:extLst>
+          </p:cNvPr>
+          <p:cNvSpPr>
+            <a:spLocks noGrp="1"/>
+          </p:cNvSpPr>
+          <p:nvPr>
+            <p:ph type="sldNum" sz="quarter" idx="12"/>
+          </p:nvPr>
+        </p:nvSpPr>
+        <p:spPr/>
+        <p:txBody>
+          <a:bodyPr/>
+          <a:lstStyle/>
+          <a:p>
+            <a:fld id="{F904C42B-FE65-422C-989C-AD3E5E2A1A20}" type="slidenum">
+              <a:rPr lang="en-IN" smtClean="0"/>
+              <a:t>23</a:t>
+            </a:fld>
+            <a:endParaRPr lang="en-IN" dirty="0"/>
+          </a:p>
+        </p:txBody>
+      </p:sp>
+    </p:spTree>
+    <p:extLst>
+      <p:ext uri="{BB962C8B-B14F-4D97-AF65-F5344CB8AC3E}">
+        <p14:creationId xmlns:p14="http://schemas.microsoft.com/office/powerpoint/2010/main" val="1926792215"/>
+      </p:ext>
+    </p:extLst>
+  </p:cSld>
+  <p:clrMapOvr>
+    <a:masterClrMapping/>
+  </p:clrMapOvr>
+</p:sld>
+</file>
+
+<file path=ppt/slides/slide24.xml><?xml version="1.0" encoding="utf-8"?>
+<p:sld xmlns:a="http://schemas.openxmlformats.org/drawingml/2006/main" xmlns:r="http://schemas.openxmlformats.org/officeDocument/2006/relationships" xmlns:p="http://schemas.openxmlformats.org/presentationml/2006/main">
+  <p:cSld>
+    <p:spTree>
+      <p:nvGrpSpPr>
+        <p:cNvPr id="1" name=""/>
+        <p:cNvGrpSpPr/>
+        <p:nvPr/>
+      </p:nvGrpSpPr>
+      <p:grpSpPr>
+        <a:xfrm>
+          <a:off x="0" y="0"/>
+          <a:ext cx="0" cy="0"/>
+          <a:chOff x="0" y="0"/>
+          <a:chExt cx="0" cy="0"/>
+        </a:xfrm>
+      </p:grpSpPr>
+      <p:sp>
+        <p:nvSpPr>
+          <p:cNvPr id="2" name="Title 1">
+            <a:extLst>
+              <a:ext uri="{FF2B5EF4-FFF2-40B4-BE49-F238E27FC236}">
+                <a16:creationId xmlns:a16="http://schemas.microsoft.com/office/drawing/2014/main" id="{F0317199-3FE4-4011-E431-B733E11096CA}"/>
+              </a:ext>
+            </a:extLst>
+          </p:cNvPr>
+          <p:cNvSpPr>
+            <a:spLocks noGrp="1"/>
+          </p:cNvSpPr>
+          <p:nvPr>
+            <p:ph type="title"/>
+          </p:nvPr>
+        </p:nvSpPr>
+        <p:spPr/>
+        <p:txBody>
+          <a:bodyPr/>
+          <a:lstStyle/>
+          <a:p>
+            <a:r>
+              <a:rPr lang="en-GB" dirty="0"/>
+              <a:t>PDF</a:t>
+            </a:r>
+            <a:endParaRPr lang="en-IN" dirty="0"/>
+          </a:p>
+        </p:txBody>
+      </p:sp>
+      <p:sp>
+        <p:nvSpPr>
+          <p:cNvPr id="3" name="Content Placeholder 2">
+            <a:extLst>
+              <a:ext uri="{FF2B5EF4-FFF2-40B4-BE49-F238E27FC236}">
+                <a16:creationId xmlns:a16="http://schemas.microsoft.com/office/drawing/2014/main" id="{3417A133-ACB9-E81D-EC4A-0A5A4CF5DEE0}"/>
+              </a:ext>
+            </a:extLst>
+          </p:cNvPr>
+          <p:cNvSpPr>
+            <a:spLocks noGrp="1"/>
+          </p:cNvSpPr>
+          <p:nvPr>
+            <p:ph idx="1"/>
+          </p:nvPr>
+        </p:nvSpPr>
+        <p:spPr/>
+        <p:txBody>
+          <a:bodyPr/>
+          <a:lstStyle/>
+          <a:p>
+            <a:endParaRPr lang="en-IN"/>
+          </a:p>
+        </p:txBody>
+      </p:sp>
+      <p:sp>
+        <p:nvSpPr>
+          <p:cNvPr id="4" name="Footer Placeholder 3">
+            <a:extLst>
+              <a:ext uri="{FF2B5EF4-FFF2-40B4-BE49-F238E27FC236}">
+                <a16:creationId xmlns:a16="http://schemas.microsoft.com/office/drawing/2014/main" id="{06D2FE4E-A7CE-4D3B-42B3-8DD37D027516}"/>
+              </a:ext>
+            </a:extLst>
+          </p:cNvPr>
+          <p:cNvSpPr>
+            <a:spLocks noGrp="1"/>
+          </p:cNvSpPr>
+          <p:nvPr>
+            <p:ph type="ftr" sz="quarter" idx="11"/>
+          </p:nvPr>
+        </p:nvSpPr>
+        <p:spPr/>
+        <p:txBody>
+          <a:bodyPr/>
+          <a:lstStyle/>
+          <a:p>
+            <a:r>
+              <a:rPr lang="it-IT"/>
+              <a:t>Agnie Consulting India Pvt Limited</a:t>
+            </a:r>
+            <a:endParaRPr lang="en-IN" dirty="0"/>
+          </a:p>
+        </p:txBody>
+      </p:sp>
+      <p:sp>
+        <p:nvSpPr>
+          <p:cNvPr id="5" name="Slide Number Placeholder 4">
+            <a:extLst>
+              <a:ext uri="{FF2B5EF4-FFF2-40B4-BE49-F238E27FC236}">
+                <a16:creationId xmlns:a16="http://schemas.microsoft.com/office/drawing/2014/main" id="{CF0277D4-6825-FE55-E325-241E05EE90B4}"/>
+              </a:ext>
+            </a:extLst>
+          </p:cNvPr>
+          <p:cNvSpPr>
+            <a:spLocks noGrp="1"/>
+          </p:cNvSpPr>
+          <p:nvPr>
+            <p:ph type="sldNum" sz="quarter" idx="12"/>
+          </p:nvPr>
+        </p:nvSpPr>
+        <p:spPr/>
+        <p:txBody>
+          <a:bodyPr/>
+          <a:lstStyle/>
+          <a:p>
+            <a:fld id="{F904C42B-FE65-422C-989C-AD3E5E2A1A20}" type="slidenum">
+              <a:rPr lang="en-IN" smtClean="0"/>
+              <a:t>24</a:t>
+            </a:fld>
+            <a:endParaRPr lang="en-IN" dirty="0"/>
+          </a:p>
+        </p:txBody>
+      </p:sp>
+    </p:spTree>
+    <p:extLst>
+      <p:ext uri="{BB962C8B-B14F-4D97-AF65-F5344CB8AC3E}">
+        <p14:creationId xmlns:p14="http://schemas.microsoft.com/office/powerpoint/2010/main" val="1572536975"/>
+      </p:ext>
+    </p:extLst>
+  </p:cSld>
+  <p:clrMapOvr>
+    <a:masterClrMapping/>
+  </p:clrMapOvr>
+</p:sld>
+</file>
+
+<file path=ppt/slides/slide25.xml><?xml version="1.0" encoding="utf-8"?>
+<p:sld xmlns:a="http://schemas.openxmlformats.org/drawingml/2006/main" xmlns:r="http://schemas.openxmlformats.org/officeDocument/2006/relationships" xmlns:p="http://schemas.openxmlformats.org/presentationml/2006/main">
+  <p:cSld>
+    <p:spTree>
+      <p:nvGrpSpPr>
+        <p:cNvPr id="1" name=""/>
+        <p:cNvGrpSpPr/>
+        <p:nvPr/>
+      </p:nvGrpSpPr>
+      <p:grpSpPr>
+        <a:xfrm>
+          <a:off x="0" y="0"/>
+          <a:ext cx="0" cy="0"/>
+          <a:chOff x="0" y="0"/>
+          <a:chExt cx="0" cy="0"/>
+        </a:xfrm>
+      </p:grpSpPr>
+      <p:sp>
+        <p:nvSpPr>
+          <p:cNvPr id="2" name="Title 1">
+            <a:extLst>
+              <a:ext uri="{FF2B5EF4-FFF2-40B4-BE49-F238E27FC236}">
+                <a16:creationId xmlns:a16="http://schemas.microsoft.com/office/drawing/2014/main" id="{D70072C2-CAC4-C990-6527-C89C83DBC442}"/>
+              </a:ext>
+            </a:extLst>
+          </p:cNvPr>
+          <p:cNvSpPr>
+            <a:spLocks noGrp="1"/>
+          </p:cNvSpPr>
+          <p:nvPr>
+            <p:ph type="title"/>
+          </p:nvPr>
+        </p:nvSpPr>
+        <p:spPr/>
+        <p:txBody>
+          <a:bodyPr/>
+          <a:lstStyle/>
+          <a:p>
+            <a:r>
+              <a:rPr lang="en-GB" dirty="0"/>
+              <a:t>Email</a:t>
+            </a:r>
+            <a:endParaRPr lang="en-IN" dirty="0"/>
+          </a:p>
+        </p:txBody>
+      </p:sp>
+      <p:sp>
+        <p:nvSpPr>
+          <p:cNvPr id="3" name="Content Placeholder 2">
+            <a:extLst>
+              <a:ext uri="{FF2B5EF4-FFF2-40B4-BE49-F238E27FC236}">
+                <a16:creationId xmlns:a16="http://schemas.microsoft.com/office/drawing/2014/main" id="{96D6ED05-9C2A-02BA-AAD4-D9D580B91181}"/>
+              </a:ext>
+            </a:extLst>
+          </p:cNvPr>
+          <p:cNvSpPr>
+            <a:spLocks noGrp="1"/>
+          </p:cNvSpPr>
+          <p:nvPr>
+            <p:ph idx="1"/>
+          </p:nvPr>
+        </p:nvSpPr>
+        <p:spPr/>
+        <p:txBody>
+          <a:bodyPr/>
+          <a:lstStyle/>
+          <a:p>
+            <a:endParaRPr lang="en-IN"/>
+          </a:p>
+        </p:txBody>
+      </p:sp>
+      <p:sp>
+        <p:nvSpPr>
+          <p:cNvPr id="4" name="Footer Placeholder 3">
+            <a:extLst>
+              <a:ext uri="{FF2B5EF4-FFF2-40B4-BE49-F238E27FC236}">
+                <a16:creationId xmlns:a16="http://schemas.microsoft.com/office/drawing/2014/main" id="{EC9EC30D-1289-FA18-7D84-4F3CF09AC37C}"/>
+              </a:ext>
+            </a:extLst>
+          </p:cNvPr>
+          <p:cNvSpPr>
+            <a:spLocks noGrp="1"/>
+          </p:cNvSpPr>
+          <p:nvPr>
+            <p:ph type="ftr" sz="quarter" idx="11"/>
+          </p:nvPr>
+        </p:nvSpPr>
+        <p:spPr/>
+        <p:txBody>
+          <a:bodyPr/>
+          <a:lstStyle/>
+          <a:p>
+            <a:r>
+              <a:rPr lang="it-IT"/>
+              <a:t>Agnie Consulting India Pvt Limited</a:t>
+            </a:r>
+            <a:endParaRPr lang="en-IN" dirty="0"/>
+          </a:p>
+        </p:txBody>
+      </p:sp>
+      <p:sp>
+        <p:nvSpPr>
+          <p:cNvPr id="5" name="Slide Number Placeholder 4">
+            <a:extLst>
+              <a:ext uri="{FF2B5EF4-FFF2-40B4-BE49-F238E27FC236}">
+                <a16:creationId xmlns:a16="http://schemas.microsoft.com/office/drawing/2014/main" id="{B42736E2-8304-D2B5-5ADA-5F4CC1D080FA}"/>
+              </a:ext>
+            </a:extLst>
+          </p:cNvPr>
+          <p:cNvSpPr>
+            <a:spLocks noGrp="1"/>
+          </p:cNvSpPr>
+          <p:nvPr>
+            <p:ph type="sldNum" sz="quarter" idx="12"/>
+          </p:nvPr>
+        </p:nvSpPr>
+        <p:spPr/>
+        <p:txBody>
+          <a:bodyPr/>
+          <a:lstStyle/>
+          <a:p>
+            <a:fld id="{F904C42B-FE65-422C-989C-AD3E5E2A1A20}" type="slidenum">
+              <a:rPr lang="en-IN" smtClean="0"/>
+              <a:t>25</a:t>
+            </a:fld>
+            <a:endParaRPr lang="en-IN" dirty="0"/>
+          </a:p>
+        </p:txBody>
+      </p:sp>
+    </p:spTree>
+    <p:extLst>
+      <p:ext uri="{BB962C8B-B14F-4D97-AF65-F5344CB8AC3E}">
+        <p14:creationId xmlns:p14="http://schemas.microsoft.com/office/powerpoint/2010/main" val="479021944"/>
+      </p:ext>
+    </p:extLst>
+  </p:cSld>
+  <p:clrMapOvr>
+    <a:masterClrMapping/>
+  </p:clrMapOvr>
+</p:sld>
+</file>
+
+<file path=ppt/slides/slide26.xml><?xml version="1.0" encoding="utf-8"?>
+<p:sld xmlns:a="http://schemas.openxmlformats.org/drawingml/2006/main" xmlns:r="http://schemas.openxmlformats.org/officeDocument/2006/relationships" xmlns:p="http://schemas.openxmlformats.org/presentationml/2006/main">
+  <p:cSld>
+    <p:spTree>
+      <p:nvGrpSpPr>
+        <p:cNvPr id="1" name=""/>
+        <p:cNvGrpSpPr/>
+        <p:nvPr/>
+      </p:nvGrpSpPr>
+      <p:grpSpPr>
+        <a:xfrm>
+          <a:off x="0" y="0"/>
+          <a:ext cx="0" cy="0"/>
+          <a:chOff x="0" y="0"/>
+          <a:chExt cx="0" cy="0"/>
+        </a:xfrm>
+      </p:grpSpPr>
+      <p:sp>
+        <p:nvSpPr>
+          <p:cNvPr id="2" name="Title 1">
+            <a:extLst>
+              <a:ext uri="{FF2B5EF4-FFF2-40B4-BE49-F238E27FC236}">
+                <a16:creationId xmlns:a16="http://schemas.microsoft.com/office/drawing/2014/main" id="{1FCB99E7-F51A-5F8F-0A2B-A1B4E791D20E}"/>
+              </a:ext>
+            </a:extLst>
+          </p:cNvPr>
+          <p:cNvSpPr>
+            <a:spLocks noGrp="1"/>
+          </p:cNvSpPr>
+          <p:nvPr>
+            <p:ph type="title"/>
+          </p:nvPr>
+        </p:nvSpPr>
+        <p:spPr/>
+        <p:txBody>
+          <a:bodyPr/>
+          <a:lstStyle/>
+          <a:p>
+            <a:r>
+              <a:rPr lang="en-IN" dirty="0"/>
+              <a:t>Packages</a:t>
+            </a:r>
+          </a:p>
+        </p:txBody>
+      </p:sp>
+      <p:sp>
+        <p:nvSpPr>
+          <p:cNvPr id="3" name="Content Placeholder 2">
+            <a:extLst>
+              <a:ext uri="{FF2B5EF4-FFF2-40B4-BE49-F238E27FC236}">
+                <a16:creationId xmlns:a16="http://schemas.microsoft.com/office/drawing/2014/main" id="{7409316D-8C26-7210-C0E1-CFFF704126C4}"/>
+              </a:ext>
+            </a:extLst>
+          </p:cNvPr>
+          <p:cNvSpPr>
+            <a:spLocks noGrp="1"/>
+          </p:cNvSpPr>
+          <p:nvPr>
+            <p:ph idx="1"/>
+          </p:nvPr>
+        </p:nvSpPr>
+        <p:spPr/>
+        <p:txBody>
+          <a:bodyPr/>
+          <a:lstStyle/>
+          <a:p>
+            <a:endParaRPr lang="en-IN"/>
+          </a:p>
+        </p:txBody>
+      </p:sp>
+      <p:sp>
+        <p:nvSpPr>
+          <p:cNvPr id="4" name="Footer Placeholder 3">
+            <a:extLst>
+              <a:ext uri="{FF2B5EF4-FFF2-40B4-BE49-F238E27FC236}">
+                <a16:creationId xmlns:a16="http://schemas.microsoft.com/office/drawing/2014/main" id="{284EDD6F-94F9-AD66-7AD0-71560E0948EC}"/>
+              </a:ext>
+            </a:extLst>
+          </p:cNvPr>
+          <p:cNvSpPr>
+            <a:spLocks noGrp="1"/>
+          </p:cNvSpPr>
+          <p:nvPr>
+            <p:ph type="ftr" sz="quarter" idx="11"/>
+          </p:nvPr>
+        </p:nvSpPr>
+        <p:spPr/>
+        <p:txBody>
+          <a:bodyPr/>
+          <a:lstStyle/>
+          <a:p>
+            <a:r>
+              <a:rPr lang="it-IT"/>
+              <a:t>Agnie Consulting India Pvt Limited</a:t>
+            </a:r>
+            <a:endParaRPr lang="en-IN" dirty="0"/>
+          </a:p>
+        </p:txBody>
+      </p:sp>
+      <p:sp>
+        <p:nvSpPr>
+          <p:cNvPr id="5" name="Slide Number Placeholder 4">
+            <a:extLst>
+              <a:ext uri="{FF2B5EF4-FFF2-40B4-BE49-F238E27FC236}">
+                <a16:creationId xmlns:a16="http://schemas.microsoft.com/office/drawing/2014/main" id="{A30DD123-3895-9857-EA37-0C3847200B56}"/>
+              </a:ext>
+            </a:extLst>
+          </p:cNvPr>
+          <p:cNvSpPr>
+            <a:spLocks noGrp="1"/>
+          </p:cNvSpPr>
+          <p:nvPr>
+            <p:ph type="sldNum" sz="quarter" idx="12"/>
+          </p:nvPr>
+        </p:nvSpPr>
+        <p:spPr/>
+        <p:txBody>
+          <a:bodyPr/>
+          <a:lstStyle/>
+          <a:p>
+            <a:fld id="{F904C42B-FE65-422C-989C-AD3E5E2A1A20}" type="slidenum">
+              <a:rPr lang="en-IN" smtClean="0"/>
+              <a:t>26</a:t>
+            </a:fld>
+            <a:endParaRPr lang="en-IN" dirty="0"/>
+          </a:p>
+        </p:txBody>
+      </p:sp>
+    </p:spTree>
+    <p:extLst>
+      <p:ext uri="{BB962C8B-B14F-4D97-AF65-F5344CB8AC3E}">
+        <p14:creationId xmlns:p14="http://schemas.microsoft.com/office/powerpoint/2010/main" val="1780490698"/>
+      </p:ext>
+    </p:extLst>
+  </p:cSld>
+  <p:clrMapOvr>
+    <a:masterClrMapping/>
+  </p:clrMapOvr>
+</p:sld>
+</file>
+
+<file path=ppt/slides/slide27.xml><?xml version="1.0" encoding="utf-8"?>
+<p:sld xmlns:a="http://schemas.openxmlformats.org/drawingml/2006/main" xmlns:r="http://schemas.openxmlformats.org/officeDocument/2006/relationships" xmlns:p="http://schemas.openxmlformats.org/presentationml/2006/main">
+  <p:cSld>
+    <p:spTree>
+      <p:nvGrpSpPr>
+        <p:cNvPr id="1" name=""/>
+        <p:cNvGrpSpPr/>
+        <p:nvPr/>
+      </p:nvGrpSpPr>
+      <p:grpSpPr>
+        <a:xfrm>
+          <a:off x="0" y="0"/>
+          <a:ext cx="0" cy="0"/>
+          <a:chOff x="0" y="0"/>
+          <a:chExt cx="0" cy="0"/>
+        </a:xfrm>
+      </p:grpSpPr>
+      <p:sp>
+        <p:nvSpPr>
+          <p:cNvPr id="2" name="Title 1">
+            <a:extLst>
+              <a:ext uri="{FF2B5EF4-FFF2-40B4-BE49-F238E27FC236}">
+                <a16:creationId xmlns:a16="http://schemas.microsoft.com/office/drawing/2014/main" id="{05537F52-D920-165C-539D-D4323D2D50DF}"/>
+              </a:ext>
+            </a:extLst>
+          </p:cNvPr>
+          <p:cNvSpPr>
+            <a:spLocks noGrp="1"/>
+          </p:cNvSpPr>
+          <p:nvPr>
+            <p:ph type="title"/>
+          </p:nvPr>
+        </p:nvSpPr>
+        <p:spPr/>
+        <p:txBody>
+          <a:bodyPr/>
+          <a:lstStyle/>
+          <a:p>
+            <a:r>
+              <a:rPr lang="en-GB" dirty="0"/>
+              <a:t>Custom Packages</a:t>
+            </a:r>
+            <a:endParaRPr lang="en-IN" dirty="0"/>
+          </a:p>
+        </p:txBody>
+      </p:sp>
+      <p:sp>
+        <p:nvSpPr>
+          <p:cNvPr id="3" name="Content Placeholder 2">
+            <a:extLst>
+              <a:ext uri="{FF2B5EF4-FFF2-40B4-BE49-F238E27FC236}">
+                <a16:creationId xmlns:a16="http://schemas.microsoft.com/office/drawing/2014/main" id="{0AAE2362-0572-BFD5-F478-A0EF74AB9E1A}"/>
+              </a:ext>
+            </a:extLst>
+          </p:cNvPr>
+          <p:cNvSpPr>
+            <a:spLocks noGrp="1"/>
+          </p:cNvSpPr>
+          <p:nvPr>
+            <p:ph idx="1"/>
+          </p:nvPr>
+        </p:nvSpPr>
+        <p:spPr/>
+        <p:txBody>
+          <a:bodyPr/>
+          <a:lstStyle/>
+          <a:p>
+            <a:endParaRPr lang="en-IN"/>
+          </a:p>
+        </p:txBody>
+      </p:sp>
+      <p:sp>
+        <p:nvSpPr>
+          <p:cNvPr id="4" name="Footer Placeholder 3">
+            <a:extLst>
+              <a:ext uri="{FF2B5EF4-FFF2-40B4-BE49-F238E27FC236}">
+                <a16:creationId xmlns:a16="http://schemas.microsoft.com/office/drawing/2014/main" id="{DFE71CE4-9080-389F-EBAC-A28DAE84DAEE}"/>
+              </a:ext>
+            </a:extLst>
+          </p:cNvPr>
+          <p:cNvSpPr>
+            <a:spLocks noGrp="1"/>
+          </p:cNvSpPr>
+          <p:nvPr>
+            <p:ph type="ftr" sz="quarter" idx="11"/>
+          </p:nvPr>
+        </p:nvSpPr>
+        <p:spPr/>
+        <p:txBody>
+          <a:bodyPr/>
+          <a:lstStyle/>
+          <a:p>
+            <a:r>
+              <a:rPr lang="it-IT"/>
+              <a:t>Agnie Consulting India Pvt Limited</a:t>
+            </a:r>
+            <a:endParaRPr lang="en-IN" dirty="0"/>
+          </a:p>
+        </p:txBody>
+      </p:sp>
+      <p:sp>
+        <p:nvSpPr>
+          <p:cNvPr id="5" name="Slide Number Placeholder 4">
+            <a:extLst>
+              <a:ext uri="{FF2B5EF4-FFF2-40B4-BE49-F238E27FC236}">
+                <a16:creationId xmlns:a16="http://schemas.microsoft.com/office/drawing/2014/main" id="{08D0C57D-0999-D180-8AC1-D9F2F4C92A21}"/>
+              </a:ext>
+            </a:extLst>
+          </p:cNvPr>
+          <p:cNvSpPr>
+            <a:spLocks noGrp="1"/>
+          </p:cNvSpPr>
+          <p:nvPr>
+            <p:ph type="sldNum" sz="quarter" idx="12"/>
+          </p:nvPr>
+        </p:nvSpPr>
+        <p:spPr/>
+        <p:txBody>
+          <a:bodyPr/>
+          <a:lstStyle/>
+          <a:p>
+            <a:fld id="{F904C42B-FE65-422C-989C-AD3E5E2A1A20}" type="slidenum">
+              <a:rPr lang="en-IN" smtClean="0"/>
+              <a:t>27</a:t>
+            </a:fld>
+            <a:endParaRPr lang="en-IN" dirty="0"/>
+          </a:p>
+        </p:txBody>
+      </p:sp>
+    </p:spTree>
+    <p:extLst>
+      <p:ext uri="{BB962C8B-B14F-4D97-AF65-F5344CB8AC3E}">
+        <p14:creationId xmlns:p14="http://schemas.microsoft.com/office/powerpoint/2010/main" val="2724122432"/>
+      </p:ext>
+    </p:extLst>
+  </p:cSld>
+  <p:clrMapOvr>
+    <a:masterClrMapping/>
+  </p:clrMapOvr>
+</p:sld>
+</file>
+
+<file path=ppt/slides/slide28.xml><?xml version="1.0" encoding="utf-8"?>
+<p:sld xmlns:a="http://schemas.openxmlformats.org/drawingml/2006/main" xmlns:r="http://schemas.openxmlformats.org/officeDocument/2006/relationships" xmlns:p="http://schemas.openxmlformats.org/presentationml/2006/main">
+  <p:cSld>
+    <p:spTree>
+      <p:nvGrpSpPr>
+        <p:cNvPr id="1" name=""/>
+        <p:cNvGrpSpPr/>
+        <p:nvPr/>
+      </p:nvGrpSpPr>
+      <p:grpSpPr>
+        <a:xfrm>
+          <a:off x="0" y="0"/>
+          <a:ext cx="0" cy="0"/>
+          <a:chOff x="0" y="0"/>
+          <a:chExt cx="0" cy="0"/>
+        </a:xfrm>
+      </p:grpSpPr>
+      <p:sp>
+        <p:nvSpPr>
+          <p:cNvPr id="2" name="Title 1">
+            <a:extLst>
+              <a:ext uri="{FF2B5EF4-FFF2-40B4-BE49-F238E27FC236}">
+                <a16:creationId xmlns:a16="http://schemas.microsoft.com/office/drawing/2014/main" id="{4E910C82-F4D6-8BAD-4B49-32DCFF98126F}"/>
+              </a:ext>
+            </a:extLst>
+          </p:cNvPr>
+          <p:cNvSpPr>
+            <a:spLocks noGrp="1"/>
+          </p:cNvSpPr>
+          <p:nvPr>
+            <p:ph type="title"/>
+          </p:nvPr>
+        </p:nvSpPr>
+        <p:spPr/>
+        <p:txBody>
+          <a:bodyPr/>
+          <a:lstStyle/>
+          <a:p>
+            <a:r>
+              <a:rPr lang="en-GB" dirty="0"/>
+              <a:t>Virtual Environment</a:t>
+            </a:r>
+            <a:endParaRPr lang="en-IN" dirty="0"/>
+          </a:p>
+        </p:txBody>
+      </p:sp>
+      <p:sp>
+        <p:nvSpPr>
+          <p:cNvPr id="3" name="Content Placeholder 2">
+            <a:extLst>
+              <a:ext uri="{FF2B5EF4-FFF2-40B4-BE49-F238E27FC236}">
+                <a16:creationId xmlns:a16="http://schemas.microsoft.com/office/drawing/2014/main" id="{0543EA3C-E07C-5917-5EBD-2B2AB33F4B98}"/>
+              </a:ext>
+            </a:extLst>
+          </p:cNvPr>
+          <p:cNvSpPr>
+            <a:spLocks noGrp="1"/>
+          </p:cNvSpPr>
+          <p:nvPr>
+            <p:ph idx="1"/>
+          </p:nvPr>
+        </p:nvSpPr>
+        <p:spPr/>
+        <p:txBody>
+          <a:bodyPr/>
+          <a:lstStyle/>
+          <a:p>
+            <a:endParaRPr lang="en-IN"/>
+          </a:p>
+        </p:txBody>
+      </p:sp>
+      <p:sp>
+        <p:nvSpPr>
+          <p:cNvPr id="4" name="Footer Placeholder 3">
+            <a:extLst>
+              <a:ext uri="{FF2B5EF4-FFF2-40B4-BE49-F238E27FC236}">
+                <a16:creationId xmlns:a16="http://schemas.microsoft.com/office/drawing/2014/main" id="{43D502F0-E14F-C473-977F-40A61FF19039}"/>
+              </a:ext>
+            </a:extLst>
+          </p:cNvPr>
+          <p:cNvSpPr>
+            <a:spLocks noGrp="1"/>
+          </p:cNvSpPr>
+          <p:nvPr>
+            <p:ph type="ftr" sz="quarter" idx="11"/>
+          </p:nvPr>
+        </p:nvSpPr>
+        <p:spPr/>
+        <p:txBody>
+          <a:bodyPr/>
+          <a:lstStyle/>
+          <a:p>
+            <a:r>
+              <a:rPr lang="it-IT"/>
+              <a:t>Agnie Consulting India Pvt Limited</a:t>
+            </a:r>
+            <a:endParaRPr lang="en-IN" dirty="0"/>
+          </a:p>
+        </p:txBody>
+      </p:sp>
+      <p:sp>
+        <p:nvSpPr>
+          <p:cNvPr id="5" name="Slide Number Placeholder 4">
+            <a:extLst>
+              <a:ext uri="{FF2B5EF4-FFF2-40B4-BE49-F238E27FC236}">
+                <a16:creationId xmlns:a16="http://schemas.microsoft.com/office/drawing/2014/main" id="{6706342E-FF86-F190-355B-93898D5F2A83}"/>
+              </a:ext>
+            </a:extLst>
+          </p:cNvPr>
+          <p:cNvSpPr>
+            <a:spLocks noGrp="1"/>
+          </p:cNvSpPr>
+          <p:nvPr>
+            <p:ph type="sldNum" sz="quarter" idx="12"/>
+          </p:nvPr>
+        </p:nvSpPr>
+        <p:spPr/>
+        <p:txBody>
+          <a:bodyPr/>
+          <a:lstStyle/>
+          <a:p>
+            <a:fld id="{F904C42B-FE65-422C-989C-AD3E5E2A1A20}" type="slidenum">
+              <a:rPr lang="en-IN" smtClean="0"/>
+              <a:t>28</a:t>
+            </a:fld>
+            <a:endParaRPr lang="en-IN" dirty="0"/>
+          </a:p>
+        </p:txBody>
+      </p:sp>
+    </p:spTree>
+    <p:extLst>
+      <p:ext uri="{BB962C8B-B14F-4D97-AF65-F5344CB8AC3E}">
+        <p14:creationId xmlns:p14="http://schemas.microsoft.com/office/powerpoint/2010/main" val="2155345922"/>
+      </p:ext>
+    </p:extLst>
+  </p:cSld>
+  <p:clrMapOvr>
+    <a:masterClrMapping/>
+  </p:clrMapOvr>
+</p:sld>
+</file>
+
+<file path=ppt/slides/slide29.xml><?xml version="1.0" encoding="utf-8"?>
+<p:sld xmlns:a="http://schemas.openxmlformats.org/drawingml/2006/main" xmlns:r="http://schemas.openxmlformats.org/officeDocument/2006/relationships" xmlns:p="http://schemas.openxmlformats.org/presentationml/2006/main">
+  <p:cSld>
+    <p:spTree>
+      <p:nvGrpSpPr>
+        <p:cNvPr id="1" name=""/>
+        <p:cNvGrpSpPr/>
+        <p:nvPr/>
+      </p:nvGrpSpPr>
+      <p:grpSpPr>
+        <a:xfrm>
+          <a:off x="0" y="0"/>
+          <a:ext cx="0" cy="0"/>
+          <a:chOff x="0" y="0"/>
+          <a:chExt cx="0" cy="0"/>
+        </a:xfrm>
+      </p:grpSpPr>
+      <p:sp>
+        <p:nvSpPr>
+          <p:cNvPr id="2" name="Title 1">
+            <a:extLst>
+              <a:ext uri="{FF2B5EF4-FFF2-40B4-BE49-F238E27FC236}">
+                <a16:creationId xmlns:a16="http://schemas.microsoft.com/office/drawing/2014/main" id="{96366A88-CFBD-B97A-00EB-C635FE8A19F8}"/>
+              </a:ext>
+            </a:extLst>
+          </p:cNvPr>
+          <p:cNvSpPr>
+            <a:spLocks noGrp="1"/>
+          </p:cNvSpPr>
+          <p:nvPr>
+            <p:ph type="title"/>
+          </p:nvPr>
+        </p:nvSpPr>
+        <p:spPr/>
+        <p:txBody>
+          <a:bodyPr/>
+          <a:lstStyle/>
+          <a:p>
+            <a:r>
+              <a:rPr lang="en-GB" dirty="0"/>
+              <a:t>OS</a:t>
+            </a:r>
+            <a:endParaRPr lang="en-IN" dirty="0"/>
+          </a:p>
+        </p:txBody>
+      </p:sp>
+      <p:sp>
+        <p:nvSpPr>
+          <p:cNvPr id="3" name="Content Placeholder 2">
+            <a:extLst>
+              <a:ext uri="{FF2B5EF4-FFF2-40B4-BE49-F238E27FC236}">
+                <a16:creationId xmlns:a16="http://schemas.microsoft.com/office/drawing/2014/main" id="{E0C53D46-508B-CE03-C0C5-4A07BB8ECD8A}"/>
+              </a:ext>
+            </a:extLst>
+          </p:cNvPr>
+          <p:cNvSpPr>
+            <a:spLocks noGrp="1"/>
+          </p:cNvSpPr>
+          <p:nvPr>
+            <p:ph idx="1"/>
+          </p:nvPr>
+        </p:nvSpPr>
+        <p:spPr/>
+        <p:txBody>
+          <a:bodyPr/>
+          <a:lstStyle/>
+          <a:p>
+            <a:endParaRPr lang="en-IN"/>
+          </a:p>
+        </p:txBody>
+      </p:sp>
+      <p:sp>
+        <p:nvSpPr>
+          <p:cNvPr id="4" name="Footer Placeholder 3">
+            <a:extLst>
+              <a:ext uri="{FF2B5EF4-FFF2-40B4-BE49-F238E27FC236}">
+                <a16:creationId xmlns:a16="http://schemas.microsoft.com/office/drawing/2014/main" id="{C8996E58-34C6-D144-C03C-FBE8CD89090D}"/>
+              </a:ext>
+            </a:extLst>
+          </p:cNvPr>
+          <p:cNvSpPr>
+            <a:spLocks noGrp="1"/>
+          </p:cNvSpPr>
+          <p:nvPr>
+            <p:ph type="ftr" sz="quarter" idx="11"/>
+          </p:nvPr>
+        </p:nvSpPr>
+        <p:spPr/>
+        <p:txBody>
+          <a:bodyPr/>
+          <a:lstStyle/>
+          <a:p>
+            <a:r>
+              <a:rPr lang="it-IT"/>
+              <a:t>Agnie Consulting India Pvt Limited</a:t>
+            </a:r>
+            <a:endParaRPr lang="en-IN" dirty="0"/>
+          </a:p>
+        </p:txBody>
+      </p:sp>
+      <p:sp>
+        <p:nvSpPr>
+          <p:cNvPr id="5" name="Slide Number Placeholder 4">
+            <a:extLst>
+              <a:ext uri="{FF2B5EF4-FFF2-40B4-BE49-F238E27FC236}">
+                <a16:creationId xmlns:a16="http://schemas.microsoft.com/office/drawing/2014/main" id="{A0B8147F-3551-F86D-E2DF-18461434347C}"/>
+              </a:ext>
+            </a:extLst>
+          </p:cNvPr>
+          <p:cNvSpPr>
+            <a:spLocks noGrp="1"/>
+          </p:cNvSpPr>
+          <p:nvPr>
+            <p:ph type="sldNum" sz="quarter" idx="12"/>
+          </p:nvPr>
+        </p:nvSpPr>
+        <p:spPr/>
+        <p:txBody>
+          <a:bodyPr/>
+          <a:lstStyle/>
+          <a:p>
+            <a:fld id="{F904C42B-FE65-422C-989C-AD3E5E2A1A20}" type="slidenum">
+              <a:rPr lang="en-IN" smtClean="0"/>
+              <a:t>29</a:t>
+            </a:fld>
+            <a:endParaRPr lang="en-IN" dirty="0"/>
+          </a:p>
+        </p:txBody>
+      </p:sp>
+    </p:spTree>
+    <p:extLst>
+      <p:ext uri="{BB962C8B-B14F-4D97-AF65-F5344CB8AC3E}">
+        <p14:creationId xmlns:p14="http://schemas.microsoft.com/office/powerpoint/2010/main" val="609168797"/>
       </p:ext>
     </p:extLst>
   </p:cSld>
@@ -8223,6 +9562,582 @@
     <p:extLst>
       <p:ext uri="{BB962C8B-B14F-4D97-AF65-F5344CB8AC3E}">
         <p14:creationId xmlns:p14="http://schemas.microsoft.com/office/powerpoint/2010/main" val="1300004212"/>
+      </p:ext>
+    </p:extLst>
+  </p:cSld>
+  <p:clrMapOvr>
+    <a:masterClrMapping/>
+  </p:clrMapOvr>
+</p:sld>
+</file>
+
+<file path=ppt/slides/slide30.xml><?xml version="1.0" encoding="utf-8"?>
+<p:sld xmlns:a="http://schemas.openxmlformats.org/drawingml/2006/main" xmlns:r="http://schemas.openxmlformats.org/officeDocument/2006/relationships" xmlns:p="http://schemas.openxmlformats.org/presentationml/2006/main">
+  <p:cSld>
+    <p:spTree>
+      <p:nvGrpSpPr>
+        <p:cNvPr id="1" name=""/>
+        <p:cNvGrpSpPr/>
+        <p:nvPr/>
+      </p:nvGrpSpPr>
+      <p:grpSpPr>
+        <a:xfrm>
+          <a:off x="0" y="0"/>
+          <a:ext cx="0" cy="0"/>
+          <a:chOff x="0" y="0"/>
+          <a:chExt cx="0" cy="0"/>
+        </a:xfrm>
+      </p:grpSpPr>
+      <p:sp>
+        <p:nvSpPr>
+          <p:cNvPr id="2" name="Title 1">
+            <a:extLst>
+              <a:ext uri="{FF2B5EF4-FFF2-40B4-BE49-F238E27FC236}">
+                <a16:creationId xmlns:a16="http://schemas.microsoft.com/office/drawing/2014/main" id="{9FDFE934-FCD7-0FF7-3D48-FE377DC2C4BB}"/>
+              </a:ext>
+            </a:extLst>
+          </p:cNvPr>
+          <p:cNvSpPr>
+            <a:spLocks noGrp="1"/>
+          </p:cNvSpPr>
+          <p:nvPr>
+            <p:ph type="title"/>
+          </p:nvPr>
+        </p:nvSpPr>
+        <p:spPr/>
+        <p:txBody>
+          <a:bodyPr/>
+          <a:lstStyle/>
+          <a:p>
+            <a:r>
+              <a:rPr lang="en-GB" dirty="0"/>
+              <a:t>Datetime</a:t>
+            </a:r>
+            <a:endParaRPr lang="en-IN" dirty="0"/>
+          </a:p>
+        </p:txBody>
+      </p:sp>
+      <p:sp>
+        <p:nvSpPr>
+          <p:cNvPr id="3" name="Content Placeholder 2">
+            <a:extLst>
+              <a:ext uri="{FF2B5EF4-FFF2-40B4-BE49-F238E27FC236}">
+                <a16:creationId xmlns:a16="http://schemas.microsoft.com/office/drawing/2014/main" id="{39006957-BA22-F06D-3CB4-AD976E5ED1FC}"/>
+              </a:ext>
+            </a:extLst>
+          </p:cNvPr>
+          <p:cNvSpPr>
+            <a:spLocks noGrp="1"/>
+          </p:cNvSpPr>
+          <p:nvPr>
+            <p:ph idx="1"/>
+          </p:nvPr>
+        </p:nvSpPr>
+        <p:spPr/>
+        <p:txBody>
+          <a:bodyPr/>
+          <a:lstStyle/>
+          <a:p>
+            <a:endParaRPr lang="en-IN"/>
+          </a:p>
+        </p:txBody>
+      </p:sp>
+      <p:sp>
+        <p:nvSpPr>
+          <p:cNvPr id="4" name="Footer Placeholder 3">
+            <a:extLst>
+              <a:ext uri="{FF2B5EF4-FFF2-40B4-BE49-F238E27FC236}">
+                <a16:creationId xmlns:a16="http://schemas.microsoft.com/office/drawing/2014/main" id="{723E5E67-40AC-20E1-815F-D843004BA175}"/>
+              </a:ext>
+            </a:extLst>
+          </p:cNvPr>
+          <p:cNvSpPr>
+            <a:spLocks noGrp="1"/>
+          </p:cNvSpPr>
+          <p:nvPr>
+            <p:ph type="ftr" sz="quarter" idx="11"/>
+          </p:nvPr>
+        </p:nvSpPr>
+        <p:spPr/>
+        <p:txBody>
+          <a:bodyPr/>
+          <a:lstStyle/>
+          <a:p>
+            <a:r>
+              <a:rPr lang="it-IT"/>
+              <a:t>Agnie Consulting India Pvt Limited</a:t>
+            </a:r>
+            <a:endParaRPr lang="en-IN" dirty="0"/>
+          </a:p>
+        </p:txBody>
+      </p:sp>
+      <p:sp>
+        <p:nvSpPr>
+          <p:cNvPr id="5" name="Slide Number Placeholder 4">
+            <a:extLst>
+              <a:ext uri="{FF2B5EF4-FFF2-40B4-BE49-F238E27FC236}">
+                <a16:creationId xmlns:a16="http://schemas.microsoft.com/office/drawing/2014/main" id="{C7832505-4646-07D5-87EB-4E8F6703AB14}"/>
+              </a:ext>
+            </a:extLst>
+          </p:cNvPr>
+          <p:cNvSpPr>
+            <a:spLocks noGrp="1"/>
+          </p:cNvSpPr>
+          <p:nvPr>
+            <p:ph type="sldNum" sz="quarter" idx="12"/>
+          </p:nvPr>
+        </p:nvSpPr>
+        <p:spPr/>
+        <p:txBody>
+          <a:bodyPr/>
+          <a:lstStyle/>
+          <a:p>
+            <a:fld id="{F904C42B-FE65-422C-989C-AD3E5E2A1A20}" type="slidenum">
+              <a:rPr lang="en-IN" smtClean="0"/>
+              <a:t>30</a:t>
+            </a:fld>
+            <a:endParaRPr lang="en-IN" dirty="0"/>
+          </a:p>
+        </p:txBody>
+      </p:sp>
+    </p:spTree>
+    <p:extLst>
+      <p:ext uri="{BB962C8B-B14F-4D97-AF65-F5344CB8AC3E}">
+        <p14:creationId xmlns:p14="http://schemas.microsoft.com/office/powerpoint/2010/main" val="682083692"/>
+      </p:ext>
+    </p:extLst>
+  </p:cSld>
+  <p:clrMapOvr>
+    <a:masterClrMapping/>
+  </p:clrMapOvr>
+</p:sld>
+</file>
+
+<file path=ppt/slides/slide31.xml><?xml version="1.0" encoding="utf-8"?>
+<p:sld xmlns:a="http://schemas.openxmlformats.org/drawingml/2006/main" xmlns:r="http://schemas.openxmlformats.org/officeDocument/2006/relationships" xmlns:p="http://schemas.openxmlformats.org/presentationml/2006/main">
+  <p:cSld>
+    <p:spTree>
+      <p:nvGrpSpPr>
+        <p:cNvPr id="1" name=""/>
+        <p:cNvGrpSpPr/>
+        <p:nvPr/>
+      </p:nvGrpSpPr>
+      <p:grpSpPr>
+        <a:xfrm>
+          <a:off x="0" y="0"/>
+          <a:ext cx="0" cy="0"/>
+          <a:chOff x="0" y="0"/>
+          <a:chExt cx="0" cy="0"/>
+        </a:xfrm>
+      </p:grpSpPr>
+      <p:sp>
+        <p:nvSpPr>
+          <p:cNvPr id="2" name="Title 1">
+            <a:extLst>
+              <a:ext uri="{FF2B5EF4-FFF2-40B4-BE49-F238E27FC236}">
+                <a16:creationId xmlns:a16="http://schemas.microsoft.com/office/drawing/2014/main" id="{2CEA5BDF-9F05-F624-FCF1-39C85E1A3DE7}"/>
+              </a:ext>
+            </a:extLst>
+          </p:cNvPr>
+          <p:cNvSpPr>
+            <a:spLocks noGrp="1"/>
+          </p:cNvSpPr>
+          <p:nvPr>
+            <p:ph type="title"/>
+          </p:nvPr>
+        </p:nvSpPr>
+        <p:spPr/>
+        <p:txBody>
+          <a:bodyPr/>
+          <a:lstStyle/>
+          <a:p>
+            <a:r>
+              <a:rPr lang="en-GB" dirty="0"/>
+              <a:t>Web &amp; GUI Development</a:t>
+            </a:r>
+            <a:endParaRPr lang="en-IN" dirty="0"/>
+          </a:p>
+        </p:txBody>
+      </p:sp>
+      <p:sp>
+        <p:nvSpPr>
+          <p:cNvPr id="3" name="Content Placeholder 2">
+            <a:extLst>
+              <a:ext uri="{FF2B5EF4-FFF2-40B4-BE49-F238E27FC236}">
+                <a16:creationId xmlns:a16="http://schemas.microsoft.com/office/drawing/2014/main" id="{3F654F39-106A-8921-8452-34F301506A96}"/>
+              </a:ext>
+            </a:extLst>
+          </p:cNvPr>
+          <p:cNvSpPr>
+            <a:spLocks noGrp="1"/>
+          </p:cNvSpPr>
+          <p:nvPr>
+            <p:ph idx="1"/>
+          </p:nvPr>
+        </p:nvSpPr>
+        <p:spPr/>
+        <p:txBody>
+          <a:bodyPr/>
+          <a:lstStyle/>
+          <a:p>
+            <a:endParaRPr lang="en-IN"/>
+          </a:p>
+        </p:txBody>
+      </p:sp>
+      <p:sp>
+        <p:nvSpPr>
+          <p:cNvPr id="4" name="Footer Placeholder 3">
+            <a:extLst>
+              <a:ext uri="{FF2B5EF4-FFF2-40B4-BE49-F238E27FC236}">
+                <a16:creationId xmlns:a16="http://schemas.microsoft.com/office/drawing/2014/main" id="{B6211910-FFBC-E796-7537-DC267EB214BD}"/>
+              </a:ext>
+            </a:extLst>
+          </p:cNvPr>
+          <p:cNvSpPr>
+            <a:spLocks noGrp="1"/>
+          </p:cNvSpPr>
+          <p:nvPr>
+            <p:ph type="ftr" sz="quarter" idx="11"/>
+          </p:nvPr>
+        </p:nvSpPr>
+        <p:spPr/>
+        <p:txBody>
+          <a:bodyPr/>
+          <a:lstStyle/>
+          <a:p>
+            <a:r>
+              <a:rPr lang="it-IT"/>
+              <a:t>Agnie Consulting India Pvt Limited</a:t>
+            </a:r>
+            <a:endParaRPr lang="en-IN" dirty="0"/>
+          </a:p>
+        </p:txBody>
+      </p:sp>
+      <p:sp>
+        <p:nvSpPr>
+          <p:cNvPr id="5" name="Slide Number Placeholder 4">
+            <a:extLst>
+              <a:ext uri="{FF2B5EF4-FFF2-40B4-BE49-F238E27FC236}">
+                <a16:creationId xmlns:a16="http://schemas.microsoft.com/office/drawing/2014/main" id="{634CE741-738C-5294-3111-4971DF04E698}"/>
+              </a:ext>
+            </a:extLst>
+          </p:cNvPr>
+          <p:cNvSpPr>
+            <a:spLocks noGrp="1"/>
+          </p:cNvSpPr>
+          <p:nvPr>
+            <p:ph type="sldNum" sz="quarter" idx="12"/>
+          </p:nvPr>
+        </p:nvSpPr>
+        <p:spPr/>
+        <p:txBody>
+          <a:bodyPr/>
+          <a:lstStyle/>
+          <a:p>
+            <a:fld id="{F904C42B-FE65-422C-989C-AD3E5E2A1A20}" type="slidenum">
+              <a:rPr lang="en-IN" smtClean="0"/>
+              <a:t>31</a:t>
+            </a:fld>
+            <a:endParaRPr lang="en-IN" dirty="0"/>
+          </a:p>
+        </p:txBody>
+      </p:sp>
+    </p:spTree>
+    <p:extLst>
+      <p:ext uri="{BB962C8B-B14F-4D97-AF65-F5344CB8AC3E}">
+        <p14:creationId xmlns:p14="http://schemas.microsoft.com/office/powerpoint/2010/main" val="35491570"/>
+      </p:ext>
+    </p:extLst>
+  </p:cSld>
+  <p:clrMapOvr>
+    <a:masterClrMapping/>
+  </p:clrMapOvr>
+</p:sld>
+</file>
+
+<file path=ppt/slides/slide32.xml><?xml version="1.0" encoding="utf-8"?>
+<p:sld xmlns:a="http://schemas.openxmlformats.org/drawingml/2006/main" xmlns:r="http://schemas.openxmlformats.org/officeDocument/2006/relationships" xmlns:p="http://schemas.openxmlformats.org/presentationml/2006/main">
+  <p:cSld>
+    <p:spTree>
+      <p:nvGrpSpPr>
+        <p:cNvPr id="1" name=""/>
+        <p:cNvGrpSpPr/>
+        <p:nvPr/>
+      </p:nvGrpSpPr>
+      <p:grpSpPr>
+        <a:xfrm>
+          <a:off x="0" y="0"/>
+          <a:ext cx="0" cy="0"/>
+          <a:chOff x="0" y="0"/>
+          <a:chExt cx="0" cy="0"/>
+        </a:xfrm>
+      </p:grpSpPr>
+      <p:sp>
+        <p:nvSpPr>
+          <p:cNvPr id="2" name="Title 1">
+            <a:extLst>
+              <a:ext uri="{FF2B5EF4-FFF2-40B4-BE49-F238E27FC236}">
+                <a16:creationId xmlns:a16="http://schemas.microsoft.com/office/drawing/2014/main" id="{0FAC2044-7BC7-BE81-4358-3C5D49931A58}"/>
+              </a:ext>
+            </a:extLst>
+          </p:cNvPr>
+          <p:cNvSpPr>
+            <a:spLocks noGrp="1"/>
+          </p:cNvSpPr>
+          <p:nvPr>
+            <p:ph type="title"/>
+          </p:nvPr>
+        </p:nvSpPr>
+        <p:spPr/>
+        <p:txBody>
+          <a:bodyPr/>
+          <a:lstStyle/>
+          <a:p>
+            <a:r>
+              <a:rPr lang="en-GB" dirty="0" err="1"/>
+              <a:t>CustomTkinter</a:t>
+            </a:r>
+            <a:endParaRPr lang="en-IN" dirty="0"/>
+          </a:p>
+        </p:txBody>
+      </p:sp>
+      <p:sp>
+        <p:nvSpPr>
+          <p:cNvPr id="3" name="Content Placeholder 2">
+            <a:extLst>
+              <a:ext uri="{FF2B5EF4-FFF2-40B4-BE49-F238E27FC236}">
+                <a16:creationId xmlns:a16="http://schemas.microsoft.com/office/drawing/2014/main" id="{69841D62-3F38-AD65-B1BF-48BF3A14F8B7}"/>
+              </a:ext>
+            </a:extLst>
+          </p:cNvPr>
+          <p:cNvSpPr>
+            <a:spLocks noGrp="1"/>
+          </p:cNvSpPr>
+          <p:nvPr>
+            <p:ph idx="1"/>
+          </p:nvPr>
+        </p:nvSpPr>
+        <p:spPr/>
+        <p:txBody>
+          <a:bodyPr/>
+          <a:lstStyle/>
+          <a:p>
+            <a:endParaRPr lang="en-IN"/>
+          </a:p>
+        </p:txBody>
+      </p:sp>
+      <p:sp>
+        <p:nvSpPr>
+          <p:cNvPr id="4" name="Footer Placeholder 3">
+            <a:extLst>
+              <a:ext uri="{FF2B5EF4-FFF2-40B4-BE49-F238E27FC236}">
+                <a16:creationId xmlns:a16="http://schemas.microsoft.com/office/drawing/2014/main" id="{889662F6-22D2-D1A9-DF10-54B94C79C5D2}"/>
+              </a:ext>
+            </a:extLst>
+          </p:cNvPr>
+          <p:cNvSpPr>
+            <a:spLocks noGrp="1"/>
+          </p:cNvSpPr>
+          <p:nvPr>
+            <p:ph type="ftr" sz="quarter" idx="11"/>
+          </p:nvPr>
+        </p:nvSpPr>
+        <p:spPr/>
+        <p:txBody>
+          <a:bodyPr/>
+          <a:lstStyle/>
+          <a:p>
+            <a:r>
+              <a:rPr lang="it-IT"/>
+              <a:t>Agnie Consulting India Pvt Limited</a:t>
+            </a:r>
+            <a:endParaRPr lang="en-IN" dirty="0"/>
+          </a:p>
+        </p:txBody>
+      </p:sp>
+      <p:sp>
+        <p:nvSpPr>
+          <p:cNvPr id="5" name="Slide Number Placeholder 4">
+            <a:extLst>
+              <a:ext uri="{FF2B5EF4-FFF2-40B4-BE49-F238E27FC236}">
+                <a16:creationId xmlns:a16="http://schemas.microsoft.com/office/drawing/2014/main" id="{4FCBC552-3D1D-6F58-3410-DBE1BCE8AF7F}"/>
+              </a:ext>
+            </a:extLst>
+          </p:cNvPr>
+          <p:cNvSpPr>
+            <a:spLocks noGrp="1"/>
+          </p:cNvSpPr>
+          <p:nvPr>
+            <p:ph type="sldNum" sz="quarter" idx="12"/>
+          </p:nvPr>
+        </p:nvSpPr>
+        <p:spPr/>
+        <p:txBody>
+          <a:bodyPr/>
+          <a:lstStyle/>
+          <a:p>
+            <a:fld id="{F904C42B-FE65-422C-989C-AD3E5E2A1A20}" type="slidenum">
+              <a:rPr lang="en-IN" smtClean="0"/>
+              <a:t>32</a:t>
+            </a:fld>
+            <a:endParaRPr lang="en-IN" dirty="0"/>
+          </a:p>
+        </p:txBody>
+      </p:sp>
+    </p:spTree>
+    <p:extLst>
+      <p:ext uri="{BB962C8B-B14F-4D97-AF65-F5344CB8AC3E}">
+        <p14:creationId xmlns:p14="http://schemas.microsoft.com/office/powerpoint/2010/main" val="3562287446"/>
+      </p:ext>
+    </p:extLst>
+  </p:cSld>
+  <p:clrMapOvr>
+    <a:masterClrMapping/>
+  </p:clrMapOvr>
+</p:sld>
+</file>
+
+<file path=ppt/slides/slide33.xml><?xml version="1.0" encoding="utf-8"?>
+<p:sld xmlns:a="http://schemas.openxmlformats.org/drawingml/2006/main" xmlns:r="http://schemas.openxmlformats.org/officeDocument/2006/relationships" xmlns:p="http://schemas.openxmlformats.org/presentationml/2006/main">
+  <p:cSld>
+    <p:spTree>
+      <p:nvGrpSpPr>
+        <p:cNvPr id="1" name=""/>
+        <p:cNvGrpSpPr/>
+        <p:nvPr/>
+      </p:nvGrpSpPr>
+      <p:grpSpPr>
+        <a:xfrm>
+          <a:off x="0" y="0"/>
+          <a:ext cx="0" cy="0"/>
+          <a:chOff x="0" y="0"/>
+          <a:chExt cx="0" cy="0"/>
+        </a:xfrm>
+      </p:grpSpPr>
+      <p:sp>
+        <p:nvSpPr>
+          <p:cNvPr id="2" name="Title 1">
+            <a:extLst>
+              <a:ext uri="{FF2B5EF4-FFF2-40B4-BE49-F238E27FC236}">
+                <a16:creationId xmlns:a16="http://schemas.microsoft.com/office/drawing/2014/main" id="{76B7B38D-DCBD-9C6B-CD51-7A408A67FAD1}"/>
+              </a:ext>
+            </a:extLst>
+          </p:cNvPr>
+          <p:cNvSpPr>
+            <a:spLocks noGrp="1"/>
+          </p:cNvSpPr>
+          <p:nvPr>
+            <p:ph type="title"/>
+          </p:nvPr>
+        </p:nvSpPr>
+        <p:spPr/>
+        <p:txBody>
+          <a:bodyPr/>
+          <a:lstStyle/>
+          <a:p>
+            <a:r>
+              <a:rPr lang="en-GB" dirty="0" err="1"/>
+              <a:t>Kivy</a:t>
+            </a:r>
+            <a:r>
+              <a:rPr lang="en-GB" dirty="0"/>
+              <a:t> &amp; </a:t>
+            </a:r>
+            <a:r>
+              <a:rPr lang="en-GB" dirty="0" err="1"/>
+              <a:t>Kivymd</a:t>
+            </a:r>
+            <a:endParaRPr lang="en-IN" dirty="0"/>
+          </a:p>
+        </p:txBody>
+      </p:sp>
+      <p:sp>
+        <p:nvSpPr>
+          <p:cNvPr id="3" name="Content Placeholder 2">
+            <a:extLst>
+              <a:ext uri="{FF2B5EF4-FFF2-40B4-BE49-F238E27FC236}">
+                <a16:creationId xmlns:a16="http://schemas.microsoft.com/office/drawing/2014/main" id="{55BFC815-5867-C2BB-884C-F3691F93B019}"/>
+              </a:ext>
+            </a:extLst>
+          </p:cNvPr>
+          <p:cNvSpPr>
+            <a:spLocks noGrp="1"/>
+          </p:cNvSpPr>
+          <p:nvPr>
+            <p:ph idx="1"/>
+          </p:nvPr>
+        </p:nvSpPr>
+        <p:spPr/>
+        <p:txBody>
+          <a:bodyPr/>
+          <a:lstStyle/>
+          <a:p>
+            <a:endParaRPr lang="en-IN"/>
+          </a:p>
+        </p:txBody>
+      </p:sp>
+      <p:sp>
+        <p:nvSpPr>
+          <p:cNvPr id="4" name="Footer Placeholder 3">
+            <a:extLst>
+              <a:ext uri="{FF2B5EF4-FFF2-40B4-BE49-F238E27FC236}">
+                <a16:creationId xmlns:a16="http://schemas.microsoft.com/office/drawing/2014/main" id="{747B2B24-B4CD-D9F0-D1F0-C426E572C6F6}"/>
+              </a:ext>
+            </a:extLst>
+          </p:cNvPr>
+          <p:cNvSpPr>
+            <a:spLocks noGrp="1"/>
+          </p:cNvSpPr>
+          <p:nvPr>
+            <p:ph type="ftr" sz="quarter" idx="11"/>
+          </p:nvPr>
+        </p:nvSpPr>
+        <p:spPr/>
+        <p:txBody>
+          <a:bodyPr/>
+          <a:lstStyle/>
+          <a:p>
+            <a:r>
+              <a:rPr lang="it-IT"/>
+              <a:t>Agnie Consulting India Pvt Limited</a:t>
+            </a:r>
+            <a:endParaRPr lang="en-IN" dirty="0"/>
+          </a:p>
+        </p:txBody>
+      </p:sp>
+      <p:sp>
+        <p:nvSpPr>
+          <p:cNvPr id="5" name="Slide Number Placeholder 4">
+            <a:extLst>
+              <a:ext uri="{FF2B5EF4-FFF2-40B4-BE49-F238E27FC236}">
+                <a16:creationId xmlns:a16="http://schemas.microsoft.com/office/drawing/2014/main" id="{8EC70CEB-FD02-B13C-90CC-1F1AACC0FCAC}"/>
+              </a:ext>
+            </a:extLst>
+          </p:cNvPr>
+          <p:cNvSpPr>
+            <a:spLocks noGrp="1"/>
+          </p:cNvSpPr>
+          <p:nvPr>
+            <p:ph type="sldNum" sz="quarter" idx="12"/>
+          </p:nvPr>
+        </p:nvSpPr>
+        <p:spPr/>
+        <p:txBody>
+          <a:bodyPr/>
+          <a:lstStyle/>
+          <a:p>
+            <a:fld id="{F904C42B-FE65-422C-989C-AD3E5E2A1A20}" type="slidenum">
+              <a:rPr lang="en-IN" smtClean="0"/>
+              <a:t>33</a:t>
+            </a:fld>
+            <a:endParaRPr lang="en-IN" dirty="0"/>
+          </a:p>
+        </p:txBody>
+      </p:sp>
+    </p:spTree>
+    <p:extLst>
+      <p:ext uri="{BB962C8B-B14F-4D97-AF65-F5344CB8AC3E}">
+        <p14:creationId xmlns:p14="http://schemas.microsoft.com/office/powerpoint/2010/main" val="340499084"/>
       </p:ext>
     </p:extLst>
   </p:cSld>

--- a/python class/Python Class.pptx
+++ b/python class/Python Class.pptx
@@ -24,20 +24,20 @@
     <p:sldId id="266" r:id="rId15"/>
     <p:sldId id="271" r:id="rId16"/>
     <p:sldId id="267" r:id="rId17"/>
-    <p:sldId id="272" r:id="rId18"/>
-    <p:sldId id="273" r:id="rId19"/>
-    <p:sldId id="274" r:id="rId20"/>
-    <p:sldId id="275" r:id="rId21"/>
-    <p:sldId id="276" r:id="rId22"/>
-    <p:sldId id="277" r:id="rId23"/>
-    <p:sldId id="286" r:id="rId24"/>
-    <p:sldId id="287" r:id="rId25"/>
-    <p:sldId id="288" r:id="rId26"/>
-    <p:sldId id="278" r:id="rId27"/>
-    <p:sldId id="280" r:id="rId28"/>
-    <p:sldId id="281" r:id="rId29"/>
-    <p:sldId id="282" r:id="rId30"/>
-    <p:sldId id="283" r:id="rId31"/>
+    <p:sldId id="274" r:id="rId18"/>
+    <p:sldId id="272" r:id="rId19"/>
+    <p:sldId id="276" r:id="rId20"/>
+    <p:sldId id="277" r:id="rId21"/>
+    <p:sldId id="281" r:id="rId22"/>
+    <p:sldId id="278" r:id="rId23"/>
+    <p:sldId id="273" r:id="rId24"/>
+    <p:sldId id="283" r:id="rId25"/>
+    <p:sldId id="282" r:id="rId26"/>
+    <p:sldId id="275" r:id="rId27"/>
+    <p:sldId id="286" r:id="rId28"/>
+    <p:sldId id="287" r:id="rId29"/>
+    <p:sldId id="288" r:id="rId30"/>
+    <p:sldId id="280" r:id="rId31"/>
     <p:sldId id="279" r:id="rId32"/>
     <p:sldId id="284" r:id="rId33"/>
     <p:sldId id="285" r:id="rId34"/>
@@ -229,7 +229,7 @@
           <a:p>
             <a:fld id="{C7300FFE-222E-424B-A24A-B86ADB1660A8}" type="datetimeFigureOut">
               <a:rPr lang="en-IN" smtClean="0"/>
-              <a:t>03-07-2026</a:t>
+              <a:t>07-07-2026</a:t>
             </a:fld>
             <a:endParaRPr lang="en-IN" dirty="0"/>
           </a:p>
@@ -657,7 +657,7 @@
           <a:p>
             <a:fld id="{AD501974-91E0-4A6C-BF4F-18DDA0DBE697}" type="datetime1">
               <a:rPr lang="en-IN" smtClean="0"/>
-              <a:t>03-07-2026</a:t>
+              <a:t>07-07-2026</a:t>
             </a:fld>
             <a:endParaRPr lang="en-IN" dirty="0"/>
           </a:p>
@@ -782,7 +782,7 @@
           <a:p>
             <a:fld id="{340C70EA-229A-4802-A7BC-A1799783BDD3}" type="datetime1">
               <a:rPr lang="en-IN" smtClean="0"/>
-              <a:t>03-07-2026</a:t>
+              <a:t>07-07-2026</a:t>
             </a:fld>
             <a:endParaRPr lang="en-IN" dirty="0"/>
           </a:p>
@@ -1069,7 +1069,7 @@
           <a:p>
             <a:fld id="{BD944048-9929-4BB2-BADE-62F9A707015B}" type="datetime1">
               <a:rPr lang="en-IN" smtClean="0"/>
-              <a:t>03-07-2026</a:t>
+              <a:t>07-07-2026</a:t>
             </a:fld>
             <a:endParaRPr lang="en-IN" dirty="0"/>
           </a:p>
@@ -1375,7 +1375,7 @@
           <a:p>
             <a:fld id="{09A388D1-7504-45FD-847C-EF9E921E08DF}" type="datetime1">
               <a:rPr lang="en-IN" smtClean="0"/>
-              <a:t>03-07-2026</a:t>
+              <a:t>07-07-2026</a:t>
             </a:fld>
             <a:endParaRPr lang="en-IN" dirty="0"/>
           </a:p>
@@ -1604,7 +1604,7 @@
           <a:p>
             <a:fld id="{6015BE80-B03C-48AB-B3E2-19C5F4D60D3C}" type="datetime1">
               <a:rPr lang="en-IN" smtClean="0"/>
-              <a:t>03-07-2026</a:t>
+              <a:t>07-07-2026</a:t>
             </a:fld>
             <a:endParaRPr lang="en-IN" dirty="0"/>
           </a:p>
@@ -1875,7 +1875,7 @@
           <a:p>
             <a:fld id="{450E9977-AF0E-4B1A-B2BF-2416B4828E95}" type="datetime1">
               <a:rPr lang="en-IN" smtClean="0"/>
-              <a:t>03-07-2026</a:t>
+              <a:t>07-07-2026</a:t>
             </a:fld>
             <a:endParaRPr lang="en-IN" dirty="0"/>
           </a:p>
@@ -2102,7 +2102,7 @@
           <a:p>
             <a:fld id="{972A712B-80AB-4FDB-AFE5-C959280677B9}" type="datetime1">
               <a:rPr lang="en-IN" smtClean="0"/>
-              <a:t>03-07-2026</a:t>
+              <a:t>07-07-2026</a:t>
             </a:fld>
             <a:endParaRPr lang="en-IN" dirty="0"/>
           </a:p>
@@ -2393,7 +2393,7 @@
           <a:p>
             <a:fld id="{78FC1D50-5769-4793-A6D0-4C61D943385E}" type="datetime1">
               <a:rPr lang="en-IN" smtClean="0"/>
-              <a:t>03-07-2026</a:t>
+              <a:t>07-07-2026</a:t>
             </a:fld>
             <a:endParaRPr lang="en-IN" dirty="0"/>
           </a:p>
@@ -2658,7 +2658,7 @@
           <a:p>
             <a:fld id="{1093E9E7-66F0-49C7-87AF-7A91F126A0CA}" type="datetime1">
               <a:rPr lang="en-IN" smtClean="0"/>
-              <a:t>03-07-2026</a:t>
+              <a:t>07-07-2026</a:t>
             </a:fld>
             <a:endParaRPr lang="en-IN" dirty="0"/>
           </a:p>
@@ -3104,7 +3104,7 @@
           <a:p>
             <a:fld id="{4802E001-56FE-4C01-9545-A69D840AB1F5}" type="datetime1">
               <a:rPr lang="en-IN" smtClean="0"/>
-              <a:t>03-07-2026</a:t>
+              <a:t>07-07-2026</a:t>
             </a:fld>
             <a:endParaRPr lang="en-IN" dirty="0"/>
           </a:p>
@@ -3268,7 +3268,7 @@
           <a:p>
             <a:fld id="{FC628212-ABC2-4EAF-BB21-53D61AEEEA49}" type="datetime1">
               <a:rPr lang="en-IN" smtClean="0"/>
-              <a:t>03-07-2026</a:t>
+              <a:t>07-07-2026</a:t>
             </a:fld>
             <a:endParaRPr lang="en-IN" dirty="0"/>
           </a:p>
@@ -3432,7 +3432,7 @@
           <a:p>
             <a:fld id="{83F0C27E-97BD-4ACD-AFDF-13985BE88ECF}" type="datetime1">
               <a:rPr lang="en-IN" smtClean="0"/>
-              <a:t>03-07-2026</a:t>
+              <a:t>07-07-2026</a:t>
             </a:fld>
             <a:endParaRPr lang="en-IN" dirty="0"/>
           </a:p>
@@ -3630,7 +3630,7 @@
           <a:p>
             <a:fld id="{10A04BDC-9A72-4B08-81B7-A336A5B4E254}" type="datetime1">
               <a:rPr lang="en-IN" smtClean="0"/>
-              <a:t>03-07-2026</a:t>
+              <a:t>07-07-2026</a:t>
             </a:fld>
             <a:endParaRPr lang="en-IN" dirty="0"/>
           </a:p>
@@ -3828,7 +3828,7 @@
           <a:p>
             <a:fld id="{2E5D08A3-D96A-4309-8AF3-C610782BB2D3}" type="datetime1">
               <a:rPr lang="en-IN" smtClean="0"/>
-              <a:t>03-07-2026</a:t>
+              <a:t>07-07-2026</a:t>
             </a:fld>
             <a:endParaRPr lang="en-IN" dirty="0"/>
           </a:p>
@@ -6357,6 +6357,38 @@
               <a:rPr lang="en-IN" dirty="0"/>
               <a:t>)  , </a:t>
             </a:r>
+            <a:r>
+              <a:rPr lang="en-IN" dirty="0" err="1"/>
+              <a:t>intersection_update</a:t>
+            </a:r>
+            <a:r>
+              <a:rPr lang="en-IN" dirty="0"/>
+              <a:t>(</a:t>
+            </a:r>
+            <a:r>
+              <a:rPr lang="en-IN" dirty="0" err="1"/>
+              <a:t>iterable</a:t>
+            </a:r>
+            <a:r>
+              <a:rPr lang="en-IN" dirty="0"/>
+              <a:t>) , </a:t>
+            </a:r>
+            <a:r>
+              <a:rPr lang="en-IN" dirty="0" err="1"/>
+              <a:t>difference_update</a:t>
+            </a:r>
+            <a:r>
+              <a:rPr lang="en-IN" dirty="0"/>
+              <a:t>(</a:t>
+            </a:r>
+            <a:r>
+              <a:rPr lang="en-IN" dirty="0" err="1"/>
+              <a:t>iterable</a:t>
+            </a:r>
+            <a:r>
+              <a:rPr lang="en-IN" dirty="0"/>
+              <a:t>) , copy() , discard(element) , pop() , clear()</a:t>
+            </a:r>
           </a:p>
         </p:txBody>
       </p:sp>
@@ -6453,7 +6485,7 @@
           <p:cNvPr id="2" name="Title 1">
             <a:extLst>
               <a:ext uri="{FF2B5EF4-FFF2-40B4-BE49-F238E27FC236}">
-                <a16:creationId xmlns:a16="http://schemas.microsoft.com/office/drawing/2014/main" id="{368B6DED-16D0-50B6-ACB8-D304DC9ECB97}"/>
+                <a16:creationId xmlns:a16="http://schemas.microsoft.com/office/drawing/2014/main" id="{D7C7727E-BA08-9FFE-B2E7-811A03FB4BC7}"/>
               </a:ext>
             </a:extLst>
           </p:cNvPr>
@@ -6470,9 +6502,10 @@
           <a:lstStyle/>
           <a:p>
             <a:r>
-              <a:rPr lang="en-IN" dirty="0"/>
-              <a:t>Built-In Functions</a:t>
-            </a:r>
+              <a:rPr lang="en-GB" dirty="0"/>
+              <a:t>Formatting Strings</a:t>
+            </a:r>
+            <a:endParaRPr lang="en-IN" dirty="0"/>
           </a:p>
         </p:txBody>
       </p:sp>
@@ -6481,7 +6514,7 @@
           <p:cNvPr id="3" name="Content Placeholder 2">
             <a:extLst>
               <a:ext uri="{FF2B5EF4-FFF2-40B4-BE49-F238E27FC236}">
-                <a16:creationId xmlns:a16="http://schemas.microsoft.com/office/drawing/2014/main" id="{668E4BA7-A44F-4451-C2CC-A64D0992A332}"/>
+                <a16:creationId xmlns:a16="http://schemas.microsoft.com/office/drawing/2014/main" id="{FEBD293C-90DE-DD6D-FE2F-477168D68F96}"/>
               </a:ext>
             </a:extLst>
           </p:cNvPr>
@@ -6499,50 +6532,71 @@
           <a:p>
             <a:r>
               <a:rPr lang="en-IN" dirty="0"/>
-              <a:t> Sorting : sorted()</a:t>
-            </a:r>
-          </a:p>
-          <a:p>
-            <a:r>
-              <a:rPr lang="en-IN" dirty="0"/>
-              <a:t> Maximum : max()</a:t>
-            </a:r>
-          </a:p>
-          <a:p>
-            <a:r>
-              <a:rPr lang="en-IN" dirty="0"/>
-              <a:t> Minimum : min()</a:t>
-            </a:r>
-          </a:p>
-          <a:p>
-            <a:r>
-              <a:rPr lang="en-IN" dirty="0"/>
-              <a:t> Filtering : filter()</a:t>
-            </a:r>
-          </a:p>
-          <a:p>
-            <a:r>
-              <a:rPr lang="en-IN" dirty="0"/>
-              <a:t> Mapping : map()</a:t>
-            </a:r>
-          </a:p>
-          <a:p>
-            <a:r>
-              <a:rPr lang="en-IN" dirty="0"/>
-              <a:t> Zip : zip()</a:t>
-            </a:r>
-          </a:p>
-          <a:p>
-            <a:r>
-              <a:rPr lang="en-IN" dirty="0"/>
-              <a:t> All-Filtering : all()</a:t>
-            </a:r>
-          </a:p>
-          <a:p>
-            <a:r>
-              <a:rPr lang="en-IN" dirty="0"/>
-              <a:t> Any-Filtering : any()</a:t>
-            </a:r>
+              <a:t> 2 types:</a:t>
+            </a:r>
+          </a:p>
+          <a:p>
+            <a:pPr lvl="1"/>
+            <a:r>
+              <a:rPr lang="en-IN" dirty="0"/>
+              <a:t> Using Format().</a:t>
+            </a:r>
+          </a:p>
+          <a:p>
+            <a:pPr lvl="1"/>
+            <a:r>
+              <a:rPr lang="en-IN" dirty="0"/>
+              <a:t> f-strings.</a:t>
+            </a:r>
+          </a:p>
+          <a:p>
+            <a:r>
+              <a:rPr lang="en-IN" dirty="0"/>
+              <a:t> Allows formatting directly inside a string.</a:t>
+            </a:r>
+          </a:p>
+          <a:p>
+            <a:r>
+              <a:rPr lang="en-IN" dirty="0"/>
+              <a:t> </a:t>
+            </a:r>
+            <a:r>
+              <a:rPr lang="en-IN" b="1" dirty="0"/>
+              <a:t>Examples : </a:t>
+            </a:r>
+          </a:p>
+          <a:p>
+            <a:pPr lvl="1"/>
+            <a:r>
+              <a:rPr lang="en-IN" b="1" dirty="0"/>
+              <a:t> format() : </a:t>
+            </a:r>
+            <a:r>
+              <a:rPr lang="en-IN" dirty="0"/>
+              <a:t>"Name: {name}, Age: {age}".format(name="John", age=25)</a:t>
+            </a:r>
+          </a:p>
+          <a:p>
+            <a:pPr lvl="1"/>
+            <a:r>
+              <a:rPr lang="en-IN" b="1" dirty="0"/>
+              <a:t> f-strings : </a:t>
+            </a:r>
+            <a:r>
+              <a:rPr lang="en-IN" dirty="0"/>
+              <a:t>f’{2:b}’</a:t>
+            </a:r>
+          </a:p>
+          <a:p>
+            <a:r>
+              <a:rPr lang="en-IN" b="1" dirty="0"/>
+              <a:t> f-String usages : </a:t>
+            </a:r>
+            <a:r>
+              <a:rPr lang="en-IN" dirty="0"/>
+              <a:t>Number Formatting ,zero padding , thousand separator , percentage , alignment.</a:t>
+            </a:r>
+            <a:endParaRPr lang="en-IN" b="1" dirty="0"/>
           </a:p>
         </p:txBody>
       </p:sp>
@@ -6551,7 +6605,7 @@
           <p:cNvPr id="4" name="Footer Placeholder 3">
             <a:extLst>
               <a:ext uri="{FF2B5EF4-FFF2-40B4-BE49-F238E27FC236}">
-                <a16:creationId xmlns:a16="http://schemas.microsoft.com/office/drawing/2014/main" id="{A1ED2971-6123-D0EB-8C04-2F30F8E81BFE}"/>
+                <a16:creationId xmlns:a16="http://schemas.microsoft.com/office/drawing/2014/main" id="{15CDCE1E-D23F-7EB6-AB12-FCD18C2D14CB}"/>
               </a:ext>
             </a:extLst>
           </p:cNvPr>
@@ -6580,7 +6634,7 @@
           <p:cNvPr id="5" name="Slide Number Placeholder 4">
             <a:extLst>
               <a:ext uri="{FF2B5EF4-FFF2-40B4-BE49-F238E27FC236}">
-                <a16:creationId xmlns:a16="http://schemas.microsoft.com/office/drawing/2014/main" id="{23D979BA-C9A0-AFAA-B62A-973379D64ECB}"/>
+                <a16:creationId xmlns:a16="http://schemas.microsoft.com/office/drawing/2014/main" id="{563064CC-EA70-EDEF-9E04-1CA92CE3D6D4}"/>
               </a:ext>
             </a:extLst>
           </p:cNvPr>
@@ -6607,7 +6661,7 @@
     </p:spTree>
     <p:extLst>
       <p:ext uri="{BB962C8B-B14F-4D97-AF65-F5344CB8AC3E}">
-        <p14:creationId xmlns:p14="http://schemas.microsoft.com/office/powerpoint/2010/main" val="1755475911"/>
+        <p14:creationId xmlns:p14="http://schemas.microsoft.com/office/powerpoint/2010/main" val="1572786888"/>
       </p:ext>
     </p:extLst>
   </p:cSld>
@@ -6639,7 +6693,7 @@
           <p:cNvPr id="2" name="Title 1">
             <a:extLst>
               <a:ext uri="{FF2B5EF4-FFF2-40B4-BE49-F238E27FC236}">
-                <a16:creationId xmlns:a16="http://schemas.microsoft.com/office/drawing/2014/main" id="{5CA56418-8A9A-5805-BCBB-4959E5ABF278}"/>
+                <a16:creationId xmlns:a16="http://schemas.microsoft.com/office/drawing/2014/main" id="{368B6DED-16D0-50B6-ACB8-D304DC9ECB97}"/>
               </a:ext>
             </a:extLst>
           </p:cNvPr>
@@ -6657,7 +6711,7 @@
           <a:p>
             <a:r>
               <a:rPr lang="en-IN" dirty="0"/>
-              <a:t>Collections</a:t>
+              <a:t>Built-In Functions</a:t>
             </a:r>
           </a:p>
         </p:txBody>
@@ -6667,7 +6721,7 @@
           <p:cNvPr id="3" name="Content Placeholder 2">
             <a:extLst>
               <a:ext uri="{FF2B5EF4-FFF2-40B4-BE49-F238E27FC236}">
-                <a16:creationId xmlns:a16="http://schemas.microsoft.com/office/drawing/2014/main" id="{03DD4096-0D2C-E2BF-FF90-6117481C3C05}"/>
+                <a16:creationId xmlns:a16="http://schemas.microsoft.com/office/drawing/2014/main" id="{668E4BA7-A44F-4451-C2CC-A64D0992A332}"/>
               </a:ext>
             </a:extLst>
           </p:cNvPr>
@@ -6685,39 +6739,49 @@
           <a:p>
             <a:r>
               <a:rPr lang="en-IN" dirty="0"/>
-              <a:t> </a:t>
-            </a:r>
-            <a:r>
-              <a:rPr lang="en-IN" b="1" dirty="0"/>
-              <a:t>Counter : </a:t>
-            </a:r>
-            <a:r>
-              <a:rPr lang="en-IN" dirty="0"/>
-              <a:t>returns frequency as a dictionary.</a:t>
-            </a:r>
-          </a:p>
-          <a:p>
-            <a:r>
-              <a:rPr lang="en-IN" b="1" dirty="0"/>
-              <a:t> </a:t>
-            </a:r>
-            <a:r>
-              <a:rPr lang="en-IN" b="1" dirty="0" err="1"/>
-              <a:t>defaultdict</a:t>
-            </a:r>
-            <a:r>
-              <a:rPr lang="en-IN" b="1" dirty="0"/>
-              <a:t> : </a:t>
-            </a:r>
-            <a:r>
-              <a:rPr lang="en-IN" dirty="0"/>
-              <a:t>dictionary with default key as 0.</a:t>
-            </a:r>
-          </a:p>
-          <a:p>
-            <a:r>
-              <a:rPr lang="en-IN" b="1" dirty="0"/>
-              <a:t> </a:t>
+              <a:t> Sorting : sorted()</a:t>
+            </a:r>
+          </a:p>
+          <a:p>
+            <a:r>
+              <a:rPr lang="en-IN" dirty="0"/>
+              <a:t> Maximum : max()</a:t>
+            </a:r>
+          </a:p>
+          <a:p>
+            <a:r>
+              <a:rPr lang="en-IN" dirty="0"/>
+              <a:t> Minimum : min()</a:t>
+            </a:r>
+          </a:p>
+          <a:p>
+            <a:r>
+              <a:rPr lang="en-IN" dirty="0"/>
+              <a:t> Filtering : filter()</a:t>
+            </a:r>
+          </a:p>
+          <a:p>
+            <a:r>
+              <a:rPr lang="en-IN" dirty="0"/>
+              <a:t> Mapping : map()</a:t>
+            </a:r>
+          </a:p>
+          <a:p>
+            <a:r>
+              <a:rPr lang="en-IN" dirty="0"/>
+              <a:t> Zip : zip()</a:t>
+            </a:r>
+          </a:p>
+          <a:p>
+            <a:r>
+              <a:rPr lang="en-IN" dirty="0"/>
+              <a:t> All-Filtering : all()</a:t>
+            </a:r>
+          </a:p>
+          <a:p>
+            <a:r>
+              <a:rPr lang="en-IN" dirty="0"/>
+              <a:t> Any-Filtering : any()</a:t>
             </a:r>
           </a:p>
         </p:txBody>
@@ -6727,7 +6791,7 @@
           <p:cNvPr id="4" name="Footer Placeholder 3">
             <a:extLst>
               <a:ext uri="{FF2B5EF4-FFF2-40B4-BE49-F238E27FC236}">
-                <a16:creationId xmlns:a16="http://schemas.microsoft.com/office/drawing/2014/main" id="{7551125C-0612-0BB6-4524-77CDC89E331C}"/>
+                <a16:creationId xmlns:a16="http://schemas.microsoft.com/office/drawing/2014/main" id="{A1ED2971-6123-D0EB-8C04-2F30F8E81BFE}"/>
               </a:ext>
             </a:extLst>
           </p:cNvPr>
@@ -6756,7 +6820,7 @@
           <p:cNvPr id="5" name="Slide Number Placeholder 4">
             <a:extLst>
               <a:ext uri="{FF2B5EF4-FFF2-40B4-BE49-F238E27FC236}">
-                <a16:creationId xmlns:a16="http://schemas.microsoft.com/office/drawing/2014/main" id="{31F5E781-B492-4D2E-A425-D3367CBF888C}"/>
+                <a16:creationId xmlns:a16="http://schemas.microsoft.com/office/drawing/2014/main" id="{23D979BA-C9A0-AFAA-B62A-973379D64ECB}"/>
               </a:ext>
             </a:extLst>
           </p:cNvPr>
@@ -6783,7 +6847,7 @@
     </p:spTree>
     <p:extLst>
       <p:ext uri="{BB962C8B-B14F-4D97-AF65-F5344CB8AC3E}">
-        <p14:creationId xmlns:p14="http://schemas.microsoft.com/office/powerpoint/2010/main" val="2843299797"/>
+        <p14:creationId xmlns:p14="http://schemas.microsoft.com/office/powerpoint/2010/main" val="1755475911"/>
       </p:ext>
     </p:extLst>
   </p:cSld>
@@ -6815,7 +6879,7 @@
           <p:cNvPr id="2" name="Title 1">
             <a:extLst>
               <a:ext uri="{FF2B5EF4-FFF2-40B4-BE49-F238E27FC236}">
-                <a16:creationId xmlns:a16="http://schemas.microsoft.com/office/drawing/2014/main" id="{D7C7727E-BA08-9FFE-B2E7-811A03FB4BC7}"/>
+                <a16:creationId xmlns:a16="http://schemas.microsoft.com/office/drawing/2014/main" id="{5B4EE579-3042-DE43-FD11-D93F7BFDF048}"/>
               </a:ext>
             </a:extLst>
           </p:cNvPr>
@@ -6833,7 +6897,7 @@
           <a:p>
             <a:r>
               <a:rPr lang="en-GB" dirty="0"/>
-              <a:t>Formatting Strings</a:t>
+              <a:t>Custom Functions</a:t>
             </a:r>
             <a:endParaRPr lang="en-IN" dirty="0"/>
           </a:p>
@@ -6844,7 +6908,7 @@
           <p:cNvPr id="3" name="Content Placeholder 2">
             <a:extLst>
               <a:ext uri="{FF2B5EF4-FFF2-40B4-BE49-F238E27FC236}">
-                <a16:creationId xmlns:a16="http://schemas.microsoft.com/office/drawing/2014/main" id="{FEBD293C-90DE-DD6D-FE2F-477168D68F96}"/>
+                <a16:creationId xmlns:a16="http://schemas.microsoft.com/office/drawing/2014/main" id="{D8341C3D-D3B8-288E-250F-8BB47531DF72}"/>
               </a:ext>
             </a:extLst>
           </p:cNvPr>
@@ -6860,7 +6924,64 @@
           <a:bodyPr/>
           <a:lstStyle/>
           <a:p>
-            <a:endParaRPr lang="en-IN"/>
+            <a:r>
+              <a:rPr lang="en-GB" dirty="0"/>
+              <a:t> Defined using the keyword </a:t>
+            </a:r>
+            <a:r>
+              <a:rPr lang="en-GB" b="1" dirty="0"/>
+              <a:t>def</a:t>
+            </a:r>
+            <a:r>
+              <a:rPr lang="en-GB" dirty="0"/>
+              <a:t> . </a:t>
+            </a:r>
+          </a:p>
+          <a:p>
+            <a:r>
+              <a:rPr lang="en-GB" b="1" dirty="0"/>
+              <a:t> Syntax : </a:t>
+            </a:r>
+            <a:r>
+              <a:rPr lang="en-GB" dirty="0"/>
+              <a:t>def </a:t>
+            </a:r>
+            <a:r>
+              <a:rPr lang="en-GB" dirty="0" err="1"/>
+              <a:t>function_name</a:t>
+            </a:r>
+            <a:r>
+              <a:rPr lang="en-GB" dirty="0"/>
+              <a:t>():</a:t>
+            </a:r>
+          </a:p>
+          <a:p>
+            <a:r>
+              <a:rPr lang="en-GB" b="1" dirty="0"/>
+              <a:t> </a:t>
+            </a:r>
+            <a:r>
+              <a:rPr lang="en-GB" dirty="0"/>
+              <a:t>each functions may or may not have return type .</a:t>
+            </a:r>
+          </a:p>
+          <a:p>
+            <a:r>
+              <a:rPr lang="en-GB" dirty="0"/>
+              <a:t> function call – </a:t>
+            </a:r>
+            <a:r>
+              <a:rPr lang="en-GB" dirty="0" err="1"/>
+              <a:t>function_name</a:t>
+            </a:r>
+            <a:r>
+              <a:rPr lang="en-GB" dirty="0"/>
+              <a:t>() </a:t>
+            </a:r>
+            <a:endParaRPr lang="en-GB" b="1" dirty="0"/>
+          </a:p>
+          <a:p>
+            <a:endParaRPr lang="en-IN" b="1" dirty="0"/>
           </a:p>
         </p:txBody>
       </p:sp>
@@ -6869,7 +6990,7 @@
           <p:cNvPr id="4" name="Footer Placeholder 3">
             <a:extLst>
               <a:ext uri="{FF2B5EF4-FFF2-40B4-BE49-F238E27FC236}">
-                <a16:creationId xmlns:a16="http://schemas.microsoft.com/office/drawing/2014/main" id="{15CDCE1E-D23F-7EB6-AB12-FCD18C2D14CB}"/>
+                <a16:creationId xmlns:a16="http://schemas.microsoft.com/office/drawing/2014/main" id="{E7AE428B-2B5A-54E8-56DD-D707BD14DD11}"/>
               </a:ext>
             </a:extLst>
           </p:cNvPr>
@@ -6898,7 +7019,7 @@
           <p:cNvPr id="5" name="Slide Number Placeholder 4">
             <a:extLst>
               <a:ext uri="{FF2B5EF4-FFF2-40B4-BE49-F238E27FC236}">
-                <a16:creationId xmlns:a16="http://schemas.microsoft.com/office/drawing/2014/main" id="{563064CC-EA70-EDEF-9E04-1CA92CE3D6D4}"/>
+                <a16:creationId xmlns:a16="http://schemas.microsoft.com/office/drawing/2014/main" id="{83475F66-2B0A-E5D8-323B-C4905E62A4AB}"/>
               </a:ext>
             </a:extLst>
           </p:cNvPr>
@@ -6925,7 +7046,7 @@
     </p:spTree>
     <p:extLst>
       <p:ext uri="{BB962C8B-B14F-4D97-AF65-F5344CB8AC3E}">
-        <p14:creationId xmlns:p14="http://schemas.microsoft.com/office/powerpoint/2010/main" val="1572786888"/>
+        <p14:creationId xmlns:p14="http://schemas.microsoft.com/office/powerpoint/2010/main" val="1659146117"/>
       </p:ext>
     </p:extLst>
   </p:cSld>
@@ -7210,7 +7331,7 @@
           <p:cNvPr id="2" name="Title 1">
             <a:extLst>
               <a:ext uri="{FF2B5EF4-FFF2-40B4-BE49-F238E27FC236}">
-                <a16:creationId xmlns:a16="http://schemas.microsoft.com/office/drawing/2014/main" id="{7907DEEF-0FBD-20D9-2965-3ED3E721BD53}"/>
+                <a16:creationId xmlns:a16="http://schemas.microsoft.com/office/drawing/2014/main" id="{AC33EE2A-E291-6B6C-4692-69F438D2D122}"/>
               </a:ext>
             </a:extLst>
           </p:cNvPr>
@@ -7228,7 +7349,7 @@
           <a:p>
             <a:r>
               <a:rPr lang="en-GB" dirty="0"/>
-              <a:t>MYSQL Connection</a:t>
+              <a:t>Exception Handling</a:t>
             </a:r>
             <a:endParaRPr lang="en-IN" dirty="0"/>
           </a:p>
@@ -7239,7 +7360,7 @@
           <p:cNvPr id="3" name="Content Placeholder 2">
             <a:extLst>
               <a:ext uri="{FF2B5EF4-FFF2-40B4-BE49-F238E27FC236}">
-                <a16:creationId xmlns:a16="http://schemas.microsoft.com/office/drawing/2014/main" id="{BD381BC6-08E5-488F-AD25-3B559783886A}"/>
+                <a16:creationId xmlns:a16="http://schemas.microsoft.com/office/drawing/2014/main" id="{20DD8D14-6237-1982-4EB8-681E3F06B371}"/>
               </a:ext>
             </a:extLst>
           </p:cNvPr>
@@ -7255,7 +7376,46 @@
           <a:bodyPr/>
           <a:lstStyle/>
           <a:p>
-            <a:endParaRPr lang="en-IN"/>
+            <a:r>
+              <a:rPr lang="en-GB" dirty="0"/>
+              <a:t> functions : </a:t>
+            </a:r>
+          </a:p>
+          <a:p>
+            <a:pPr lvl="1"/>
+            <a:r>
+              <a:rPr lang="en-GB" dirty="0"/>
+              <a:t> try</a:t>
+            </a:r>
+          </a:p>
+          <a:p>
+            <a:pPr lvl="1"/>
+            <a:r>
+              <a:rPr lang="en-GB" dirty="0"/>
+              <a:t> except</a:t>
+            </a:r>
+          </a:p>
+          <a:p>
+            <a:pPr lvl="1"/>
+            <a:r>
+              <a:rPr lang="en-GB" dirty="0"/>
+              <a:t> else</a:t>
+            </a:r>
+          </a:p>
+          <a:p>
+            <a:pPr lvl="1"/>
+            <a:r>
+              <a:rPr lang="en-GB" dirty="0"/>
+              <a:t> finally</a:t>
+            </a:r>
+            <a:endParaRPr lang="en-IN" dirty="0"/>
+          </a:p>
+          <a:p>
+            <a:r>
+              <a:rPr lang="en-IN" dirty="0"/>
+              <a:t> </a:t>
+            </a:r>
+            <a:endParaRPr lang="en-GB" dirty="0"/>
           </a:p>
         </p:txBody>
       </p:sp>
@@ -7264,7 +7424,7 @@
           <p:cNvPr id="4" name="Footer Placeholder 3">
             <a:extLst>
               <a:ext uri="{FF2B5EF4-FFF2-40B4-BE49-F238E27FC236}">
-                <a16:creationId xmlns:a16="http://schemas.microsoft.com/office/drawing/2014/main" id="{F48C9E58-D3F1-09C7-FE6C-48D612C2329F}"/>
+                <a16:creationId xmlns:a16="http://schemas.microsoft.com/office/drawing/2014/main" id="{72BD80CB-A028-534E-3E57-441FF63C0AAD}"/>
               </a:ext>
             </a:extLst>
           </p:cNvPr>
@@ -7293,7 +7453,7 @@
           <p:cNvPr id="5" name="Slide Number Placeholder 4">
             <a:extLst>
               <a:ext uri="{FF2B5EF4-FFF2-40B4-BE49-F238E27FC236}">
-                <a16:creationId xmlns:a16="http://schemas.microsoft.com/office/drawing/2014/main" id="{9208607B-2CC6-16D0-6988-4DB6A51DD176}"/>
+                <a16:creationId xmlns:a16="http://schemas.microsoft.com/office/drawing/2014/main" id="{0E5822AE-D486-BA76-0E08-1D718A0A6BE3}"/>
               </a:ext>
             </a:extLst>
           </p:cNvPr>
@@ -7320,7 +7480,7 @@
     </p:spTree>
     <p:extLst>
       <p:ext uri="{BB962C8B-B14F-4D97-AF65-F5344CB8AC3E}">
-        <p14:creationId xmlns:p14="http://schemas.microsoft.com/office/powerpoint/2010/main" val="2713769145"/>
+        <p14:creationId xmlns:p14="http://schemas.microsoft.com/office/powerpoint/2010/main" val="1480239433"/>
       </p:ext>
     </p:extLst>
   </p:cSld>
@@ -7352,7 +7512,7 @@
           <p:cNvPr id="2" name="Title 1">
             <a:extLst>
               <a:ext uri="{FF2B5EF4-FFF2-40B4-BE49-F238E27FC236}">
-                <a16:creationId xmlns:a16="http://schemas.microsoft.com/office/drawing/2014/main" id="{5B4EE579-3042-DE43-FD11-D93F7BFDF048}"/>
+                <a16:creationId xmlns:a16="http://schemas.microsoft.com/office/drawing/2014/main" id="{4E910C82-F4D6-8BAD-4B49-32DCFF98126F}"/>
               </a:ext>
             </a:extLst>
           </p:cNvPr>
@@ -7370,7 +7530,7 @@
           <a:p>
             <a:r>
               <a:rPr lang="en-GB" dirty="0"/>
-              <a:t>Functions</a:t>
+              <a:t>Virtual Environment</a:t>
             </a:r>
             <a:endParaRPr lang="en-IN" dirty="0"/>
           </a:p>
@@ -7381,7 +7541,7 @@
           <p:cNvPr id="3" name="Content Placeholder 2">
             <a:extLst>
               <a:ext uri="{FF2B5EF4-FFF2-40B4-BE49-F238E27FC236}">
-                <a16:creationId xmlns:a16="http://schemas.microsoft.com/office/drawing/2014/main" id="{D8341C3D-D3B8-288E-250F-8BB47531DF72}"/>
+                <a16:creationId xmlns:a16="http://schemas.microsoft.com/office/drawing/2014/main" id="{0543EA3C-E07C-5917-5EBD-2B2AB33F4B98}"/>
               </a:ext>
             </a:extLst>
           </p:cNvPr>
@@ -7397,7 +7557,138 @@
           <a:bodyPr/>
           <a:lstStyle/>
           <a:p>
-            <a:endParaRPr lang="en-IN"/>
+            <a:r>
+              <a:rPr lang="en-IN" dirty="0"/>
+              <a:t> Python Main Environment Types : </a:t>
+            </a:r>
+          </a:p>
+          <a:p>
+            <a:pPr lvl="1"/>
+            <a:r>
+              <a:rPr lang="en-IN" dirty="0"/>
+              <a:t> Global Environment.</a:t>
+            </a:r>
+          </a:p>
+          <a:p>
+            <a:pPr lvl="1"/>
+            <a:r>
+              <a:rPr lang="en-IN" dirty="0"/>
+              <a:t> Virtual Environment.</a:t>
+            </a:r>
+          </a:p>
+          <a:p>
+            <a:r>
+              <a:rPr lang="en-IN" dirty="0"/>
+              <a:t> Why Virtual Environment?</a:t>
+            </a:r>
+          </a:p>
+          <a:p>
+            <a:pPr lvl="1"/>
+            <a:r>
+              <a:rPr lang="en-IN" dirty="0"/>
+              <a:t> </a:t>
+            </a:r>
+            <a:r>
+              <a:rPr lang="en-IN" dirty="0" err="1"/>
+              <a:t>numpy</a:t>
+            </a:r>
+            <a:r>
+              <a:rPr lang="en-IN" dirty="0"/>
+              <a:t> 0.0.1 already exists in global environment</a:t>
+            </a:r>
+          </a:p>
+          <a:p>
+            <a:pPr lvl="1"/>
+            <a:r>
+              <a:rPr lang="en-IN" dirty="0"/>
+              <a:t> project 1 : requires </a:t>
+            </a:r>
+            <a:r>
+              <a:rPr lang="en-IN" dirty="0" err="1"/>
+              <a:t>numpy</a:t>
+            </a:r>
+            <a:r>
+              <a:rPr lang="en-IN" dirty="0"/>
+              <a:t> 0.0.1</a:t>
+            </a:r>
+          </a:p>
+          <a:p>
+            <a:pPr lvl="1"/>
+            <a:r>
+              <a:rPr lang="en-IN" dirty="0"/>
+              <a:t> project 2 : requires </a:t>
+            </a:r>
+            <a:r>
+              <a:rPr lang="en-IN" dirty="0" err="1"/>
+              <a:t>numpy</a:t>
+            </a:r>
+            <a:r>
+              <a:rPr lang="en-IN" dirty="0"/>
+              <a:t> 0.1.1</a:t>
+            </a:r>
+          </a:p>
+          <a:p>
+            <a:pPr lvl="1"/>
+            <a:r>
+              <a:rPr lang="en-IN" dirty="0"/>
+              <a:t> changes version of this package will affect any one of the projects</a:t>
+            </a:r>
+          </a:p>
+          <a:p>
+            <a:pPr lvl="1"/>
+            <a:r>
+              <a:rPr lang="en-IN" dirty="0"/>
+              <a:t> to overcome those create project 2 in virtual environment</a:t>
+            </a:r>
+          </a:p>
+          <a:p>
+            <a:r>
+              <a:rPr lang="en-IN" dirty="0"/>
+              <a:t> </a:t>
+            </a:r>
+            <a:r>
+              <a:rPr lang="en-IN" b="1" dirty="0"/>
+              <a:t>create VE : </a:t>
+            </a:r>
+            <a:r>
+              <a:rPr lang="en-IN" dirty="0"/>
+              <a:t>python –m </a:t>
+            </a:r>
+            <a:r>
+              <a:rPr lang="en-IN" dirty="0" err="1"/>
+              <a:t>venv</a:t>
+            </a:r>
+            <a:r>
+              <a:rPr lang="en-IN" dirty="0"/>
+              <a:t> </a:t>
+            </a:r>
+            <a:r>
+              <a:rPr lang="en-IN" dirty="0" err="1"/>
+              <a:t>Vename</a:t>
+            </a:r>
+            <a:endParaRPr lang="en-IN" dirty="0"/>
+          </a:p>
+          <a:p>
+            <a:r>
+              <a:rPr lang="en-IN" dirty="0"/>
+              <a:t> Activation : In </a:t>
+            </a:r>
+            <a:r>
+              <a:rPr lang="en-IN" dirty="0" err="1"/>
+              <a:t>cmd</a:t>
+            </a:r>
+            <a:r>
+              <a:rPr lang="en-IN" dirty="0"/>
+              <a:t> change directory to scripts </a:t>
+            </a:r>
+            <a:r>
+              <a:rPr lang="en-IN"/>
+              <a:t>and enter </a:t>
+            </a:r>
+            <a:r>
+              <a:rPr lang="en-IN" dirty="0"/>
+              <a:t>activate</a:t>
+            </a:r>
           </a:p>
         </p:txBody>
       </p:sp>
@@ -7406,7 +7697,7 @@
           <p:cNvPr id="4" name="Footer Placeholder 3">
             <a:extLst>
               <a:ext uri="{FF2B5EF4-FFF2-40B4-BE49-F238E27FC236}">
-                <a16:creationId xmlns:a16="http://schemas.microsoft.com/office/drawing/2014/main" id="{E7AE428B-2B5A-54E8-56DD-D707BD14DD11}"/>
+                <a16:creationId xmlns:a16="http://schemas.microsoft.com/office/drawing/2014/main" id="{43D502F0-E14F-C473-977F-40A61FF19039}"/>
               </a:ext>
             </a:extLst>
           </p:cNvPr>
@@ -7435,7 +7726,7 @@
           <p:cNvPr id="5" name="Slide Number Placeholder 4">
             <a:extLst>
               <a:ext uri="{FF2B5EF4-FFF2-40B4-BE49-F238E27FC236}">
-                <a16:creationId xmlns:a16="http://schemas.microsoft.com/office/drawing/2014/main" id="{83475F66-2B0A-E5D8-323B-C4905E62A4AB}"/>
+                <a16:creationId xmlns:a16="http://schemas.microsoft.com/office/drawing/2014/main" id="{6706342E-FF86-F190-355B-93898D5F2A83}"/>
               </a:ext>
             </a:extLst>
           </p:cNvPr>
@@ -7462,7 +7753,7 @@
     </p:spTree>
     <p:extLst>
       <p:ext uri="{BB962C8B-B14F-4D97-AF65-F5344CB8AC3E}">
-        <p14:creationId xmlns:p14="http://schemas.microsoft.com/office/powerpoint/2010/main" val="1659146117"/>
+        <p14:creationId xmlns:p14="http://schemas.microsoft.com/office/powerpoint/2010/main" val="2155345922"/>
       </p:ext>
     </p:extLst>
   </p:cSld>
@@ -7494,7 +7785,7 @@
           <p:cNvPr id="2" name="Title 1">
             <a:extLst>
               <a:ext uri="{FF2B5EF4-FFF2-40B4-BE49-F238E27FC236}">
-                <a16:creationId xmlns:a16="http://schemas.microsoft.com/office/drawing/2014/main" id="{AC33EE2A-E291-6B6C-4692-69F438D2D122}"/>
+                <a16:creationId xmlns:a16="http://schemas.microsoft.com/office/drawing/2014/main" id="{1FCB99E7-F51A-5F8F-0A2B-A1B4E791D20E}"/>
               </a:ext>
             </a:extLst>
           </p:cNvPr>
@@ -7511,60 +7802,119 @@
           <a:lstStyle/>
           <a:p>
             <a:r>
+              <a:rPr lang="en-IN" dirty="0"/>
+              <a:t>Modules &amp; Packages</a:t>
+            </a:r>
+          </a:p>
+        </p:txBody>
+      </p:sp>
+      <p:sp>
+        <p:nvSpPr>
+          <p:cNvPr id="3" name="Content Placeholder 2">
+            <a:extLst>
+              <a:ext uri="{FF2B5EF4-FFF2-40B4-BE49-F238E27FC236}">
+                <a16:creationId xmlns:a16="http://schemas.microsoft.com/office/drawing/2014/main" id="{7409316D-8C26-7210-C0E1-CFFF704126C4}"/>
+              </a:ext>
+            </a:extLst>
+          </p:cNvPr>
+          <p:cNvSpPr>
+            <a:spLocks noGrp="1"/>
+          </p:cNvSpPr>
+          <p:nvPr>
+            <p:ph idx="1"/>
+          </p:nvPr>
+        </p:nvSpPr>
+        <p:spPr/>
+        <p:txBody>
+          <a:bodyPr/>
+          <a:lstStyle/>
+          <a:p>
+            <a:r>
               <a:rPr lang="en-GB" dirty="0"/>
-              <a:t>Exception Handling</a:t>
-            </a:r>
-            <a:endParaRPr lang="en-IN" dirty="0"/>
-          </a:p>
-        </p:txBody>
-      </p:sp>
-      <p:sp>
-        <p:nvSpPr>
-          <p:cNvPr id="3" name="Content Placeholder 2">
-            <a:extLst>
-              <a:ext uri="{FF2B5EF4-FFF2-40B4-BE49-F238E27FC236}">
-                <a16:creationId xmlns:a16="http://schemas.microsoft.com/office/drawing/2014/main" id="{20DD8D14-6237-1982-4EB8-681E3F06B371}"/>
-              </a:ext>
-            </a:extLst>
-          </p:cNvPr>
-          <p:cNvSpPr>
-            <a:spLocks noGrp="1"/>
-          </p:cNvSpPr>
-          <p:nvPr>
-            <p:ph idx="1"/>
-          </p:nvPr>
-        </p:nvSpPr>
-        <p:spPr/>
-        <p:txBody>
-          <a:bodyPr/>
-          <a:lstStyle/>
+              <a:t> 3 Types of Library Packages &amp; Modules : </a:t>
+            </a:r>
+          </a:p>
+          <a:p>
+            <a:pPr lvl="1"/>
+            <a:r>
+              <a:rPr lang="en-GB" dirty="0"/>
+              <a:t> Built-In.</a:t>
+            </a:r>
+          </a:p>
+          <a:p>
+            <a:pPr lvl="1"/>
+            <a:r>
+              <a:rPr lang="en-GB" dirty="0"/>
+              <a:t> User-Defined.</a:t>
+            </a:r>
+          </a:p>
+          <a:p>
+            <a:pPr lvl="1"/>
+            <a:r>
+              <a:rPr lang="en-GB" dirty="0"/>
+              <a:t> External.</a:t>
+            </a:r>
+          </a:p>
           <a:p>
             <a:r>
               <a:rPr lang="en-GB" dirty="0"/>
               <a:t> </a:t>
             </a:r>
-          </a:p>
-          <a:p>
-            <a:pPr lvl="1"/>
+            <a:r>
+              <a:rPr lang="en-GB" b="1" dirty="0"/>
+              <a:t>Built-In : </a:t>
+            </a:r>
             <a:r>
               <a:rPr lang="en-GB" dirty="0"/>
-              <a:t> try</a:t>
-            </a:r>
-          </a:p>
-          <a:p>
-            <a:pPr lvl="1"/>
+              <a:t>pre-build python modules (</a:t>
+            </a:r>
+            <a:r>
+              <a:rPr lang="en-GB" dirty="0" err="1"/>
+              <a:t>os</a:t>
+            </a:r>
             <a:r>
               <a:rPr lang="en-GB" dirty="0"/>
-              <a:t> except</a:t>
-            </a:r>
-          </a:p>
-          <a:p>
-            <a:pPr lvl="1"/>
+              <a:t> , datetime , math , random)</a:t>
+            </a:r>
+            <a:endParaRPr lang="en-GB" b="1" dirty="0"/>
+          </a:p>
+          <a:p>
             <a:r>
               <a:rPr lang="en-GB" dirty="0"/>
               <a:t> </a:t>
             </a:r>
-            <a:endParaRPr lang="en-IN" dirty="0"/>
+            <a:r>
+              <a:rPr lang="en-GB" b="1" dirty="0"/>
+              <a:t>User-Defined : </a:t>
+            </a:r>
+            <a:r>
+              <a:rPr lang="en-IN" dirty="0"/>
+              <a:t>custom modules created by developers </a:t>
+            </a:r>
+            <a:endParaRPr lang="en-GB" dirty="0"/>
+          </a:p>
+          <a:p>
+            <a:r>
+              <a:rPr lang="en-GB" dirty="0"/>
+              <a:t> </a:t>
+            </a:r>
+            <a:r>
+              <a:rPr lang="en-GB" b="1" dirty="0"/>
+              <a:t>External : </a:t>
+            </a:r>
+            <a:r>
+              <a:rPr lang="en-IN" dirty="0"/>
+              <a:t>built by independent developers and open-source community . These modules can be installed through the </a:t>
+            </a:r>
+            <a:r>
+              <a:rPr lang="en-IN" b="1" dirty="0"/>
+              <a:t>command : pip install </a:t>
+            </a:r>
+            <a:r>
+              <a:rPr lang="en-IN" dirty="0"/>
+              <a:t>module</a:t>
+            </a:r>
+            <a:endParaRPr lang="en-GB" b="1" dirty="0"/>
           </a:p>
         </p:txBody>
       </p:sp>
@@ -7573,7 +7923,7 @@
           <p:cNvPr id="4" name="Footer Placeholder 3">
             <a:extLst>
               <a:ext uri="{FF2B5EF4-FFF2-40B4-BE49-F238E27FC236}">
-                <a16:creationId xmlns:a16="http://schemas.microsoft.com/office/drawing/2014/main" id="{72BD80CB-A028-534E-3E57-441FF63C0AAD}"/>
+                <a16:creationId xmlns:a16="http://schemas.microsoft.com/office/drawing/2014/main" id="{284EDD6F-94F9-AD66-7AD0-71560E0948EC}"/>
               </a:ext>
             </a:extLst>
           </p:cNvPr>
@@ -7602,7 +7952,7 @@
           <p:cNvPr id="5" name="Slide Number Placeholder 4">
             <a:extLst>
               <a:ext uri="{FF2B5EF4-FFF2-40B4-BE49-F238E27FC236}">
-                <a16:creationId xmlns:a16="http://schemas.microsoft.com/office/drawing/2014/main" id="{0E5822AE-D486-BA76-0E08-1D718A0A6BE3}"/>
+                <a16:creationId xmlns:a16="http://schemas.microsoft.com/office/drawing/2014/main" id="{A30DD123-3895-9857-EA37-0C3847200B56}"/>
               </a:ext>
             </a:extLst>
           </p:cNvPr>
@@ -7629,7 +7979,7 @@
     </p:spTree>
     <p:extLst>
       <p:ext uri="{BB962C8B-B14F-4D97-AF65-F5344CB8AC3E}">
-        <p14:creationId xmlns:p14="http://schemas.microsoft.com/office/powerpoint/2010/main" val="1480239433"/>
+        <p14:creationId xmlns:p14="http://schemas.microsoft.com/office/powerpoint/2010/main" val="1780490698"/>
       </p:ext>
     </p:extLst>
   </p:cSld>
@@ -7661,7 +8011,7 @@
           <p:cNvPr id="2" name="Title 1">
             <a:extLst>
               <a:ext uri="{FF2B5EF4-FFF2-40B4-BE49-F238E27FC236}">
-                <a16:creationId xmlns:a16="http://schemas.microsoft.com/office/drawing/2014/main" id="{9E6DD218-3F31-33F2-8CDB-7DA5BBC005B5}"/>
+                <a16:creationId xmlns:a16="http://schemas.microsoft.com/office/drawing/2014/main" id="{5CA56418-8A9A-5805-BCBB-4959E5ABF278}"/>
               </a:ext>
             </a:extLst>
           </p:cNvPr>
@@ -7678,10 +8028,9 @@
           <a:lstStyle/>
           <a:p>
             <a:r>
-              <a:rPr lang="en-GB" dirty="0"/>
-              <a:t>Excel</a:t>
-            </a:r>
-            <a:endParaRPr lang="en-IN" dirty="0"/>
+              <a:rPr lang="en-IN" dirty="0"/>
+              <a:t>Collections</a:t>
+            </a:r>
           </a:p>
         </p:txBody>
       </p:sp>
@@ -7690,7 +8039,7 @@
           <p:cNvPr id="3" name="Content Placeholder 2">
             <a:extLst>
               <a:ext uri="{FF2B5EF4-FFF2-40B4-BE49-F238E27FC236}">
-                <a16:creationId xmlns:a16="http://schemas.microsoft.com/office/drawing/2014/main" id="{500E92CE-D89D-F2AE-C187-40E84467AA4A}"/>
+                <a16:creationId xmlns:a16="http://schemas.microsoft.com/office/drawing/2014/main" id="{03DD4096-0D2C-E2BF-FF90-6117481C3C05}"/>
               </a:ext>
             </a:extLst>
           </p:cNvPr>
@@ -7706,7 +8055,42 @@
           <a:bodyPr/>
           <a:lstStyle/>
           <a:p>
-            <a:endParaRPr lang="en-IN"/>
+            <a:r>
+              <a:rPr lang="en-IN" dirty="0"/>
+              <a:t> </a:t>
+            </a:r>
+            <a:r>
+              <a:rPr lang="en-IN" b="1" dirty="0"/>
+              <a:t>Counter : </a:t>
+            </a:r>
+            <a:r>
+              <a:rPr lang="en-IN" dirty="0"/>
+              <a:t>returns frequency as a dictionary.</a:t>
+            </a:r>
+          </a:p>
+          <a:p>
+            <a:r>
+              <a:rPr lang="en-IN" b="1" dirty="0"/>
+              <a:t> </a:t>
+            </a:r>
+            <a:r>
+              <a:rPr lang="en-IN" b="1" dirty="0" err="1"/>
+              <a:t>defaultdict</a:t>
+            </a:r>
+            <a:r>
+              <a:rPr lang="en-IN" b="1" dirty="0"/>
+              <a:t> : </a:t>
+            </a:r>
+            <a:r>
+              <a:rPr lang="en-IN" dirty="0"/>
+              <a:t>dictionary with default key as 0.</a:t>
+            </a:r>
+          </a:p>
+          <a:p>
+            <a:r>
+              <a:rPr lang="en-IN" b="1" dirty="0"/>
+              <a:t> </a:t>
+            </a:r>
           </a:p>
         </p:txBody>
       </p:sp>
@@ -7715,7 +8099,7 @@
           <p:cNvPr id="4" name="Footer Placeholder 3">
             <a:extLst>
               <a:ext uri="{FF2B5EF4-FFF2-40B4-BE49-F238E27FC236}">
-                <a16:creationId xmlns:a16="http://schemas.microsoft.com/office/drawing/2014/main" id="{55C92561-856D-7F47-3708-294C94D9D3BA}"/>
+                <a16:creationId xmlns:a16="http://schemas.microsoft.com/office/drawing/2014/main" id="{7551125C-0612-0BB6-4524-77CDC89E331C}"/>
               </a:ext>
             </a:extLst>
           </p:cNvPr>
@@ -7744,7 +8128,7 @@
           <p:cNvPr id="5" name="Slide Number Placeholder 4">
             <a:extLst>
               <a:ext uri="{FF2B5EF4-FFF2-40B4-BE49-F238E27FC236}">
-                <a16:creationId xmlns:a16="http://schemas.microsoft.com/office/drawing/2014/main" id="{5A544846-71AE-4EED-7C71-69CBD266AB5B}"/>
+                <a16:creationId xmlns:a16="http://schemas.microsoft.com/office/drawing/2014/main" id="{31F5E781-B492-4D2E-A425-D3367CBF888C}"/>
               </a:ext>
             </a:extLst>
           </p:cNvPr>
@@ -7771,7 +8155,7 @@
     </p:spTree>
     <p:extLst>
       <p:ext uri="{BB962C8B-B14F-4D97-AF65-F5344CB8AC3E}">
-        <p14:creationId xmlns:p14="http://schemas.microsoft.com/office/powerpoint/2010/main" val="1926792215"/>
+        <p14:creationId xmlns:p14="http://schemas.microsoft.com/office/powerpoint/2010/main" val="2843299797"/>
       </p:ext>
     </p:extLst>
   </p:cSld>
@@ -7803,7 +8187,7 @@
           <p:cNvPr id="2" name="Title 1">
             <a:extLst>
               <a:ext uri="{FF2B5EF4-FFF2-40B4-BE49-F238E27FC236}">
-                <a16:creationId xmlns:a16="http://schemas.microsoft.com/office/drawing/2014/main" id="{F0317199-3FE4-4011-E431-B733E11096CA}"/>
+                <a16:creationId xmlns:a16="http://schemas.microsoft.com/office/drawing/2014/main" id="{9FDFE934-FCD7-0FF7-3D48-FE377DC2C4BB}"/>
               </a:ext>
             </a:extLst>
           </p:cNvPr>
@@ -7821,7 +8205,7 @@
           <a:p>
             <a:r>
               <a:rPr lang="en-GB" dirty="0"/>
-              <a:t>PDF</a:t>
+              <a:t>Datetime</a:t>
             </a:r>
             <a:endParaRPr lang="en-IN" dirty="0"/>
           </a:p>
@@ -7832,7 +8216,7 @@
           <p:cNvPr id="3" name="Content Placeholder 2">
             <a:extLst>
               <a:ext uri="{FF2B5EF4-FFF2-40B4-BE49-F238E27FC236}">
-                <a16:creationId xmlns:a16="http://schemas.microsoft.com/office/drawing/2014/main" id="{3417A133-ACB9-E81D-EC4A-0A5A4CF5DEE0}"/>
+                <a16:creationId xmlns:a16="http://schemas.microsoft.com/office/drawing/2014/main" id="{39006957-BA22-F06D-3CB4-AD976E5ED1FC}"/>
               </a:ext>
             </a:extLst>
           </p:cNvPr>
@@ -7857,7 +8241,7 @@
           <p:cNvPr id="4" name="Footer Placeholder 3">
             <a:extLst>
               <a:ext uri="{FF2B5EF4-FFF2-40B4-BE49-F238E27FC236}">
-                <a16:creationId xmlns:a16="http://schemas.microsoft.com/office/drawing/2014/main" id="{06D2FE4E-A7CE-4D3B-42B3-8DD37D027516}"/>
+                <a16:creationId xmlns:a16="http://schemas.microsoft.com/office/drawing/2014/main" id="{723E5E67-40AC-20E1-815F-D843004BA175}"/>
               </a:ext>
             </a:extLst>
           </p:cNvPr>
@@ -7886,7 +8270,7 @@
           <p:cNvPr id="5" name="Slide Number Placeholder 4">
             <a:extLst>
               <a:ext uri="{FF2B5EF4-FFF2-40B4-BE49-F238E27FC236}">
-                <a16:creationId xmlns:a16="http://schemas.microsoft.com/office/drawing/2014/main" id="{CF0277D4-6825-FE55-E325-241E05EE90B4}"/>
+                <a16:creationId xmlns:a16="http://schemas.microsoft.com/office/drawing/2014/main" id="{C7832505-4646-07D5-87EB-4E8F6703AB14}"/>
               </a:ext>
             </a:extLst>
           </p:cNvPr>
@@ -7913,7 +8297,7 @@
     </p:spTree>
     <p:extLst>
       <p:ext uri="{BB962C8B-B14F-4D97-AF65-F5344CB8AC3E}">
-        <p14:creationId xmlns:p14="http://schemas.microsoft.com/office/powerpoint/2010/main" val="1572536975"/>
+        <p14:creationId xmlns:p14="http://schemas.microsoft.com/office/powerpoint/2010/main" val="682083692"/>
       </p:ext>
     </p:extLst>
   </p:cSld>
@@ -7945,7 +8329,7 @@
           <p:cNvPr id="2" name="Title 1">
             <a:extLst>
               <a:ext uri="{FF2B5EF4-FFF2-40B4-BE49-F238E27FC236}">
-                <a16:creationId xmlns:a16="http://schemas.microsoft.com/office/drawing/2014/main" id="{D70072C2-CAC4-C990-6527-C89C83DBC442}"/>
+                <a16:creationId xmlns:a16="http://schemas.microsoft.com/office/drawing/2014/main" id="{96366A88-CFBD-B97A-00EB-C635FE8A19F8}"/>
               </a:ext>
             </a:extLst>
           </p:cNvPr>
@@ -7963,7 +8347,7 @@
           <a:p>
             <a:r>
               <a:rPr lang="en-GB" dirty="0"/>
-              <a:t>Email</a:t>
+              <a:t>OS</a:t>
             </a:r>
             <a:endParaRPr lang="en-IN" dirty="0"/>
           </a:p>
@@ -7974,7 +8358,7 @@
           <p:cNvPr id="3" name="Content Placeholder 2">
             <a:extLst>
               <a:ext uri="{FF2B5EF4-FFF2-40B4-BE49-F238E27FC236}">
-                <a16:creationId xmlns:a16="http://schemas.microsoft.com/office/drawing/2014/main" id="{96D6ED05-9C2A-02BA-AAD4-D9D580B91181}"/>
+                <a16:creationId xmlns:a16="http://schemas.microsoft.com/office/drawing/2014/main" id="{E0C53D46-508B-CE03-C0C5-4A07BB8ECD8A}"/>
               </a:ext>
             </a:extLst>
           </p:cNvPr>
@@ -7999,7 +8383,7 @@
           <p:cNvPr id="4" name="Footer Placeholder 3">
             <a:extLst>
               <a:ext uri="{FF2B5EF4-FFF2-40B4-BE49-F238E27FC236}">
-                <a16:creationId xmlns:a16="http://schemas.microsoft.com/office/drawing/2014/main" id="{EC9EC30D-1289-FA18-7D84-4F3CF09AC37C}"/>
+                <a16:creationId xmlns:a16="http://schemas.microsoft.com/office/drawing/2014/main" id="{C8996E58-34C6-D144-C03C-FBE8CD89090D}"/>
               </a:ext>
             </a:extLst>
           </p:cNvPr>
@@ -8028,7 +8412,7 @@
           <p:cNvPr id="5" name="Slide Number Placeholder 4">
             <a:extLst>
               <a:ext uri="{FF2B5EF4-FFF2-40B4-BE49-F238E27FC236}">
-                <a16:creationId xmlns:a16="http://schemas.microsoft.com/office/drawing/2014/main" id="{B42736E2-8304-D2B5-5ADA-5F4CC1D080FA}"/>
+                <a16:creationId xmlns:a16="http://schemas.microsoft.com/office/drawing/2014/main" id="{A0B8147F-3551-F86D-E2DF-18461434347C}"/>
               </a:ext>
             </a:extLst>
           </p:cNvPr>
@@ -8055,7 +8439,7 @@
     </p:spTree>
     <p:extLst>
       <p:ext uri="{BB962C8B-B14F-4D97-AF65-F5344CB8AC3E}">
-        <p14:creationId xmlns:p14="http://schemas.microsoft.com/office/powerpoint/2010/main" val="479021944"/>
+        <p14:creationId xmlns:p14="http://schemas.microsoft.com/office/powerpoint/2010/main" val="609168797"/>
       </p:ext>
     </p:extLst>
   </p:cSld>
@@ -8087,7 +8471,7 @@
           <p:cNvPr id="2" name="Title 1">
             <a:extLst>
               <a:ext uri="{FF2B5EF4-FFF2-40B4-BE49-F238E27FC236}">
-                <a16:creationId xmlns:a16="http://schemas.microsoft.com/office/drawing/2014/main" id="{1FCB99E7-F51A-5F8F-0A2B-A1B4E791D20E}"/>
+                <a16:creationId xmlns:a16="http://schemas.microsoft.com/office/drawing/2014/main" id="{7907DEEF-0FBD-20D9-2965-3ED3E721BD53}"/>
               </a:ext>
             </a:extLst>
           </p:cNvPr>
@@ -8104,9 +8488,10 @@
           <a:lstStyle/>
           <a:p>
             <a:r>
-              <a:rPr lang="en-IN" dirty="0"/>
-              <a:t>Packages</a:t>
-            </a:r>
+              <a:rPr lang="en-GB" dirty="0"/>
+              <a:t>MYSQL Connection</a:t>
+            </a:r>
+            <a:endParaRPr lang="en-IN" dirty="0"/>
           </a:p>
         </p:txBody>
       </p:sp>
@@ -8115,7 +8500,7 @@
           <p:cNvPr id="3" name="Content Placeholder 2">
             <a:extLst>
               <a:ext uri="{FF2B5EF4-FFF2-40B4-BE49-F238E27FC236}">
-                <a16:creationId xmlns:a16="http://schemas.microsoft.com/office/drawing/2014/main" id="{7409316D-8C26-7210-C0E1-CFFF704126C4}"/>
+                <a16:creationId xmlns:a16="http://schemas.microsoft.com/office/drawing/2014/main" id="{BD381BC6-08E5-488F-AD25-3B559783886A}"/>
               </a:ext>
             </a:extLst>
           </p:cNvPr>
@@ -8131,7 +8516,27 @@
           <a:bodyPr/>
           <a:lstStyle/>
           <a:p>
-            <a:endParaRPr lang="en-IN"/>
+            <a:r>
+              <a:rPr lang="en-GB" dirty="0"/>
+              <a:t> </a:t>
+            </a:r>
+            <a:r>
+              <a:rPr lang="en-GB" b="1" dirty="0" err="1"/>
+              <a:t>cmd</a:t>
+            </a:r>
+            <a:r>
+              <a:rPr lang="en-GB" b="1" dirty="0"/>
+              <a:t> : pip install </a:t>
+            </a:r>
+            <a:r>
+              <a:rPr lang="en-GB" b="1" dirty="0" err="1"/>
+              <a:t>mysql</a:t>
+            </a:r>
+            <a:r>
+              <a:rPr lang="en-GB" b="1" dirty="0"/>
+              <a:t>-connector-python</a:t>
+            </a:r>
+            <a:endParaRPr lang="en-IN" dirty="0"/>
           </a:p>
         </p:txBody>
       </p:sp>
@@ -8140,7 +8545,7 @@
           <p:cNvPr id="4" name="Footer Placeholder 3">
             <a:extLst>
               <a:ext uri="{FF2B5EF4-FFF2-40B4-BE49-F238E27FC236}">
-                <a16:creationId xmlns:a16="http://schemas.microsoft.com/office/drawing/2014/main" id="{284EDD6F-94F9-AD66-7AD0-71560E0948EC}"/>
+                <a16:creationId xmlns:a16="http://schemas.microsoft.com/office/drawing/2014/main" id="{F48C9E58-D3F1-09C7-FE6C-48D612C2329F}"/>
               </a:ext>
             </a:extLst>
           </p:cNvPr>
@@ -8169,7 +8574,7 @@
           <p:cNvPr id="5" name="Slide Number Placeholder 4">
             <a:extLst>
               <a:ext uri="{FF2B5EF4-FFF2-40B4-BE49-F238E27FC236}">
-                <a16:creationId xmlns:a16="http://schemas.microsoft.com/office/drawing/2014/main" id="{A30DD123-3895-9857-EA37-0C3847200B56}"/>
+                <a16:creationId xmlns:a16="http://schemas.microsoft.com/office/drawing/2014/main" id="{9208607B-2CC6-16D0-6988-4DB6A51DD176}"/>
               </a:ext>
             </a:extLst>
           </p:cNvPr>
@@ -8196,7 +8601,7 @@
     </p:spTree>
     <p:extLst>
       <p:ext uri="{BB962C8B-B14F-4D97-AF65-F5344CB8AC3E}">
-        <p14:creationId xmlns:p14="http://schemas.microsoft.com/office/powerpoint/2010/main" val="1780490698"/>
+        <p14:creationId xmlns:p14="http://schemas.microsoft.com/office/powerpoint/2010/main" val="2713769145"/>
       </p:ext>
     </p:extLst>
   </p:cSld>
@@ -8228,7 +8633,7 @@
           <p:cNvPr id="2" name="Title 1">
             <a:extLst>
               <a:ext uri="{FF2B5EF4-FFF2-40B4-BE49-F238E27FC236}">
-                <a16:creationId xmlns:a16="http://schemas.microsoft.com/office/drawing/2014/main" id="{05537F52-D920-165C-539D-D4323D2D50DF}"/>
+                <a16:creationId xmlns:a16="http://schemas.microsoft.com/office/drawing/2014/main" id="{9E6DD218-3F31-33F2-8CDB-7DA5BBC005B5}"/>
               </a:ext>
             </a:extLst>
           </p:cNvPr>
@@ -8246,7 +8651,7 @@
           <a:p>
             <a:r>
               <a:rPr lang="en-GB" dirty="0"/>
-              <a:t>Custom Packages</a:t>
+              <a:t>Excel</a:t>
             </a:r>
             <a:endParaRPr lang="en-IN" dirty="0"/>
           </a:p>
@@ -8257,7 +8662,7 @@
           <p:cNvPr id="3" name="Content Placeholder 2">
             <a:extLst>
               <a:ext uri="{FF2B5EF4-FFF2-40B4-BE49-F238E27FC236}">
-                <a16:creationId xmlns:a16="http://schemas.microsoft.com/office/drawing/2014/main" id="{0AAE2362-0572-BFD5-F478-A0EF74AB9E1A}"/>
+                <a16:creationId xmlns:a16="http://schemas.microsoft.com/office/drawing/2014/main" id="{500E92CE-D89D-F2AE-C187-40E84467AA4A}"/>
               </a:ext>
             </a:extLst>
           </p:cNvPr>
@@ -8282,7 +8687,7 @@
           <p:cNvPr id="4" name="Footer Placeholder 3">
             <a:extLst>
               <a:ext uri="{FF2B5EF4-FFF2-40B4-BE49-F238E27FC236}">
-                <a16:creationId xmlns:a16="http://schemas.microsoft.com/office/drawing/2014/main" id="{DFE71CE4-9080-389F-EBAC-A28DAE84DAEE}"/>
+                <a16:creationId xmlns:a16="http://schemas.microsoft.com/office/drawing/2014/main" id="{55C92561-856D-7F47-3708-294C94D9D3BA}"/>
               </a:ext>
             </a:extLst>
           </p:cNvPr>
@@ -8311,7 +8716,7 @@
           <p:cNvPr id="5" name="Slide Number Placeholder 4">
             <a:extLst>
               <a:ext uri="{FF2B5EF4-FFF2-40B4-BE49-F238E27FC236}">
-                <a16:creationId xmlns:a16="http://schemas.microsoft.com/office/drawing/2014/main" id="{08D0C57D-0999-D180-8AC1-D9F2F4C92A21}"/>
+                <a16:creationId xmlns:a16="http://schemas.microsoft.com/office/drawing/2014/main" id="{5A544846-71AE-4EED-7C71-69CBD266AB5B}"/>
               </a:ext>
             </a:extLst>
           </p:cNvPr>
@@ -8338,7 +8743,7 @@
     </p:spTree>
     <p:extLst>
       <p:ext uri="{BB962C8B-B14F-4D97-AF65-F5344CB8AC3E}">
-        <p14:creationId xmlns:p14="http://schemas.microsoft.com/office/powerpoint/2010/main" val="2724122432"/>
+        <p14:creationId xmlns:p14="http://schemas.microsoft.com/office/powerpoint/2010/main" val="1926792215"/>
       </p:ext>
     </p:extLst>
   </p:cSld>
@@ -8370,7 +8775,7 @@
           <p:cNvPr id="2" name="Title 1">
             <a:extLst>
               <a:ext uri="{FF2B5EF4-FFF2-40B4-BE49-F238E27FC236}">
-                <a16:creationId xmlns:a16="http://schemas.microsoft.com/office/drawing/2014/main" id="{4E910C82-F4D6-8BAD-4B49-32DCFF98126F}"/>
+                <a16:creationId xmlns:a16="http://schemas.microsoft.com/office/drawing/2014/main" id="{F0317199-3FE4-4011-E431-B733E11096CA}"/>
               </a:ext>
             </a:extLst>
           </p:cNvPr>
@@ -8388,7 +8793,7 @@
           <a:p>
             <a:r>
               <a:rPr lang="en-GB" dirty="0"/>
-              <a:t>Virtual Environment</a:t>
+              <a:t>PDF</a:t>
             </a:r>
             <a:endParaRPr lang="en-IN" dirty="0"/>
           </a:p>
@@ -8399,7 +8804,7 @@
           <p:cNvPr id="3" name="Content Placeholder 2">
             <a:extLst>
               <a:ext uri="{FF2B5EF4-FFF2-40B4-BE49-F238E27FC236}">
-                <a16:creationId xmlns:a16="http://schemas.microsoft.com/office/drawing/2014/main" id="{0543EA3C-E07C-5917-5EBD-2B2AB33F4B98}"/>
+                <a16:creationId xmlns:a16="http://schemas.microsoft.com/office/drawing/2014/main" id="{3417A133-ACB9-E81D-EC4A-0A5A4CF5DEE0}"/>
               </a:ext>
             </a:extLst>
           </p:cNvPr>
@@ -8424,7 +8829,7 @@
           <p:cNvPr id="4" name="Footer Placeholder 3">
             <a:extLst>
               <a:ext uri="{FF2B5EF4-FFF2-40B4-BE49-F238E27FC236}">
-                <a16:creationId xmlns:a16="http://schemas.microsoft.com/office/drawing/2014/main" id="{43D502F0-E14F-C473-977F-40A61FF19039}"/>
+                <a16:creationId xmlns:a16="http://schemas.microsoft.com/office/drawing/2014/main" id="{06D2FE4E-A7CE-4D3B-42B3-8DD37D027516}"/>
               </a:ext>
             </a:extLst>
           </p:cNvPr>
@@ -8453,7 +8858,7 @@
           <p:cNvPr id="5" name="Slide Number Placeholder 4">
             <a:extLst>
               <a:ext uri="{FF2B5EF4-FFF2-40B4-BE49-F238E27FC236}">
-                <a16:creationId xmlns:a16="http://schemas.microsoft.com/office/drawing/2014/main" id="{6706342E-FF86-F190-355B-93898D5F2A83}"/>
+                <a16:creationId xmlns:a16="http://schemas.microsoft.com/office/drawing/2014/main" id="{CF0277D4-6825-FE55-E325-241E05EE90B4}"/>
               </a:ext>
             </a:extLst>
           </p:cNvPr>
@@ -8480,7 +8885,7 @@
     </p:spTree>
     <p:extLst>
       <p:ext uri="{BB962C8B-B14F-4D97-AF65-F5344CB8AC3E}">
-        <p14:creationId xmlns:p14="http://schemas.microsoft.com/office/powerpoint/2010/main" val="2155345922"/>
+        <p14:creationId xmlns:p14="http://schemas.microsoft.com/office/powerpoint/2010/main" val="1572536975"/>
       </p:ext>
     </p:extLst>
   </p:cSld>
@@ -8512,7 +8917,7 @@
           <p:cNvPr id="2" name="Title 1">
             <a:extLst>
               <a:ext uri="{FF2B5EF4-FFF2-40B4-BE49-F238E27FC236}">
-                <a16:creationId xmlns:a16="http://schemas.microsoft.com/office/drawing/2014/main" id="{96366A88-CFBD-B97A-00EB-C635FE8A19F8}"/>
+                <a16:creationId xmlns:a16="http://schemas.microsoft.com/office/drawing/2014/main" id="{D70072C2-CAC4-C990-6527-C89C83DBC442}"/>
               </a:ext>
             </a:extLst>
           </p:cNvPr>
@@ -8530,7 +8935,7 @@
           <a:p>
             <a:r>
               <a:rPr lang="en-GB" dirty="0"/>
-              <a:t>OS</a:t>
+              <a:t>Email</a:t>
             </a:r>
             <a:endParaRPr lang="en-IN" dirty="0"/>
           </a:p>
@@ -8541,7 +8946,7 @@
           <p:cNvPr id="3" name="Content Placeholder 2">
             <a:extLst>
               <a:ext uri="{FF2B5EF4-FFF2-40B4-BE49-F238E27FC236}">
-                <a16:creationId xmlns:a16="http://schemas.microsoft.com/office/drawing/2014/main" id="{E0C53D46-508B-CE03-C0C5-4A07BB8ECD8A}"/>
+                <a16:creationId xmlns:a16="http://schemas.microsoft.com/office/drawing/2014/main" id="{96D6ED05-9C2A-02BA-AAD4-D9D580B91181}"/>
               </a:ext>
             </a:extLst>
           </p:cNvPr>
@@ -8566,7 +8971,7 @@
           <p:cNvPr id="4" name="Footer Placeholder 3">
             <a:extLst>
               <a:ext uri="{FF2B5EF4-FFF2-40B4-BE49-F238E27FC236}">
-                <a16:creationId xmlns:a16="http://schemas.microsoft.com/office/drawing/2014/main" id="{C8996E58-34C6-D144-C03C-FBE8CD89090D}"/>
+                <a16:creationId xmlns:a16="http://schemas.microsoft.com/office/drawing/2014/main" id="{EC9EC30D-1289-FA18-7D84-4F3CF09AC37C}"/>
               </a:ext>
             </a:extLst>
           </p:cNvPr>
@@ -8595,7 +9000,7 @@
           <p:cNvPr id="5" name="Slide Number Placeholder 4">
             <a:extLst>
               <a:ext uri="{FF2B5EF4-FFF2-40B4-BE49-F238E27FC236}">
-                <a16:creationId xmlns:a16="http://schemas.microsoft.com/office/drawing/2014/main" id="{A0B8147F-3551-F86D-E2DF-18461434347C}"/>
+                <a16:creationId xmlns:a16="http://schemas.microsoft.com/office/drawing/2014/main" id="{B42736E2-8304-D2B5-5ADA-5F4CC1D080FA}"/>
               </a:ext>
             </a:extLst>
           </p:cNvPr>
@@ -8622,7 +9027,7 @@
     </p:spTree>
     <p:extLst>
       <p:ext uri="{BB962C8B-B14F-4D97-AF65-F5344CB8AC3E}">
-        <p14:creationId xmlns:p14="http://schemas.microsoft.com/office/powerpoint/2010/main" val="609168797"/>
+        <p14:creationId xmlns:p14="http://schemas.microsoft.com/office/powerpoint/2010/main" val="479021944"/>
       </p:ext>
     </p:extLst>
   </p:cSld>
@@ -9593,7 +9998,7 @@
           <p:cNvPr id="2" name="Title 1">
             <a:extLst>
               <a:ext uri="{FF2B5EF4-FFF2-40B4-BE49-F238E27FC236}">
-                <a16:creationId xmlns:a16="http://schemas.microsoft.com/office/drawing/2014/main" id="{9FDFE934-FCD7-0FF7-3D48-FE377DC2C4BB}"/>
+                <a16:creationId xmlns:a16="http://schemas.microsoft.com/office/drawing/2014/main" id="{05537F52-D920-165C-539D-D4323D2D50DF}"/>
               </a:ext>
             </a:extLst>
           </p:cNvPr>
@@ -9611,7 +10016,7 @@
           <a:p>
             <a:r>
               <a:rPr lang="en-GB" dirty="0"/>
-              <a:t>Datetime</a:t>
+              <a:t>Custom Packages</a:t>
             </a:r>
             <a:endParaRPr lang="en-IN" dirty="0"/>
           </a:p>
@@ -9622,7 +10027,7 @@
           <p:cNvPr id="3" name="Content Placeholder 2">
             <a:extLst>
               <a:ext uri="{FF2B5EF4-FFF2-40B4-BE49-F238E27FC236}">
-                <a16:creationId xmlns:a16="http://schemas.microsoft.com/office/drawing/2014/main" id="{39006957-BA22-F06D-3CB4-AD976E5ED1FC}"/>
+                <a16:creationId xmlns:a16="http://schemas.microsoft.com/office/drawing/2014/main" id="{0AAE2362-0572-BFD5-F478-A0EF74AB9E1A}"/>
               </a:ext>
             </a:extLst>
           </p:cNvPr>
@@ -9638,7 +10043,10 @@
           <a:bodyPr/>
           <a:lstStyle/>
           <a:p>
-            <a:endParaRPr lang="en-IN"/>
+            <a:r>
+              <a:rPr lang="en-IN" dirty="0"/>
+              <a:t> Create own Packages.</a:t>
+            </a:r>
           </a:p>
         </p:txBody>
       </p:sp>
@@ -9647,7 +10055,7 @@
           <p:cNvPr id="4" name="Footer Placeholder 3">
             <a:extLst>
               <a:ext uri="{FF2B5EF4-FFF2-40B4-BE49-F238E27FC236}">
-                <a16:creationId xmlns:a16="http://schemas.microsoft.com/office/drawing/2014/main" id="{723E5E67-40AC-20E1-815F-D843004BA175}"/>
+                <a16:creationId xmlns:a16="http://schemas.microsoft.com/office/drawing/2014/main" id="{DFE71CE4-9080-389F-EBAC-A28DAE84DAEE}"/>
               </a:ext>
             </a:extLst>
           </p:cNvPr>
@@ -9676,7 +10084,7 @@
           <p:cNvPr id="5" name="Slide Number Placeholder 4">
             <a:extLst>
               <a:ext uri="{FF2B5EF4-FFF2-40B4-BE49-F238E27FC236}">
-                <a16:creationId xmlns:a16="http://schemas.microsoft.com/office/drawing/2014/main" id="{C7832505-4646-07D5-87EB-4E8F6703AB14}"/>
+                <a16:creationId xmlns:a16="http://schemas.microsoft.com/office/drawing/2014/main" id="{08D0C57D-0999-D180-8AC1-D9F2F4C92A21}"/>
               </a:ext>
             </a:extLst>
           </p:cNvPr>
@@ -9703,7 +10111,7 @@
     </p:spTree>
     <p:extLst>
       <p:ext uri="{BB962C8B-B14F-4D97-AF65-F5344CB8AC3E}">
-        <p14:creationId xmlns:p14="http://schemas.microsoft.com/office/powerpoint/2010/main" val="682083692"/>
+        <p14:creationId xmlns:p14="http://schemas.microsoft.com/office/powerpoint/2010/main" val="2724122432"/>
       </p:ext>
     </p:extLst>
   </p:cSld>
@@ -9922,7 +10330,23 @@
           <a:bodyPr/>
           <a:lstStyle/>
           <a:p>
-            <a:endParaRPr lang="en-IN"/>
+            <a:r>
+              <a:rPr lang="en-GB" dirty="0"/>
+              <a:t> </a:t>
+            </a:r>
+            <a:r>
+              <a:rPr lang="en-GB" b="1" dirty="0" err="1"/>
+              <a:t>cmd</a:t>
+            </a:r>
+            <a:r>
+              <a:rPr lang="en-GB" b="1" dirty="0"/>
+              <a:t> : pip install </a:t>
+            </a:r>
+            <a:r>
+              <a:rPr lang="en-GB" b="1" dirty="0" err="1"/>
+              <a:t>customtkinter</a:t>
+            </a:r>
+            <a:endParaRPr lang="en-IN" dirty="0"/>
           </a:p>
         </p:txBody>
       </p:sp>
@@ -10072,7 +10496,31 @@
           <a:bodyPr/>
           <a:lstStyle/>
           <a:p>
-            <a:endParaRPr lang="en-IN"/>
+            <a:r>
+              <a:rPr lang="en-GB" dirty="0"/>
+              <a:t> </a:t>
+            </a:r>
+            <a:r>
+              <a:rPr lang="en-GB" b="1" dirty="0" err="1"/>
+              <a:t>cmd</a:t>
+            </a:r>
+            <a:r>
+              <a:rPr lang="en-GB" b="1" dirty="0"/>
+              <a:t> : pip install </a:t>
+            </a:r>
+            <a:r>
+              <a:rPr lang="en-GB" b="1" dirty="0" err="1"/>
+              <a:t>kivy</a:t>
+            </a:r>
+            <a:r>
+              <a:rPr lang="en-GB" b="1" dirty="0"/>
+              <a:t> </a:t>
+            </a:r>
+            <a:r>
+              <a:rPr lang="en-GB" b="1" dirty="0" err="1"/>
+              <a:t>kivymd</a:t>
+            </a:r>
+            <a:endParaRPr lang="en-IN" dirty="0"/>
           </a:p>
         </p:txBody>
       </p:sp>

--- a/python class/Python Class.pptx
+++ b/python class/Python Class.pptx
@@ -7671,7 +7671,15 @@
           <a:p>
             <a:r>
               <a:rPr lang="en-IN" dirty="0"/>
-              <a:t> Activation : In </a:t>
+              <a:t> </a:t>
+            </a:r>
+            <a:r>
+              <a:rPr lang="en-IN" b="1" dirty="0"/>
+              <a:t>Activation : </a:t>
+            </a:r>
+            <a:r>
+              <a:rPr lang="en-IN" dirty="0"/>
+              <a:t>In </a:t>
             </a:r>
             <a:r>
               <a:rPr lang="en-IN" dirty="0" err="1"/>
@@ -7679,15 +7687,7 @@
             </a:r>
             <a:r>
               <a:rPr lang="en-IN" dirty="0"/>
-              <a:t> change directory to scripts </a:t>
-            </a:r>
-            <a:r>
-              <a:rPr lang="en-IN"/>
-              <a:t>and enter </a:t>
-            </a:r>
-            <a:r>
-              <a:rPr lang="en-IN" dirty="0"/>
-              <a:t>activate</a:t>
+              <a:t> change directory to scripts and enter activate.</a:t>
             </a:r>
           </a:p>
         </p:txBody>
@@ -10047,6 +10047,71 @@
               <a:rPr lang="en-IN" dirty="0"/>
               <a:t> Create own Packages.</a:t>
             </a:r>
+          </a:p>
+          <a:p>
+            <a:r>
+              <a:rPr lang="en-IN" dirty="0"/>
+              <a:t> </a:t>
+            </a:r>
+            <a:r>
+              <a:rPr lang="en-IN" b="1" dirty="0"/>
+              <a:t>Steps : </a:t>
+            </a:r>
+          </a:p>
+          <a:p>
+            <a:pPr lvl="1"/>
+            <a:r>
+              <a:rPr lang="en-IN" b="1" dirty="0"/>
+              <a:t> </a:t>
+            </a:r>
+            <a:r>
+              <a:rPr lang="en-IN" dirty="0"/>
+              <a:t>create a folder</a:t>
+            </a:r>
+          </a:p>
+          <a:p>
+            <a:pPr lvl="1"/>
+            <a:r>
+              <a:rPr lang="en-IN" dirty="0"/>
+              <a:t> inside that folder add </a:t>
+            </a:r>
+            <a:r>
+              <a:rPr lang="en-IN" dirty="0" err="1"/>
+              <a:t>src</a:t>
+            </a:r>
+            <a:r>
+              <a:rPr lang="en-IN" dirty="0"/>
+              <a:t> folder , </a:t>
+            </a:r>
+            <a:r>
+              <a:rPr lang="en-IN" dirty="0" err="1"/>
+              <a:t>gitignore</a:t>
+            </a:r>
+            <a:r>
+              <a:rPr lang="en-IN" dirty="0"/>
+              <a:t> , readme , license , </a:t>
+            </a:r>
+            <a:r>
+              <a:rPr lang="en-IN" dirty="0" err="1"/>
+              <a:t>venv</a:t>
+            </a:r>
+            <a:r>
+              <a:rPr lang="en-IN" dirty="0"/>
+              <a:t> , </a:t>
+            </a:r>
+            <a:r>
+              <a:rPr lang="en-IN" dirty="0" err="1"/>
+              <a:t>pyproject</a:t>
+            </a:r>
+            <a:r>
+              <a:rPr lang="en-IN" err="1"/>
+              <a:t>.</a:t>
+            </a:r>
+            <a:r>
+              <a:rPr lang="en-IN"/>
+              <a:t>toml</a:t>
+            </a:r>
+            <a:endParaRPr lang="en-IN" dirty="0"/>
           </a:p>
         </p:txBody>
       </p:sp>

--- a/python class/Python Class.pptx
+++ b/python class/Python Class.pptx
@@ -229,7 +229,7 @@
           <a:p>
             <a:fld id="{C7300FFE-222E-424B-A24A-B86ADB1660A8}" type="datetimeFigureOut">
               <a:rPr lang="en-IN" smtClean="0"/>
-              <a:t>07-07-2026</a:t>
+              <a:t>09-07-2026</a:t>
             </a:fld>
             <a:endParaRPr lang="en-IN" dirty="0"/>
           </a:p>
@@ -657,7 +657,7 @@
           <a:p>
             <a:fld id="{AD501974-91E0-4A6C-BF4F-18DDA0DBE697}" type="datetime1">
               <a:rPr lang="en-IN" smtClean="0"/>
-              <a:t>07-07-2026</a:t>
+              <a:t>09-07-2026</a:t>
             </a:fld>
             <a:endParaRPr lang="en-IN" dirty="0"/>
           </a:p>
@@ -782,7 +782,7 @@
           <a:p>
             <a:fld id="{340C70EA-229A-4802-A7BC-A1799783BDD3}" type="datetime1">
               <a:rPr lang="en-IN" smtClean="0"/>
-              <a:t>07-07-2026</a:t>
+              <a:t>09-07-2026</a:t>
             </a:fld>
             <a:endParaRPr lang="en-IN" dirty="0"/>
           </a:p>
@@ -1069,7 +1069,7 @@
           <a:p>
             <a:fld id="{BD944048-9929-4BB2-BADE-62F9A707015B}" type="datetime1">
               <a:rPr lang="en-IN" smtClean="0"/>
-              <a:t>07-07-2026</a:t>
+              <a:t>09-07-2026</a:t>
             </a:fld>
             <a:endParaRPr lang="en-IN" dirty="0"/>
           </a:p>
@@ -1375,7 +1375,7 @@
           <a:p>
             <a:fld id="{09A388D1-7504-45FD-847C-EF9E921E08DF}" type="datetime1">
               <a:rPr lang="en-IN" smtClean="0"/>
-              <a:t>07-07-2026</a:t>
+              <a:t>09-07-2026</a:t>
             </a:fld>
             <a:endParaRPr lang="en-IN" dirty="0"/>
           </a:p>
@@ -1604,7 +1604,7 @@
           <a:p>
             <a:fld id="{6015BE80-B03C-48AB-B3E2-19C5F4D60D3C}" type="datetime1">
               <a:rPr lang="en-IN" smtClean="0"/>
-              <a:t>07-07-2026</a:t>
+              <a:t>09-07-2026</a:t>
             </a:fld>
             <a:endParaRPr lang="en-IN" dirty="0"/>
           </a:p>
@@ -1875,7 +1875,7 @@
           <a:p>
             <a:fld id="{450E9977-AF0E-4B1A-B2BF-2416B4828E95}" type="datetime1">
               <a:rPr lang="en-IN" smtClean="0"/>
-              <a:t>07-07-2026</a:t>
+              <a:t>09-07-2026</a:t>
             </a:fld>
             <a:endParaRPr lang="en-IN" dirty="0"/>
           </a:p>
@@ -2102,7 +2102,7 @@
           <a:p>
             <a:fld id="{972A712B-80AB-4FDB-AFE5-C959280677B9}" type="datetime1">
               <a:rPr lang="en-IN" smtClean="0"/>
-              <a:t>07-07-2026</a:t>
+              <a:t>09-07-2026</a:t>
             </a:fld>
             <a:endParaRPr lang="en-IN" dirty="0"/>
           </a:p>
@@ -2393,7 +2393,7 @@
           <a:p>
             <a:fld id="{78FC1D50-5769-4793-A6D0-4C61D943385E}" type="datetime1">
               <a:rPr lang="en-IN" smtClean="0"/>
-              <a:t>07-07-2026</a:t>
+              <a:t>09-07-2026</a:t>
             </a:fld>
             <a:endParaRPr lang="en-IN" dirty="0"/>
           </a:p>
@@ -2658,7 +2658,7 @@
           <a:p>
             <a:fld id="{1093E9E7-66F0-49C7-87AF-7A91F126A0CA}" type="datetime1">
               <a:rPr lang="en-IN" smtClean="0"/>
-              <a:t>07-07-2026</a:t>
+              <a:t>09-07-2026</a:t>
             </a:fld>
             <a:endParaRPr lang="en-IN" dirty="0"/>
           </a:p>
@@ -3104,7 +3104,7 @@
           <a:p>
             <a:fld id="{4802E001-56FE-4C01-9545-A69D840AB1F5}" type="datetime1">
               <a:rPr lang="en-IN" smtClean="0"/>
-              <a:t>07-07-2026</a:t>
+              <a:t>09-07-2026</a:t>
             </a:fld>
             <a:endParaRPr lang="en-IN" dirty="0"/>
           </a:p>
@@ -3268,7 +3268,7 @@
           <a:p>
             <a:fld id="{FC628212-ABC2-4EAF-BB21-53D61AEEEA49}" type="datetime1">
               <a:rPr lang="en-IN" smtClean="0"/>
-              <a:t>07-07-2026</a:t>
+              <a:t>09-07-2026</a:t>
             </a:fld>
             <a:endParaRPr lang="en-IN" dirty="0"/>
           </a:p>
@@ -3432,7 +3432,7 @@
           <a:p>
             <a:fld id="{83F0C27E-97BD-4ACD-AFDF-13985BE88ECF}" type="datetime1">
               <a:rPr lang="en-IN" smtClean="0"/>
-              <a:t>07-07-2026</a:t>
+              <a:t>09-07-2026</a:t>
             </a:fld>
             <a:endParaRPr lang="en-IN" dirty="0"/>
           </a:p>
@@ -3630,7 +3630,7 @@
           <a:p>
             <a:fld id="{10A04BDC-9A72-4B08-81B7-A336A5B4E254}" type="datetime1">
               <a:rPr lang="en-IN" smtClean="0"/>
-              <a:t>07-07-2026</a:t>
+              <a:t>09-07-2026</a:t>
             </a:fld>
             <a:endParaRPr lang="en-IN" dirty="0"/>
           </a:p>
@@ -3828,7 +3828,7 @@
           <a:p>
             <a:fld id="{2E5D08A3-D96A-4309-8AF3-C610782BB2D3}" type="datetime1">
               <a:rPr lang="en-IN" smtClean="0"/>
-              <a:t>07-07-2026</a:t>
+              <a:t>09-07-2026</a:t>
             </a:fld>
             <a:endParaRPr lang="en-IN" dirty="0"/>
           </a:p>
@@ -6387,7 +6387,7 @@
             </a:r>
             <a:r>
               <a:rPr lang="en-IN" dirty="0"/>
-              <a:t>) , copy() , discard(element) , pop() , clear()</a:t>
+              <a:t>) , copy() , discard(element) , pop() , clear().</a:t>
             </a:r>
           </a:p>
         </p:txBody>
@@ -6975,8 +6975,8 @@
               <a:t>function_name</a:t>
             </a:r>
             <a:r>
-              <a:rPr lang="en-GB" dirty="0"/>
-              <a:t>() </a:t>
+              <a:rPr lang="en-GB"/>
+              <a:t>()</a:t>
             </a:r>
             <a:endParaRPr lang="en-GB" b="1" dirty="0"/>
           </a:p>
@@ -10101,17 +10101,31 @@
             </a:r>
             <a:r>
               <a:rPr lang="en-IN" dirty="0" err="1"/>
-              <a:t>pyproject</a:t>
-            </a:r>
-            <a:r>
-              <a:rPr lang="en-IN" err="1"/>
-              <a:t>.</a:t>
-            </a:r>
-            <a:r>
-              <a:rPr lang="en-IN"/>
-              <a:t>toml</a:t>
-            </a:r>
-            <a:endParaRPr lang="en-IN" dirty="0"/>
+              <a:t>pyproject.toml</a:t>
+            </a:r>
+            <a:endParaRPr lang="en-IN" dirty="0"/>
+          </a:p>
+          <a:p>
+            <a:pPr lvl="1"/>
+            <a:r>
+              <a:rPr lang="en-IN" dirty="0"/>
+              <a:t> </a:t>
+            </a:r>
+            <a:r>
+              <a:rPr lang="en-IN" dirty="0" err="1"/>
+              <a:t>pypi</a:t>
+            </a:r>
+            <a:r>
+              <a:rPr lang="en-IN" dirty="0"/>
+              <a:t> account login</a:t>
+            </a:r>
+          </a:p>
+          <a:p>
+            <a:pPr lvl="1"/>
+            <a:r>
+              <a:rPr lang="en-IN" dirty="0"/>
+              <a:t> </a:t>
+            </a:r>
           </a:p>
         </p:txBody>
       </p:sp>

--- a/python class/Python Class.pptx
+++ b/python class/Python Class.pptx
@@ -5,7 +5,7 @@
     <p:sldMasterId id="2147483660" r:id="rId1"/>
   </p:sldMasterIdLst>
   <p:notesMasterIdLst>
-    <p:notesMasterId r:id="rId35"/>
+    <p:notesMasterId r:id="rId37"/>
   </p:notesMasterIdLst>
   <p:sldIdLst>
     <p:sldId id="256" r:id="rId2"/>
@@ -28,19 +28,21 @@
     <p:sldId id="272" r:id="rId19"/>
     <p:sldId id="276" r:id="rId20"/>
     <p:sldId id="277" r:id="rId21"/>
-    <p:sldId id="281" r:id="rId22"/>
+    <p:sldId id="289" r:id="rId22"/>
     <p:sldId id="278" r:id="rId23"/>
-    <p:sldId id="273" r:id="rId24"/>
-    <p:sldId id="283" r:id="rId25"/>
-    <p:sldId id="282" r:id="rId26"/>
-    <p:sldId id="275" r:id="rId27"/>
-    <p:sldId id="286" r:id="rId28"/>
-    <p:sldId id="287" r:id="rId29"/>
-    <p:sldId id="288" r:id="rId30"/>
-    <p:sldId id="280" r:id="rId31"/>
-    <p:sldId id="279" r:id="rId32"/>
-    <p:sldId id="284" r:id="rId33"/>
-    <p:sldId id="285" r:id="rId34"/>
+    <p:sldId id="281" r:id="rId24"/>
+    <p:sldId id="273" r:id="rId25"/>
+    <p:sldId id="283" r:id="rId26"/>
+    <p:sldId id="282" r:id="rId27"/>
+    <p:sldId id="288" r:id="rId28"/>
+    <p:sldId id="275" r:id="rId29"/>
+    <p:sldId id="286" r:id="rId30"/>
+    <p:sldId id="287" r:id="rId31"/>
+    <p:sldId id="280" r:id="rId32"/>
+    <p:sldId id="290" r:id="rId33"/>
+    <p:sldId id="279" r:id="rId34"/>
+    <p:sldId id="284" r:id="rId35"/>
+    <p:sldId id="285" r:id="rId36"/>
   </p:sldIdLst>
   <p:sldSz cx="12192000" cy="6858000"/>
   <p:notesSz cx="7104063" cy="10234613"/>
@@ -229,7 +231,7 @@
           <a:p>
             <a:fld id="{C7300FFE-222E-424B-A24A-B86ADB1660A8}" type="datetimeFigureOut">
               <a:rPr lang="en-IN" smtClean="0"/>
-              <a:t>09-07-2026</a:t>
+              <a:t>13-07-2026</a:t>
             </a:fld>
             <a:endParaRPr lang="en-IN" dirty="0"/>
           </a:p>
@@ -657,7 +659,7 @@
           <a:p>
             <a:fld id="{AD501974-91E0-4A6C-BF4F-18DDA0DBE697}" type="datetime1">
               <a:rPr lang="en-IN" smtClean="0"/>
-              <a:t>09-07-2026</a:t>
+              <a:t>13-07-2026</a:t>
             </a:fld>
             <a:endParaRPr lang="en-IN" dirty="0"/>
           </a:p>
@@ -782,7 +784,7 @@
           <a:p>
             <a:fld id="{340C70EA-229A-4802-A7BC-A1799783BDD3}" type="datetime1">
               <a:rPr lang="en-IN" smtClean="0"/>
-              <a:t>09-07-2026</a:t>
+              <a:t>13-07-2026</a:t>
             </a:fld>
             <a:endParaRPr lang="en-IN" dirty="0"/>
           </a:p>
@@ -1069,7 +1071,7 @@
           <a:p>
             <a:fld id="{BD944048-9929-4BB2-BADE-62F9A707015B}" type="datetime1">
               <a:rPr lang="en-IN" smtClean="0"/>
-              <a:t>09-07-2026</a:t>
+              <a:t>13-07-2026</a:t>
             </a:fld>
             <a:endParaRPr lang="en-IN" dirty="0"/>
           </a:p>
@@ -1375,7 +1377,7 @@
           <a:p>
             <a:fld id="{09A388D1-7504-45FD-847C-EF9E921E08DF}" type="datetime1">
               <a:rPr lang="en-IN" smtClean="0"/>
-              <a:t>09-07-2026</a:t>
+              <a:t>13-07-2026</a:t>
             </a:fld>
             <a:endParaRPr lang="en-IN" dirty="0"/>
           </a:p>
@@ -1604,7 +1606,7 @@
           <a:p>
             <a:fld id="{6015BE80-B03C-48AB-B3E2-19C5F4D60D3C}" type="datetime1">
               <a:rPr lang="en-IN" smtClean="0"/>
-              <a:t>09-07-2026</a:t>
+              <a:t>13-07-2026</a:t>
             </a:fld>
             <a:endParaRPr lang="en-IN" dirty="0"/>
           </a:p>
@@ -1875,7 +1877,7 @@
           <a:p>
             <a:fld id="{450E9977-AF0E-4B1A-B2BF-2416B4828E95}" type="datetime1">
               <a:rPr lang="en-IN" smtClean="0"/>
-              <a:t>09-07-2026</a:t>
+              <a:t>13-07-2026</a:t>
             </a:fld>
             <a:endParaRPr lang="en-IN" dirty="0"/>
           </a:p>
@@ -2102,7 +2104,7 @@
           <a:p>
             <a:fld id="{972A712B-80AB-4FDB-AFE5-C959280677B9}" type="datetime1">
               <a:rPr lang="en-IN" smtClean="0"/>
-              <a:t>09-07-2026</a:t>
+              <a:t>13-07-2026</a:t>
             </a:fld>
             <a:endParaRPr lang="en-IN" dirty="0"/>
           </a:p>
@@ -2393,7 +2395,7 @@
           <a:p>
             <a:fld id="{78FC1D50-5769-4793-A6D0-4C61D943385E}" type="datetime1">
               <a:rPr lang="en-IN" smtClean="0"/>
-              <a:t>09-07-2026</a:t>
+              <a:t>13-07-2026</a:t>
             </a:fld>
             <a:endParaRPr lang="en-IN" dirty="0"/>
           </a:p>
@@ -2658,7 +2660,7 @@
           <a:p>
             <a:fld id="{1093E9E7-66F0-49C7-87AF-7A91F126A0CA}" type="datetime1">
               <a:rPr lang="en-IN" smtClean="0"/>
-              <a:t>09-07-2026</a:t>
+              <a:t>13-07-2026</a:t>
             </a:fld>
             <a:endParaRPr lang="en-IN" dirty="0"/>
           </a:p>
@@ -3104,7 +3106,7 @@
           <a:p>
             <a:fld id="{4802E001-56FE-4C01-9545-A69D840AB1F5}" type="datetime1">
               <a:rPr lang="en-IN" smtClean="0"/>
-              <a:t>09-07-2026</a:t>
+              <a:t>13-07-2026</a:t>
             </a:fld>
             <a:endParaRPr lang="en-IN" dirty="0"/>
           </a:p>
@@ -3268,7 +3270,7 @@
           <a:p>
             <a:fld id="{FC628212-ABC2-4EAF-BB21-53D61AEEEA49}" type="datetime1">
               <a:rPr lang="en-IN" smtClean="0"/>
-              <a:t>09-07-2026</a:t>
+              <a:t>13-07-2026</a:t>
             </a:fld>
             <a:endParaRPr lang="en-IN" dirty="0"/>
           </a:p>
@@ -3432,7 +3434,7 @@
           <a:p>
             <a:fld id="{83F0C27E-97BD-4ACD-AFDF-13985BE88ECF}" type="datetime1">
               <a:rPr lang="en-IN" smtClean="0"/>
-              <a:t>09-07-2026</a:t>
+              <a:t>13-07-2026</a:t>
             </a:fld>
             <a:endParaRPr lang="en-IN" dirty="0"/>
           </a:p>
@@ -3630,7 +3632,7 @@
           <a:p>
             <a:fld id="{10A04BDC-9A72-4B08-81B7-A336A5B4E254}" type="datetime1">
               <a:rPr lang="en-IN" smtClean="0"/>
-              <a:t>09-07-2026</a:t>
+              <a:t>13-07-2026</a:t>
             </a:fld>
             <a:endParaRPr lang="en-IN" dirty="0"/>
           </a:p>
@@ -3828,7 +3830,7 @@
           <a:p>
             <a:fld id="{2E5D08A3-D96A-4309-8AF3-C610782BB2D3}" type="datetime1">
               <a:rPr lang="en-IN" smtClean="0"/>
-              <a:t>09-07-2026</a:t>
+              <a:t>13-07-2026</a:t>
             </a:fld>
             <a:endParaRPr lang="en-IN" dirty="0"/>
           </a:p>
@@ -7378,7 +7380,11 @@
           <a:p>
             <a:r>
               <a:rPr lang="en-GB" dirty="0"/>
-              <a:t> functions : </a:t>
+              <a:t> </a:t>
+            </a:r>
+            <a:r>
+              <a:rPr lang="en-GB" b="1" dirty="0"/>
+              <a:t>keywords : </a:t>
             </a:r>
           </a:p>
           <a:p>
@@ -7414,6 +7420,56 @@
             <a:r>
               <a:rPr lang="en-IN" dirty="0"/>
               <a:t> </a:t>
+            </a:r>
+            <a:r>
+              <a:rPr lang="en-IN" b="1" dirty="0"/>
+              <a:t>try : </a:t>
+            </a:r>
+            <a:r>
+              <a:rPr lang="en-IN" dirty="0"/>
+              <a:t>try to execute the block</a:t>
+            </a:r>
+          </a:p>
+          <a:p>
+            <a:r>
+              <a:rPr lang="en-IN" dirty="0"/>
+              <a:t> </a:t>
+            </a:r>
+            <a:r>
+              <a:rPr lang="en-IN" b="1" dirty="0"/>
+              <a:t>except : </a:t>
+            </a:r>
+            <a:r>
+              <a:rPr lang="en-IN" dirty="0"/>
+              <a:t>executes when the exception occurs</a:t>
+            </a:r>
+          </a:p>
+          <a:p>
+            <a:r>
+              <a:rPr lang="en-IN" dirty="0"/>
+              <a:t> </a:t>
+            </a:r>
+            <a:r>
+              <a:rPr lang="en-IN" b="1" dirty="0"/>
+              <a:t>else : </a:t>
+            </a:r>
+            <a:r>
+              <a:rPr lang="en-IN" dirty="0"/>
+              <a:t>runs when no exception occurs</a:t>
+            </a:r>
+          </a:p>
+          <a:p>
+            <a:r>
+              <a:rPr lang="en-IN" dirty="0"/>
+              <a:t> </a:t>
+            </a:r>
+            <a:r>
+              <a:rPr lang="en-IN" b="1" dirty="0"/>
+              <a:t>finally : </a:t>
+            </a:r>
+            <a:r>
+              <a:rPr lang="en-IN" dirty="0"/>
+              <a:t>this block always executes</a:t>
             </a:r>
             <a:endParaRPr lang="en-GB" dirty="0"/>
           </a:p>
@@ -7512,7 +7568,7 @@
           <p:cNvPr id="2" name="Title 1">
             <a:extLst>
               <a:ext uri="{FF2B5EF4-FFF2-40B4-BE49-F238E27FC236}">
-                <a16:creationId xmlns:a16="http://schemas.microsoft.com/office/drawing/2014/main" id="{4E910C82-F4D6-8BAD-4B49-32DCFF98126F}"/>
+                <a16:creationId xmlns:a16="http://schemas.microsoft.com/office/drawing/2014/main" id="{6037DABA-6315-8D57-BB48-0E452943FE7C}"/>
               </a:ext>
             </a:extLst>
           </p:cNvPr>
@@ -7529,10 +7585,9 @@
           <a:lstStyle/>
           <a:p>
             <a:r>
-              <a:rPr lang="en-GB" dirty="0"/>
-              <a:t>Virtual Environment</a:t>
-            </a:r>
-            <a:endParaRPr lang="en-IN" dirty="0"/>
+              <a:rPr lang="en-IN" dirty="0"/>
+              <a:t>Problems</a:t>
+            </a:r>
           </a:p>
         </p:txBody>
       </p:sp>
@@ -7541,7 +7596,7 @@
           <p:cNvPr id="3" name="Content Placeholder 2">
             <a:extLst>
               <a:ext uri="{FF2B5EF4-FFF2-40B4-BE49-F238E27FC236}">
-                <a16:creationId xmlns:a16="http://schemas.microsoft.com/office/drawing/2014/main" id="{0543EA3C-E07C-5917-5EBD-2B2AB33F4B98}"/>
+                <a16:creationId xmlns:a16="http://schemas.microsoft.com/office/drawing/2014/main" id="{B51B7CBC-3FC4-960A-3DED-6D0F670713EF}"/>
               </a:ext>
             </a:extLst>
           </p:cNvPr>
@@ -7559,136 +7614,37 @@
           <a:p>
             <a:r>
               <a:rPr lang="en-IN" dirty="0"/>
-              <a:t> Python Main Environment Types : </a:t>
-            </a:r>
-          </a:p>
-          <a:p>
-            <a:pPr lvl="1"/>
-            <a:r>
-              <a:rPr lang="en-IN" dirty="0"/>
-              <a:t> Global Environment.</a:t>
-            </a:r>
-          </a:p>
-          <a:p>
-            <a:pPr lvl="1"/>
-            <a:r>
-              <a:rPr lang="en-IN" dirty="0"/>
-              <a:t> Virtual Environment.</a:t>
-            </a:r>
-          </a:p>
-          <a:p>
-            <a:r>
-              <a:rPr lang="en-IN" dirty="0"/>
-              <a:t> Why Virtual Environment?</a:t>
-            </a:r>
-          </a:p>
-          <a:p>
-            <a:pPr lvl="1"/>
+              <a:t> simple calculator which works on any inputs.</a:t>
+            </a:r>
+          </a:p>
+          <a:p>
+            <a:r>
+              <a:rPr lang="en-IN" dirty="0"/>
+              <a:t> invalid input.</a:t>
+            </a:r>
+          </a:p>
+          <a:p>
+            <a:r>
+              <a:rPr lang="en-IN" dirty="0"/>
+              <a:t> string and list indexing.</a:t>
+            </a:r>
+          </a:p>
+          <a:p>
+            <a:r>
+              <a:rPr lang="en-IN" dirty="0"/>
+              <a:t> dictionary keys.</a:t>
+            </a:r>
+          </a:p>
+          <a:p>
             <a:r>
               <a:rPr lang="en-IN" dirty="0"/>
               <a:t> </a:t>
             </a:r>
             <a:r>
-              <a:rPr lang="en-IN" dirty="0" err="1"/>
-              <a:t>numpy</a:t>
-            </a:r>
-            <a:r>
-              <a:rPr lang="en-IN" dirty="0"/>
-              <a:t> 0.0.1 already exists in global environment</a:t>
-            </a:r>
-          </a:p>
-          <a:p>
-            <a:pPr lvl="1"/>
-            <a:r>
-              <a:rPr lang="en-IN" dirty="0"/>
-              <a:t> project 1 : requires </a:t>
-            </a:r>
-            <a:r>
-              <a:rPr lang="en-IN" dirty="0" err="1"/>
-              <a:t>numpy</a:t>
-            </a:r>
-            <a:r>
-              <a:rPr lang="en-IN" dirty="0"/>
-              <a:t> 0.0.1</a:t>
-            </a:r>
-          </a:p>
-          <a:p>
-            <a:pPr lvl="1"/>
-            <a:r>
-              <a:rPr lang="en-IN" dirty="0"/>
-              <a:t> project 2 : requires </a:t>
-            </a:r>
-            <a:r>
-              <a:rPr lang="en-IN" dirty="0" err="1"/>
-              <a:t>numpy</a:t>
-            </a:r>
-            <a:r>
-              <a:rPr lang="en-IN" dirty="0"/>
-              <a:t> 0.1.1</a:t>
-            </a:r>
-          </a:p>
-          <a:p>
-            <a:pPr lvl="1"/>
-            <a:r>
-              <a:rPr lang="en-IN" dirty="0"/>
-              <a:t> changes version of this package will affect any one of the projects</a:t>
-            </a:r>
-          </a:p>
-          <a:p>
-            <a:pPr lvl="1"/>
-            <a:r>
-              <a:rPr lang="en-IN" dirty="0"/>
-              <a:t> to overcome those create project 2 in virtual environment</a:t>
-            </a:r>
-          </a:p>
-          <a:p>
-            <a:r>
-              <a:rPr lang="en-IN" dirty="0"/>
-              <a:t> </a:t>
-            </a:r>
-            <a:r>
-              <a:rPr lang="en-IN" b="1" dirty="0"/>
-              <a:t>create VE : </a:t>
-            </a:r>
-            <a:r>
-              <a:rPr lang="en-IN" dirty="0"/>
-              <a:t>python –m </a:t>
-            </a:r>
-            <a:r>
-              <a:rPr lang="en-IN" dirty="0" err="1"/>
-              <a:t>venv</a:t>
-            </a:r>
-            <a:r>
-              <a:rPr lang="en-IN" dirty="0"/>
-              <a:t> </a:t>
-            </a:r>
-            <a:r>
-              <a:rPr lang="en-IN" dirty="0" err="1"/>
-              <a:t>Vename</a:t>
-            </a:r>
-            <a:endParaRPr lang="en-IN" dirty="0"/>
-          </a:p>
-          <a:p>
-            <a:r>
-              <a:rPr lang="en-IN" dirty="0"/>
-              <a:t> </a:t>
-            </a:r>
-            <a:r>
-              <a:rPr lang="en-IN" b="1" dirty="0"/>
-              <a:t>Activation : </a:t>
-            </a:r>
-            <a:r>
-              <a:rPr lang="en-IN" dirty="0"/>
-              <a:t>In </a:t>
-            </a:r>
-            <a:r>
-              <a:rPr lang="en-IN" dirty="0" err="1"/>
-              <a:t>cmd</a:t>
-            </a:r>
-            <a:r>
-              <a:rPr lang="en-IN" dirty="0"/>
-              <a:t> change directory to scripts and enter activate.</a:t>
-            </a:r>
+              <a:rPr lang="en-IN"/>
+              <a:t>file operations.</a:t>
+            </a:r>
+            <a:endParaRPr lang="en-IN" dirty="0"/>
           </a:p>
         </p:txBody>
       </p:sp>
@@ -7697,7 +7653,7 @@
           <p:cNvPr id="4" name="Footer Placeholder 3">
             <a:extLst>
               <a:ext uri="{FF2B5EF4-FFF2-40B4-BE49-F238E27FC236}">
-                <a16:creationId xmlns:a16="http://schemas.microsoft.com/office/drawing/2014/main" id="{43D502F0-E14F-C473-977F-40A61FF19039}"/>
+                <a16:creationId xmlns:a16="http://schemas.microsoft.com/office/drawing/2014/main" id="{793E04A4-1AA9-224D-956E-0338B88C51F4}"/>
               </a:ext>
             </a:extLst>
           </p:cNvPr>
@@ -7726,7 +7682,7 @@
           <p:cNvPr id="5" name="Slide Number Placeholder 4">
             <a:extLst>
               <a:ext uri="{FF2B5EF4-FFF2-40B4-BE49-F238E27FC236}">
-                <a16:creationId xmlns:a16="http://schemas.microsoft.com/office/drawing/2014/main" id="{6706342E-FF86-F190-355B-93898D5F2A83}"/>
+                <a16:creationId xmlns:a16="http://schemas.microsoft.com/office/drawing/2014/main" id="{9FCD9DAB-05EF-3B1B-496B-CCCBE53F0A3E}"/>
               </a:ext>
             </a:extLst>
           </p:cNvPr>
@@ -7753,7 +7709,7 @@
     </p:spTree>
     <p:extLst>
       <p:ext uri="{BB962C8B-B14F-4D97-AF65-F5344CB8AC3E}">
-        <p14:creationId xmlns:p14="http://schemas.microsoft.com/office/powerpoint/2010/main" val="2155345922"/>
+        <p14:creationId xmlns:p14="http://schemas.microsoft.com/office/powerpoint/2010/main" val="2145168545"/>
       </p:ext>
     </p:extLst>
   </p:cSld>
@@ -7913,6 +7869,43 @@
             <a:r>
               <a:rPr lang="en-IN" dirty="0"/>
               <a:t>module</a:t>
+            </a:r>
+          </a:p>
+          <a:p>
+            <a:r>
+              <a:rPr lang="en-IN" b="1" dirty="0"/>
+              <a:t> Importing : </a:t>
+            </a:r>
+          </a:p>
+          <a:p>
+            <a:pPr lvl="1"/>
+            <a:r>
+              <a:rPr lang="en-IN" dirty="0"/>
+              <a:t> import </a:t>
+            </a:r>
+            <a:r>
+              <a:rPr lang="en-IN" dirty="0" err="1"/>
+              <a:t>module_name</a:t>
+            </a:r>
+            <a:endParaRPr lang="en-IN" dirty="0"/>
+          </a:p>
+          <a:p>
+            <a:pPr lvl="1"/>
+            <a:r>
+              <a:rPr lang="en-IN" b="1" dirty="0"/>
+              <a:t> </a:t>
+            </a:r>
+            <a:r>
+              <a:rPr lang="en-IN" dirty="0"/>
+              <a:t>from </a:t>
+            </a:r>
+            <a:r>
+              <a:rPr lang="en-IN" dirty="0" err="1"/>
+              <a:t>module_name</a:t>
+            </a:r>
+            <a:r>
+              <a:rPr lang="en-IN" dirty="0"/>
+              <a:t> import *</a:t>
             </a:r>
             <a:endParaRPr lang="en-GB" b="1" dirty="0"/>
           </a:p>
@@ -8011,7 +8004,7 @@
           <p:cNvPr id="2" name="Title 1">
             <a:extLst>
               <a:ext uri="{FF2B5EF4-FFF2-40B4-BE49-F238E27FC236}">
-                <a16:creationId xmlns:a16="http://schemas.microsoft.com/office/drawing/2014/main" id="{5CA56418-8A9A-5805-BCBB-4959E5ABF278}"/>
+                <a16:creationId xmlns:a16="http://schemas.microsoft.com/office/drawing/2014/main" id="{4E910C82-F4D6-8BAD-4B49-32DCFF98126F}"/>
               </a:ext>
             </a:extLst>
           </p:cNvPr>
@@ -8028,9 +8021,10 @@
           <a:lstStyle/>
           <a:p>
             <a:r>
-              <a:rPr lang="en-IN" dirty="0"/>
-              <a:t>Collections</a:t>
-            </a:r>
+              <a:rPr lang="en-GB" dirty="0"/>
+              <a:t>Virtual Environment</a:t>
+            </a:r>
+            <a:endParaRPr lang="en-IN" dirty="0"/>
           </a:p>
         </p:txBody>
       </p:sp>
@@ -8039,7 +8033,7 @@
           <p:cNvPr id="3" name="Content Placeholder 2">
             <a:extLst>
               <a:ext uri="{FF2B5EF4-FFF2-40B4-BE49-F238E27FC236}">
-                <a16:creationId xmlns:a16="http://schemas.microsoft.com/office/drawing/2014/main" id="{03DD4096-0D2C-E2BF-FF90-6117481C3C05}"/>
+                <a16:creationId xmlns:a16="http://schemas.microsoft.com/office/drawing/2014/main" id="{0543EA3C-E07C-5917-5EBD-2B2AB33F4B98}"/>
               </a:ext>
             </a:extLst>
           </p:cNvPr>
@@ -8057,39 +8051,135 @@
           <a:p>
             <a:r>
               <a:rPr lang="en-IN" dirty="0"/>
+              <a:t> Python Main Environment Types : </a:t>
+            </a:r>
+          </a:p>
+          <a:p>
+            <a:pPr lvl="1"/>
+            <a:r>
+              <a:rPr lang="en-IN" dirty="0"/>
+              <a:t> Global Environment.</a:t>
+            </a:r>
+          </a:p>
+          <a:p>
+            <a:pPr lvl="1"/>
+            <a:r>
+              <a:rPr lang="en-IN" dirty="0"/>
+              <a:t> Virtual Environment.</a:t>
+            </a:r>
+          </a:p>
+          <a:p>
+            <a:r>
+              <a:rPr lang="en-IN" dirty="0"/>
+              <a:t> Why Virtual Environment?</a:t>
+            </a:r>
+          </a:p>
+          <a:p>
+            <a:pPr lvl="1"/>
+            <a:r>
+              <a:rPr lang="en-IN" dirty="0"/>
               <a:t> </a:t>
             </a:r>
             <a:r>
+              <a:rPr lang="en-IN" dirty="0" err="1"/>
+              <a:t>numpy</a:t>
+            </a:r>
+            <a:r>
+              <a:rPr lang="en-IN" dirty="0"/>
+              <a:t> 0.0.1 already exists in global environment</a:t>
+            </a:r>
+          </a:p>
+          <a:p>
+            <a:pPr lvl="1"/>
+            <a:r>
+              <a:rPr lang="en-IN" dirty="0"/>
+              <a:t> project 1 : requires </a:t>
+            </a:r>
+            <a:r>
+              <a:rPr lang="en-IN" dirty="0" err="1"/>
+              <a:t>numpy</a:t>
+            </a:r>
+            <a:r>
+              <a:rPr lang="en-IN" dirty="0"/>
+              <a:t> 0.0.1</a:t>
+            </a:r>
+          </a:p>
+          <a:p>
+            <a:pPr lvl="1"/>
+            <a:r>
+              <a:rPr lang="en-IN" dirty="0"/>
+              <a:t> project 2 : requires </a:t>
+            </a:r>
+            <a:r>
+              <a:rPr lang="en-IN" dirty="0" err="1"/>
+              <a:t>numpy</a:t>
+            </a:r>
+            <a:r>
+              <a:rPr lang="en-IN" dirty="0"/>
+              <a:t> 0.1.1</a:t>
+            </a:r>
+          </a:p>
+          <a:p>
+            <a:pPr lvl="1"/>
+            <a:r>
+              <a:rPr lang="en-IN" dirty="0"/>
+              <a:t> changes version of this package will affect any one of the projects</a:t>
+            </a:r>
+          </a:p>
+          <a:p>
+            <a:pPr lvl="1"/>
+            <a:r>
+              <a:rPr lang="en-IN" dirty="0"/>
+              <a:t> to overcome those create project 2 in virtual environment</a:t>
+            </a:r>
+          </a:p>
+          <a:p>
+            <a:r>
+              <a:rPr lang="en-IN" dirty="0"/>
+              <a:t> </a:t>
+            </a:r>
+            <a:r>
               <a:rPr lang="en-IN" b="1" dirty="0"/>
-              <a:t>Counter : </a:t>
-            </a:r>
-            <a:r>
-              <a:rPr lang="en-IN" dirty="0"/>
-              <a:t>returns frequency as a dictionary.</a:t>
-            </a:r>
-          </a:p>
-          <a:p>
+              <a:t>create VE : </a:t>
+            </a:r>
+            <a:r>
+              <a:rPr lang="en-IN" dirty="0"/>
+              <a:t>python –m </a:t>
+            </a:r>
+            <a:r>
+              <a:rPr lang="en-IN" dirty="0" err="1"/>
+              <a:t>venv</a:t>
+            </a:r>
+            <a:r>
+              <a:rPr lang="en-IN" dirty="0"/>
+              <a:t> </a:t>
+            </a:r>
+            <a:r>
+              <a:rPr lang="en-IN" dirty="0" err="1"/>
+              <a:t>Vename</a:t>
+            </a:r>
+            <a:endParaRPr lang="en-IN" dirty="0"/>
+          </a:p>
+          <a:p>
+            <a:r>
+              <a:rPr lang="en-IN" dirty="0"/>
+              <a:t> </a:t>
+            </a:r>
             <a:r>
               <a:rPr lang="en-IN" b="1" dirty="0"/>
-              <a:t> </a:t>
-            </a:r>
-            <a:r>
-              <a:rPr lang="en-IN" b="1" dirty="0" err="1"/>
-              <a:t>defaultdict</a:t>
-            </a:r>
-            <a:r>
-              <a:rPr lang="en-IN" b="1" dirty="0"/>
-              <a:t> : </a:t>
-            </a:r>
-            <a:r>
-              <a:rPr lang="en-IN" dirty="0"/>
-              <a:t>dictionary with default key as 0.</a:t>
-            </a:r>
-          </a:p>
-          <a:p>
-            <a:r>
-              <a:rPr lang="en-IN" b="1" dirty="0"/>
-              <a:t> </a:t>
+              <a:t>Activation : </a:t>
+            </a:r>
+            <a:r>
+              <a:rPr lang="en-IN" dirty="0"/>
+              <a:t>In </a:t>
+            </a:r>
+            <a:r>
+              <a:rPr lang="en-IN" dirty="0" err="1"/>
+              <a:t>cmd</a:t>
+            </a:r>
+            <a:r>
+              <a:rPr lang="en-IN" dirty="0"/>
+              <a:t> change directory to scripts and enter activate.</a:t>
             </a:r>
           </a:p>
         </p:txBody>
@@ -8099,7 +8189,7 @@
           <p:cNvPr id="4" name="Footer Placeholder 3">
             <a:extLst>
               <a:ext uri="{FF2B5EF4-FFF2-40B4-BE49-F238E27FC236}">
-                <a16:creationId xmlns:a16="http://schemas.microsoft.com/office/drawing/2014/main" id="{7551125C-0612-0BB6-4524-77CDC89E331C}"/>
+                <a16:creationId xmlns:a16="http://schemas.microsoft.com/office/drawing/2014/main" id="{43D502F0-E14F-C473-977F-40A61FF19039}"/>
               </a:ext>
             </a:extLst>
           </p:cNvPr>
@@ -8128,7 +8218,7 @@
           <p:cNvPr id="5" name="Slide Number Placeholder 4">
             <a:extLst>
               <a:ext uri="{FF2B5EF4-FFF2-40B4-BE49-F238E27FC236}">
-                <a16:creationId xmlns:a16="http://schemas.microsoft.com/office/drawing/2014/main" id="{31F5E781-B492-4D2E-A425-D3367CBF888C}"/>
+                <a16:creationId xmlns:a16="http://schemas.microsoft.com/office/drawing/2014/main" id="{6706342E-FF86-F190-355B-93898D5F2A83}"/>
               </a:ext>
             </a:extLst>
           </p:cNvPr>
@@ -8155,7 +8245,7 @@
     </p:spTree>
     <p:extLst>
       <p:ext uri="{BB962C8B-B14F-4D97-AF65-F5344CB8AC3E}">
-        <p14:creationId xmlns:p14="http://schemas.microsoft.com/office/powerpoint/2010/main" val="2843299797"/>
+        <p14:creationId xmlns:p14="http://schemas.microsoft.com/office/powerpoint/2010/main" val="2155345922"/>
       </p:ext>
     </p:extLst>
   </p:cSld>
@@ -8187,7 +8277,7 @@
           <p:cNvPr id="2" name="Title 1">
             <a:extLst>
               <a:ext uri="{FF2B5EF4-FFF2-40B4-BE49-F238E27FC236}">
-                <a16:creationId xmlns:a16="http://schemas.microsoft.com/office/drawing/2014/main" id="{9FDFE934-FCD7-0FF7-3D48-FE377DC2C4BB}"/>
+                <a16:creationId xmlns:a16="http://schemas.microsoft.com/office/drawing/2014/main" id="{5CA56418-8A9A-5805-BCBB-4959E5ABF278}"/>
               </a:ext>
             </a:extLst>
           </p:cNvPr>
@@ -8204,10 +8294,9 @@
           <a:lstStyle/>
           <a:p>
             <a:r>
-              <a:rPr lang="en-GB" dirty="0"/>
-              <a:t>Datetime</a:t>
-            </a:r>
-            <a:endParaRPr lang="en-IN" dirty="0"/>
+              <a:rPr lang="en-IN" dirty="0"/>
+              <a:t>Collections</a:t>
+            </a:r>
           </a:p>
         </p:txBody>
       </p:sp>
@@ -8216,7 +8305,7 @@
           <p:cNvPr id="3" name="Content Placeholder 2">
             <a:extLst>
               <a:ext uri="{FF2B5EF4-FFF2-40B4-BE49-F238E27FC236}">
-                <a16:creationId xmlns:a16="http://schemas.microsoft.com/office/drawing/2014/main" id="{39006957-BA22-F06D-3CB4-AD976E5ED1FC}"/>
+                <a16:creationId xmlns:a16="http://schemas.microsoft.com/office/drawing/2014/main" id="{03DD4096-0D2C-E2BF-FF90-6117481C3C05}"/>
               </a:ext>
             </a:extLst>
           </p:cNvPr>
@@ -8232,7 +8321,42 @@
           <a:bodyPr/>
           <a:lstStyle/>
           <a:p>
-            <a:endParaRPr lang="en-IN"/>
+            <a:r>
+              <a:rPr lang="en-IN" dirty="0"/>
+              <a:t> </a:t>
+            </a:r>
+            <a:r>
+              <a:rPr lang="en-IN" b="1" dirty="0"/>
+              <a:t>Counter : </a:t>
+            </a:r>
+            <a:r>
+              <a:rPr lang="en-IN" dirty="0"/>
+              <a:t>returns frequency as a dictionary.</a:t>
+            </a:r>
+          </a:p>
+          <a:p>
+            <a:r>
+              <a:rPr lang="en-IN" b="1" dirty="0"/>
+              <a:t> </a:t>
+            </a:r>
+            <a:r>
+              <a:rPr lang="en-IN" b="1" dirty="0" err="1"/>
+              <a:t>defaultdict</a:t>
+            </a:r>
+            <a:r>
+              <a:rPr lang="en-IN" b="1" dirty="0"/>
+              <a:t> : </a:t>
+            </a:r>
+            <a:r>
+              <a:rPr lang="en-IN" dirty="0"/>
+              <a:t>dictionary with default key as 0.</a:t>
+            </a:r>
+          </a:p>
+          <a:p>
+            <a:r>
+              <a:rPr lang="en-IN" b="1" dirty="0"/>
+              <a:t> </a:t>
+            </a:r>
           </a:p>
         </p:txBody>
       </p:sp>
@@ -8241,7 +8365,7 @@
           <p:cNvPr id="4" name="Footer Placeholder 3">
             <a:extLst>
               <a:ext uri="{FF2B5EF4-FFF2-40B4-BE49-F238E27FC236}">
-                <a16:creationId xmlns:a16="http://schemas.microsoft.com/office/drawing/2014/main" id="{723E5E67-40AC-20E1-815F-D843004BA175}"/>
+                <a16:creationId xmlns:a16="http://schemas.microsoft.com/office/drawing/2014/main" id="{7551125C-0612-0BB6-4524-77CDC89E331C}"/>
               </a:ext>
             </a:extLst>
           </p:cNvPr>
@@ -8270,7 +8394,7 @@
           <p:cNvPr id="5" name="Slide Number Placeholder 4">
             <a:extLst>
               <a:ext uri="{FF2B5EF4-FFF2-40B4-BE49-F238E27FC236}">
-                <a16:creationId xmlns:a16="http://schemas.microsoft.com/office/drawing/2014/main" id="{C7832505-4646-07D5-87EB-4E8F6703AB14}"/>
+                <a16:creationId xmlns:a16="http://schemas.microsoft.com/office/drawing/2014/main" id="{31F5E781-B492-4D2E-A425-D3367CBF888C}"/>
               </a:ext>
             </a:extLst>
           </p:cNvPr>
@@ -8297,7 +8421,7 @@
     </p:spTree>
     <p:extLst>
       <p:ext uri="{BB962C8B-B14F-4D97-AF65-F5344CB8AC3E}">
-        <p14:creationId xmlns:p14="http://schemas.microsoft.com/office/powerpoint/2010/main" val="682083692"/>
+        <p14:creationId xmlns:p14="http://schemas.microsoft.com/office/powerpoint/2010/main" val="2843299797"/>
       </p:ext>
     </p:extLst>
   </p:cSld>
@@ -8329,7 +8453,7 @@
           <p:cNvPr id="2" name="Title 1">
             <a:extLst>
               <a:ext uri="{FF2B5EF4-FFF2-40B4-BE49-F238E27FC236}">
-                <a16:creationId xmlns:a16="http://schemas.microsoft.com/office/drawing/2014/main" id="{96366A88-CFBD-B97A-00EB-C635FE8A19F8}"/>
+                <a16:creationId xmlns:a16="http://schemas.microsoft.com/office/drawing/2014/main" id="{9FDFE934-FCD7-0FF7-3D48-FE377DC2C4BB}"/>
               </a:ext>
             </a:extLst>
           </p:cNvPr>
@@ -8347,7 +8471,7 @@
           <a:p>
             <a:r>
               <a:rPr lang="en-GB" dirty="0"/>
-              <a:t>OS</a:t>
+              <a:t>Datetime</a:t>
             </a:r>
             <a:endParaRPr lang="en-IN" dirty="0"/>
           </a:p>
@@ -8358,7 +8482,7 @@
           <p:cNvPr id="3" name="Content Placeholder 2">
             <a:extLst>
               <a:ext uri="{FF2B5EF4-FFF2-40B4-BE49-F238E27FC236}">
-                <a16:creationId xmlns:a16="http://schemas.microsoft.com/office/drawing/2014/main" id="{E0C53D46-508B-CE03-C0C5-4A07BB8ECD8A}"/>
+                <a16:creationId xmlns:a16="http://schemas.microsoft.com/office/drawing/2014/main" id="{39006957-BA22-F06D-3CB4-AD976E5ED1FC}"/>
               </a:ext>
             </a:extLst>
           </p:cNvPr>
@@ -8374,7 +8498,19 @@
           <a:bodyPr/>
           <a:lstStyle/>
           <a:p>
-            <a:endParaRPr lang="en-IN"/>
+            <a:r>
+              <a:rPr lang="en-GB" dirty="0"/>
+              <a:t> </a:t>
+            </a:r>
+            <a:r>
+              <a:rPr lang="en-GB" b="1" dirty="0"/>
+              <a:t>Import : </a:t>
+            </a:r>
+            <a:r>
+              <a:rPr lang="en-GB" dirty="0"/>
+              <a:t>import datetime	or	from datetime import *</a:t>
+            </a:r>
+            <a:endParaRPr lang="en-IN" dirty="0"/>
           </a:p>
         </p:txBody>
       </p:sp>
@@ -8383,7 +8519,7 @@
           <p:cNvPr id="4" name="Footer Placeholder 3">
             <a:extLst>
               <a:ext uri="{FF2B5EF4-FFF2-40B4-BE49-F238E27FC236}">
-                <a16:creationId xmlns:a16="http://schemas.microsoft.com/office/drawing/2014/main" id="{C8996E58-34C6-D144-C03C-FBE8CD89090D}"/>
+                <a16:creationId xmlns:a16="http://schemas.microsoft.com/office/drawing/2014/main" id="{723E5E67-40AC-20E1-815F-D843004BA175}"/>
               </a:ext>
             </a:extLst>
           </p:cNvPr>
@@ -8412,7 +8548,7 @@
           <p:cNvPr id="5" name="Slide Number Placeholder 4">
             <a:extLst>
               <a:ext uri="{FF2B5EF4-FFF2-40B4-BE49-F238E27FC236}">
-                <a16:creationId xmlns:a16="http://schemas.microsoft.com/office/drawing/2014/main" id="{A0B8147F-3551-F86D-E2DF-18461434347C}"/>
+                <a16:creationId xmlns:a16="http://schemas.microsoft.com/office/drawing/2014/main" id="{C7832505-4646-07D5-87EB-4E8F6703AB14}"/>
               </a:ext>
             </a:extLst>
           </p:cNvPr>
@@ -8439,7 +8575,7 @@
     </p:spTree>
     <p:extLst>
       <p:ext uri="{BB962C8B-B14F-4D97-AF65-F5344CB8AC3E}">
-        <p14:creationId xmlns:p14="http://schemas.microsoft.com/office/powerpoint/2010/main" val="609168797"/>
+        <p14:creationId xmlns:p14="http://schemas.microsoft.com/office/powerpoint/2010/main" val="682083692"/>
       </p:ext>
     </p:extLst>
   </p:cSld>
@@ -8471,7 +8607,7 @@
           <p:cNvPr id="2" name="Title 1">
             <a:extLst>
               <a:ext uri="{FF2B5EF4-FFF2-40B4-BE49-F238E27FC236}">
-                <a16:creationId xmlns:a16="http://schemas.microsoft.com/office/drawing/2014/main" id="{7907DEEF-0FBD-20D9-2965-3ED3E721BD53}"/>
+                <a16:creationId xmlns:a16="http://schemas.microsoft.com/office/drawing/2014/main" id="{96366A88-CFBD-B97A-00EB-C635FE8A19F8}"/>
               </a:ext>
             </a:extLst>
           </p:cNvPr>
@@ -8489,7 +8625,7 @@
           <a:p>
             <a:r>
               <a:rPr lang="en-GB" dirty="0"/>
-              <a:t>MYSQL Connection</a:t>
+              <a:t>OS</a:t>
             </a:r>
             <a:endParaRPr lang="en-IN" dirty="0"/>
           </a:p>
@@ -8500,7 +8636,7 @@
           <p:cNvPr id="3" name="Content Placeholder 2">
             <a:extLst>
               <a:ext uri="{FF2B5EF4-FFF2-40B4-BE49-F238E27FC236}">
-                <a16:creationId xmlns:a16="http://schemas.microsoft.com/office/drawing/2014/main" id="{BD381BC6-08E5-488F-AD25-3B559783886A}"/>
+                <a16:creationId xmlns:a16="http://schemas.microsoft.com/office/drawing/2014/main" id="{E0C53D46-508B-CE03-C0C5-4A07BB8ECD8A}"/>
               </a:ext>
             </a:extLst>
           </p:cNvPr>
@@ -8517,26 +8653,18 @@
           <a:lstStyle/>
           <a:p>
             <a:r>
-              <a:rPr lang="en-GB" dirty="0"/>
-              <a:t> </a:t>
-            </a:r>
-            <a:r>
-              <a:rPr lang="en-GB" b="1" dirty="0" err="1"/>
-              <a:t>cmd</a:t>
-            </a:r>
-            <a:r>
-              <a:rPr lang="en-GB" b="1" dirty="0"/>
-              <a:t> : pip install </a:t>
-            </a:r>
-            <a:r>
-              <a:rPr lang="en-GB" b="1" dirty="0" err="1"/>
-              <a:t>mysql</a:t>
-            </a:r>
-            <a:r>
-              <a:rPr lang="en-GB" b="1" dirty="0"/>
-              <a:t>-connector-python</a:t>
-            </a:r>
-            <a:endParaRPr lang="en-IN" dirty="0"/>
+              <a:rPr lang="en-IN" b="1" dirty="0"/>
+              <a:t> Import : </a:t>
+            </a:r>
+            <a:r>
+              <a:rPr lang="en-IN" dirty="0"/>
+              <a:t>import </a:t>
+            </a:r>
+            <a:r>
+              <a:rPr lang="en-IN" dirty="0" err="1"/>
+              <a:t>os</a:t>
+            </a:r>
+            <a:endParaRPr lang="en-IN" b="1" dirty="0"/>
           </a:p>
         </p:txBody>
       </p:sp>
@@ -8545,7 +8673,7 @@
           <p:cNvPr id="4" name="Footer Placeholder 3">
             <a:extLst>
               <a:ext uri="{FF2B5EF4-FFF2-40B4-BE49-F238E27FC236}">
-                <a16:creationId xmlns:a16="http://schemas.microsoft.com/office/drawing/2014/main" id="{F48C9E58-D3F1-09C7-FE6C-48D612C2329F}"/>
+                <a16:creationId xmlns:a16="http://schemas.microsoft.com/office/drawing/2014/main" id="{C8996E58-34C6-D144-C03C-FBE8CD89090D}"/>
               </a:ext>
             </a:extLst>
           </p:cNvPr>
@@ -8574,7 +8702,7 @@
           <p:cNvPr id="5" name="Slide Number Placeholder 4">
             <a:extLst>
               <a:ext uri="{FF2B5EF4-FFF2-40B4-BE49-F238E27FC236}">
-                <a16:creationId xmlns:a16="http://schemas.microsoft.com/office/drawing/2014/main" id="{9208607B-2CC6-16D0-6988-4DB6A51DD176}"/>
+                <a16:creationId xmlns:a16="http://schemas.microsoft.com/office/drawing/2014/main" id="{A0B8147F-3551-F86D-E2DF-18461434347C}"/>
               </a:ext>
             </a:extLst>
           </p:cNvPr>
@@ -8601,7 +8729,7 @@
     </p:spTree>
     <p:extLst>
       <p:ext uri="{BB962C8B-B14F-4D97-AF65-F5344CB8AC3E}">
-        <p14:creationId xmlns:p14="http://schemas.microsoft.com/office/powerpoint/2010/main" val="2713769145"/>
+        <p14:creationId xmlns:p14="http://schemas.microsoft.com/office/powerpoint/2010/main" val="609168797"/>
       </p:ext>
     </p:extLst>
   </p:cSld>
@@ -8633,7 +8761,7 @@
           <p:cNvPr id="2" name="Title 1">
             <a:extLst>
               <a:ext uri="{FF2B5EF4-FFF2-40B4-BE49-F238E27FC236}">
-                <a16:creationId xmlns:a16="http://schemas.microsoft.com/office/drawing/2014/main" id="{9E6DD218-3F31-33F2-8CDB-7DA5BBC005B5}"/>
+                <a16:creationId xmlns:a16="http://schemas.microsoft.com/office/drawing/2014/main" id="{D70072C2-CAC4-C990-6527-C89C83DBC442}"/>
               </a:ext>
             </a:extLst>
           </p:cNvPr>
@@ -8651,7 +8779,7 @@
           <a:p>
             <a:r>
               <a:rPr lang="en-GB" dirty="0"/>
-              <a:t>Excel</a:t>
+              <a:t>Email</a:t>
             </a:r>
             <a:endParaRPr lang="en-IN" dirty="0"/>
           </a:p>
@@ -8662,7 +8790,7 @@
           <p:cNvPr id="3" name="Content Placeholder 2">
             <a:extLst>
               <a:ext uri="{FF2B5EF4-FFF2-40B4-BE49-F238E27FC236}">
-                <a16:creationId xmlns:a16="http://schemas.microsoft.com/office/drawing/2014/main" id="{500E92CE-D89D-F2AE-C187-40E84467AA4A}"/>
+                <a16:creationId xmlns:a16="http://schemas.microsoft.com/office/drawing/2014/main" id="{96D6ED05-9C2A-02BA-AAD4-D9D580B91181}"/>
               </a:ext>
             </a:extLst>
           </p:cNvPr>
@@ -8678,7 +8806,34 @@
           <a:bodyPr/>
           <a:lstStyle/>
           <a:p>
-            <a:endParaRPr lang="en-IN"/>
+            <a:r>
+              <a:rPr lang="en-GB" dirty="0"/>
+              <a:t> </a:t>
+            </a:r>
+            <a:r>
+              <a:rPr lang="en-GB" b="1" dirty="0"/>
+              <a:t>Package : </a:t>
+            </a:r>
+            <a:r>
+              <a:rPr lang="en-GB" dirty="0" err="1"/>
+              <a:t>smtplib</a:t>
+            </a:r>
+            <a:r>
+              <a:rPr lang="en-GB" dirty="0"/>
+              <a:t> , </a:t>
+            </a:r>
+            <a:r>
+              <a:rPr lang="en-GB" dirty="0" err="1"/>
+              <a:t>mimetype</a:t>
+            </a:r>
+            <a:endParaRPr lang="en-GB" dirty="0"/>
+          </a:p>
+          <a:p>
+            <a:r>
+              <a:rPr lang="en-GB" dirty="0"/>
+              <a:t> </a:t>
+            </a:r>
+            <a:endParaRPr lang="en-IN" dirty="0"/>
           </a:p>
         </p:txBody>
       </p:sp>
@@ -8687,7 +8842,7 @@
           <p:cNvPr id="4" name="Footer Placeholder 3">
             <a:extLst>
               <a:ext uri="{FF2B5EF4-FFF2-40B4-BE49-F238E27FC236}">
-                <a16:creationId xmlns:a16="http://schemas.microsoft.com/office/drawing/2014/main" id="{55C92561-856D-7F47-3708-294C94D9D3BA}"/>
+                <a16:creationId xmlns:a16="http://schemas.microsoft.com/office/drawing/2014/main" id="{EC9EC30D-1289-FA18-7D84-4F3CF09AC37C}"/>
               </a:ext>
             </a:extLst>
           </p:cNvPr>
@@ -8716,7 +8871,7 @@
           <p:cNvPr id="5" name="Slide Number Placeholder 4">
             <a:extLst>
               <a:ext uri="{FF2B5EF4-FFF2-40B4-BE49-F238E27FC236}">
-                <a16:creationId xmlns:a16="http://schemas.microsoft.com/office/drawing/2014/main" id="{5A544846-71AE-4EED-7C71-69CBD266AB5B}"/>
+                <a16:creationId xmlns:a16="http://schemas.microsoft.com/office/drawing/2014/main" id="{B42736E2-8304-D2B5-5ADA-5F4CC1D080FA}"/>
               </a:ext>
             </a:extLst>
           </p:cNvPr>
@@ -8743,7 +8898,7 @@
     </p:spTree>
     <p:extLst>
       <p:ext uri="{BB962C8B-B14F-4D97-AF65-F5344CB8AC3E}">
-        <p14:creationId xmlns:p14="http://schemas.microsoft.com/office/powerpoint/2010/main" val="1926792215"/>
+        <p14:creationId xmlns:p14="http://schemas.microsoft.com/office/powerpoint/2010/main" val="479021944"/>
       </p:ext>
     </p:extLst>
   </p:cSld>
@@ -8775,7 +8930,7 @@
           <p:cNvPr id="2" name="Title 1">
             <a:extLst>
               <a:ext uri="{FF2B5EF4-FFF2-40B4-BE49-F238E27FC236}">
-                <a16:creationId xmlns:a16="http://schemas.microsoft.com/office/drawing/2014/main" id="{F0317199-3FE4-4011-E431-B733E11096CA}"/>
+                <a16:creationId xmlns:a16="http://schemas.microsoft.com/office/drawing/2014/main" id="{7907DEEF-0FBD-20D9-2965-3ED3E721BD53}"/>
               </a:ext>
             </a:extLst>
           </p:cNvPr>
@@ -8793,7 +8948,7 @@
           <a:p>
             <a:r>
               <a:rPr lang="en-GB" dirty="0"/>
-              <a:t>PDF</a:t>
+              <a:t>MYSQL Connection</a:t>
             </a:r>
             <a:endParaRPr lang="en-IN" dirty="0"/>
           </a:p>
@@ -8804,7 +8959,7 @@
           <p:cNvPr id="3" name="Content Placeholder 2">
             <a:extLst>
               <a:ext uri="{FF2B5EF4-FFF2-40B4-BE49-F238E27FC236}">
-                <a16:creationId xmlns:a16="http://schemas.microsoft.com/office/drawing/2014/main" id="{3417A133-ACB9-E81D-EC4A-0A5A4CF5DEE0}"/>
+                <a16:creationId xmlns:a16="http://schemas.microsoft.com/office/drawing/2014/main" id="{BD381BC6-08E5-488F-AD25-3B559783886A}"/>
               </a:ext>
             </a:extLst>
           </p:cNvPr>
@@ -8820,7 +8975,27 @@
           <a:bodyPr/>
           <a:lstStyle/>
           <a:p>
-            <a:endParaRPr lang="en-IN"/>
+            <a:r>
+              <a:rPr lang="en-GB" dirty="0"/>
+              <a:t> </a:t>
+            </a:r>
+            <a:r>
+              <a:rPr lang="en-GB" b="1" dirty="0" err="1"/>
+              <a:t>cmd</a:t>
+            </a:r>
+            <a:r>
+              <a:rPr lang="en-GB" b="1" dirty="0"/>
+              <a:t> : pip install </a:t>
+            </a:r>
+            <a:r>
+              <a:rPr lang="en-GB" b="1" dirty="0" err="1"/>
+              <a:t>mysql</a:t>
+            </a:r>
+            <a:r>
+              <a:rPr lang="en-GB" b="1" dirty="0"/>
+              <a:t>-connector-python</a:t>
+            </a:r>
+            <a:endParaRPr lang="en-IN" dirty="0"/>
           </a:p>
         </p:txBody>
       </p:sp>
@@ -8829,7 +9004,7 @@
           <p:cNvPr id="4" name="Footer Placeholder 3">
             <a:extLst>
               <a:ext uri="{FF2B5EF4-FFF2-40B4-BE49-F238E27FC236}">
-                <a16:creationId xmlns:a16="http://schemas.microsoft.com/office/drawing/2014/main" id="{06D2FE4E-A7CE-4D3B-42B3-8DD37D027516}"/>
+                <a16:creationId xmlns:a16="http://schemas.microsoft.com/office/drawing/2014/main" id="{F48C9E58-D3F1-09C7-FE6C-48D612C2329F}"/>
               </a:ext>
             </a:extLst>
           </p:cNvPr>
@@ -8858,7 +9033,7 @@
           <p:cNvPr id="5" name="Slide Number Placeholder 4">
             <a:extLst>
               <a:ext uri="{FF2B5EF4-FFF2-40B4-BE49-F238E27FC236}">
-                <a16:creationId xmlns:a16="http://schemas.microsoft.com/office/drawing/2014/main" id="{CF0277D4-6825-FE55-E325-241E05EE90B4}"/>
+                <a16:creationId xmlns:a16="http://schemas.microsoft.com/office/drawing/2014/main" id="{9208607B-2CC6-16D0-6988-4DB6A51DD176}"/>
               </a:ext>
             </a:extLst>
           </p:cNvPr>
@@ -8885,7 +9060,7 @@
     </p:spTree>
     <p:extLst>
       <p:ext uri="{BB962C8B-B14F-4D97-AF65-F5344CB8AC3E}">
-        <p14:creationId xmlns:p14="http://schemas.microsoft.com/office/powerpoint/2010/main" val="1572536975"/>
+        <p14:creationId xmlns:p14="http://schemas.microsoft.com/office/powerpoint/2010/main" val="2713769145"/>
       </p:ext>
     </p:extLst>
   </p:cSld>
@@ -8917,7 +9092,7 @@
           <p:cNvPr id="2" name="Title 1">
             <a:extLst>
               <a:ext uri="{FF2B5EF4-FFF2-40B4-BE49-F238E27FC236}">
-                <a16:creationId xmlns:a16="http://schemas.microsoft.com/office/drawing/2014/main" id="{D70072C2-CAC4-C990-6527-C89C83DBC442}"/>
+                <a16:creationId xmlns:a16="http://schemas.microsoft.com/office/drawing/2014/main" id="{9E6DD218-3F31-33F2-8CDB-7DA5BBC005B5}"/>
               </a:ext>
             </a:extLst>
           </p:cNvPr>
@@ -8935,7 +9110,7 @@
           <a:p>
             <a:r>
               <a:rPr lang="en-GB" dirty="0"/>
-              <a:t>Email</a:t>
+              <a:t>Excel</a:t>
             </a:r>
             <a:endParaRPr lang="en-IN" dirty="0"/>
           </a:p>
@@ -8946,7 +9121,7 @@
           <p:cNvPr id="3" name="Content Placeholder 2">
             <a:extLst>
               <a:ext uri="{FF2B5EF4-FFF2-40B4-BE49-F238E27FC236}">
-                <a16:creationId xmlns:a16="http://schemas.microsoft.com/office/drawing/2014/main" id="{96D6ED05-9C2A-02BA-AAD4-D9D580B91181}"/>
+                <a16:creationId xmlns:a16="http://schemas.microsoft.com/office/drawing/2014/main" id="{500E92CE-D89D-F2AE-C187-40E84467AA4A}"/>
               </a:ext>
             </a:extLst>
           </p:cNvPr>
@@ -8971,7 +9146,7 @@
           <p:cNvPr id="4" name="Footer Placeholder 3">
             <a:extLst>
               <a:ext uri="{FF2B5EF4-FFF2-40B4-BE49-F238E27FC236}">
-                <a16:creationId xmlns:a16="http://schemas.microsoft.com/office/drawing/2014/main" id="{EC9EC30D-1289-FA18-7D84-4F3CF09AC37C}"/>
+                <a16:creationId xmlns:a16="http://schemas.microsoft.com/office/drawing/2014/main" id="{55C92561-856D-7F47-3708-294C94D9D3BA}"/>
               </a:ext>
             </a:extLst>
           </p:cNvPr>
@@ -9000,7 +9175,7 @@
           <p:cNvPr id="5" name="Slide Number Placeholder 4">
             <a:extLst>
               <a:ext uri="{FF2B5EF4-FFF2-40B4-BE49-F238E27FC236}">
-                <a16:creationId xmlns:a16="http://schemas.microsoft.com/office/drawing/2014/main" id="{B42736E2-8304-D2B5-5ADA-5F4CC1D080FA}"/>
+                <a16:creationId xmlns:a16="http://schemas.microsoft.com/office/drawing/2014/main" id="{5A544846-71AE-4EED-7C71-69CBD266AB5B}"/>
               </a:ext>
             </a:extLst>
           </p:cNvPr>
@@ -9027,7 +9202,7 @@
     </p:spTree>
     <p:extLst>
       <p:ext uri="{BB962C8B-B14F-4D97-AF65-F5344CB8AC3E}">
-        <p14:creationId xmlns:p14="http://schemas.microsoft.com/office/powerpoint/2010/main" val="479021944"/>
+        <p14:creationId xmlns:p14="http://schemas.microsoft.com/office/powerpoint/2010/main" val="1926792215"/>
       </p:ext>
     </p:extLst>
   </p:cSld>
@@ -9998,7 +10173,7 @@
           <p:cNvPr id="2" name="Title 1">
             <a:extLst>
               <a:ext uri="{FF2B5EF4-FFF2-40B4-BE49-F238E27FC236}">
-                <a16:creationId xmlns:a16="http://schemas.microsoft.com/office/drawing/2014/main" id="{05537F52-D920-165C-539D-D4323D2D50DF}"/>
+                <a16:creationId xmlns:a16="http://schemas.microsoft.com/office/drawing/2014/main" id="{F0317199-3FE4-4011-E431-B733E11096CA}"/>
               </a:ext>
             </a:extLst>
           </p:cNvPr>
@@ -10016,7 +10191,7 @@
           <a:p>
             <a:r>
               <a:rPr lang="en-GB" dirty="0"/>
-              <a:t>Custom Packages</a:t>
+              <a:t>PDF</a:t>
             </a:r>
             <a:endParaRPr lang="en-IN" dirty="0"/>
           </a:p>
@@ -10027,7 +10202,7 @@
           <p:cNvPr id="3" name="Content Placeholder 2">
             <a:extLst>
               <a:ext uri="{FF2B5EF4-FFF2-40B4-BE49-F238E27FC236}">
-                <a16:creationId xmlns:a16="http://schemas.microsoft.com/office/drawing/2014/main" id="{0AAE2362-0572-BFD5-F478-A0EF74AB9E1A}"/>
+                <a16:creationId xmlns:a16="http://schemas.microsoft.com/office/drawing/2014/main" id="{3417A133-ACB9-E81D-EC4A-0A5A4CF5DEE0}"/>
               </a:ext>
             </a:extLst>
           </p:cNvPr>
@@ -10043,89 +10218,7 @@
           <a:bodyPr/>
           <a:lstStyle/>
           <a:p>
-            <a:r>
-              <a:rPr lang="en-IN" dirty="0"/>
-              <a:t> Create own Packages.</a:t>
-            </a:r>
-          </a:p>
-          <a:p>
-            <a:r>
-              <a:rPr lang="en-IN" dirty="0"/>
-              <a:t> </a:t>
-            </a:r>
-            <a:r>
-              <a:rPr lang="en-IN" b="1" dirty="0"/>
-              <a:t>Steps : </a:t>
-            </a:r>
-          </a:p>
-          <a:p>
-            <a:pPr lvl="1"/>
-            <a:r>
-              <a:rPr lang="en-IN" b="1" dirty="0"/>
-              <a:t> </a:t>
-            </a:r>
-            <a:r>
-              <a:rPr lang="en-IN" dirty="0"/>
-              <a:t>create a folder</a:t>
-            </a:r>
-          </a:p>
-          <a:p>
-            <a:pPr lvl="1"/>
-            <a:r>
-              <a:rPr lang="en-IN" dirty="0"/>
-              <a:t> inside that folder add </a:t>
-            </a:r>
-            <a:r>
-              <a:rPr lang="en-IN" dirty="0" err="1"/>
-              <a:t>src</a:t>
-            </a:r>
-            <a:r>
-              <a:rPr lang="en-IN" dirty="0"/>
-              <a:t> folder , </a:t>
-            </a:r>
-            <a:r>
-              <a:rPr lang="en-IN" dirty="0" err="1"/>
-              <a:t>gitignore</a:t>
-            </a:r>
-            <a:r>
-              <a:rPr lang="en-IN" dirty="0"/>
-              <a:t> , readme , license , </a:t>
-            </a:r>
-            <a:r>
-              <a:rPr lang="en-IN" dirty="0" err="1"/>
-              <a:t>venv</a:t>
-            </a:r>
-            <a:r>
-              <a:rPr lang="en-IN" dirty="0"/>
-              <a:t> , </a:t>
-            </a:r>
-            <a:r>
-              <a:rPr lang="en-IN" dirty="0" err="1"/>
-              <a:t>pyproject.toml</a:t>
-            </a:r>
-            <a:endParaRPr lang="en-IN" dirty="0"/>
-          </a:p>
-          <a:p>
-            <a:pPr lvl="1"/>
-            <a:r>
-              <a:rPr lang="en-IN" dirty="0"/>
-              <a:t> </a:t>
-            </a:r>
-            <a:r>
-              <a:rPr lang="en-IN" dirty="0" err="1"/>
-              <a:t>pypi</a:t>
-            </a:r>
-            <a:r>
-              <a:rPr lang="en-IN" dirty="0"/>
-              <a:t> account login</a:t>
-            </a:r>
-          </a:p>
-          <a:p>
-            <a:pPr lvl="1"/>
-            <a:r>
-              <a:rPr lang="en-IN" dirty="0"/>
-              <a:t> </a:t>
-            </a:r>
+            <a:endParaRPr lang="en-IN" dirty="0"/>
           </a:p>
         </p:txBody>
       </p:sp>
@@ -10134,7 +10227,7 @@
           <p:cNvPr id="4" name="Footer Placeholder 3">
             <a:extLst>
               <a:ext uri="{FF2B5EF4-FFF2-40B4-BE49-F238E27FC236}">
-                <a16:creationId xmlns:a16="http://schemas.microsoft.com/office/drawing/2014/main" id="{DFE71CE4-9080-389F-EBAC-A28DAE84DAEE}"/>
+                <a16:creationId xmlns:a16="http://schemas.microsoft.com/office/drawing/2014/main" id="{06D2FE4E-A7CE-4D3B-42B3-8DD37D027516}"/>
               </a:ext>
             </a:extLst>
           </p:cNvPr>
@@ -10163,7 +10256,7 @@
           <p:cNvPr id="5" name="Slide Number Placeholder 4">
             <a:extLst>
               <a:ext uri="{FF2B5EF4-FFF2-40B4-BE49-F238E27FC236}">
-                <a16:creationId xmlns:a16="http://schemas.microsoft.com/office/drawing/2014/main" id="{08D0C57D-0999-D180-8AC1-D9F2F4C92A21}"/>
+                <a16:creationId xmlns:a16="http://schemas.microsoft.com/office/drawing/2014/main" id="{CF0277D4-6825-FE55-E325-241E05EE90B4}"/>
               </a:ext>
             </a:extLst>
           </p:cNvPr>
@@ -10190,7 +10283,7 @@
     </p:spTree>
     <p:extLst>
       <p:ext uri="{BB962C8B-B14F-4D97-AF65-F5344CB8AC3E}">
-        <p14:creationId xmlns:p14="http://schemas.microsoft.com/office/powerpoint/2010/main" val="2724122432"/>
+        <p14:creationId xmlns:p14="http://schemas.microsoft.com/office/powerpoint/2010/main" val="1572536975"/>
       </p:ext>
     </p:extLst>
   </p:cSld>
@@ -10222,7 +10315,7 @@
           <p:cNvPr id="2" name="Title 1">
             <a:extLst>
               <a:ext uri="{FF2B5EF4-FFF2-40B4-BE49-F238E27FC236}">
-                <a16:creationId xmlns:a16="http://schemas.microsoft.com/office/drawing/2014/main" id="{2CEA5BDF-9F05-F624-FCF1-39C85E1A3DE7}"/>
+                <a16:creationId xmlns:a16="http://schemas.microsoft.com/office/drawing/2014/main" id="{05537F52-D920-165C-539D-D4323D2D50DF}"/>
               </a:ext>
             </a:extLst>
           </p:cNvPr>
@@ -10240,7 +10333,7 @@
           <a:p>
             <a:r>
               <a:rPr lang="en-GB" dirty="0"/>
-              <a:t>Web &amp; GUI Development</a:t>
+              <a:t>Custom Packages</a:t>
             </a:r>
             <a:endParaRPr lang="en-IN" dirty="0"/>
           </a:p>
@@ -10251,7 +10344,7 @@
           <p:cNvPr id="3" name="Content Placeholder 2">
             <a:extLst>
               <a:ext uri="{FF2B5EF4-FFF2-40B4-BE49-F238E27FC236}">
-                <a16:creationId xmlns:a16="http://schemas.microsoft.com/office/drawing/2014/main" id="{3F654F39-106A-8921-8452-34F301506A96}"/>
+                <a16:creationId xmlns:a16="http://schemas.microsoft.com/office/drawing/2014/main" id="{0AAE2362-0572-BFD5-F478-A0EF74AB9E1A}"/>
               </a:ext>
             </a:extLst>
           </p:cNvPr>
@@ -10267,7 +10360,104 @@
           <a:bodyPr/>
           <a:lstStyle/>
           <a:p>
-            <a:endParaRPr lang="en-IN"/>
+            <a:r>
+              <a:rPr lang="en-IN" dirty="0"/>
+              <a:t> Create own Packages.</a:t>
+            </a:r>
+          </a:p>
+          <a:p>
+            <a:r>
+              <a:rPr lang="en-IN" dirty="0"/>
+              <a:t> </a:t>
+            </a:r>
+            <a:r>
+              <a:rPr lang="en-IN" b="1" dirty="0"/>
+              <a:t>Steps : </a:t>
+            </a:r>
+          </a:p>
+          <a:p>
+            <a:pPr lvl="1"/>
+            <a:r>
+              <a:rPr lang="en-IN" b="1" dirty="0"/>
+              <a:t> </a:t>
+            </a:r>
+            <a:r>
+              <a:rPr lang="en-IN" dirty="0"/>
+              <a:t>create a folder</a:t>
+            </a:r>
+          </a:p>
+          <a:p>
+            <a:pPr lvl="1"/>
+            <a:r>
+              <a:rPr lang="en-IN" dirty="0"/>
+              <a:t> inside that folder add </a:t>
+            </a:r>
+            <a:r>
+              <a:rPr lang="en-IN" dirty="0" err="1"/>
+              <a:t>src</a:t>
+            </a:r>
+            <a:r>
+              <a:rPr lang="en-IN" dirty="0"/>
+              <a:t> folder , </a:t>
+            </a:r>
+            <a:r>
+              <a:rPr lang="en-IN" dirty="0" err="1"/>
+              <a:t>gitignore</a:t>
+            </a:r>
+            <a:r>
+              <a:rPr lang="en-IN" dirty="0"/>
+              <a:t> , readme , license , </a:t>
+            </a:r>
+            <a:r>
+              <a:rPr lang="en-IN" dirty="0" err="1"/>
+              <a:t>venv</a:t>
+            </a:r>
+            <a:r>
+              <a:rPr lang="en-IN" dirty="0"/>
+              <a:t> , </a:t>
+            </a:r>
+            <a:r>
+              <a:rPr lang="en-IN" dirty="0" err="1"/>
+              <a:t>pyproject.toml</a:t>
+            </a:r>
+            <a:endParaRPr lang="en-IN" dirty="0"/>
+          </a:p>
+          <a:p>
+            <a:pPr lvl="1"/>
+            <a:r>
+              <a:rPr lang="en-IN" dirty="0"/>
+              <a:t> </a:t>
+            </a:r>
+            <a:r>
+              <a:rPr lang="en-IN" dirty="0" err="1"/>
+              <a:t>pypi</a:t>
+            </a:r>
+            <a:r>
+              <a:rPr lang="en-IN" dirty="0"/>
+              <a:t> account login</a:t>
+            </a:r>
+          </a:p>
+          <a:p>
+            <a:pPr lvl="1"/>
+            <a:r>
+              <a:rPr lang="en-IN" dirty="0"/>
+              <a:t> publish the branch in GitHub.</a:t>
+            </a:r>
+          </a:p>
+          <a:p>
+            <a:pPr lvl="1"/>
+            <a:r>
+              <a:rPr lang="en-IN" dirty="0"/>
+              <a:t> on </a:t>
+            </a:r>
+            <a:r>
+              <a:rPr lang="en-IN" dirty="0" err="1"/>
+              <a:t>cmd</a:t>
+            </a:r>
+            <a:r>
+              <a:rPr lang="en-IN" dirty="0"/>
+              <a:t> push the folder</a:t>
+            </a:r>
           </a:p>
         </p:txBody>
       </p:sp>
@@ -10276,7 +10466,7 @@
           <p:cNvPr id="4" name="Footer Placeholder 3">
             <a:extLst>
               <a:ext uri="{FF2B5EF4-FFF2-40B4-BE49-F238E27FC236}">
-                <a16:creationId xmlns:a16="http://schemas.microsoft.com/office/drawing/2014/main" id="{B6211910-FFBC-E796-7537-DC267EB214BD}"/>
+                <a16:creationId xmlns:a16="http://schemas.microsoft.com/office/drawing/2014/main" id="{DFE71CE4-9080-389F-EBAC-A28DAE84DAEE}"/>
               </a:ext>
             </a:extLst>
           </p:cNvPr>
@@ -10305,7 +10495,7 @@
           <p:cNvPr id="5" name="Slide Number Placeholder 4">
             <a:extLst>
               <a:ext uri="{FF2B5EF4-FFF2-40B4-BE49-F238E27FC236}">
-                <a16:creationId xmlns:a16="http://schemas.microsoft.com/office/drawing/2014/main" id="{634CE741-738C-5294-3111-4971DF04E698}"/>
+                <a16:creationId xmlns:a16="http://schemas.microsoft.com/office/drawing/2014/main" id="{08D0C57D-0999-D180-8AC1-D9F2F4C92A21}"/>
               </a:ext>
             </a:extLst>
           </p:cNvPr>
@@ -10332,7 +10522,7 @@
     </p:spTree>
     <p:extLst>
       <p:ext uri="{BB962C8B-B14F-4D97-AF65-F5344CB8AC3E}">
-        <p14:creationId xmlns:p14="http://schemas.microsoft.com/office/powerpoint/2010/main" val="35491570"/>
+        <p14:creationId xmlns:p14="http://schemas.microsoft.com/office/powerpoint/2010/main" val="2724122432"/>
       </p:ext>
     </p:extLst>
   </p:cSld>
@@ -10364,7 +10554,7 @@
           <p:cNvPr id="2" name="Title 1">
             <a:extLst>
               <a:ext uri="{FF2B5EF4-FFF2-40B4-BE49-F238E27FC236}">
-                <a16:creationId xmlns:a16="http://schemas.microsoft.com/office/drawing/2014/main" id="{0FAC2044-7BC7-BE81-4358-3C5D49931A58}"/>
+                <a16:creationId xmlns:a16="http://schemas.microsoft.com/office/drawing/2014/main" id="{EA46A9CF-2C01-C94A-DFD6-EFFFA8132FF4}"/>
               </a:ext>
             </a:extLst>
           </p:cNvPr>
@@ -10381,10 +10571,9 @@
           <a:lstStyle/>
           <a:p>
             <a:r>
-              <a:rPr lang="en-GB" dirty="0" err="1"/>
-              <a:t>CustomTkinter</a:t>
-            </a:r>
-            <a:endParaRPr lang="en-IN" dirty="0"/>
+              <a:rPr lang="en-IN" dirty="0"/>
+              <a:t>Folder Structure</a:t>
+            </a:r>
           </a:p>
         </p:txBody>
       </p:sp>
@@ -10393,7 +10582,7 @@
           <p:cNvPr id="3" name="Content Placeholder 2">
             <a:extLst>
               <a:ext uri="{FF2B5EF4-FFF2-40B4-BE49-F238E27FC236}">
-                <a16:creationId xmlns:a16="http://schemas.microsoft.com/office/drawing/2014/main" id="{69841D62-3F38-AD65-B1BF-48BF3A14F8B7}"/>
+                <a16:creationId xmlns:a16="http://schemas.microsoft.com/office/drawing/2014/main" id="{2839D2C2-24AC-AFC4-E450-8CABA8F02A1E}"/>
               </a:ext>
             </a:extLst>
           </p:cNvPr>
@@ -10409,22 +10598,6 @@
           <a:bodyPr/>
           <a:lstStyle/>
           <a:p>
-            <a:r>
-              <a:rPr lang="en-GB" dirty="0"/>
-              <a:t> </a:t>
-            </a:r>
-            <a:r>
-              <a:rPr lang="en-GB" b="1" dirty="0" err="1"/>
-              <a:t>cmd</a:t>
-            </a:r>
-            <a:r>
-              <a:rPr lang="en-GB" b="1" dirty="0"/>
-              <a:t> : pip install </a:t>
-            </a:r>
-            <a:r>
-              <a:rPr lang="en-GB" b="1" dirty="0" err="1"/>
-              <a:t>customtkinter</a:t>
-            </a:r>
             <a:endParaRPr lang="en-IN" dirty="0"/>
           </a:p>
         </p:txBody>
@@ -10434,7 +10607,7 @@
           <p:cNvPr id="4" name="Footer Placeholder 3">
             <a:extLst>
               <a:ext uri="{FF2B5EF4-FFF2-40B4-BE49-F238E27FC236}">
-                <a16:creationId xmlns:a16="http://schemas.microsoft.com/office/drawing/2014/main" id="{889662F6-22D2-D1A9-DF10-54B94C79C5D2}"/>
+                <a16:creationId xmlns:a16="http://schemas.microsoft.com/office/drawing/2014/main" id="{8367D499-21CA-1608-F638-E9171FD79A35}"/>
               </a:ext>
             </a:extLst>
           </p:cNvPr>
@@ -10463,7 +10636,7 @@
           <p:cNvPr id="5" name="Slide Number Placeholder 4">
             <a:extLst>
               <a:ext uri="{FF2B5EF4-FFF2-40B4-BE49-F238E27FC236}">
-                <a16:creationId xmlns:a16="http://schemas.microsoft.com/office/drawing/2014/main" id="{4FCBC552-3D1D-6F58-3410-DBE1BCE8AF7F}"/>
+                <a16:creationId xmlns:a16="http://schemas.microsoft.com/office/drawing/2014/main" id="{2FE49377-ACB1-2199-795C-1989FA4FA786}"/>
               </a:ext>
             </a:extLst>
           </p:cNvPr>
@@ -10490,7 +10663,7 @@
     </p:spTree>
     <p:extLst>
       <p:ext uri="{BB962C8B-B14F-4D97-AF65-F5344CB8AC3E}">
-        <p14:creationId xmlns:p14="http://schemas.microsoft.com/office/powerpoint/2010/main" val="3562287446"/>
+        <p14:creationId xmlns:p14="http://schemas.microsoft.com/office/powerpoint/2010/main" val="1743211506"/>
       </p:ext>
     </p:extLst>
   </p:cSld>
@@ -10522,7 +10695,7 @@
           <p:cNvPr id="2" name="Title 1">
             <a:extLst>
               <a:ext uri="{FF2B5EF4-FFF2-40B4-BE49-F238E27FC236}">
-                <a16:creationId xmlns:a16="http://schemas.microsoft.com/office/drawing/2014/main" id="{76B7B38D-DCBD-9C6B-CD51-7A408A67FAD1}"/>
+                <a16:creationId xmlns:a16="http://schemas.microsoft.com/office/drawing/2014/main" id="{2CEA5BDF-9F05-F624-FCF1-39C85E1A3DE7}"/>
               </a:ext>
             </a:extLst>
           </p:cNvPr>
@@ -10539,16 +10712,8 @@
           <a:lstStyle/>
           <a:p>
             <a:r>
-              <a:rPr lang="en-GB" dirty="0" err="1"/>
-              <a:t>Kivy</a:t>
-            </a:r>
-            <a:r>
               <a:rPr lang="en-GB" dirty="0"/>
-              <a:t> &amp; </a:t>
-            </a:r>
-            <a:r>
-              <a:rPr lang="en-GB" dirty="0" err="1"/>
-              <a:t>Kivymd</a:t>
+              <a:t>Web &amp; GUI Development</a:t>
             </a:r>
             <a:endParaRPr lang="en-IN" dirty="0"/>
           </a:p>
@@ -10559,7 +10724,7 @@
           <p:cNvPr id="3" name="Content Placeholder 2">
             <a:extLst>
               <a:ext uri="{FF2B5EF4-FFF2-40B4-BE49-F238E27FC236}">
-                <a16:creationId xmlns:a16="http://schemas.microsoft.com/office/drawing/2014/main" id="{55BFC815-5867-C2BB-884C-F3691F93B019}"/>
+                <a16:creationId xmlns:a16="http://schemas.microsoft.com/office/drawing/2014/main" id="{3F654F39-106A-8921-8452-34F301506A96}"/>
               </a:ext>
             </a:extLst>
           </p:cNvPr>
@@ -10575,31 +10740,7 @@
           <a:bodyPr/>
           <a:lstStyle/>
           <a:p>
-            <a:r>
-              <a:rPr lang="en-GB" dirty="0"/>
-              <a:t> </a:t>
-            </a:r>
-            <a:r>
-              <a:rPr lang="en-GB" b="1" dirty="0" err="1"/>
-              <a:t>cmd</a:t>
-            </a:r>
-            <a:r>
-              <a:rPr lang="en-GB" b="1" dirty="0"/>
-              <a:t> : pip install </a:t>
-            </a:r>
-            <a:r>
-              <a:rPr lang="en-GB" b="1" dirty="0" err="1"/>
-              <a:t>kivy</a:t>
-            </a:r>
-            <a:r>
-              <a:rPr lang="en-GB" b="1" dirty="0"/>
-              <a:t> </a:t>
-            </a:r>
-            <a:r>
-              <a:rPr lang="en-GB" b="1" dirty="0" err="1"/>
-              <a:t>kivymd</a:t>
-            </a:r>
-            <a:endParaRPr lang="en-IN" dirty="0"/>
+            <a:endParaRPr lang="en-IN"/>
           </a:p>
         </p:txBody>
       </p:sp>
@@ -10608,7 +10749,7 @@
           <p:cNvPr id="4" name="Footer Placeholder 3">
             <a:extLst>
               <a:ext uri="{FF2B5EF4-FFF2-40B4-BE49-F238E27FC236}">
-                <a16:creationId xmlns:a16="http://schemas.microsoft.com/office/drawing/2014/main" id="{747B2B24-B4CD-D9F0-D1F0-C426E572C6F6}"/>
+                <a16:creationId xmlns:a16="http://schemas.microsoft.com/office/drawing/2014/main" id="{B6211910-FFBC-E796-7537-DC267EB214BD}"/>
               </a:ext>
             </a:extLst>
           </p:cNvPr>
@@ -10637,7 +10778,7 @@
           <p:cNvPr id="5" name="Slide Number Placeholder 4">
             <a:extLst>
               <a:ext uri="{FF2B5EF4-FFF2-40B4-BE49-F238E27FC236}">
-                <a16:creationId xmlns:a16="http://schemas.microsoft.com/office/drawing/2014/main" id="{8EC70CEB-FD02-B13C-90CC-1F1AACC0FCAC}"/>
+                <a16:creationId xmlns:a16="http://schemas.microsoft.com/office/drawing/2014/main" id="{634CE741-738C-5294-3111-4971DF04E698}"/>
               </a:ext>
             </a:extLst>
           </p:cNvPr>
@@ -10656,6 +10797,338 @@
             <a:fld id="{F904C42B-FE65-422C-989C-AD3E5E2A1A20}" type="slidenum">
               <a:rPr lang="en-IN" smtClean="0"/>
               <a:t>33</a:t>
+            </a:fld>
+            <a:endParaRPr lang="en-IN" dirty="0"/>
+          </a:p>
+        </p:txBody>
+      </p:sp>
+    </p:spTree>
+    <p:extLst>
+      <p:ext uri="{BB962C8B-B14F-4D97-AF65-F5344CB8AC3E}">
+        <p14:creationId xmlns:p14="http://schemas.microsoft.com/office/powerpoint/2010/main" val="35491570"/>
+      </p:ext>
+    </p:extLst>
+  </p:cSld>
+  <p:clrMapOvr>
+    <a:masterClrMapping/>
+  </p:clrMapOvr>
+</p:sld>
+</file>
+
+<file path=ppt/slides/slide34.xml><?xml version="1.0" encoding="utf-8"?>
+<p:sld xmlns:a="http://schemas.openxmlformats.org/drawingml/2006/main" xmlns:r="http://schemas.openxmlformats.org/officeDocument/2006/relationships" xmlns:p="http://schemas.openxmlformats.org/presentationml/2006/main">
+  <p:cSld>
+    <p:spTree>
+      <p:nvGrpSpPr>
+        <p:cNvPr id="1" name=""/>
+        <p:cNvGrpSpPr/>
+        <p:nvPr/>
+      </p:nvGrpSpPr>
+      <p:grpSpPr>
+        <a:xfrm>
+          <a:off x="0" y="0"/>
+          <a:ext cx="0" cy="0"/>
+          <a:chOff x="0" y="0"/>
+          <a:chExt cx="0" cy="0"/>
+        </a:xfrm>
+      </p:grpSpPr>
+      <p:sp>
+        <p:nvSpPr>
+          <p:cNvPr id="2" name="Title 1">
+            <a:extLst>
+              <a:ext uri="{FF2B5EF4-FFF2-40B4-BE49-F238E27FC236}">
+                <a16:creationId xmlns:a16="http://schemas.microsoft.com/office/drawing/2014/main" id="{0FAC2044-7BC7-BE81-4358-3C5D49931A58}"/>
+              </a:ext>
+            </a:extLst>
+          </p:cNvPr>
+          <p:cNvSpPr>
+            <a:spLocks noGrp="1"/>
+          </p:cNvSpPr>
+          <p:nvPr>
+            <p:ph type="title"/>
+          </p:nvPr>
+        </p:nvSpPr>
+        <p:spPr/>
+        <p:txBody>
+          <a:bodyPr/>
+          <a:lstStyle/>
+          <a:p>
+            <a:r>
+              <a:rPr lang="en-GB" dirty="0" err="1"/>
+              <a:t>CustomTkinter</a:t>
+            </a:r>
+            <a:endParaRPr lang="en-IN" dirty="0"/>
+          </a:p>
+        </p:txBody>
+      </p:sp>
+      <p:sp>
+        <p:nvSpPr>
+          <p:cNvPr id="3" name="Content Placeholder 2">
+            <a:extLst>
+              <a:ext uri="{FF2B5EF4-FFF2-40B4-BE49-F238E27FC236}">
+                <a16:creationId xmlns:a16="http://schemas.microsoft.com/office/drawing/2014/main" id="{69841D62-3F38-AD65-B1BF-48BF3A14F8B7}"/>
+              </a:ext>
+            </a:extLst>
+          </p:cNvPr>
+          <p:cNvSpPr>
+            <a:spLocks noGrp="1"/>
+          </p:cNvSpPr>
+          <p:nvPr>
+            <p:ph idx="1"/>
+          </p:nvPr>
+        </p:nvSpPr>
+        <p:spPr/>
+        <p:txBody>
+          <a:bodyPr/>
+          <a:lstStyle/>
+          <a:p>
+            <a:r>
+              <a:rPr lang="en-GB" dirty="0"/>
+              <a:t> </a:t>
+            </a:r>
+            <a:r>
+              <a:rPr lang="en-GB" b="1" dirty="0" err="1"/>
+              <a:t>cmd</a:t>
+            </a:r>
+            <a:r>
+              <a:rPr lang="en-GB" b="1" dirty="0"/>
+              <a:t> : pip install </a:t>
+            </a:r>
+            <a:r>
+              <a:rPr lang="en-GB" b="1" dirty="0" err="1"/>
+              <a:t>customtkinter</a:t>
+            </a:r>
+            <a:endParaRPr lang="en-IN" dirty="0"/>
+          </a:p>
+        </p:txBody>
+      </p:sp>
+      <p:sp>
+        <p:nvSpPr>
+          <p:cNvPr id="4" name="Footer Placeholder 3">
+            <a:extLst>
+              <a:ext uri="{FF2B5EF4-FFF2-40B4-BE49-F238E27FC236}">
+                <a16:creationId xmlns:a16="http://schemas.microsoft.com/office/drawing/2014/main" id="{889662F6-22D2-D1A9-DF10-54B94C79C5D2}"/>
+              </a:ext>
+            </a:extLst>
+          </p:cNvPr>
+          <p:cNvSpPr>
+            <a:spLocks noGrp="1"/>
+          </p:cNvSpPr>
+          <p:nvPr>
+            <p:ph type="ftr" sz="quarter" idx="11"/>
+          </p:nvPr>
+        </p:nvSpPr>
+        <p:spPr/>
+        <p:txBody>
+          <a:bodyPr/>
+          <a:lstStyle/>
+          <a:p>
+            <a:r>
+              <a:rPr lang="it-IT"/>
+              <a:t>Agnie Consulting India Pvt Limited</a:t>
+            </a:r>
+            <a:endParaRPr lang="en-IN" dirty="0"/>
+          </a:p>
+        </p:txBody>
+      </p:sp>
+      <p:sp>
+        <p:nvSpPr>
+          <p:cNvPr id="5" name="Slide Number Placeholder 4">
+            <a:extLst>
+              <a:ext uri="{FF2B5EF4-FFF2-40B4-BE49-F238E27FC236}">
+                <a16:creationId xmlns:a16="http://schemas.microsoft.com/office/drawing/2014/main" id="{4FCBC552-3D1D-6F58-3410-DBE1BCE8AF7F}"/>
+              </a:ext>
+            </a:extLst>
+          </p:cNvPr>
+          <p:cNvSpPr>
+            <a:spLocks noGrp="1"/>
+          </p:cNvSpPr>
+          <p:nvPr>
+            <p:ph type="sldNum" sz="quarter" idx="12"/>
+          </p:nvPr>
+        </p:nvSpPr>
+        <p:spPr/>
+        <p:txBody>
+          <a:bodyPr/>
+          <a:lstStyle/>
+          <a:p>
+            <a:fld id="{F904C42B-FE65-422C-989C-AD3E5E2A1A20}" type="slidenum">
+              <a:rPr lang="en-IN" smtClean="0"/>
+              <a:t>34</a:t>
+            </a:fld>
+            <a:endParaRPr lang="en-IN" dirty="0"/>
+          </a:p>
+        </p:txBody>
+      </p:sp>
+    </p:spTree>
+    <p:extLst>
+      <p:ext uri="{BB962C8B-B14F-4D97-AF65-F5344CB8AC3E}">
+        <p14:creationId xmlns:p14="http://schemas.microsoft.com/office/powerpoint/2010/main" val="3562287446"/>
+      </p:ext>
+    </p:extLst>
+  </p:cSld>
+  <p:clrMapOvr>
+    <a:masterClrMapping/>
+  </p:clrMapOvr>
+</p:sld>
+</file>
+
+<file path=ppt/slides/slide35.xml><?xml version="1.0" encoding="utf-8"?>
+<p:sld xmlns:a="http://schemas.openxmlformats.org/drawingml/2006/main" xmlns:r="http://schemas.openxmlformats.org/officeDocument/2006/relationships" xmlns:p="http://schemas.openxmlformats.org/presentationml/2006/main">
+  <p:cSld>
+    <p:spTree>
+      <p:nvGrpSpPr>
+        <p:cNvPr id="1" name=""/>
+        <p:cNvGrpSpPr/>
+        <p:nvPr/>
+      </p:nvGrpSpPr>
+      <p:grpSpPr>
+        <a:xfrm>
+          <a:off x="0" y="0"/>
+          <a:ext cx="0" cy="0"/>
+          <a:chOff x="0" y="0"/>
+          <a:chExt cx="0" cy="0"/>
+        </a:xfrm>
+      </p:grpSpPr>
+      <p:sp>
+        <p:nvSpPr>
+          <p:cNvPr id="2" name="Title 1">
+            <a:extLst>
+              <a:ext uri="{FF2B5EF4-FFF2-40B4-BE49-F238E27FC236}">
+                <a16:creationId xmlns:a16="http://schemas.microsoft.com/office/drawing/2014/main" id="{76B7B38D-DCBD-9C6B-CD51-7A408A67FAD1}"/>
+              </a:ext>
+            </a:extLst>
+          </p:cNvPr>
+          <p:cNvSpPr>
+            <a:spLocks noGrp="1"/>
+          </p:cNvSpPr>
+          <p:nvPr>
+            <p:ph type="title"/>
+          </p:nvPr>
+        </p:nvSpPr>
+        <p:spPr/>
+        <p:txBody>
+          <a:bodyPr/>
+          <a:lstStyle/>
+          <a:p>
+            <a:r>
+              <a:rPr lang="en-GB" dirty="0" err="1"/>
+              <a:t>Kivy</a:t>
+            </a:r>
+            <a:r>
+              <a:rPr lang="en-GB" dirty="0"/>
+              <a:t> &amp; </a:t>
+            </a:r>
+            <a:r>
+              <a:rPr lang="en-GB" dirty="0" err="1"/>
+              <a:t>Kivymd</a:t>
+            </a:r>
+            <a:endParaRPr lang="en-IN" dirty="0"/>
+          </a:p>
+        </p:txBody>
+      </p:sp>
+      <p:sp>
+        <p:nvSpPr>
+          <p:cNvPr id="3" name="Content Placeholder 2">
+            <a:extLst>
+              <a:ext uri="{FF2B5EF4-FFF2-40B4-BE49-F238E27FC236}">
+                <a16:creationId xmlns:a16="http://schemas.microsoft.com/office/drawing/2014/main" id="{55BFC815-5867-C2BB-884C-F3691F93B019}"/>
+              </a:ext>
+            </a:extLst>
+          </p:cNvPr>
+          <p:cNvSpPr>
+            <a:spLocks noGrp="1"/>
+          </p:cNvSpPr>
+          <p:nvPr>
+            <p:ph idx="1"/>
+          </p:nvPr>
+        </p:nvSpPr>
+        <p:spPr/>
+        <p:txBody>
+          <a:bodyPr/>
+          <a:lstStyle/>
+          <a:p>
+            <a:r>
+              <a:rPr lang="en-GB" dirty="0"/>
+              <a:t> </a:t>
+            </a:r>
+            <a:r>
+              <a:rPr lang="en-GB" b="1" dirty="0" err="1"/>
+              <a:t>cmd</a:t>
+            </a:r>
+            <a:r>
+              <a:rPr lang="en-GB" b="1" dirty="0"/>
+              <a:t> : pip install </a:t>
+            </a:r>
+            <a:r>
+              <a:rPr lang="en-GB" b="1" dirty="0" err="1"/>
+              <a:t>kivy</a:t>
+            </a:r>
+            <a:r>
+              <a:rPr lang="en-GB" b="1" dirty="0"/>
+              <a:t> </a:t>
+            </a:r>
+            <a:r>
+              <a:rPr lang="en-GB" b="1" dirty="0" err="1"/>
+              <a:t>kivymd</a:t>
+            </a:r>
+            <a:endParaRPr lang="en-IN" dirty="0"/>
+          </a:p>
+        </p:txBody>
+      </p:sp>
+      <p:sp>
+        <p:nvSpPr>
+          <p:cNvPr id="4" name="Footer Placeholder 3">
+            <a:extLst>
+              <a:ext uri="{FF2B5EF4-FFF2-40B4-BE49-F238E27FC236}">
+                <a16:creationId xmlns:a16="http://schemas.microsoft.com/office/drawing/2014/main" id="{747B2B24-B4CD-D9F0-D1F0-C426E572C6F6}"/>
+              </a:ext>
+            </a:extLst>
+          </p:cNvPr>
+          <p:cNvSpPr>
+            <a:spLocks noGrp="1"/>
+          </p:cNvSpPr>
+          <p:nvPr>
+            <p:ph type="ftr" sz="quarter" idx="11"/>
+          </p:nvPr>
+        </p:nvSpPr>
+        <p:spPr/>
+        <p:txBody>
+          <a:bodyPr/>
+          <a:lstStyle/>
+          <a:p>
+            <a:r>
+              <a:rPr lang="it-IT"/>
+              <a:t>Agnie Consulting India Pvt Limited</a:t>
+            </a:r>
+            <a:endParaRPr lang="en-IN" dirty="0"/>
+          </a:p>
+        </p:txBody>
+      </p:sp>
+      <p:sp>
+        <p:nvSpPr>
+          <p:cNvPr id="5" name="Slide Number Placeholder 4">
+            <a:extLst>
+              <a:ext uri="{FF2B5EF4-FFF2-40B4-BE49-F238E27FC236}">
+                <a16:creationId xmlns:a16="http://schemas.microsoft.com/office/drawing/2014/main" id="{8EC70CEB-FD02-B13C-90CC-1F1AACC0FCAC}"/>
+              </a:ext>
+            </a:extLst>
+          </p:cNvPr>
+          <p:cNvSpPr>
+            <a:spLocks noGrp="1"/>
+          </p:cNvSpPr>
+          <p:nvPr>
+            <p:ph type="sldNum" sz="quarter" idx="12"/>
+          </p:nvPr>
+        </p:nvSpPr>
+        <p:spPr/>
+        <p:txBody>
+          <a:bodyPr/>
+          <a:lstStyle/>
+          <a:p>
+            <a:fld id="{F904C42B-FE65-422C-989C-AD3E5E2A1A20}" type="slidenum">
+              <a:rPr lang="en-IN" smtClean="0"/>
+              <a:t>35</a:t>
             </a:fld>
             <a:endParaRPr lang="en-IN" dirty="0"/>
           </a:p>

--- a/python class/Python Class.pptx
+++ b/python class/Python Class.pptx
@@ -231,7 +231,7 @@
           <a:p>
             <a:fld id="{C7300FFE-222E-424B-A24A-B86ADB1660A8}" type="datetimeFigureOut">
               <a:rPr lang="en-IN" smtClean="0"/>
-              <a:t>13-07-2026</a:t>
+              <a:t>14-07-2026</a:t>
             </a:fld>
             <a:endParaRPr lang="en-IN" dirty="0"/>
           </a:p>
@@ -659,7 +659,7 @@
           <a:p>
             <a:fld id="{AD501974-91E0-4A6C-BF4F-18DDA0DBE697}" type="datetime1">
               <a:rPr lang="en-IN" smtClean="0"/>
-              <a:t>13-07-2026</a:t>
+              <a:t>14-07-2026</a:t>
             </a:fld>
             <a:endParaRPr lang="en-IN" dirty="0"/>
           </a:p>
@@ -784,7 +784,7 @@
           <a:p>
             <a:fld id="{340C70EA-229A-4802-A7BC-A1799783BDD3}" type="datetime1">
               <a:rPr lang="en-IN" smtClean="0"/>
-              <a:t>13-07-2026</a:t>
+              <a:t>14-07-2026</a:t>
             </a:fld>
             <a:endParaRPr lang="en-IN" dirty="0"/>
           </a:p>
@@ -1071,7 +1071,7 @@
           <a:p>
             <a:fld id="{BD944048-9929-4BB2-BADE-62F9A707015B}" type="datetime1">
               <a:rPr lang="en-IN" smtClean="0"/>
-              <a:t>13-07-2026</a:t>
+              <a:t>14-07-2026</a:t>
             </a:fld>
             <a:endParaRPr lang="en-IN" dirty="0"/>
           </a:p>
@@ -1377,7 +1377,7 @@
           <a:p>
             <a:fld id="{09A388D1-7504-45FD-847C-EF9E921E08DF}" type="datetime1">
               <a:rPr lang="en-IN" smtClean="0"/>
-              <a:t>13-07-2026</a:t>
+              <a:t>14-07-2026</a:t>
             </a:fld>
             <a:endParaRPr lang="en-IN" dirty="0"/>
           </a:p>
@@ -1606,7 +1606,7 @@
           <a:p>
             <a:fld id="{6015BE80-B03C-48AB-B3E2-19C5F4D60D3C}" type="datetime1">
               <a:rPr lang="en-IN" smtClean="0"/>
-              <a:t>13-07-2026</a:t>
+              <a:t>14-07-2026</a:t>
             </a:fld>
             <a:endParaRPr lang="en-IN" dirty="0"/>
           </a:p>
@@ -1877,7 +1877,7 @@
           <a:p>
             <a:fld id="{450E9977-AF0E-4B1A-B2BF-2416B4828E95}" type="datetime1">
               <a:rPr lang="en-IN" smtClean="0"/>
-              <a:t>13-07-2026</a:t>
+              <a:t>14-07-2026</a:t>
             </a:fld>
             <a:endParaRPr lang="en-IN" dirty="0"/>
           </a:p>
@@ -2104,7 +2104,7 @@
           <a:p>
             <a:fld id="{972A712B-80AB-4FDB-AFE5-C959280677B9}" type="datetime1">
               <a:rPr lang="en-IN" smtClean="0"/>
-              <a:t>13-07-2026</a:t>
+              <a:t>14-07-2026</a:t>
             </a:fld>
             <a:endParaRPr lang="en-IN" dirty="0"/>
           </a:p>
@@ -2395,7 +2395,7 @@
           <a:p>
             <a:fld id="{78FC1D50-5769-4793-A6D0-4C61D943385E}" type="datetime1">
               <a:rPr lang="en-IN" smtClean="0"/>
-              <a:t>13-07-2026</a:t>
+              <a:t>14-07-2026</a:t>
             </a:fld>
             <a:endParaRPr lang="en-IN" dirty="0"/>
           </a:p>
@@ -2660,7 +2660,7 @@
           <a:p>
             <a:fld id="{1093E9E7-66F0-49C7-87AF-7A91F126A0CA}" type="datetime1">
               <a:rPr lang="en-IN" smtClean="0"/>
-              <a:t>13-07-2026</a:t>
+              <a:t>14-07-2026</a:t>
             </a:fld>
             <a:endParaRPr lang="en-IN" dirty="0"/>
           </a:p>
@@ -3106,7 +3106,7 @@
           <a:p>
             <a:fld id="{4802E001-56FE-4C01-9545-A69D840AB1F5}" type="datetime1">
               <a:rPr lang="en-IN" smtClean="0"/>
-              <a:t>13-07-2026</a:t>
+              <a:t>14-07-2026</a:t>
             </a:fld>
             <a:endParaRPr lang="en-IN" dirty="0"/>
           </a:p>
@@ -3270,7 +3270,7 @@
           <a:p>
             <a:fld id="{FC628212-ABC2-4EAF-BB21-53D61AEEEA49}" type="datetime1">
               <a:rPr lang="en-IN" smtClean="0"/>
-              <a:t>13-07-2026</a:t>
+              <a:t>14-07-2026</a:t>
             </a:fld>
             <a:endParaRPr lang="en-IN" dirty="0"/>
           </a:p>
@@ -3434,7 +3434,7 @@
           <a:p>
             <a:fld id="{83F0C27E-97BD-4ACD-AFDF-13985BE88ECF}" type="datetime1">
               <a:rPr lang="en-IN" smtClean="0"/>
-              <a:t>13-07-2026</a:t>
+              <a:t>14-07-2026</a:t>
             </a:fld>
             <a:endParaRPr lang="en-IN" dirty="0"/>
           </a:p>
@@ -3632,7 +3632,7 @@
           <a:p>
             <a:fld id="{10A04BDC-9A72-4B08-81B7-A336A5B4E254}" type="datetime1">
               <a:rPr lang="en-IN" smtClean="0"/>
-              <a:t>13-07-2026</a:t>
+              <a:t>14-07-2026</a:t>
             </a:fld>
             <a:endParaRPr lang="en-IN" dirty="0"/>
           </a:p>
@@ -3830,7 +3830,7 @@
           <a:p>
             <a:fld id="{2E5D08A3-D96A-4309-8AF3-C610782BB2D3}" type="datetime1">
               <a:rPr lang="en-IN" smtClean="0"/>
-              <a:t>13-07-2026</a:t>
+              <a:t>14-07-2026</a:t>
             </a:fld>
             <a:endParaRPr lang="en-IN" dirty="0"/>
           </a:p>
@@ -5653,7 +5653,7 @@
             </a:r>
             <a:r>
               <a:rPr lang="en-IN" dirty="0"/>
-              <a:t> Triangle , Pyramid , Diamond , Binary Triangle , Butterfly Pattern , X Pattern , Palindrome Triangle , Sandglass Pattern , Concentric Number Pattern</a:t>
+              <a:t> Triangle , Pyramid , Diamond , Binary Triangle , Butterfly Pattern , X Pattern , Palindrome Triangle , Concentric Number Pattern</a:t>
             </a:r>
           </a:p>
           <a:p>
@@ -7638,13 +7638,14 @@
           <a:p>
             <a:r>
               <a:rPr lang="en-IN" dirty="0"/>
-              <a:t> </a:t>
-            </a:r>
-            <a:r>
-              <a:rPr lang="en-IN"/>
-              <a:t>file operations.</a:t>
-            </a:r>
-            <a:endParaRPr lang="en-IN" dirty="0"/>
+              <a:t> file operations.</a:t>
+            </a:r>
+          </a:p>
+          <a:p>
+            <a:r>
+              <a:rPr lang="en-IN" dirty="0"/>
+              <a:t> database operations.</a:t>
+            </a:r>
           </a:p>
         </p:txBody>
       </p:sp>
@@ -8156,7 +8157,7 @@
             </a:r>
             <a:r>
               <a:rPr lang="en-IN" dirty="0" err="1"/>
-              <a:t>Vename</a:t>
+              <a:t>VEname</a:t>
             </a:r>
             <a:endParaRPr lang="en-IN" dirty="0"/>
           </a:p>
@@ -8327,7 +8328,17 @@
             </a:r>
             <a:r>
               <a:rPr lang="en-IN" b="1" dirty="0"/>
-              <a:t>Counter : </a:t>
+              <a:t>Import : </a:t>
+            </a:r>
+            <a:r>
+              <a:rPr lang="en-IN" dirty="0"/>
+              <a:t>from collections import *</a:t>
+            </a:r>
+          </a:p>
+          <a:p>
+            <a:r>
+              <a:rPr lang="en-IN" b="1" dirty="0"/>
+              <a:t> Counter : </a:t>
             </a:r>
             <a:r>
               <a:rPr lang="en-IN" dirty="0"/>
@@ -8356,6 +8367,52 @@
             <a:r>
               <a:rPr lang="en-IN" b="1" dirty="0"/>
               <a:t> </a:t>
+            </a:r>
+            <a:r>
+              <a:rPr lang="en-IN" b="1" dirty="0" err="1"/>
+              <a:t>ChainMap</a:t>
+            </a:r>
+            <a:r>
+              <a:rPr lang="en-IN" b="1" dirty="0"/>
+              <a:t> : </a:t>
+            </a:r>
+            <a:r>
+              <a:rPr lang="en-IN" dirty="0"/>
+              <a:t>for </a:t>
+            </a:r>
+            <a:r>
+              <a:rPr lang="en-IN" dirty="0" err="1"/>
+              <a:t>updation</a:t>
+            </a:r>
+            <a:r>
+              <a:rPr lang="en-IN" dirty="0"/>
+              <a:t> it creates a new index not modifies.</a:t>
+            </a:r>
+          </a:p>
+          <a:p>
+            <a:r>
+              <a:rPr lang="en-IN" b="1" dirty="0"/>
+              <a:t> </a:t>
+            </a:r>
+            <a:r>
+              <a:rPr lang="en-IN" b="1" dirty="0" err="1"/>
+              <a:t>OrderedDict</a:t>
+            </a:r>
+            <a:r>
+              <a:rPr lang="en-IN" b="1" dirty="0"/>
+              <a:t> : </a:t>
+            </a:r>
+            <a:r>
+              <a:rPr lang="en-IN" dirty="0"/>
+              <a:t>order of the </a:t>
+            </a:r>
+            <a:r>
+              <a:rPr lang="en-IN" dirty="0" err="1"/>
+              <a:t>updation</a:t>
+            </a:r>
+            <a:r>
+              <a:rPr lang="en-IN" dirty="0"/>
+              <a:t> not change.</a:t>
             </a:r>
           </a:p>
         </p:txBody>
@@ -8663,6 +8720,31 @@
             <a:r>
               <a:rPr lang="en-IN" dirty="0" err="1"/>
               <a:t>os</a:t>
+            </a:r>
+            <a:endParaRPr lang="en-IN" dirty="0"/>
+          </a:p>
+          <a:p>
+            <a:r>
+              <a:rPr lang="en-IN" b="1" dirty="0"/>
+              <a:t> Uses : </a:t>
+            </a:r>
+            <a:r>
+              <a:rPr lang="en-IN" dirty="0"/>
+              <a:t>files &amp; folders operations</a:t>
+            </a:r>
+          </a:p>
+          <a:p>
+            <a:r>
+              <a:rPr lang="en-IN" b="1" dirty="0"/>
+              <a:t> Operations : </a:t>
+            </a:r>
+            <a:r>
+              <a:rPr lang="en-IN" dirty="0" err="1"/>
+              <a:t>makedir</a:t>
+            </a:r>
+            <a:r>
+              <a:rPr lang="en-IN" dirty="0"/>
+              <a:t> , </a:t>
             </a:r>
             <a:endParaRPr lang="en-IN" b="1" dirty="0"/>
           </a:p>

--- a/python class/Python Class.pptx
+++ b/python class/Python Class.pptx
@@ -231,7 +231,7 @@
           <a:p>
             <a:fld id="{C7300FFE-222E-424B-A24A-B86ADB1660A8}" type="datetimeFigureOut">
               <a:rPr lang="en-IN" smtClean="0"/>
-              <a:t>14-07-2026</a:t>
+              <a:t>15-07-2026</a:t>
             </a:fld>
             <a:endParaRPr lang="en-IN" dirty="0"/>
           </a:p>
@@ -659,7 +659,7 @@
           <a:p>
             <a:fld id="{AD501974-91E0-4A6C-BF4F-18DDA0DBE697}" type="datetime1">
               <a:rPr lang="en-IN" smtClean="0"/>
-              <a:t>14-07-2026</a:t>
+              <a:t>15-07-2026</a:t>
             </a:fld>
             <a:endParaRPr lang="en-IN" dirty="0"/>
           </a:p>
@@ -784,7 +784,7 @@
           <a:p>
             <a:fld id="{340C70EA-229A-4802-A7BC-A1799783BDD3}" type="datetime1">
               <a:rPr lang="en-IN" smtClean="0"/>
-              <a:t>14-07-2026</a:t>
+              <a:t>15-07-2026</a:t>
             </a:fld>
             <a:endParaRPr lang="en-IN" dirty="0"/>
           </a:p>
@@ -1071,7 +1071,7 @@
           <a:p>
             <a:fld id="{BD944048-9929-4BB2-BADE-62F9A707015B}" type="datetime1">
               <a:rPr lang="en-IN" smtClean="0"/>
-              <a:t>14-07-2026</a:t>
+              <a:t>15-07-2026</a:t>
             </a:fld>
             <a:endParaRPr lang="en-IN" dirty="0"/>
           </a:p>
@@ -1377,7 +1377,7 @@
           <a:p>
             <a:fld id="{09A388D1-7504-45FD-847C-EF9E921E08DF}" type="datetime1">
               <a:rPr lang="en-IN" smtClean="0"/>
-              <a:t>14-07-2026</a:t>
+              <a:t>15-07-2026</a:t>
             </a:fld>
             <a:endParaRPr lang="en-IN" dirty="0"/>
           </a:p>
@@ -1606,7 +1606,7 @@
           <a:p>
             <a:fld id="{6015BE80-B03C-48AB-B3E2-19C5F4D60D3C}" type="datetime1">
               <a:rPr lang="en-IN" smtClean="0"/>
-              <a:t>14-07-2026</a:t>
+              <a:t>15-07-2026</a:t>
             </a:fld>
             <a:endParaRPr lang="en-IN" dirty="0"/>
           </a:p>
@@ -1877,7 +1877,7 @@
           <a:p>
             <a:fld id="{450E9977-AF0E-4B1A-B2BF-2416B4828E95}" type="datetime1">
               <a:rPr lang="en-IN" smtClean="0"/>
-              <a:t>14-07-2026</a:t>
+              <a:t>15-07-2026</a:t>
             </a:fld>
             <a:endParaRPr lang="en-IN" dirty="0"/>
           </a:p>
@@ -2104,7 +2104,7 @@
           <a:p>
             <a:fld id="{972A712B-80AB-4FDB-AFE5-C959280677B9}" type="datetime1">
               <a:rPr lang="en-IN" smtClean="0"/>
-              <a:t>14-07-2026</a:t>
+              <a:t>15-07-2026</a:t>
             </a:fld>
             <a:endParaRPr lang="en-IN" dirty="0"/>
           </a:p>
@@ -2395,7 +2395,7 @@
           <a:p>
             <a:fld id="{78FC1D50-5769-4793-A6D0-4C61D943385E}" type="datetime1">
               <a:rPr lang="en-IN" smtClean="0"/>
-              <a:t>14-07-2026</a:t>
+              <a:t>15-07-2026</a:t>
             </a:fld>
             <a:endParaRPr lang="en-IN" dirty="0"/>
           </a:p>
@@ -2660,7 +2660,7 @@
           <a:p>
             <a:fld id="{1093E9E7-66F0-49C7-87AF-7A91F126A0CA}" type="datetime1">
               <a:rPr lang="en-IN" smtClean="0"/>
-              <a:t>14-07-2026</a:t>
+              <a:t>15-07-2026</a:t>
             </a:fld>
             <a:endParaRPr lang="en-IN" dirty="0"/>
           </a:p>
@@ -3106,7 +3106,7 @@
           <a:p>
             <a:fld id="{4802E001-56FE-4C01-9545-A69D840AB1F5}" type="datetime1">
               <a:rPr lang="en-IN" smtClean="0"/>
-              <a:t>14-07-2026</a:t>
+              <a:t>15-07-2026</a:t>
             </a:fld>
             <a:endParaRPr lang="en-IN" dirty="0"/>
           </a:p>
@@ -3270,7 +3270,7 @@
           <a:p>
             <a:fld id="{FC628212-ABC2-4EAF-BB21-53D61AEEEA49}" type="datetime1">
               <a:rPr lang="en-IN" smtClean="0"/>
-              <a:t>14-07-2026</a:t>
+              <a:t>15-07-2026</a:t>
             </a:fld>
             <a:endParaRPr lang="en-IN" dirty="0"/>
           </a:p>
@@ -3434,7 +3434,7 @@
           <a:p>
             <a:fld id="{83F0C27E-97BD-4ACD-AFDF-13985BE88ECF}" type="datetime1">
               <a:rPr lang="en-IN" smtClean="0"/>
-              <a:t>14-07-2026</a:t>
+              <a:t>15-07-2026</a:t>
             </a:fld>
             <a:endParaRPr lang="en-IN" dirty="0"/>
           </a:p>
@@ -3632,7 +3632,7 @@
           <a:p>
             <a:fld id="{10A04BDC-9A72-4B08-81B7-A336A5B4E254}" type="datetime1">
               <a:rPr lang="en-IN" smtClean="0"/>
-              <a:t>14-07-2026</a:t>
+              <a:t>15-07-2026</a:t>
             </a:fld>
             <a:endParaRPr lang="en-IN" dirty="0"/>
           </a:p>
@@ -3830,7 +3830,7 @@
           <a:p>
             <a:fld id="{2E5D08A3-D96A-4309-8AF3-C610782BB2D3}" type="datetime1">
               <a:rPr lang="en-IN" smtClean="0"/>
-              <a:t>14-07-2026</a:t>
+              <a:t>15-07-2026</a:t>
             </a:fld>
             <a:endParaRPr lang="en-IN" dirty="0"/>
           </a:p>
@@ -8415,6 +8415,21 @@
               <a:t> not change.</a:t>
             </a:r>
           </a:p>
+          <a:p>
+            <a:r>
+              <a:rPr lang="en-IN" dirty="0"/>
+              <a:t> </a:t>
+            </a:r>
+            <a:r>
+              <a:rPr lang="en-IN" b="1" dirty="0"/>
+              <a:t>Dequeue : </a:t>
+            </a:r>
+            <a:r>
+              <a:rPr lang="en-IN"/>
+              <a:t>Implements Queue</a:t>
+            </a:r>
+            <a:endParaRPr lang="en-IN" dirty="0"/>
+          </a:p>
         </p:txBody>
       </p:sp>
       <p:sp>
@@ -8894,7 +8909,7 @@
             </a:r>
             <a:r>
               <a:rPr lang="en-GB" b="1" dirty="0"/>
-              <a:t>Package : </a:t>
+              <a:t>Packages : </a:t>
             </a:r>
             <a:r>
               <a:rPr lang="en-GB" dirty="0" err="1"/>
@@ -9219,7 +9234,19 @@
           <a:bodyPr/>
           <a:lstStyle/>
           <a:p>
-            <a:endParaRPr lang="en-IN"/>
+            <a:r>
+              <a:rPr lang="en-IN" dirty="0"/>
+              <a:t> </a:t>
+            </a:r>
+            <a:r>
+              <a:rPr lang="en-IN" b="1" dirty="0"/>
+              <a:t>Package : </a:t>
+            </a:r>
+            <a:r>
+              <a:rPr lang="en-IN" dirty="0" err="1"/>
+              <a:t>openpyxl</a:t>
+            </a:r>
+            <a:endParaRPr lang="en-IN" dirty="0"/>
           </a:p>
         </p:txBody>
       </p:sp>
@@ -10300,6 +10327,14 @@
           <a:bodyPr/>
           <a:lstStyle/>
           <a:p>
+            <a:r>
+              <a:rPr lang="en-IN" dirty="0"/>
+              <a:t> </a:t>
+            </a:r>
+            <a:r>
+              <a:rPr lang="en-IN" b="1" dirty="0"/>
+              <a:t>Package : </a:t>
+            </a:r>
             <a:endParaRPr lang="en-IN" dirty="0"/>
           </a:p>
         </p:txBody>
@@ -10677,9 +10712,134 @@
         </p:nvSpPr>
         <p:spPr/>
         <p:txBody>
-          <a:bodyPr/>
-          <a:lstStyle/>
-          <a:p>
+          <a:bodyPr>
+            <a:normAutofit lnSpcReduction="10000"/>
+          </a:bodyPr>
+          <a:lstStyle/>
+          <a:p>
+            <a:r>
+              <a:rPr lang="en-IN" dirty="0"/>
+              <a:t> </a:t>
+            </a:r>
+            <a:r>
+              <a:rPr lang="en-IN" b="1" dirty="0"/>
+              <a:t>Example : </a:t>
+            </a:r>
+            <a:r>
+              <a:rPr lang="en-IN" dirty="0"/>
+              <a:t>creating a package named customs</a:t>
+            </a:r>
+          </a:p>
+          <a:p>
+            <a:r>
+              <a:rPr lang="en-IN" dirty="0"/>
+              <a:t> </a:t>
+            </a:r>
+            <a:r>
+              <a:rPr lang="en-IN" b="1" dirty="0"/>
+              <a:t>Structure : </a:t>
+            </a:r>
+            <a:endParaRPr lang="en-IN" dirty="0"/>
+          </a:p>
+          <a:p>
+            <a:pPr marL="0" indent="0">
+              <a:buNone/>
+            </a:pPr>
+            <a:r>
+              <a:rPr lang="en-IN" dirty="0"/>
+              <a:t>	- </a:t>
+            </a:r>
+            <a:r>
+              <a:rPr lang="en-IN" dirty="0" err="1"/>
+              <a:t>src</a:t>
+            </a:r>
+            <a:endParaRPr lang="en-IN" dirty="0"/>
+          </a:p>
+          <a:p>
+            <a:pPr marL="0" indent="0">
+              <a:buNone/>
+            </a:pPr>
+            <a:r>
+              <a:rPr lang="en-IN" dirty="0"/>
+              <a:t>		- customs</a:t>
+            </a:r>
+          </a:p>
+          <a:p>
+            <a:pPr marL="0" indent="0">
+              <a:buNone/>
+            </a:pPr>
+            <a:r>
+              <a:rPr lang="en-IN" dirty="0"/>
+              <a:t>			- </a:t>
+            </a:r>
+            <a:r>
+              <a:rPr lang="en-IN" dirty="0" err="1"/>
+              <a:t>venv</a:t>
+            </a:r>
+            <a:endParaRPr lang="en-IN" dirty="0"/>
+          </a:p>
+          <a:p>
+            <a:pPr marL="0" indent="0">
+              <a:buNone/>
+            </a:pPr>
+            <a:r>
+              <a:rPr lang="en-IN" dirty="0"/>
+              <a:t>			- __init__.py</a:t>
+            </a:r>
+          </a:p>
+          <a:p>
+            <a:pPr marL="0" indent="0">
+              <a:buNone/>
+            </a:pPr>
+            <a:r>
+              <a:rPr lang="en-IN" dirty="0"/>
+              <a:t>			- main.py</a:t>
+            </a:r>
+          </a:p>
+          <a:p>
+            <a:pPr marL="0" indent="0">
+              <a:buNone/>
+            </a:pPr>
+            <a:r>
+              <a:rPr lang="en-IN" dirty="0"/>
+              <a:t>	- license</a:t>
+            </a:r>
+          </a:p>
+          <a:p>
+            <a:pPr marL="0" indent="0">
+              <a:buNone/>
+            </a:pPr>
+            <a:r>
+              <a:rPr lang="en-IN" dirty="0"/>
+              <a:t>	- readme</a:t>
+            </a:r>
+          </a:p>
+          <a:p>
+            <a:pPr marL="0" indent="0">
+              <a:buNone/>
+            </a:pPr>
+            <a:r>
+              <a:rPr lang="en-IN" dirty="0"/>
+              <a:t>	- </a:t>
+            </a:r>
+            <a:r>
+              <a:rPr lang="en-IN" dirty="0" err="1"/>
+              <a:t>pyproject.toml</a:t>
+            </a:r>
+            <a:endParaRPr lang="en-IN" dirty="0"/>
+          </a:p>
+          <a:p>
+            <a:pPr marL="0" indent="0">
+              <a:buNone/>
+            </a:pPr>
+            <a:r>
+              <a:rPr lang="en-IN" dirty="0"/>
+              <a:t>	- .</a:t>
+            </a:r>
+            <a:r>
+              <a:rPr lang="en-IN" dirty="0" err="1"/>
+              <a:t>gitignore</a:t>
+            </a:r>
             <a:endParaRPr lang="en-IN" dirty="0"/>
           </a:p>
         </p:txBody>

--- a/python class/Python Class.pptx
+++ b/python class/Python Class.pptx
@@ -5,7 +5,7 @@
     <p:sldMasterId id="2147483660" r:id="rId1"/>
   </p:sldMasterIdLst>
   <p:notesMasterIdLst>
-    <p:notesMasterId r:id="rId37"/>
+    <p:notesMasterId r:id="rId40"/>
   </p:notesMasterIdLst>
   <p:sldIdLst>
     <p:sldId id="256" r:id="rId2"/>
@@ -32,17 +32,20 @@
     <p:sldId id="278" r:id="rId23"/>
     <p:sldId id="281" r:id="rId24"/>
     <p:sldId id="273" r:id="rId25"/>
-    <p:sldId id="283" r:id="rId26"/>
-    <p:sldId id="282" r:id="rId27"/>
-    <p:sldId id="288" r:id="rId28"/>
-    <p:sldId id="275" r:id="rId29"/>
-    <p:sldId id="286" r:id="rId30"/>
-    <p:sldId id="287" r:id="rId31"/>
-    <p:sldId id="280" r:id="rId32"/>
-    <p:sldId id="290" r:id="rId33"/>
-    <p:sldId id="279" r:id="rId34"/>
-    <p:sldId id="284" r:id="rId35"/>
-    <p:sldId id="285" r:id="rId36"/>
+    <p:sldId id="282" r:id="rId26"/>
+    <p:sldId id="292" r:id="rId27"/>
+    <p:sldId id="286" r:id="rId28"/>
+    <p:sldId id="291" r:id="rId29"/>
+    <p:sldId id="283" r:id="rId30"/>
+    <p:sldId id="288" r:id="rId31"/>
+    <p:sldId id="275" r:id="rId32"/>
+    <p:sldId id="287" r:id="rId33"/>
+    <p:sldId id="280" r:id="rId34"/>
+    <p:sldId id="290" r:id="rId35"/>
+    <p:sldId id="279" r:id="rId36"/>
+    <p:sldId id="284" r:id="rId37"/>
+    <p:sldId id="285" r:id="rId38"/>
+    <p:sldId id="293" r:id="rId39"/>
   </p:sldIdLst>
   <p:sldSz cx="12192000" cy="6858000"/>
   <p:notesSz cx="7104063" cy="10234613"/>
@@ -231,7 +234,7 @@
           <a:p>
             <a:fld id="{C7300FFE-222E-424B-A24A-B86ADB1660A8}" type="datetimeFigureOut">
               <a:rPr lang="en-IN" smtClean="0"/>
-              <a:t>15-07-2026</a:t>
+              <a:t>16-07-2026</a:t>
             </a:fld>
             <a:endParaRPr lang="en-IN" dirty="0"/>
           </a:p>
@@ -659,7 +662,7 @@
           <a:p>
             <a:fld id="{AD501974-91E0-4A6C-BF4F-18DDA0DBE697}" type="datetime1">
               <a:rPr lang="en-IN" smtClean="0"/>
-              <a:t>15-07-2026</a:t>
+              <a:t>16-07-2026</a:t>
             </a:fld>
             <a:endParaRPr lang="en-IN" dirty="0"/>
           </a:p>
@@ -784,7 +787,7 @@
           <a:p>
             <a:fld id="{340C70EA-229A-4802-A7BC-A1799783BDD3}" type="datetime1">
               <a:rPr lang="en-IN" smtClean="0"/>
-              <a:t>15-07-2026</a:t>
+              <a:t>16-07-2026</a:t>
             </a:fld>
             <a:endParaRPr lang="en-IN" dirty="0"/>
           </a:p>
@@ -1071,7 +1074,7 @@
           <a:p>
             <a:fld id="{BD944048-9929-4BB2-BADE-62F9A707015B}" type="datetime1">
               <a:rPr lang="en-IN" smtClean="0"/>
-              <a:t>15-07-2026</a:t>
+              <a:t>16-07-2026</a:t>
             </a:fld>
             <a:endParaRPr lang="en-IN" dirty="0"/>
           </a:p>
@@ -1377,7 +1380,7 @@
           <a:p>
             <a:fld id="{09A388D1-7504-45FD-847C-EF9E921E08DF}" type="datetime1">
               <a:rPr lang="en-IN" smtClean="0"/>
-              <a:t>15-07-2026</a:t>
+              <a:t>16-07-2026</a:t>
             </a:fld>
             <a:endParaRPr lang="en-IN" dirty="0"/>
           </a:p>
@@ -1606,7 +1609,7 @@
           <a:p>
             <a:fld id="{6015BE80-B03C-48AB-B3E2-19C5F4D60D3C}" type="datetime1">
               <a:rPr lang="en-IN" smtClean="0"/>
-              <a:t>15-07-2026</a:t>
+              <a:t>16-07-2026</a:t>
             </a:fld>
             <a:endParaRPr lang="en-IN" dirty="0"/>
           </a:p>
@@ -1877,7 +1880,7 @@
           <a:p>
             <a:fld id="{450E9977-AF0E-4B1A-B2BF-2416B4828E95}" type="datetime1">
               <a:rPr lang="en-IN" smtClean="0"/>
-              <a:t>15-07-2026</a:t>
+              <a:t>16-07-2026</a:t>
             </a:fld>
             <a:endParaRPr lang="en-IN" dirty="0"/>
           </a:p>
@@ -2104,7 +2107,7 @@
           <a:p>
             <a:fld id="{972A712B-80AB-4FDB-AFE5-C959280677B9}" type="datetime1">
               <a:rPr lang="en-IN" smtClean="0"/>
-              <a:t>15-07-2026</a:t>
+              <a:t>16-07-2026</a:t>
             </a:fld>
             <a:endParaRPr lang="en-IN" dirty="0"/>
           </a:p>
@@ -2395,7 +2398,7 @@
           <a:p>
             <a:fld id="{78FC1D50-5769-4793-A6D0-4C61D943385E}" type="datetime1">
               <a:rPr lang="en-IN" smtClean="0"/>
-              <a:t>15-07-2026</a:t>
+              <a:t>16-07-2026</a:t>
             </a:fld>
             <a:endParaRPr lang="en-IN" dirty="0"/>
           </a:p>
@@ -2660,7 +2663,7 @@
           <a:p>
             <a:fld id="{1093E9E7-66F0-49C7-87AF-7A91F126A0CA}" type="datetime1">
               <a:rPr lang="en-IN" smtClean="0"/>
-              <a:t>15-07-2026</a:t>
+              <a:t>16-07-2026</a:t>
             </a:fld>
             <a:endParaRPr lang="en-IN" dirty="0"/>
           </a:p>
@@ -3106,7 +3109,7 @@
           <a:p>
             <a:fld id="{4802E001-56FE-4C01-9545-A69D840AB1F5}" type="datetime1">
               <a:rPr lang="en-IN" smtClean="0"/>
-              <a:t>15-07-2026</a:t>
+              <a:t>16-07-2026</a:t>
             </a:fld>
             <a:endParaRPr lang="en-IN" dirty="0"/>
           </a:p>
@@ -3270,7 +3273,7 @@
           <a:p>
             <a:fld id="{FC628212-ABC2-4EAF-BB21-53D61AEEEA49}" type="datetime1">
               <a:rPr lang="en-IN" smtClean="0"/>
-              <a:t>15-07-2026</a:t>
+              <a:t>16-07-2026</a:t>
             </a:fld>
             <a:endParaRPr lang="en-IN" dirty="0"/>
           </a:p>
@@ -3434,7 +3437,7 @@
           <a:p>
             <a:fld id="{83F0C27E-97BD-4ACD-AFDF-13985BE88ECF}" type="datetime1">
               <a:rPr lang="en-IN" smtClean="0"/>
-              <a:t>15-07-2026</a:t>
+              <a:t>16-07-2026</a:t>
             </a:fld>
             <a:endParaRPr lang="en-IN" dirty="0"/>
           </a:p>
@@ -3632,7 +3635,7 @@
           <a:p>
             <a:fld id="{10A04BDC-9A72-4B08-81B7-A336A5B4E254}" type="datetime1">
               <a:rPr lang="en-IN" smtClean="0"/>
-              <a:t>15-07-2026</a:t>
+              <a:t>16-07-2026</a:t>
             </a:fld>
             <a:endParaRPr lang="en-IN" dirty="0"/>
           </a:p>
@@ -3830,7 +3833,7 @@
           <a:p>
             <a:fld id="{2E5D08A3-D96A-4309-8AF3-C610782BB2D3}" type="datetime1">
               <a:rPr lang="en-IN" smtClean="0"/>
-              <a:t>15-07-2026</a:t>
+              <a:t>16-07-2026</a:t>
             </a:fld>
             <a:endParaRPr lang="en-IN" dirty="0"/>
           </a:p>
@@ -5190,47 +5193,7 @@
             <a:pPr lvl="1"/>
             <a:r>
               <a:rPr lang="en-IN" dirty="0"/>
-              <a:t> split(string) , capitalize() , </a:t>
-            </a:r>
-            <a:r>
-              <a:rPr lang="en-IN" dirty="0" err="1"/>
-              <a:t>center</a:t>
-            </a:r>
-            <a:r>
-              <a:rPr lang="en-IN" dirty="0"/>
-              <a:t>(</a:t>
-            </a:r>
-            <a:r>
-              <a:rPr lang="en-IN" dirty="0" err="1"/>
-              <a:t>width,string</a:t>
-            </a:r>
-            <a:r>
-              <a:rPr lang="en-IN" dirty="0"/>
-              <a:t>) , count(string) , </a:t>
-            </a:r>
-            <a:r>
-              <a:rPr lang="en-IN" dirty="0" err="1"/>
-              <a:t>endswith</a:t>
-            </a:r>
-            <a:r>
-              <a:rPr lang="en-IN" dirty="0"/>
-              <a:t>(string) , find(string) , format(parameters) , index(string) , replace(</a:t>
-            </a:r>
-            <a:r>
-              <a:rPr lang="en-IN" dirty="0" err="1"/>
-              <a:t>string,new,count</a:t>
-            </a:r>
-            <a:r>
-              <a:rPr lang="en-IN" dirty="0"/>
-              <a:t>) , strip(string) , upper() , lower() , </a:t>
-            </a:r>
-            <a:r>
-              <a:rPr lang="en-IN" dirty="0" err="1"/>
-              <a:t>startswith</a:t>
-            </a:r>
-            <a:r>
-              <a:rPr lang="en-IN" dirty="0"/>
-              <a:t>(string) , …</a:t>
+              <a:t> split(string) , capitalize() , center(width,string) , count(string) , endswith(string) , find(string) , format(parameters) , index(string) , replace(string,new,count) , strip(string) , upper() , lower() , startswith(string) , …</a:t>
             </a:r>
           </a:p>
         </p:txBody>
@@ -5414,15 +5377,7 @@
             </a:r>
             <a:r>
               <a:rPr lang="en-IN" dirty="0"/>
-              <a:t>Compress a String. (Example : </a:t>
-            </a:r>
-            <a:r>
-              <a:rPr lang="en-IN" dirty="0" err="1"/>
-              <a:t>aaabbcccc</a:t>
-            </a:r>
-            <a:r>
-              <a:rPr lang="en-IN" dirty="0"/>
-              <a:t> , a3b2c4)</a:t>
+              <a:t>Compress a String. (Example : aaabbcccc , a3b2c4)</a:t>
             </a:r>
           </a:p>
           <a:p>
@@ -5476,17 +5431,8 @@
           <a:p>
             <a:r>
               <a:rPr lang="en-IN" dirty="0"/>
-              <a:t> First Non-Repeating Character. (Example : </a:t>
-            </a:r>
-            <a:r>
-              <a:rPr lang="en-IN" dirty="0" err="1"/>
-              <a:t>swiss</a:t>
-            </a:r>
-            <a:r>
-              <a:rPr lang="en-IN"/>
-              <a:t> , w)</a:t>
-            </a:r>
-            <a:endParaRPr lang="en-IN" dirty="0"/>
+              <a:t> First Non-Repeating Character. (Example : swiss , w)</a:t>
+            </a:r>
           </a:p>
         </p:txBody>
       </p:sp>
@@ -5637,23 +5583,7 @@
             </a:r>
             <a:r>
               <a:rPr lang="en-IN" dirty="0"/>
-              <a:t>Square Pattern , </a:t>
-            </a:r>
-            <a:r>
-              <a:rPr lang="en-IN" dirty="0" err="1"/>
-              <a:t>Right&amp;Left</a:t>
-            </a:r>
-            <a:r>
-              <a:rPr lang="en-IN" dirty="0"/>
-              <a:t> Triangle , Inverted </a:t>
-            </a:r>
-            <a:r>
-              <a:rPr lang="en-IN" dirty="0" err="1"/>
-              <a:t>Right&amp;Left</a:t>
-            </a:r>
-            <a:r>
-              <a:rPr lang="en-IN" dirty="0"/>
-              <a:t> Triangle , Pyramid , Diamond , Binary Triangle , Butterfly Pattern , X Pattern , Palindrome Triangle , Concentric Number Pattern</a:t>
+              <a:t>Square Pattern , Right&amp;Left Triangle , Inverted Right&amp;Left Triangle , Pyramid , Diamond , Binary Triangle , Butterfly Pattern , X Pattern , Palindrome Triangle , Concentric Number Pattern</a:t>
             </a:r>
           </a:p>
           <a:p>
@@ -5873,15 +5803,7 @@
             <a:pPr lvl="1"/>
             <a:r>
               <a:rPr lang="en-IN" dirty="0"/>
-              <a:t> stream = </a:t>
-            </a:r>
-            <a:r>
-              <a:rPr lang="en-IN" dirty="0" err="1"/>
-              <a:t>dict</a:t>
-            </a:r>
-            <a:r>
-              <a:rPr lang="en-IN" dirty="0"/>
-              <a:t>()	or stream = {}		# Empty dictionary</a:t>
+              <a:t> stream = dict()	or stream = {}		# Empty dictionary</a:t>
             </a:r>
           </a:p>
           <a:p>
@@ -6055,37 +5977,13 @@
           <a:p>
             <a:r>
               <a:rPr lang="en-IN" dirty="0"/>
-              <a:t> Sort String </a:t>
-            </a:r>
-            <a:r>
-              <a:rPr lang="en-IN" dirty="0" err="1"/>
-              <a:t>wrt</a:t>
-            </a:r>
-            <a:r>
-              <a:rPr lang="en-IN" dirty="0"/>
-              <a:t> frequency.</a:t>
-            </a:r>
-          </a:p>
-          <a:p>
-            <a:r>
-              <a:rPr lang="en-IN" dirty="0"/>
-              <a:t> Group Anagrams : stream = ["eat","tea","tan","ate","</a:t>
-            </a:r>
-            <a:r>
-              <a:rPr lang="en-IN" dirty="0" err="1"/>
-              <a:t>nat</a:t>
-            </a:r>
-            <a:r>
-              <a:rPr lang="en-IN" dirty="0"/>
-              <a:t>","bat"] ; o/p: {'a1e1t1': ['eat', 'tea', 'ate'], 'a1n1t1': ['tan', '</a:t>
-            </a:r>
-            <a:r>
-              <a:rPr lang="en-IN" dirty="0" err="1"/>
-              <a:t>nat</a:t>
-            </a:r>
-            <a:r>
-              <a:rPr lang="en-IN" dirty="0"/>
-              <a:t>'], 'a1b1t1': ['bat’]}</a:t>
+              <a:t> Sort String wrt frequency.</a:t>
+            </a:r>
+          </a:p>
+          <a:p>
+            <a:r>
+              <a:rPr lang="en-IN" dirty="0"/>
+              <a:t> Group Anagrams : stream = ["eat","tea","tan","ate","nat","bat"] ; o/p: {'a1e1t1': ['eat', 'tea', 'ate'], 'a1n1t1': ['tan', 'nat'], 'a1b1t1': ['bat’]}</a:t>
             </a:r>
           </a:p>
           <a:p>
@@ -6095,23 +5993,7 @@
             </a:r>
             <a:r>
               <a:rPr lang="en-GB" dirty="0"/>
-              <a:t>{"John":20, "Mary":21, "Tom":20, "Alice":21}; o/p:{ 20:["</a:t>
-            </a:r>
-            <a:r>
-              <a:rPr lang="en-GB" dirty="0" err="1"/>
-              <a:t>John","Tom</a:t>
-            </a:r>
-            <a:r>
-              <a:rPr lang="en-GB" dirty="0"/>
-              <a:t>"], 21:["</a:t>
-            </a:r>
-            <a:r>
-              <a:rPr lang="en-GB" dirty="0" err="1"/>
-              <a:t>Mary","Alice</a:t>
-            </a:r>
-            <a:r>
-              <a:rPr lang="en-GB" dirty="0"/>
-              <a:t>"]}.</a:t>
+              <a:t>{"John":20, "Mary":21, "Tom":20, "Alice":21}; o/p:{ 20:["John","Tom"], 21:["Mary","Alice"]}.</a:t>
             </a:r>
           </a:p>
           <a:p>
@@ -6127,15 +6009,7 @@
             </a:r>
             <a:r>
               <a:rPr lang="en-IN" dirty="0"/>
-              <a:t>Word Pattern : pattern="abba" , sentence="dog cat </a:t>
-            </a:r>
-            <a:r>
-              <a:rPr lang="en-IN" dirty="0" err="1"/>
-              <a:t>cat</a:t>
-            </a:r>
-            <a:r>
-              <a:rPr lang="en-IN" dirty="0"/>
-              <a:t> dog" . o/p : True.</a:t>
+              <a:t>Word Pattern : pattern="abba" , sentence="dog cat cat dog" . o/p : True.</a:t>
             </a:r>
             <a:endParaRPr lang="en-GB" dirty="0"/>
           </a:p>
@@ -6325,71 +6199,7 @@
             <a:pPr lvl="1"/>
             <a:r>
               <a:rPr lang="en-IN" dirty="0"/>
-              <a:t> add(value) , union(</a:t>
-            </a:r>
-            <a:r>
-              <a:rPr lang="en-IN" dirty="0" err="1"/>
-              <a:t>iterable</a:t>
-            </a:r>
-            <a:r>
-              <a:rPr lang="en-IN" dirty="0"/>
-              <a:t>) , update(</a:t>
-            </a:r>
-            <a:r>
-              <a:rPr lang="en-IN" dirty="0" err="1"/>
-              <a:t>iterable</a:t>
-            </a:r>
-            <a:r>
-              <a:rPr lang="en-IN" dirty="0"/>
-              <a:t>) , difference(</a:t>
-            </a:r>
-            <a:r>
-              <a:rPr lang="en-IN" dirty="0" err="1"/>
-              <a:t>iterable</a:t>
-            </a:r>
-            <a:r>
-              <a:rPr lang="en-IN" dirty="0"/>
-              <a:t>) , intersection(</a:t>
-            </a:r>
-            <a:r>
-              <a:rPr lang="en-IN" dirty="0" err="1"/>
-              <a:t>iterable</a:t>
-            </a:r>
-            <a:r>
-              <a:rPr lang="en-IN" dirty="0"/>
-              <a:t>)  , </a:t>
-            </a:r>
-            <a:r>
-              <a:rPr lang="en-IN" dirty="0" err="1"/>
-              <a:t>intersection_update</a:t>
-            </a:r>
-            <a:r>
-              <a:rPr lang="en-IN" dirty="0"/>
-              <a:t>(</a:t>
-            </a:r>
-            <a:r>
-              <a:rPr lang="en-IN" dirty="0" err="1"/>
-              <a:t>iterable</a:t>
-            </a:r>
-            <a:r>
-              <a:rPr lang="en-IN" dirty="0"/>
-              <a:t>) , </a:t>
-            </a:r>
-            <a:r>
-              <a:rPr lang="en-IN" dirty="0" err="1"/>
-              <a:t>difference_update</a:t>
-            </a:r>
-            <a:r>
-              <a:rPr lang="en-IN" dirty="0"/>
-              <a:t>(</a:t>
-            </a:r>
-            <a:r>
-              <a:rPr lang="en-IN" dirty="0" err="1"/>
-              <a:t>iterable</a:t>
-            </a:r>
-            <a:r>
-              <a:rPr lang="en-IN" dirty="0"/>
-              <a:t>) , copy() , discard(element) , pop() , clear().</a:t>
+              <a:t> add(value) , union(iterable) , update(iterable) , difference(iterable) , intersection(iterable)  , intersection_update(iterable) , difference_update(iterable) , copy() , discard(element) , pop() , clear().</a:t>
             </a:r>
           </a:p>
         </p:txBody>
@@ -6946,15 +6756,7 @@
             </a:r>
             <a:r>
               <a:rPr lang="en-GB" dirty="0"/>
-              <a:t>def </a:t>
-            </a:r>
-            <a:r>
-              <a:rPr lang="en-GB" dirty="0" err="1"/>
-              <a:t>function_name</a:t>
-            </a:r>
-            <a:r>
-              <a:rPr lang="en-GB" dirty="0"/>
-              <a:t>():</a:t>
+              <a:t>def function_name():</a:t>
             </a:r>
           </a:p>
           <a:p>
@@ -6970,15 +6772,7 @@
           <a:p>
             <a:r>
               <a:rPr lang="en-GB" dirty="0"/>
-              <a:t> function call – </a:t>
-            </a:r>
-            <a:r>
-              <a:rPr lang="en-GB" dirty="0" err="1"/>
-              <a:t>function_name</a:t>
-            </a:r>
-            <a:r>
-              <a:rPr lang="en-GB"/>
-              <a:t>()</a:t>
+              <a:t> function call – function_name()</a:t>
             </a:r>
             <a:endParaRPr lang="en-GB" b="1" dirty="0"/>
           </a:p>
@@ -7823,15 +7617,7 @@
             </a:r>
             <a:r>
               <a:rPr lang="en-GB" dirty="0"/>
-              <a:t>pre-build python modules (</a:t>
-            </a:r>
-            <a:r>
-              <a:rPr lang="en-GB" dirty="0" err="1"/>
-              <a:t>os</a:t>
-            </a:r>
-            <a:r>
-              <a:rPr lang="en-GB" dirty="0"/>
-              <a:t> , datetime , math , random)</a:t>
+              <a:t>pre-build python modules (os , datetime , math , random)</a:t>
             </a:r>
             <a:endParaRPr lang="en-GB" b="1" dirty="0"/>
           </a:p>
@@ -7882,13 +7668,8 @@
             <a:pPr lvl="1"/>
             <a:r>
               <a:rPr lang="en-IN" dirty="0"/>
-              <a:t> import </a:t>
-            </a:r>
-            <a:r>
-              <a:rPr lang="en-IN" dirty="0" err="1"/>
-              <a:t>module_name</a:t>
-            </a:r>
-            <a:endParaRPr lang="en-IN" dirty="0"/>
+              <a:t> import module_name</a:t>
+            </a:r>
           </a:p>
           <a:p>
             <a:pPr lvl="1"/>
@@ -7898,15 +7679,7 @@
             </a:r>
             <a:r>
               <a:rPr lang="en-IN" dirty="0"/>
-              <a:t>from </a:t>
-            </a:r>
-            <a:r>
-              <a:rPr lang="en-IN" dirty="0" err="1"/>
-              <a:t>module_name</a:t>
-            </a:r>
-            <a:r>
-              <a:rPr lang="en-IN" dirty="0"/>
-              <a:t> import *</a:t>
+              <a:t>from module_name import *</a:t>
             </a:r>
             <a:endParaRPr lang="en-GB" b="1" dirty="0"/>
           </a:p>
@@ -8079,45 +7852,21 @@
             <a:pPr lvl="1"/>
             <a:r>
               <a:rPr lang="en-IN" dirty="0"/>
-              <a:t> </a:t>
-            </a:r>
-            <a:r>
-              <a:rPr lang="en-IN" dirty="0" err="1"/>
-              <a:t>numpy</a:t>
-            </a:r>
-            <a:r>
-              <a:rPr lang="en-IN" dirty="0"/>
-              <a:t> 0.0.1 already exists in global environment</a:t>
+              <a:t> numpy 0.0.1 already exists in global environment</a:t>
             </a:r>
           </a:p>
           <a:p>
             <a:pPr lvl="1"/>
             <a:r>
               <a:rPr lang="en-IN" dirty="0"/>
-              <a:t> project 1 : requires </a:t>
-            </a:r>
-            <a:r>
-              <a:rPr lang="en-IN" dirty="0" err="1"/>
-              <a:t>numpy</a:t>
-            </a:r>
-            <a:r>
-              <a:rPr lang="en-IN" dirty="0"/>
-              <a:t> 0.0.1</a:t>
+              <a:t> project 1 : requires numpy 0.0.1</a:t>
             </a:r>
           </a:p>
           <a:p>
             <a:pPr lvl="1"/>
             <a:r>
               <a:rPr lang="en-IN" dirty="0"/>
-              <a:t> project 2 : requires </a:t>
-            </a:r>
-            <a:r>
-              <a:rPr lang="en-IN" dirty="0" err="1"/>
-              <a:t>numpy</a:t>
-            </a:r>
-            <a:r>
-              <a:rPr lang="en-IN" dirty="0"/>
-              <a:t> 0.1.1</a:t>
+              <a:t> project 2 : requires numpy 0.1.1</a:t>
             </a:r>
           </a:p>
           <a:p>
@@ -8145,21 +7894,8 @@
             </a:r>
             <a:r>
               <a:rPr lang="en-IN" dirty="0"/>
-              <a:t>python –m </a:t>
-            </a:r>
-            <a:r>
-              <a:rPr lang="en-IN" dirty="0" err="1"/>
-              <a:t>venv</a:t>
-            </a:r>
-            <a:r>
-              <a:rPr lang="en-IN" dirty="0"/>
-              <a:t> </a:t>
-            </a:r>
-            <a:r>
-              <a:rPr lang="en-IN" dirty="0" err="1"/>
-              <a:t>VEname</a:t>
-            </a:r>
-            <a:endParaRPr lang="en-IN" dirty="0"/>
+              <a:t>python –m venv VEname</a:t>
+            </a:r>
           </a:p>
           <a:p>
             <a:r>
@@ -8172,15 +7908,7 @@
             </a:r>
             <a:r>
               <a:rPr lang="en-IN" dirty="0"/>
-              <a:t>In </a:t>
-            </a:r>
-            <a:r>
-              <a:rPr lang="en-IN" dirty="0" err="1"/>
-              <a:t>cmd</a:t>
-            </a:r>
-            <a:r>
-              <a:rPr lang="en-IN" dirty="0"/>
-              <a:t> change directory to scripts and enter activate.</a:t>
+              <a:t>In cmd change directory to scripts and enter activate.</a:t>
             </a:r>
           </a:p>
         </p:txBody>
@@ -8348,71 +8076,31 @@
           <a:p>
             <a:r>
               <a:rPr lang="en-IN" b="1" dirty="0"/>
-              <a:t> </a:t>
-            </a:r>
-            <a:r>
-              <a:rPr lang="en-IN" b="1" dirty="0" err="1"/>
-              <a:t>defaultdict</a:t>
-            </a:r>
+              <a:t> defaultdict : </a:t>
+            </a:r>
+            <a:r>
+              <a:rPr lang="en-IN" dirty="0"/>
+              <a:t>dictionary with default key as 0.</a:t>
+            </a:r>
+          </a:p>
+          <a:p>
             <a:r>
               <a:rPr lang="en-IN" b="1" dirty="0"/>
-              <a:t> : </a:t>
-            </a:r>
-            <a:r>
-              <a:rPr lang="en-IN" dirty="0"/>
-              <a:t>dictionary with default key as 0.</a:t>
+              <a:t> ChainMap : </a:t>
+            </a:r>
+            <a:r>
+              <a:rPr lang="en-IN" dirty="0"/>
+              <a:t>for updation it creates a new index not modifies.</a:t>
             </a:r>
           </a:p>
           <a:p>
             <a:r>
               <a:rPr lang="en-IN" b="1" dirty="0"/>
-              <a:t> </a:t>
-            </a:r>
-            <a:r>
-              <a:rPr lang="en-IN" b="1" dirty="0" err="1"/>
-              <a:t>ChainMap</a:t>
-            </a:r>
-            <a:r>
-              <a:rPr lang="en-IN" b="1" dirty="0"/>
-              <a:t> : </a:t>
-            </a:r>
-            <a:r>
-              <a:rPr lang="en-IN" dirty="0"/>
-              <a:t>for </a:t>
-            </a:r>
-            <a:r>
-              <a:rPr lang="en-IN" dirty="0" err="1"/>
-              <a:t>updation</a:t>
-            </a:r>
-            <a:r>
-              <a:rPr lang="en-IN" dirty="0"/>
-              <a:t> it creates a new index not modifies.</a:t>
-            </a:r>
-          </a:p>
-          <a:p>
-            <a:r>
-              <a:rPr lang="en-IN" b="1" dirty="0"/>
-              <a:t> </a:t>
-            </a:r>
-            <a:r>
-              <a:rPr lang="en-IN" b="1" dirty="0" err="1"/>
-              <a:t>OrderedDict</a:t>
-            </a:r>
-            <a:r>
-              <a:rPr lang="en-IN" b="1" dirty="0"/>
-              <a:t> : </a:t>
-            </a:r>
-            <a:r>
-              <a:rPr lang="en-IN" dirty="0"/>
-              <a:t>order of the </a:t>
-            </a:r>
-            <a:r>
-              <a:rPr lang="en-IN" dirty="0" err="1"/>
-              <a:t>updation</a:t>
-            </a:r>
-            <a:r>
-              <a:rPr lang="en-IN" dirty="0"/>
-              <a:t> not change.</a:t>
+              <a:t> OrderedDict : </a:t>
+            </a:r>
+            <a:r>
+              <a:rPr lang="en-IN" dirty="0"/>
+              <a:t>order of the updation not change.</a:t>
             </a:r>
           </a:p>
           <a:p>
@@ -8425,10 +8113,9 @@
               <a:t>Dequeue : </a:t>
             </a:r>
             <a:r>
-              <a:rPr lang="en-IN"/>
+              <a:rPr lang="en-IN" dirty="0"/>
               <a:t>Implements Queue</a:t>
             </a:r>
-            <a:endParaRPr lang="en-IN" dirty="0"/>
           </a:p>
         </p:txBody>
       </p:sp>
@@ -8525,7 +8212,7 @@
           <p:cNvPr id="2" name="Title 1">
             <a:extLst>
               <a:ext uri="{FF2B5EF4-FFF2-40B4-BE49-F238E27FC236}">
-                <a16:creationId xmlns:a16="http://schemas.microsoft.com/office/drawing/2014/main" id="{9FDFE934-FCD7-0FF7-3D48-FE377DC2C4BB}"/>
+                <a16:creationId xmlns:a16="http://schemas.microsoft.com/office/drawing/2014/main" id="{96366A88-CFBD-B97A-00EB-C635FE8A19F8}"/>
               </a:ext>
             </a:extLst>
           </p:cNvPr>
@@ -8543,7 +8230,7 @@
           <a:p>
             <a:r>
               <a:rPr lang="en-GB" dirty="0"/>
-              <a:t>Datetime</a:t>
+              <a:t>OS</a:t>
             </a:r>
             <a:endParaRPr lang="en-IN" dirty="0"/>
           </a:p>
@@ -8554,7 +8241,7 @@
           <p:cNvPr id="3" name="Content Placeholder 2">
             <a:extLst>
               <a:ext uri="{FF2B5EF4-FFF2-40B4-BE49-F238E27FC236}">
-                <a16:creationId xmlns:a16="http://schemas.microsoft.com/office/drawing/2014/main" id="{39006957-BA22-F06D-3CB4-AD976E5ED1FC}"/>
+                <a16:creationId xmlns:a16="http://schemas.microsoft.com/office/drawing/2014/main" id="{E0C53D46-508B-CE03-C0C5-4A07BB8ECD8A}"/>
               </a:ext>
             </a:extLst>
           </p:cNvPr>
@@ -8571,18 +8258,34 @@
           <a:lstStyle/>
           <a:p>
             <a:r>
-              <a:rPr lang="en-GB" dirty="0"/>
-              <a:t> </a:t>
-            </a:r>
-            <a:r>
-              <a:rPr lang="en-GB" b="1" dirty="0"/>
-              <a:t>Import : </a:t>
-            </a:r>
-            <a:r>
-              <a:rPr lang="en-GB" dirty="0"/>
-              <a:t>import datetime	or	from datetime import *</a:t>
-            </a:r>
-            <a:endParaRPr lang="en-IN" dirty="0"/>
+              <a:rPr lang="en-IN" b="1" dirty="0"/>
+              <a:t> Import : </a:t>
+            </a:r>
+            <a:r>
+              <a:rPr lang="en-IN" dirty="0"/>
+              <a:t>import os</a:t>
+            </a:r>
+          </a:p>
+          <a:p>
+            <a:r>
+              <a:rPr lang="en-IN" b="1" dirty="0"/>
+              <a:t> Uses : </a:t>
+            </a:r>
+            <a:r>
+              <a:rPr lang="en-IN" dirty="0"/>
+              <a:t>files &amp; folders operations</a:t>
+            </a:r>
+          </a:p>
+          <a:p>
+            <a:r>
+              <a:rPr lang="en-IN" b="1" dirty="0"/>
+              <a:t> Operations : </a:t>
+            </a:r>
+            <a:r>
+              <a:rPr lang="en-IN" dirty="0"/>
+              <a:t>makedir , listdir , system , path , startfile , getuid , rename , remove , rmdir</a:t>
+            </a:r>
+            <a:endParaRPr lang="en-IN" b="1" dirty="0"/>
           </a:p>
         </p:txBody>
       </p:sp>
@@ -8591,7 +8294,7 @@
           <p:cNvPr id="4" name="Footer Placeholder 3">
             <a:extLst>
               <a:ext uri="{FF2B5EF4-FFF2-40B4-BE49-F238E27FC236}">
-                <a16:creationId xmlns:a16="http://schemas.microsoft.com/office/drawing/2014/main" id="{723E5E67-40AC-20E1-815F-D843004BA175}"/>
+                <a16:creationId xmlns:a16="http://schemas.microsoft.com/office/drawing/2014/main" id="{C8996E58-34C6-D144-C03C-FBE8CD89090D}"/>
               </a:ext>
             </a:extLst>
           </p:cNvPr>
@@ -8620,7 +8323,7 @@
           <p:cNvPr id="5" name="Slide Number Placeholder 4">
             <a:extLst>
               <a:ext uri="{FF2B5EF4-FFF2-40B4-BE49-F238E27FC236}">
-                <a16:creationId xmlns:a16="http://schemas.microsoft.com/office/drawing/2014/main" id="{C7832505-4646-07D5-87EB-4E8F6703AB14}"/>
+                <a16:creationId xmlns:a16="http://schemas.microsoft.com/office/drawing/2014/main" id="{A0B8147F-3551-F86D-E2DF-18461434347C}"/>
               </a:ext>
             </a:extLst>
           </p:cNvPr>
@@ -8647,7 +8350,7 @@
     </p:spTree>
     <p:extLst>
       <p:ext uri="{BB962C8B-B14F-4D97-AF65-F5344CB8AC3E}">
-        <p14:creationId xmlns:p14="http://schemas.microsoft.com/office/powerpoint/2010/main" val="682083692"/>
+        <p14:creationId xmlns:p14="http://schemas.microsoft.com/office/powerpoint/2010/main" val="609168797"/>
       </p:ext>
     </p:extLst>
   </p:cSld>
@@ -8679,7 +8382,7 @@
           <p:cNvPr id="2" name="Title 1">
             <a:extLst>
               <a:ext uri="{FF2B5EF4-FFF2-40B4-BE49-F238E27FC236}">
-                <a16:creationId xmlns:a16="http://schemas.microsoft.com/office/drawing/2014/main" id="{96366A88-CFBD-B97A-00EB-C635FE8A19F8}"/>
+                <a16:creationId xmlns:a16="http://schemas.microsoft.com/office/drawing/2014/main" id="{434F5D56-38D2-FC34-E6C3-431B49D3B854}"/>
               </a:ext>
             </a:extLst>
           </p:cNvPr>
@@ -8696,10 +8399,9 @@
           <a:lstStyle/>
           <a:p>
             <a:r>
-              <a:rPr lang="en-GB" dirty="0"/>
-              <a:t>OS</a:t>
-            </a:r>
-            <a:endParaRPr lang="en-IN" dirty="0"/>
+              <a:rPr lang="en-IN" dirty="0"/>
+              <a:t>Math</a:t>
+            </a:r>
           </a:p>
         </p:txBody>
       </p:sp>
@@ -8708,7 +8410,7 @@
           <p:cNvPr id="3" name="Content Placeholder 2">
             <a:extLst>
               <a:ext uri="{FF2B5EF4-FFF2-40B4-BE49-F238E27FC236}">
-                <a16:creationId xmlns:a16="http://schemas.microsoft.com/office/drawing/2014/main" id="{E0C53D46-508B-CE03-C0C5-4A07BB8ECD8A}"/>
+                <a16:creationId xmlns:a16="http://schemas.microsoft.com/office/drawing/2014/main" id="{223C7B8F-EBE5-9DE4-0F7D-695792180D17}"/>
               </a:ext>
             </a:extLst>
           </p:cNvPr>
@@ -8724,44 +8426,7 @@
           <a:bodyPr/>
           <a:lstStyle/>
           <a:p>
-            <a:r>
-              <a:rPr lang="en-IN" b="1" dirty="0"/>
-              <a:t> Import : </a:t>
-            </a:r>
-            <a:r>
-              <a:rPr lang="en-IN" dirty="0"/>
-              <a:t>import </a:t>
-            </a:r>
-            <a:r>
-              <a:rPr lang="en-IN" dirty="0" err="1"/>
-              <a:t>os</a:t>
-            </a:r>
-            <a:endParaRPr lang="en-IN" dirty="0"/>
-          </a:p>
-          <a:p>
-            <a:r>
-              <a:rPr lang="en-IN" b="1" dirty="0"/>
-              <a:t> Uses : </a:t>
-            </a:r>
-            <a:r>
-              <a:rPr lang="en-IN" dirty="0"/>
-              <a:t>files &amp; folders operations</a:t>
-            </a:r>
-          </a:p>
-          <a:p>
-            <a:r>
-              <a:rPr lang="en-IN" b="1" dirty="0"/>
-              <a:t> Operations : </a:t>
-            </a:r>
-            <a:r>
-              <a:rPr lang="en-IN" dirty="0" err="1"/>
-              <a:t>makedir</a:t>
-            </a:r>
-            <a:r>
-              <a:rPr lang="en-IN" dirty="0"/>
-              <a:t> , </a:t>
-            </a:r>
-            <a:endParaRPr lang="en-IN" b="1" dirty="0"/>
+            <a:endParaRPr lang="en-IN" dirty="0"/>
           </a:p>
         </p:txBody>
       </p:sp>
@@ -8770,7 +8435,7 @@
           <p:cNvPr id="4" name="Footer Placeholder 3">
             <a:extLst>
               <a:ext uri="{FF2B5EF4-FFF2-40B4-BE49-F238E27FC236}">
-                <a16:creationId xmlns:a16="http://schemas.microsoft.com/office/drawing/2014/main" id="{C8996E58-34C6-D144-C03C-FBE8CD89090D}"/>
+                <a16:creationId xmlns:a16="http://schemas.microsoft.com/office/drawing/2014/main" id="{5940098E-A127-E081-A037-48F29067B548}"/>
               </a:ext>
             </a:extLst>
           </p:cNvPr>
@@ -8799,7 +8464,7 @@
           <p:cNvPr id="5" name="Slide Number Placeholder 4">
             <a:extLst>
               <a:ext uri="{FF2B5EF4-FFF2-40B4-BE49-F238E27FC236}">
-                <a16:creationId xmlns:a16="http://schemas.microsoft.com/office/drawing/2014/main" id="{A0B8147F-3551-F86D-E2DF-18461434347C}"/>
+                <a16:creationId xmlns:a16="http://schemas.microsoft.com/office/drawing/2014/main" id="{F8AD206D-52F3-9A34-127F-2CD8392EBF28}"/>
               </a:ext>
             </a:extLst>
           </p:cNvPr>
@@ -8826,7 +8491,7 @@
     </p:spTree>
     <p:extLst>
       <p:ext uri="{BB962C8B-B14F-4D97-AF65-F5344CB8AC3E}">
-        <p14:creationId xmlns:p14="http://schemas.microsoft.com/office/powerpoint/2010/main" val="609168797"/>
+        <p14:creationId xmlns:p14="http://schemas.microsoft.com/office/powerpoint/2010/main" val="2833460125"/>
       </p:ext>
     </p:extLst>
   </p:cSld>
@@ -8858,7 +8523,7 @@
           <p:cNvPr id="2" name="Title 1">
             <a:extLst>
               <a:ext uri="{FF2B5EF4-FFF2-40B4-BE49-F238E27FC236}">
-                <a16:creationId xmlns:a16="http://schemas.microsoft.com/office/drawing/2014/main" id="{D70072C2-CAC4-C990-6527-C89C83DBC442}"/>
+                <a16:creationId xmlns:a16="http://schemas.microsoft.com/office/drawing/2014/main" id="{9E6DD218-3F31-33F2-8CDB-7DA5BBC005B5}"/>
               </a:ext>
             </a:extLst>
           </p:cNvPr>
@@ -8876,7 +8541,7 @@
           <a:p>
             <a:r>
               <a:rPr lang="en-GB" dirty="0"/>
-              <a:t>Email</a:t>
+              <a:t>Excel</a:t>
             </a:r>
             <a:endParaRPr lang="en-IN" dirty="0"/>
           </a:p>
@@ -8887,7 +8552,7 @@
           <p:cNvPr id="3" name="Content Placeholder 2">
             <a:extLst>
               <a:ext uri="{FF2B5EF4-FFF2-40B4-BE49-F238E27FC236}">
-                <a16:creationId xmlns:a16="http://schemas.microsoft.com/office/drawing/2014/main" id="{96D6ED05-9C2A-02BA-AAD4-D9D580B91181}"/>
+                <a16:creationId xmlns:a16="http://schemas.microsoft.com/office/drawing/2014/main" id="{500E92CE-D89D-F2AE-C187-40E84467AA4A}"/>
               </a:ext>
             </a:extLst>
           </p:cNvPr>
@@ -8904,33 +8569,17 @@
           <a:lstStyle/>
           <a:p>
             <a:r>
-              <a:rPr lang="en-GB" dirty="0"/>
+              <a:rPr lang="en-IN" dirty="0"/>
               <a:t> </a:t>
             </a:r>
             <a:r>
-              <a:rPr lang="en-GB" b="1" dirty="0"/>
-              <a:t>Packages : </a:t>
-            </a:r>
-            <a:r>
-              <a:rPr lang="en-GB" dirty="0" err="1"/>
-              <a:t>smtplib</a:t>
-            </a:r>
-            <a:r>
-              <a:rPr lang="en-GB" dirty="0"/>
-              <a:t> , </a:t>
-            </a:r>
-            <a:r>
-              <a:rPr lang="en-GB" dirty="0" err="1"/>
-              <a:t>mimetype</a:t>
-            </a:r>
-            <a:endParaRPr lang="en-GB" dirty="0"/>
-          </a:p>
-          <a:p>
-            <a:r>
-              <a:rPr lang="en-GB" dirty="0"/>
-              <a:t> </a:t>
-            </a:r>
-            <a:endParaRPr lang="en-IN" dirty="0"/>
+              <a:rPr lang="en-IN" b="1" dirty="0"/>
+              <a:t>Package : </a:t>
+            </a:r>
+            <a:r>
+              <a:rPr lang="en-IN" dirty="0"/>
+              <a:t>openpyxl</a:t>
+            </a:r>
           </a:p>
         </p:txBody>
       </p:sp>
@@ -8939,7 +8588,7 @@
           <p:cNvPr id="4" name="Footer Placeholder 3">
             <a:extLst>
               <a:ext uri="{FF2B5EF4-FFF2-40B4-BE49-F238E27FC236}">
-                <a16:creationId xmlns:a16="http://schemas.microsoft.com/office/drawing/2014/main" id="{EC9EC30D-1289-FA18-7D84-4F3CF09AC37C}"/>
+                <a16:creationId xmlns:a16="http://schemas.microsoft.com/office/drawing/2014/main" id="{55C92561-856D-7F47-3708-294C94D9D3BA}"/>
               </a:ext>
             </a:extLst>
           </p:cNvPr>
@@ -8968,7 +8617,7 @@
           <p:cNvPr id="5" name="Slide Number Placeholder 4">
             <a:extLst>
               <a:ext uri="{FF2B5EF4-FFF2-40B4-BE49-F238E27FC236}">
-                <a16:creationId xmlns:a16="http://schemas.microsoft.com/office/drawing/2014/main" id="{B42736E2-8304-D2B5-5ADA-5F4CC1D080FA}"/>
+                <a16:creationId xmlns:a16="http://schemas.microsoft.com/office/drawing/2014/main" id="{5A544846-71AE-4EED-7C71-69CBD266AB5B}"/>
               </a:ext>
             </a:extLst>
           </p:cNvPr>
@@ -8995,7 +8644,7 @@
     </p:spTree>
     <p:extLst>
       <p:ext uri="{BB962C8B-B14F-4D97-AF65-F5344CB8AC3E}">
-        <p14:creationId xmlns:p14="http://schemas.microsoft.com/office/powerpoint/2010/main" val="479021944"/>
+        <p14:creationId xmlns:p14="http://schemas.microsoft.com/office/powerpoint/2010/main" val="1926792215"/>
       </p:ext>
     </p:extLst>
   </p:cSld>
@@ -9027,7 +8676,7 @@
           <p:cNvPr id="2" name="Title 1">
             <a:extLst>
               <a:ext uri="{FF2B5EF4-FFF2-40B4-BE49-F238E27FC236}">
-                <a16:creationId xmlns:a16="http://schemas.microsoft.com/office/drawing/2014/main" id="{7907DEEF-0FBD-20D9-2965-3ED3E721BD53}"/>
+                <a16:creationId xmlns:a16="http://schemas.microsoft.com/office/drawing/2014/main" id="{F4F099D4-75DE-2228-3253-ECEEA4A44245}"/>
               </a:ext>
             </a:extLst>
           </p:cNvPr>
@@ -9044,10 +8693,9 @@
           <a:lstStyle/>
           <a:p>
             <a:r>
-              <a:rPr lang="en-GB" dirty="0"/>
-              <a:t>MYSQL Connection</a:t>
-            </a:r>
-            <a:endParaRPr lang="en-IN" dirty="0"/>
+              <a:rPr lang="en-IN" dirty="0"/>
+              <a:t>Data Generator</a:t>
+            </a:r>
           </a:p>
         </p:txBody>
       </p:sp>
@@ -9056,7 +8704,7 @@
           <p:cNvPr id="3" name="Content Placeholder 2">
             <a:extLst>
               <a:ext uri="{FF2B5EF4-FFF2-40B4-BE49-F238E27FC236}">
-                <a16:creationId xmlns:a16="http://schemas.microsoft.com/office/drawing/2014/main" id="{BD381BC6-08E5-488F-AD25-3B559783886A}"/>
+                <a16:creationId xmlns:a16="http://schemas.microsoft.com/office/drawing/2014/main" id="{A799FB1B-936E-83C0-D314-A9D32BEFDC25}"/>
               </a:ext>
             </a:extLst>
           </p:cNvPr>
@@ -9073,26 +8721,31 @@
           <a:lstStyle/>
           <a:p>
             <a:r>
-              <a:rPr lang="en-GB" dirty="0"/>
+              <a:rPr lang="en-IN" dirty="0"/>
               <a:t> </a:t>
             </a:r>
             <a:r>
-              <a:rPr lang="en-GB" b="1" dirty="0" err="1"/>
-              <a:t>cmd</a:t>
-            </a:r>
-            <a:r>
-              <a:rPr lang="en-GB" b="1" dirty="0"/>
-              <a:t> : pip install </a:t>
-            </a:r>
-            <a:r>
-              <a:rPr lang="en-GB" b="1" dirty="0" err="1"/>
-              <a:t>mysql</a:t>
-            </a:r>
-            <a:r>
-              <a:rPr lang="en-GB" b="1" dirty="0"/>
-              <a:t>-connector-python</a:t>
-            </a:r>
-            <a:endParaRPr lang="en-IN" dirty="0"/>
+              <a:rPr lang="en-IN" b="1" dirty="0"/>
+              <a:t>Package : </a:t>
+            </a:r>
+            <a:r>
+              <a:rPr lang="en-IN" dirty="0"/>
+              <a:t>faker</a:t>
+            </a:r>
+          </a:p>
+          <a:p>
+            <a:r>
+              <a:rPr lang="en-IN" dirty="0"/>
+              <a:t> </a:t>
+            </a:r>
+            <a:r>
+              <a:rPr lang="en-IN" b="1" dirty="0"/>
+              <a:t>Usage : </a:t>
+            </a:r>
+            <a:r>
+              <a:rPr lang="en-IN" dirty="0"/>
+              <a:t>generates fake data</a:t>
+            </a:r>
           </a:p>
         </p:txBody>
       </p:sp>
@@ -9101,7 +8754,7 @@
           <p:cNvPr id="4" name="Footer Placeholder 3">
             <a:extLst>
               <a:ext uri="{FF2B5EF4-FFF2-40B4-BE49-F238E27FC236}">
-                <a16:creationId xmlns:a16="http://schemas.microsoft.com/office/drawing/2014/main" id="{F48C9E58-D3F1-09C7-FE6C-48D612C2329F}"/>
+                <a16:creationId xmlns:a16="http://schemas.microsoft.com/office/drawing/2014/main" id="{707FD7A8-A650-29AB-1F96-AA998CE268BB}"/>
               </a:ext>
             </a:extLst>
           </p:cNvPr>
@@ -9130,7 +8783,7 @@
           <p:cNvPr id="5" name="Slide Number Placeholder 4">
             <a:extLst>
               <a:ext uri="{FF2B5EF4-FFF2-40B4-BE49-F238E27FC236}">
-                <a16:creationId xmlns:a16="http://schemas.microsoft.com/office/drawing/2014/main" id="{9208607B-2CC6-16D0-6988-4DB6A51DD176}"/>
+                <a16:creationId xmlns:a16="http://schemas.microsoft.com/office/drawing/2014/main" id="{4D8E87B5-D318-9AA5-634B-EFDFEA10639F}"/>
               </a:ext>
             </a:extLst>
           </p:cNvPr>
@@ -9157,7 +8810,7 @@
     </p:spTree>
     <p:extLst>
       <p:ext uri="{BB962C8B-B14F-4D97-AF65-F5344CB8AC3E}">
-        <p14:creationId xmlns:p14="http://schemas.microsoft.com/office/powerpoint/2010/main" val="2713769145"/>
+        <p14:creationId xmlns:p14="http://schemas.microsoft.com/office/powerpoint/2010/main" val="683650118"/>
       </p:ext>
     </p:extLst>
   </p:cSld>
@@ -9189,7 +8842,7 @@
           <p:cNvPr id="2" name="Title 1">
             <a:extLst>
               <a:ext uri="{FF2B5EF4-FFF2-40B4-BE49-F238E27FC236}">
-                <a16:creationId xmlns:a16="http://schemas.microsoft.com/office/drawing/2014/main" id="{9E6DD218-3F31-33F2-8CDB-7DA5BBC005B5}"/>
+                <a16:creationId xmlns:a16="http://schemas.microsoft.com/office/drawing/2014/main" id="{9FDFE934-FCD7-0FF7-3D48-FE377DC2C4BB}"/>
               </a:ext>
             </a:extLst>
           </p:cNvPr>
@@ -9207,7 +8860,7 @@
           <a:p>
             <a:r>
               <a:rPr lang="en-GB" dirty="0"/>
-              <a:t>Excel</a:t>
+              <a:t>Datetime</a:t>
             </a:r>
             <a:endParaRPr lang="en-IN" dirty="0"/>
           </a:p>
@@ -9218,7 +8871,7 @@
           <p:cNvPr id="3" name="Content Placeholder 2">
             <a:extLst>
               <a:ext uri="{FF2B5EF4-FFF2-40B4-BE49-F238E27FC236}">
-                <a16:creationId xmlns:a16="http://schemas.microsoft.com/office/drawing/2014/main" id="{500E92CE-D89D-F2AE-C187-40E84467AA4A}"/>
+                <a16:creationId xmlns:a16="http://schemas.microsoft.com/office/drawing/2014/main" id="{39006957-BA22-F06D-3CB4-AD976E5ED1FC}"/>
               </a:ext>
             </a:extLst>
           </p:cNvPr>
@@ -9235,16 +8888,16 @@
           <a:lstStyle/>
           <a:p>
             <a:r>
-              <a:rPr lang="en-IN" dirty="0"/>
+              <a:rPr lang="en-GB" dirty="0"/>
               <a:t> </a:t>
             </a:r>
             <a:r>
-              <a:rPr lang="en-IN" b="1" dirty="0"/>
-              <a:t>Package : </a:t>
-            </a:r>
-            <a:r>
-              <a:rPr lang="en-IN" dirty="0" err="1"/>
-              <a:t>openpyxl</a:t>
+              <a:rPr lang="en-GB" b="1" dirty="0"/>
+              <a:t>Import : </a:t>
+            </a:r>
+            <a:r>
+              <a:rPr lang="en-GB" dirty="0"/>
+              <a:t>import datetime	or	from datetime import *</a:t>
             </a:r>
             <a:endParaRPr lang="en-IN" dirty="0"/>
           </a:p>
@@ -9255,7 +8908,7 @@
           <p:cNvPr id="4" name="Footer Placeholder 3">
             <a:extLst>
               <a:ext uri="{FF2B5EF4-FFF2-40B4-BE49-F238E27FC236}">
-                <a16:creationId xmlns:a16="http://schemas.microsoft.com/office/drawing/2014/main" id="{55C92561-856D-7F47-3708-294C94D9D3BA}"/>
+                <a16:creationId xmlns:a16="http://schemas.microsoft.com/office/drawing/2014/main" id="{723E5E67-40AC-20E1-815F-D843004BA175}"/>
               </a:ext>
             </a:extLst>
           </p:cNvPr>
@@ -9284,7 +8937,7 @@
           <p:cNvPr id="5" name="Slide Number Placeholder 4">
             <a:extLst>
               <a:ext uri="{FF2B5EF4-FFF2-40B4-BE49-F238E27FC236}">
-                <a16:creationId xmlns:a16="http://schemas.microsoft.com/office/drawing/2014/main" id="{5A544846-71AE-4EED-7C71-69CBD266AB5B}"/>
+                <a16:creationId xmlns:a16="http://schemas.microsoft.com/office/drawing/2014/main" id="{C7832505-4646-07D5-87EB-4E8F6703AB14}"/>
               </a:ext>
             </a:extLst>
           </p:cNvPr>
@@ -9311,7 +8964,7 @@
     </p:spTree>
     <p:extLst>
       <p:ext uri="{BB962C8B-B14F-4D97-AF65-F5344CB8AC3E}">
-        <p14:creationId xmlns:p14="http://schemas.microsoft.com/office/powerpoint/2010/main" val="1926792215"/>
+        <p14:creationId xmlns:p14="http://schemas.microsoft.com/office/powerpoint/2010/main" val="682083692"/>
       </p:ext>
     </p:extLst>
   </p:cSld>
@@ -10282,7 +9935,7 @@
           <p:cNvPr id="2" name="Title 1">
             <a:extLst>
               <a:ext uri="{FF2B5EF4-FFF2-40B4-BE49-F238E27FC236}">
-                <a16:creationId xmlns:a16="http://schemas.microsoft.com/office/drawing/2014/main" id="{F0317199-3FE4-4011-E431-B733E11096CA}"/>
+                <a16:creationId xmlns:a16="http://schemas.microsoft.com/office/drawing/2014/main" id="{D70072C2-CAC4-C990-6527-C89C83DBC442}"/>
               </a:ext>
             </a:extLst>
           </p:cNvPr>
@@ -10300,7 +9953,7 @@
           <a:p>
             <a:r>
               <a:rPr lang="en-GB" dirty="0"/>
-              <a:t>PDF</a:t>
+              <a:t>Email</a:t>
             </a:r>
             <a:endParaRPr lang="en-IN" dirty="0"/>
           </a:p>
@@ -10311,7 +9964,7 @@
           <p:cNvPr id="3" name="Content Placeholder 2">
             <a:extLst>
               <a:ext uri="{FF2B5EF4-FFF2-40B4-BE49-F238E27FC236}">
-                <a16:creationId xmlns:a16="http://schemas.microsoft.com/office/drawing/2014/main" id="{3417A133-ACB9-E81D-EC4A-0A5A4CF5DEE0}"/>
+                <a16:creationId xmlns:a16="http://schemas.microsoft.com/office/drawing/2014/main" id="{96D6ED05-9C2A-02BA-AAD4-D9D580B91181}"/>
               </a:ext>
             </a:extLst>
           </p:cNvPr>
@@ -10328,12 +9981,22 @@
           <a:lstStyle/>
           <a:p>
             <a:r>
-              <a:rPr lang="en-IN" dirty="0"/>
+              <a:rPr lang="en-GB" dirty="0"/>
               <a:t> </a:t>
             </a:r>
             <a:r>
-              <a:rPr lang="en-IN" b="1" dirty="0"/>
-              <a:t>Package : </a:t>
+              <a:rPr lang="en-GB" b="1" dirty="0"/>
+              <a:t>Packages : </a:t>
+            </a:r>
+            <a:r>
+              <a:rPr lang="en-GB" dirty="0"/>
+              <a:t>smtplib , mimetype</a:t>
+            </a:r>
+          </a:p>
+          <a:p>
+            <a:r>
+              <a:rPr lang="en-GB" dirty="0"/>
+              <a:t> </a:t>
             </a:r>
             <a:endParaRPr lang="en-IN" dirty="0"/>
           </a:p>
@@ -10344,7 +10007,7 @@
           <p:cNvPr id="4" name="Footer Placeholder 3">
             <a:extLst>
               <a:ext uri="{FF2B5EF4-FFF2-40B4-BE49-F238E27FC236}">
-                <a16:creationId xmlns:a16="http://schemas.microsoft.com/office/drawing/2014/main" id="{06D2FE4E-A7CE-4D3B-42B3-8DD37D027516}"/>
+                <a16:creationId xmlns:a16="http://schemas.microsoft.com/office/drawing/2014/main" id="{EC9EC30D-1289-FA18-7D84-4F3CF09AC37C}"/>
               </a:ext>
             </a:extLst>
           </p:cNvPr>
@@ -10373,7 +10036,7 @@
           <p:cNvPr id="5" name="Slide Number Placeholder 4">
             <a:extLst>
               <a:ext uri="{FF2B5EF4-FFF2-40B4-BE49-F238E27FC236}">
-                <a16:creationId xmlns:a16="http://schemas.microsoft.com/office/drawing/2014/main" id="{CF0277D4-6825-FE55-E325-241E05EE90B4}"/>
+                <a16:creationId xmlns:a16="http://schemas.microsoft.com/office/drawing/2014/main" id="{B42736E2-8304-D2B5-5ADA-5F4CC1D080FA}"/>
               </a:ext>
             </a:extLst>
           </p:cNvPr>
@@ -10400,7 +10063,7 @@
     </p:spTree>
     <p:extLst>
       <p:ext uri="{BB962C8B-B14F-4D97-AF65-F5344CB8AC3E}">
-        <p14:creationId xmlns:p14="http://schemas.microsoft.com/office/powerpoint/2010/main" val="1572536975"/>
+        <p14:creationId xmlns:p14="http://schemas.microsoft.com/office/powerpoint/2010/main" val="479021944"/>
       </p:ext>
     </p:extLst>
   </p:cSld>
@@ -10432,7 +10095,7 @@
           <p:cNvPr id="2" name="Title 1">
             <a:extLst>
               <a:ext uri="{FF2B5EF4-FFF2-40B4-BE49-F238E27FC236}">
-                <a16:creationId xmlns:a16="http://schemas.microsoft.com/office/drawing/2014/main" id="{05537F52-D920-165C-539D-D4323D2D50DF}"/>
+                <a16:creationId xmlns:a16="http://schemas.microsoft.com/office/drawing/2014/main" id="{7907DEEF-0FBD-20D9-2965-3ED3E721BD53}"/>
               </a:ext>
             </a:extLst>
           </p:cNvPr>
@@ -10450,7 +10113,7 @@
           <a:p>
             <a:r>
               <a:rPr lang="en-GB" dirty="0"/>
-              <a:t>Custom Packages</a:t>
+              <a:t>MYSQL Connection</a:t>
             </a:r>
             <a:endParaRPr lang="en-IN" dirty="0"/>
           </a:p>
@@ -10461,7 +10124,7 @@
           <p:cNvPr id="3" name="Content Placeholder 2">
             <a:extLst>
               <a:ext uri="{FF2B5EF4-FFF2-40B4-BE49-F238E27FC236}">
-                <a16:creationId xmlns:a16="http://schemas.microsoft.com/office/drawing/2014/main" id="{0AAE2362-0572-BFD5-F478-A0EF74AB9E1A}"/>
+                <a16:creationId xmlns:a16="http://schemas.microsoft.com/office/drawing/2014/main" id="{BD381BC6-08E5-488F-AD25-3B559783886A}"/>
               </a:ext>
             </a:extLst>
           </p:cNvPr>
@@ -10478,103 +10141,14 @@
           <a:lstStyle/>
           <a:p>
             <a:r>
-              <a:rPr lang="en-IN" dirty="0"/>
-              <a:t> Create own Packages.</a:t>
-            </a:r>
-          </a:p>
-          <a:p>
-            <a:r>
-              <a:rPr lang="en-IN" dirty="0"/>
+              <a:rPr lang="en-GB" dirty="0"/>
               <a:t> </a:t>
             </a:r>
             <a:r>
-              <a:rPr lang="en-IN" b="1" dirty="0"/>
-              <a:t>Steps : </a:t>
-            </a:r>
-          </a:p>
-          <a:p>
-            <a:pPr lvl="1"/>
-            <a:r>
-              <a:rPr lang="en-IN" b="1" dirty="0"/>
-              <a:t> </a:t>
-            </a:r>
-            <a:r>
-              <a:rPr lang="en-IN" dirty="0"/>
-              <a:t>create a folder</a:t>
-            </a:r>
-          </a:p>
-          <a:p>
-            <a:pPr lvl="1"/>
-            <a:r>
-              <a:rPr lang="en-IN" dirty="0"/>
-              <a:t> inside that folder add </a:t>
-            </a:r>
-            <a:r>
-              <a:rPr lang="en-IN" dirty="0" err="1"/>
-              <a:t>src</a:t>
-            </a:r>
-            <a:r>
-              <a:rPr lang="en-IN" dirty="0"/>
-              <a:t> folder , </a:t>
-            </a:r>
-            <a:r>
-              <a:rPr lang="en-IN" dirty="0" err="1"/>
-              <a:t>gitignore</a:t>
-            </a:r>
-            <a:r>
-              <a:rPr lang="en-IN" dirty="0"/>
-              <a:t> , readme , license , </a:t>
-            </a:r>
-            <a:r>
-              <a:rPr lang="en-IN" dirty="0" err="1"/>
-              <a:t>venv</a:t>
-            </a:r>
-            <a:r>
-              <a:rPr lang="en-IN" dirty="0"/>
-              <a:t> , </a:t>
-            </a:r>
-            <a:r>
-              <a:rPr lang="en-IN" dirty="0" err="1"/>
-              <a:t>pyproject.toml</a:t>
-            </a:r>
-            <a:endParaRPr lang="en-IN" dirty="0"/>
-          </a:p>
-          <a:p>
-            <a:pPr lvl="1"/>
-            <a:r>
-              <a:rPr lang="en-IN" dirty="0"/>
-              <a:t> </a:t>
-            </a:r>
-            <a:r>
-              <a:rPr lang="en-IN" dirty="0" err="1"/>
-              <a:t>pypi</a:t>
-            </a:r>
-            <a:r>
-              <a:rPr lang="en-IN" dirty="0"/>
-              <a:t> account login</a:t>
-            </a:r>
-          </a:p>
-          <a:p>
-            <a:pPr lvl="1"/>
-            <a:r>
-              <a:rPr lang="en-IN" dirty="0"/>
-              <a:t> publish the branch in GitHub.</a:t>
-            </a:r>
-          </a:p>
-          <a:p>
-            <a:pPr lvl="1"/>
-            <a:r>
-              <a:rPr lang="en-IN" dirty="0"/>
-              <a:t> on </a:t>
-            </a:r>
-            <a:r>
-              <a:rPr lang="en-IN" dirty="0" err="1"/>
-              <a:t>cmd</a:t>
-            </a:r>
-            <a:r>
-              <a:rPr lang="en-IN" dirty="0"/>
-              <a:t> push the folder</a:t>
-            </a:r>
+              <a:rPr lang="en-GB" b="1" dirty="0"/>
+              <a:t>cmd : pip install mysql-connector-python</a:t>
+            </a:r>
+            <a:endParaRPr lang="en-IN" dirty="0"/>
           </a:p>
         </p:txBody>
       </p:sp>
@@ -10583,7 +10157,7 @@
           <p:cNvPr id="4" name="Footer Placeholder 3">
             <a:extLst>
               <a:ext uri="{FF2B5EF4-FFF2-40B4-BE49-F238E27FC236}">
-                <a16:creationId xmlns:a16="http://schemas.microsoft.com/office/drawing/2014/main" id="{DFE71CE4-9080-389F-EBAC-A28DAE84DAEE}"/>
+                <a16:creationId xmlns:a16="http://schemas.microsoft.com/office/drawing/2014/main" id="{F48C9E58-D3F1-09C7-FE6C-48D612C2329F}"/>
               </a:ext>
             </a:extLst>
           </p:cNvPr>
@@ -10612,7 +10186,7 @@
           <p:cNvPr id="5" name="Slide Number Placeholder 4">
             <a:extLst>
               <a:ext uri="{FF2B5EF4-FFF2-40B4-BE49-F238E27FC236}">
-                <a16:creationId xmlns:a16="http://schemas.microsoft.com/office/drawing/2014/main" id="{08D0C57D-0999-D180-8AC1-D9F2F4C92A21}"/>
+                <a16:creationId xmlns:a16="http://schemas.microsoft.com/office/drawing/2014/main" id="{9208607B-2CC6-16D0-6988-4DB6A51DD176}"/>
               </a:ext>
             </a:extLst>
           </p:cNvPr>
@@ -10639,7 +10213,7 @@
     </p:spTree>
     <p:extLst>
       <p:ext uri="{BB962C8B-B14F-4D97-AF65-F5344CB8AC3E}">
-        <p14:creationId xmlns:p14="http://schemas.microsoft.com/office/powerpoint/2010/main" val="2724122432"/>
+        <p14:creationId xmlns:p14="http://schemas.microsoft.com/office/powerpoint/2010/main" val="2713769145"/>
       </p:ext>
     </p:extLst>
   </p:cSld>
@@ -10671,7 +10245,7 @@
           <p:cNvPr id="2" name="Title 1">
             <a:extLst>
               <a:ext uri="{FF2B5EF4-FFF2-40B4-BE49-F238E27FC236}">
-                <a16:creationId xmlns:a16="http://schemas.microsoft.com/office/drawing/2014/main" id="{EA46A9CF-2C01-C94A-DFD6-EFFFA8132FF4}"/>
+                <a16:creationId xmlns:a16="http://schemas.microsoft.com/office/drawing/2014/main" id="{F0317199-3FE4-4011-E431-B733E11096CA}"/>
               </a:ext>
             </a:extLst>
           </p:cNvPr>
@@ -10688,9 +10262,10 @@
           <a:lstStyle/>
           <a:p>
             <a:r>
-              <a:rPr lang="en-IN" dirty="0"/>
-              <a:t>Folder Structure</a:t>
-            </a:r>
+              <a:rPr lang="en-GB" dirty="0"/>
+              <a:t>PDF</a:t>
+            </a:r>
+            <a:endParaRPr lang="en-IN" dirty="0"/>
           </a:p>
         </p:txBody>
       </p:sp>
@@ -10699,7 +10274,7 @@
           <p:cNvPr id="3" name="Content Placeholder 2">
             <a:extLst>
               <a:ext uri="{FF2B5EF4-FFF2-40B4-BE49-F238E27FC236}">
-                <a16:creationId xmlns:a16="http://schemas.microsoft.com/office/drawing/2014/main" id="{2839D2C2-24AC-AFC4-E450-8CABA8F02A1E}"/>
+                <a16:creationId xmlns:a16="http://schemas.microsoft.com/office/drawing/2014/main" id="{3417A133-ACB9-E81D-EC4A-0A5A4CF5DEE0}"/>
               </a:ext>
             </a:extLst>
           </p:cNvPr>
@@ -10712,9 +10287,7 @@
         </p:nvSpPr>
         <p:spPr/>
         <p:txBody>
-          <a:bodyPr>
-            <a:normAutofit lnSpcReduction="10000"/>
-          </a:bodyPr>
+          <a:bodyPr/>
           <a:lstStyle/>
           <a:p>
             <a:r>
@@ -10723,122 +10296,7 @@
             </a:r>
             <a:r>
               <a:rPr lang="en-IN" b="1" dirty="0"/>
-              <a:t>Example : </a:t>
-            </a:r>
-            <a:r>
-              <a:rPr lang="en-IN" dirty="0"/>
-              <a:t>creating a package named customs</a:t>
-            </a:r>
-          </a:p>
-          <a:p>
-            <a:r>
-              <a:rPr lang="en-IN" dirty="0"/>
-              <a:t> </a:t>
-            </a:r>
-            <a:r>
-              <a:rPr lang="en-IN" b="1" dirty="0"/>
-              <a:t>Structure : </a:t>
-            </a:r>
-            <a:endParaRPr lang="en-IN" dirty="0"/>
-          </a:p>
-          <a:p>
-            <a:pPr marL="0" indent="0">
-              <a:buNone/>
-            </a:pPr>
-            <a:r>
-              <a:rPr lang="en-IN" dirty="0"/>
-              <a:t>	- </a:t>
-            </a:r>
-            <a:r>
-              <a:rPr lang="en-IN" dirty="0" err="1"/>
-              <a:t>src</a:t>
-            </a:r>
-            <a:endParaRPr lang="en-IN" dirty="0"/>
-          </a:p>
-          <a:p>
-            <a:pPr marL="0" indent="0">
-              <a:buNone/>
-            </a:pPr>
-            <a:r>
-              <a:rPr lang="en-IN" dirty="0"/>
-              <a:t>		- customs</a:t>
-            </a:r>
-          </a:p>
-          <a:p>
-            <a:pPr marL="0" indent="0">
-              <a:buNone/>
-            </a:pPr>
-            <a:r>
-              <a:rPr lang="en-IN" dirty="0"/>
-              <a:t>			- </a:t>
-            </a:r>
-            <a:r>
-              <a:rPr lang="en-IN" dirty="0" err="1"/>
-              <a:t>venv</a:t>
-            </a:r>
-            <a:endParaRPr lang="en-IN" dirty="0"/>
-          </a:p>
-          <a:p>
-            <a:pPr marL="0" indent="0">
-              <a:buNone/>
-            </a:pPr>
-            <a:r>
-              <a:rPr lang="en-IN" dirty="0"/>
-              <a:t>			- __init__.py</a:t>
-            </a:r>
-          </a:p>
-          <a:p>
-            <a:pPr marL="0" indent="0">
-              <a:buNone/>
-            </a:pPr>
-            <a:r>
-              <a:rPr lang="en-IN" dirty="0"/>
-              <a:t>			- main.py</a:t>
-            </a:r>
-          </a:p>
-          <a:p>
-            <a:pPr marL="0" indent="0">
-              <a:buNone/>
-            </a:pPr>
-            <a:r>
-              <a:rPr lang="en-IN" dirty="0"/>
-              <a:t>	- license</a:t>
-            </a:r>
-          </a:p>
-          <a:p>
-            <a:pPr marL="0" indent="0">
-              <a:buNone/>
-            </a:pPr>
-            <a:r>
-              <a:rPr lang="en-IN" dirty="0"/>
-              <a:t>	- readme</a:t>
-            </a:r>
-          </a:p>
-          <a:p>
-            <a:pPr marL="0" indent="0">
-              <a:buNone/>
-            </a:pPr>
-            <a:r>
-              <a:rPr lang="en-IN" dirty="0"/>
-              <a:t>	- </a:t>
-            </a:r>
-            <a:r>
-              <a:rPr lang="en-IN" dirty="0" err="1"/>
-              <a:t>pyproject.toml</a:t>
-            </a:r>
-            <a:endParaRPr lang="en-IN" dirty="0"/>
-          </a:p>
-          <a:p>
-            <a:pPr marL="0" indent="0">
-              <a:buNone/>
-            </a:pPr>
-            <a:r>
-              <a:rPr lang="en-IN" dirty="0"/>
-              <a:t>	- .</a:t>
-            </a:r>
-            <a:r>
-              <a:rPr lang="en-IN" dirty="0" err="1"/>
-              <a:t>gitignore</a:t>
+              <a:t>Package : </a:t>
             </a:r>
             <a:endParaRPr lang="en-IN" dirty="0"/>
           </a:p>
@@ -10849,7 +10307,7 @@
           <p:cNvPr id="4" name="Footer Placeholder 3">
             <a:extLst>
               <a:ext uri="{FF2B5EF4-FFF2-40B4-BE49-F238E27FC236}">
-                <a16:creationId xmlns:a16="http://schemas.microsoft.com/office/drawing/2014/main" id="{8367D499-21CA-1608-F638-E9171FD79A35}"/>
+                <a16:creationId xmlns:a16="http://schemas.microsoft.com/office/drawing/2014/main" id="{06D2FE4E-A7CE-4D3B-42B3-8DD37D027516}"/>
               </a:ext>
             </a:extLst>
           </p:cNvPr>
@@ -10878,7 +10336,7 @@
           <p:cNvPr id="5" name="Slide Number Placeholder 4">
             <a:extLst>
               <a:ext uri="{FF2B5EF4-FFF2-40B4-BE49-F238E27FC236}">
-                <a16:creationId xmlns:a16="http://schemas.microsoft.com/office/drawing/2014/main" id="{2FE49377-ACB1-2199-795C-1989FA4FA786}"/>
+                <a16:creationId xmlns:a16="http://schemas.microsoft.com/office/drawing/2014/main" id="{CF0277D4-6825-FE55-E325-241E05EE90B4}"/>
               </a:ext>
             </a:extLst>
           </p:cNvPr>
@@ -10905,7 +10363,7 @@
     </p:spTree>
     <p:extLst>
       <p:ext uri="{BB962C8B-B14F-4D97-AF65-F5344CB8AC3E}">
-        <p14:creationId xmlns:p14="http://schemas.microsoft.com/office/powerpoint/2010/main" val="1743211506"/>
+        <p14:creationId xmlns:p14="http://schemas.microsoft.com/office/powerpoint/2010/main" val="1572536975"/>
       </p:ext>
     </p:extLst>
   </p:cSld>
@@ -10937,7 +10395,7 @@
           <p:cNvPr id="2" name="Title 1">
             <a:extLst>
               <a:ext uri="{FF2B5EF4-FFF2-40B4-BE49-F238E27FC236}">
-                <a16:creationId xmlns:a16="http://schemas.microsoft.com/office/drawing/2014/main" id="{2CEA5BDF-9F05-F624-FCF1-39C85E1A3DE7}"/>
+                <a16:creationId xmlns:a16="http://schemas.microsoft.com/office/drawing/2014/main" id="{05537F52-D920-165C-539D-D4323D2D50DF}"/>
               </a:ext>
             </a:extLst>
           </p:cNvPr>
@@ -10955,7 +10413,7 @@
           <a:p>
             <a:r>
               <a:rPr lang="en-GB" dirty="0"/>
-              <a:t>Web &amp; GUI Development</a:t>
+              <a:t>Custom Packages</a:t>
             </a:r>
             <a:endParaRPr lang="en-IN" dirty="0"/>
           </a:p>
@@ -10966,7 +10424,7 @@
           <p:cNvPr id="3" name="Content Placeholder 2">
             <a:extLst>
               <a:ext uri="{FF2B5EF4-FFF2-40B4-BE49-F238E27FC236}">
-                <a16:creationId xmlns:a16="http://schemas.microsoft.com/office/drawing/2014/main" id="{3F654F39-106A-8921-8452-34F301506A96}"/>
+                <a16:creationId xmlns:a16="http://schemas.microsoft.com/office/drawing/2014/main" id="{0AAE2362-0572-BFD5-F478-A0EF74AB9E1A}"/>
               </a:ext>
             </a:extLst>
           </p:cNvPr>
@@ -10982,7 +10440,59 @@
           <a:bodyPr/>
           <a:lstStyle/>
           <a:p>
-            <a:endParaRPr lang="en-IN"/>
+            <a:r>
+              <a:rPr lang="en-IN" dirty="0"/>
+              <a:t> Create own Packages.</a:t>
+            </a:r>
+          </a:p>
+          <a:p>
+            <a:r>
+              <a:rPr lang="en-IN" dirty="0"/>
+              <a:t> </a:t>
+            </a:r>
+            <a:r>
+              <a:rPr lang="en-IN" b="1" dirty="0"/>
+              <a:t>Steps : </a:t>
+            </a:r>
+          </a:p>
+          <a:p>
+            <a:pPr lvl="1"/>
+            <a:r>
+              <a:rPr lang="en-IN" b="1" dirty="0"/>
+              <a:t> </a:t>
+            </a:r>
+            <a:r>
+              <a:rPr lang="en-IN" dirty="0"/>
+              <a:t>create a folder</a:t>
+            </a:r>
+          </a:p>
+          <a:p>
+            <a:pPr lvl="1"/>
+            <a:r>
+              <a:rPr lang="en-IN" dirty="0"/>
+              <a:t> inside that folder add src folder , gitignore , readme , license , venv , pyproject.toml</a:t>
+            </a:r>
+          </a:p>
+          <a:p>
+            <a:pPr lvl="1"/>
+            <a:r>
+              <a:rPr lang="en-IN" dirty="0"/>
+              <a:t> pypi account login</a:t>
+            </a:r>
+          </a:p>
+          <a:p>
+            <a:pPr lvl="1"/>
+            <a:r>
+              <a:rPr lang="en-IN" dirty="0"/>
+              <a:t> publish the branch in GitHub.</a:t>
+            </a:r>
+          </a:p>
+          <a:p>
+            <a:pPr lvl="1"/>
+            <a:r>
+              <a:rPr lang="en-IN" dirty="0"/>
+              <a:t> on cmd push the folder</a:t>
+            </a:r>
           </a:p>
         </p:txBody>
       </p:sp>
@@ -10991,7 +10501,7 @@
           <p:cNvPr id="4" name="Footer Placeholder 3">
             <a:extLst>
               <a:ext uri="{FF2B5EF4-FFF2-40B4-BE49-F238E27FC236}">
-                <a16:creationId xmlns:a16="http://schemas.microsoft.com/office/drawing/2014/main" id="{B6211910-FFBC-E796-7537-DC267EB214BD}"/>
+                <a16:creationId xmlns:a16="http://schemas.microsoft.com/office/drawing/2014/main" id="{DFE71CE4-9080-389F-EBAC-A28DAE84DAEE}"/>
               </a:ext>
             </a:extLst>
           </p:cNvPr>
@@ -11020,7 +10530,7 @@
           <p:cNvPr id="5" name="Slide Number Placeholder 4">
             <a:extLst>
               <a:ext uri="{FF2B5EF4-FFF2-40B4-BE49-F238E27FC236}">
-                <a16:creationId xmlns:a16="http://schemas.microsoft.com/office/drawing/2014/main" id="{634CE741-738C-5294-3111-4971DF04E698}"/>
+                <a16:creationId xmlns:a16="http://schemas.microsoft.com/office/drawing/2014/main" id="{08D0C57D-0999-D180-8AC1-D9F2F4C92A21}"/>
               </a:ext>
             </a:extLst>
           </p:cNvPr>
@@ -11047,7 +10557,7 @@
     </p:spTree>
     <p:extLst>
       <p:ext uri="{BB962C8B-B14F-4D97-AF65-F5344CB8AC3E}">
-        <p14:creationId xmlns:p14="http://schemas.microsoft.com/office/powerpoint/2010/main" val="35491570"/>
+        <p14:creationId xmlns:p14="http://schemas.microsoft.com/office/powerpoint/2010/main" val="2724122432"/>
       </p:ext>
     </p:extLst>
   </p:cSld>
@@ -11079,7 +10589,7 @@
           <p:cNvPr id="2" name="Title 1">
             <a:extLst>
               <a:ext uri="{FF2B5EF4-FFF2-40B4-BE49-F238E27FC236}">
-                <a16:creationId xmlns:a16="http://schemas.microsoft.com/office/drawing/2014/main" id="{0FAC2044-7BC7-BE81-4358-3C5D49931A58}"/>
+                <a16:creationId xmlns:a16="http://schemas.microsoft.com/office/drawing/2014/main" id="{EA46A9CF-2C01-C94A-DFD6-EFFFA8132FF4}"/>
               </a:ext>
             </a:extLst>
           </p:cNvPr>
@@ -11096,10 +10606,9 @@
           <a:lstStyle/>
           <a:p>
             <a:r>
-              <a:rPr lang="en-GB" dirty="0" err="1"/>
-              <a:t>CustomTkinter</a:t>
-            </a:r>
-            <a:endParaRPr lang="en-IN" dirty="0"/>
+              <a:rPr lang="en-IN" dirty="0"/>
+              <a:t>Folder Structure</a:t>
+            </a:r>
           </a:p>
         </p:txBody>
       </p:sp>
@@ -11108,7 +10617,7 @@
           <p:cNvPr id="3" name="Content Placeholder 2">
             <a:extLst>
               <a:ext uri="{FF2B5EF4-FFF2-40B4-BE49-F238E27FC236}">
-                <a16:creationId xmlns:a16="http://schemas.microsoft.com/office/drawing/2014/main" id="{69841D62-3F38-AD65-B1BF-48BF3A14F8B7}"/>
+                <a16:creationId xmlns:a16="http://schemas.microsoft.com/office/drawing/2014/main" id="{2839D2C2-24AC-AFC4-E450-8CABA8F02A1E}"/>
               </a:ext>
             </a:extLst>
           </p:cNvPr>
@@ -11121,26 +10630,115 @@
         </p:nvSpPr>
         <p:spPr/>
         <p:txBody>
-          <a:bodyPr/>
-          <a:lstStyle/>
-          <a:p>
-            <a:r>
-              <a:rPr lang="en-GB" dirty="0"/>
+          <a:bodyPr>
+            <a:normAutofit lnSpcReduction="10000"/>
+          </a:bodyPr>
+          <a:lstStyle/>
+          <a:p>
+            <a:r>
+              <a:rPr lang="en-IN" dirty="0"/>
               <a:t> </a:t>
             </a:r>
             <a:r>
-              <a:rPr lang="en-GB" b="1" dirty="0" err="1"/>
-              <a:t>cmd</a:t>
-            </a:r>
-            <a:r>
-              <a:rPr lang="en-GB" b="1" dirty="0"/>
-              <a:t> : pip install </a:t>
-            </a:r>
-            <a:r>
-              <a:rPr lang="en-GB" b="1" dirty="0" err="1"/>
-              <a:t>customtkinter</a:t>
-            </a:r>
-            <a:endParaRPr lang="en-IN" dirty="0"/>
+              <a:rPr lang="en-IN" b="1" dirty="0"/>
+              <a:t>Example : </a:t>
+            </a:r>
+            <a:r>
+              <a:rPr lang="en-IN" dirty="0"/>
+              <a:t>creating a package named customs</a:t>
+            </a:r>
+          </a:p>
+          <a:p>
+            <a:r>
+              <a:rPr lang="en-IN" dirty="0"/>
+              <a:t> </a:t>
+            </a:r>
+            <a:r>
+              <a:rPr lang="en-IN" b="1" dirty="0"/>
+              <a:t>Structure : </a:t>
+            </a:r>
+            <a:endParaRPr lang="en-IN" dirty="0"/>
+          </a:p>
+          <a:p>
+            <a:pPr marL="0" indent="0">
+              <a:buNone/>
+            </a:pPr>
+            <a:r>
+              <a:rPr lang="en-IN" dirty="0"/>
+              <a:t>	- src</a:t>
+            </a:r>
+          </a:p>
+          <a:p>
+            <a:pPr marL="0" indent="0">
+              <a:buNone/>
+            </a:pPr>
+            <a:r>
+              <a:rPr lang="en-IN" dirty="0"/>
+              <a:t>		- customs</a:t>
+            </a:r>
+          </a:p>
+          <a:p>
+            <a:pPr marL="0" indent="0">
+              <a:buNone/>
+            </a:pPr>
+            <a:r>
+              <a:rPr lang="en-IN" dirty="0"/>
+              <a:t>			- venv</a:t>
+            </a:r>
+          </a:p>
+          <a:p>
+            <a:pPr marL="0" indent="0">
+              <a:buNone/>
+            </a:pPr>
+            <a:r>
+              <a:rPr lang="en-IN" dirty="0"/>
+              <a:t>			- __init__.py</a:t>
+            </a:r>
+          </a:p>
+          <a:p>
+            <a:pPr marL="0" indent="0">
+              <a:buNone/>
+            </a:pPr>
+            <a:r>
+              <a:rPr lang="en-IN" dirty="0"/>
+              <a:t>			- main.py</a:t>
+            </a:r>
+          </a:p>
+          <a:p>
+            <a:pPr marL="0" indent="0">
+              <a:buNone/>
+            </a:pPr>
+            <a:r>
+              <a:rPr lang="en-IN" dirty="0"/>
+              <a:t>	- license</a:t>
+            </a:r>
+          </a:p>
+          <a:p>
+            <a:pPr marL="0" indent="0">
+              <a:buNone/>
+            </a:pPr>
+            <a:r>
+              <a:rPr lang="en-IN" dirty="0"/>
+              <a:t>	- readme</a:t>
+            </a:r>
+          </a:p>
+          <a:p>
+            <a:pPr marL="0" indent="0">
+              <a:buNone/>
+            </a:pPr>
+            <a:r>
+              <a:rPr lang="en-IN" dirty="0"/>
+              <a:t>	- pyproject.toml</a:t>
+            </a:r>
+          </a:p>
+          <a:p>
+            <a:pPr marL="0" indent="0">
+              <a:buNone/>
+            </a:pPr>
+            <a:r>
+              <a:rPr lang="en-IN" dirty="0"/>
+              <a:t>	- .gitignore</a:t>
+            </a:r>
           </a:p>
         </p:txBody>
       </p:sp>
@@ -11149,7 +10747,7 @@
           <p:cNvPr id="4" name="Footer Placeholder 3">
             <a:extLst>
               <a:ext uri="{FF2B5EF4-FFF2-40B4-BE49-F238E27FC236}">
-                <a16:creationId xmlns:a16="http://schemas.microsoft.com/office/drawing/2014/main" id="{889662F6-22D2-D1A9-DF10-54B94C79C5D2}"/>
+                <a16:creationId xmlns:a16="http://schemas.microsoft.com/office/drawing/2014/main" id="{8367D499-21CA-1608-F638-E9171FD79A35}"/>
               </a:ext>
             </a:extLst>
           </p:cNvPr>
@@ -11178,7 +10776,7 @@
           <p:cNvPr id="5" name="Slide Number Placeholder 4">
             <a:extLst>
               <a:ext uri="{FF2B5EF4-FFF2-40B4-BE49-F238E27FC236}">
-                <a16:creationId xmlns:a16="http://schemas.microsoft.com/office/drawing/2014/main" id="{4FCBC552-3D1D-6F58-3410-DBE1BCE8AF7F}"/>
+                <a16:creationId xmlns:a16="http://schemas.microsoft.com/office/drawing/2014/main" id="{2FE49377-ACB1-2199-795C-1989FA4FA786}"/>
               </a:ext>
             </a:extLst>
           </p:cNvPr>
@@ -11205,7 +10803,7 @@
     </p:spTree>
     <p:extLst>
       <p:ext uri="{BB962C8B-B14F-4D97-AF65-F5344CB8AC3E}">
-        <p14:creationId xmlns:p14="http://schemas.microsoft.com/office/powerpoint/2010/main" val="3562287446"/>
+        <p14:creationId xmlns:p14="http://schemas.microsoft.com/office/powerpoint/2010/main" val="1743211506"/>
       </p:ext>
     </p:extLst>
   </p:cSld>
@@ -11237,7 +10835,7 @@
           <p:cNvPr id="2" name="Title 1">
             <a:extLst>
               <a:ext uri="{FF2B5EF4-FFF2-40B4-BE49-F238E27FC236}">
-                <a16:creationId xmlns:a16="http://schemas.microsoft.com/office/drawing/2014/main" id="{76B7B38D-DCBD-9C6B-CD51-7A408A67FAD1}"/>
+                <a16:creationId xmlns:a16="http://schemas.microsoft.com/office/drawing/2014/main" id="{2CEA5BDF-9F05-F624-FCF1-39C85E1A3DE7}"/>
               </a:ext>
             </a:extLst>
           </p:cNvPr>
@@ -11254,16 +10852,8 @@
           <a:lstStyle/>
           <a:p>
             <a:r>
-              <a:rPr lang="en-GB" dirty="0" err="1"/>
-              <a:t>Kivy</a:t>
-            </a:r>
-            <a:r>
               <a:rPr lang="en-GB" dirty="0"/>
-              <a:t> &amp; </a:t>
-            </a:r>
-            <a:r>
-              <a:rPr lang="en-GB" dirty="0" err="1"/>
-              <a:t>Kivymd</a:t>
+              <a:t>Web Development</a:t>
             </a:r>
             <a:endParaRPr lang="en-IN" dirty="0"/>
           </a:p>
@@ -11274,7 +10864,7 @@
           <p:cNvPr id="3" name="Content Placeholder 2">
             <a:extLst>
               <a:ext uri="{FF2B5EF4-FFF2-40B4-BE49-F238E27FC236}">
-                <a16:creationId xmlns:a16="http://schemas.microsoft.com/office/drawing/2014/main" id="{55BFC815-5867-C2BB-884C-F3691F93B019}"/>
+                <a16:creationId xmlns:a16="http://schemas.microsoft.com/office/drawing/2014/main" id="{3F654F39-106A-8921-8452-34F301506A96}"/>
               </a:ext>
             </a:extLst>
           </p:cNvPr>
@@ -11290,30 +10880,6 @@
           <a:bodyPr/>
           <a:lstStyle/>
           <a:p>
-            <a:r>
-              <a:rPr lang="en-GB" dirty="0"/>
-              <a:t> </a:t>
-            </a:r>
-            <a:r>
-              <a:rPr lang="en-GB" b="1" dirty="0" err="1"/>
-              <a:t>cmd</a:t>
-            </a:r>
-            <a:r>
-              <a:rPr lang="en-GB" b="1" dirty="0"/>
-              <a:t> : pip install </a:t>
-            </a:r>
-            <a:r>
-              <a:rPr lang="en-GB" b="1" dirty="0" err="1"/>
-              <a:t>kivy</a:t>
-            </a:r>
-            <a:r>
-              <a:rPr lang="en-GB" b="1" dirty="0"/>
-              <a:t> </a:t>
-            </a:r>
-            <a:r>
-              <a:rPr lang="en-GB" b="1" dirty="0" err="1"/>
-              <a:t>kivymd</a:t>
-            </a:r>
             <a:endParaRPr lang="en-IN" dirty="0"/>
           </a:p>
         </p:txBody>
@@ -11323,7 +10889,7 @@
           <p:cNvPr id="4" name="Footer Placeholder 3">
             <a:extLst>
               <a:ext uri="{FF2B5EF4-FFF2-40B4-BE49-F238E27FC236}">
-                <a16:creationId xmlns:a16="http://schemas.microsoft.com/office/drawing/2014/main" id="{747B2B24-B4CD-D9F0-D1F0-C426E572C6F6}"/>
+                <a16:creationId xmlns:a16="http://schemas.microsoft.com/office/drawing/2014/main" id="{B6211910-FFBC-E796-7537-DC267EB214BD}"/>
               </a:ext>
             </a:extLst>
           </p:cNvPr>
@@ -11352,7 +10918,7 @@
           <p:cNvPr id="5" name="Slide Number Placeholder 4">
             <a:extLst>
               <a:ext uri="{FF2B5EF4-FFF2-40B4-BE49-F238E27FC236}">
-                <a16:creationId xmlns:a16="http://schemas.microsoft.com/office/drawing/2014/main" id="{8EC70CEB-FD02-B13C-90CC-1F1AACC0FCAC}"/>
+                <a16:creationId xmlns:a16="http://schemas.microsoft.com/office/drawing/2014/main" id="{634CE741-738C-5294-3111-4971DF04E698}"/>
               </a:ext>
             </a:extLst>
           </p:cNvPr>
@@ -11379,7 +10945,505 @@
     </p:spTree>
     <p:extLst>
       <p:ext uri="{BB962C8B-B14F-4D97-AF65-F5344CB8AC3E}">
+        <p14:creationId xmlns:p14="http://schemas.microsoft.com/office/powerpoint/2010/main" val="35491570"/>
+      </p:ext>
+    </p:extLst>
+  </p:cSld>
+  <p:clrMapOvr>
+    <a:masterClrMapping/>
+  </p:clrMapOvr>
+</p:sld>
+</file>
+
+<file path=ppt/slides/slide36.xml><?xml version="1.0" encoding="utf-8"?>
+<p:sld xmlns:a="http://schemas.openxmlformats.org/drawingml/2006/main" xmlns:r="http://schemas.openxmlformats.org/officeDocument/2006/relationships" xmlns:p="http://schemas.openxmlformats.org/presentationml/2006/main">
+  <p:cSld>
+    <p:spTree>
+      <p:nvGrpSpPr>
+        <p:cNvPr id="1" name=""/>
+        <p:cNvGrpSpPr/>
+        <p:nvPr/>
+      </p:nvGrpSpPr>
+      <p:grpSpPr>
+        <a:xfrm>
+          <a:off x="0" y="0"/>
+          <a:ext cx="0" cy="0"/>
+          <a:chOff x="0" y="0"/>
+          <a:chExt cx="0" cy="0"/>
+        </a:xfrm>
+      </p:grpSpPr>
+      <p:sp>
+        <p:nvSpPr>
+          <p:cNvPr id="2" name="Title 1">
+            <a:extLst>
+              <a:ext uri="{FF2B5EF4-FFF2-40B4-BE49-F238E27FC236}">
+                <a16:creationId xmlns:a16="http://schemas.microsoft.com/office/drawing/2014/main" id="{0FAC2044-7BC7-BE81-4358-3C5D49931A58}"/>
+              </a:ext>
+            </a:extLst>
+          </p:cNvPr>
+          <p:cNvSpPr>
+            <a:spLocks noGrp="1"/>
+          </p:cNvSpPr>
+          <p:nvPr>
+            <p:ph type="title"/>
+          </p:nvPr>
+        </p:nvSpPr>
+        <p:spPr/>
+        <p:txBody>
+          <a:bodyPr/>
+          <a:lstStyle/>
+          <a:p>
+            <a:r>
+              <a:rPr lang="en-GB" dirty="0"/>
+              <a:t>GUI Development</a:t>
+            </a:r>
+            <a:endParaRPr lang="en-IN" dirty="0"/>
+          </a:p>
+        </p:txBody>
+      </p:sp>
+      <p:sp>
+        <p:nvSpPr>
+          <p:cNvPr id="3" name="Content Placeholder 2">
+            <a:extLst>
+              <a:ext uri="{FF2B5EF4-FFF2-40B4-BE49-F238E27FC236}">
+                <a16:creationId xmlns:a16="http://schemas.microsoft.com/office/drawing/2014/main" id="{69841D62-3F38-AD65-B1BF-48BF3A14F8B7}"/>
+              </a:ext>
+            </a:extLst>
+          </p:cNvPr>
+          <p:cNvSpPr>
+            <a:spLocks noGrp="1"/>
+          </p:cNvSpPr>
+          <p:nvPr>
+            <p:ph idx="1"/>
+          </p:nvPr>
+        </p:nvSpPr>
+        <p:spPr/>
+        <p:txBody>
+          <a:bodyPr/>
+          <a:lstStyle/>
+          <a:p>
+            <a:r>
+              <a:rPr lang="en-GB" dirty="0"/>
+              <a:t> </a:t>
+            </a:r>
+            <a:r>
+              <a:rPr lang="en-GB" b="1" dirty="0"/>
+              <a:t>Package : </a:t>
+            </a:r>
+            <a:r>
+              <a:rPr lang="en-GB" dirty="0"/>
+              <a:t>customtkinter &amp; </a:t>
+            </a:r>
+            <a:r>
+              <a:rPr lang="en-GB" dirty="0" err="1"/>
+              <a:t>tkinter</a:t>
+            </a:r>
+            <a:endParaRPr lang="en-IN" dirty="0"/>
+          </a:p>
+        </p:txBody>
+      </p:sp>
+      <p:sp>
+        <p:nvSpPr>
+          <p:cNvPr id="4" name="Footer Placeholder 3">
+            <a:extLst>
+              <a:ext uri="{FF2B5EF4-FFF2-40B4-BE49-F238E27FC236}">
+                <a16:creationId xmlns:a16="http://schemas.microsoft.com/office/drawing/2014/main" id="{889662F6-22D2-D1A9-DF10-54B94C79C5D2}"/>
+              </a:ext>
+            </a:extLst>
+          </p:cNvPr>
+          <p:cNvSpPr>
+            <a:spLocks noGrp="1"/>
+          </p:cNvSpPr>
+          <p:nvPr>
+            <p:ph type="ftr" sz="quarter" idx="11"/>
+          </p:nvPr>
+        </p:nvSpPr>
+        <p:spPr/>
+        <p:txBody>
+          <a:bodyPr/>
+          <a:lstStyle/>
+          <a:p>
+            <a:r>
+              <a:rPr lang="it-IT"/>
+              <a:t>Agnie Consulting India Pvt Limited</a:t>
+            </a:r>
+            <a:endParaRPr lang="en-IN" dirty="0"/>
+          </a:p>
+        </p:txBody>
+      </p:sp>
+      <p:sp>
+        <p:nvSpPr>
+          <p:cNvPr id="5" name="Slide Number Placeholder 4">
+            <a:extLst>
+              <a:ext uri="{FF2B5EF4-FFF2-40B4-BE49-F238E27FC236}">
+                <a16:creationId xmlns:a16="http://schemas.microsoft.com/office/drawing/2014/main" id="{4FCBC552-3D1D-6F58-3410-DBE1BCE8AF7F}"/>
+              </a:ext>
+            </a:extLst>
+          </p:cNvPr>
+          <p:cNvSpPr>
+            <a:spLocks noGrp="1"/>
+          </p:cNvSpPr>
+          <p:nvPr>
+            <p:ph type="sldNum" sz="quarter" idx="12"/>
+          </p:nvPr>
+        </p:nvSpPr>
+        <p:spPr/>
+        <p:txBody>
+          <a:bodyPr/>
+          <a:lstStyle/>
+          <a:p>
+            <a:fld id="{F904C42B-FE65-422C-989C-AD3E5E2A1A20}" type="slidenum">
+              <a:rPr lang="en-IN" smtClean="0"/>
+              <a:t>36</a:t>
+            </a:fld>
+            <a:endParaRPr lang="en-IN" dirty="0"/>
+          </a:p>
+        </p:txBody>
+      </p:sp>
+    </p:spTree>
+    <p:extLst>
+      <p:ext uri="{BB962C8B-B14F-4D97-AF65-F5344CB8AC3E}">
+        <p14:creationId xmlns:p14="http://schemas.microsoft.com/office/powerpoint/2010/main" val="3562287446"/>
+      </p:ext>
+    </p:extLst>
+  </p:cSld>
+  <p:clrMapOvr>
+    <a:masterClrMapping/>
+  </p:clrMapOvr>
+</p:sld>
+</file>
+
+<file path=ppt/slides/slide37.xml><?xml version="1.0" encoding="utf-8"?>
+<p:sld xmlns:a="http://schemas.openxmlformats.org/drawingml/2006/main" xmlns:r="http://schemas.openxmlformats.org/officeDocument/2006/relationships" xmlns:p="http://schemas.openxmlformats.org/presentationml/2006/main">
+  <p:cSld>
+    <p:spTree>
+      <p:nvGrpSpPr>
+        <p:cNvPr id="1" name=""/>
+        <p:cNvGrpSpPr/>
+        <p:nvPr/>
+      </p:nvGrpSpPr>
+      <p:grpSpPr>
+        <a:xfrm>
+          <a:off x="0" y="0"/>
+          <a:ext cx="0" cy="0"/>
+          <a:chOff x="0" y="0"/>
+          <a:chExt cx="0" cy="0"/>
+        </a:xfrm>
+      </p:grpSpPr>
+      <p:sp>
+        <p:nvSpPr>
+          <p:cNvPr id="2" name="Title 1">
+            <a:extLst>
+              <a:ext uri="{FF2B5EF4-FFF2-40B4-BE49-F238E27FC236}">
+                <a16:creationId xmlns:a16="http://schemas.microsoft.com/office/drawing/2014/main" id="{76B7B38D-DCBD-9C6B-CD51-7A408A67FAD1}"/>
+              </a:ext>
+            </a:extLst>
+          </p:cNvPr>
+          <p:cNvSpPr>
+            <a:spLocks noGrp="1"/>
+          </p:cNvSpPr>
+          <p:nvPr>
+            <p:ph type="title"/>
+          </p:nvPr>
+        </p:nvSpPr>
+        <p:spPr/>
+        <p:txBody>
+          <a:bodyPr/>
+          <a:lstStyle/>
+          <a:p>
+            <a:r>
+              <a:rPr lang="en-GB" dirty="0"/>
+              <a:t>Kivy &amp; Kivymd</a:t>
+            </a:r>
+            <a:endParaRPr lang="en-IN" dirty="0"/>
+          </a:p>
+        </p:txBody>
+      </p:sp>
+      <p:sp>
+        <p:nvSpPr>
+          <p:cNvPr id="3" name="Content Placeholder 2">
+            <a:extLst>
+              <a:ext uri="{FF2B5EF4-FFF2-40B4-BE49-F238E27FC236}">
+                <a16:creationId xmlns:a16="http://schemas.microsoft.com/office/drawing/2014/main" id="{55BFC815-5867-C2BB-884C-F3691F93B019}"/>
+              </a:ext>
+            </a:extLst>
+          </p:cNvPr>
+          <p:cNvSpPr>
+            <a:spLocks noGrp="1"/>
+          </p:cNvSpPr>
+          <p:nvPr>
+            <p:ph idx="1"/>
+          </p:nvPr>
+        </p:nvSpPr>
+        <p:spPr/>
+        <p:txBody>
+          <a:bodyPr/>
+          <a:lstStyle/>
+          <a:p>
+            <a:r>
+              <a:rPr lang="en-GB" dirty="0"/>
+              <a:t> </a:t>
+            </a:r>
+            <a:r>
+              <a:rPr lang="en-GB" b="1" dirty="0"/>
+              <a:t>cmd : pip install kivy kivymd</a:t>
+            </a:r>
+            <a:endParaRPr lang="en-IN" dirty="0"/>
+          </a:p>
+        </p:txBody>
+      </p:sp>
+      <p:sp>
+        <p:nvSpPr>
+          <p:cNvPr id="4" name="Footer Placeholder 3">
+            <a:extLst>
+              <a:ext uri="{FF2B5EF4-FFF2-40B4-BE49-F238E27FC236}">
+                <a16:creationId xmlns:a16="http://schemas.microsoft.com/office/drawing/2014/main" id="{747B2B24-B4CD-D9F0-D1F0-C426E572C6F6}"/>
+              </a:ext>
+            </a:extLst>
+          </p:cNvPr>
+          <p:cNvSpPr>
+            <a:spLocks noGrp="1"/>
+          </p:cNvSpPr>
+          <p:nvPr>
+            <p:ph type="ftr" sz="quarter" idx="11"/>
+          </p:nvPr>
+        </p:nvSpPr>
+        <p:spPr/>
+        <p:txBody>
+          <a:bodyPr/>
+          <a:lstStyle/>
+          <a:p>
+            <a:r>
+              <a:rPr lang="it-IT"/>
+              <a:t>Agnie Consulting India Pvt Limited</a:t>
+            </a:r>
+            <a:endParaRPr lang="en-IN" dirty="0"/>
+          </a:p>
+        </p:txBody>
+      </p:sp>
+      <p:sp>
+        <p:nvSpPr>
+          <p:cNvPr id="5" name="Slide Number Placeholder 4">
+            <a:extLst>
+              <a:ext uri="{FF2B5EF4-FFF2-40B4-BE49-F238E27FC236}">
+                <a16:creationId xmlns:a16="http://schemas.microsoft.com/office/drawing/2014/main" id="{8EC70CEB-FD02-B13C-90CC-1F1AACC0FCAC}"/>
+              </a:ext>
+            </a:extLst>
+          </p:cNvPr>
+          <p:cNvSpPr>
+            <a:spLocks noGrp="1"/>
+          </p:cNvSpPr>
+          <p:nvPr>
+            <p:ph type="sldNum" sz="quarter" idx="12"/>
+          </p:nvPr>
+        </p:nvSpPr>
+        <p:spPr/>
+        <p:txBody>
+          <a:bodyPr/>
+          <a:lstStyle/>
+          <a:p>
+            <a:fld id="{F904C42B-FE65-422C-989C-AD3E5E2A1A20}" type="slidenum">
+              <a:rPr lang="en-IN" smtClean="0"/>
+              <a:t>37</a:t>
+            </a:fld>
+            <a:endParaRPr lang="en-IN" dirty="0"/>
+          </a:p>
+        </p:txBody>
+      </p:sp>
+    </p:spTree>
+    <p:extLst>
+      <p:ext uri="{BB962C8B-B14F-4D97-AF65-F5344CB8AC3E}">
         <p14:creationId xmlns:p14="http://schemas.microsoft.com/office/powerpoint/2010/main" val="340499084"/>
+      </p:ext>
+    </p:extLst>
+  </p:cSld>
+  <p:clrMapOvr>
+    <a:masterClrMapping/>
+  </p:clrMapOvr>
+</p:sld>
+</file>
+
+<file path=ppt/slides/slide38.xml><?xml version="1.0" encoding="utf-8"?>
+<p:sld xmlns:a="http://schemas.openxmlformats.org/drawingml/2006/main" xmlns:r="http://schemas.openxmlformats.org/officeDocument/2006/relationships" xmlns:p="http://schemas.openxmlformats.org/presentationml/2006/main">
+  <p:cSld>
+    <p:spTree>
+      <p:nvGrpSpPr>
+        <p:cNvPr id="1" name=""/>
+        <p:cNvGrpSpPr/>
+        <p:nvPr/>
+      </p:nvGrpSpPr>
+      <p:grpSpPr>
+        <a:xfrm>
+          <a:off x="0" y="0"/>
+          <a:ext cx="0" cy="0"/>
+          <a:chOff x="0" y="0"/>
+          <a:chExt cx="0" cy="0"/>
+        </a:xfrm>
+      </p:grpSpPr>
+      <p:sp>
+        <p:nvSpPr>
+          <p:cNvPr id="2" name="Title 1">
+            <a:extLst>
+              <a:ext uri="{FF2B5EF4-FFF2-40B4-BE49-F238E27FC236}">
+                <a16:creationId xmlns:a16="http://schemas.microsoft.com/office/drawing/2014/main" id="{89A40D6B-3A8E-67A6-6A68-010B58DAC4FC}"/>
+              </a:ext>
+            </a:extLst>
+          </p:cNvPr>
+          <p:cNvSpPr>
+            <a:spLocks noGrp="1"/>
+          </p:cNvSpPr>
+          <p:nvPr>
+            <p:ph type="title"/>
+          </p:nvPr>
+        </p:nvSpPr>
+        <p:spPr/>
+        <p:txBody>
+          <a:bodyPr/>
+          <a:lstStyle/>
+          <a:p>
+            <a:r>
+              <a:rPr lang="en-IN" dirty="0"/>
+              <a:t>Problems</a:t>
+            </a:r>
+          </a:p>
+        </p:txBody>
+      </p:sp>
+      <p:sp>
+        <p:nvSpPr>
+          <p:cNvPr id="3" name="Content Placeholder 2">
+            <a:extLst>
+              <a:ext uri="{FF2B5EF4-FFF2-40B4-BE49-F238E27FC236}">
+                <a16:creationId xmlns:a16="http://schemas.microsoft.com/office/drawing/2014/main" id="{2EA13D08-34E8-FF65-D42D-B7D8201AF8B5}"/>
+              </a:ext>
+            </a:extLst>
+          </p:cNvPr>
+          <p:cNvSpPr>
+            <a:spLocks noGrp="1"/>
+          </p:cNvSpPr>
+          <p:nvPr>
+            <p:ph idx="1"/>
+          </p:nvPr>
+        </p:nvSpPr>
+        <p:spPr/>
+        <p:txBody>
+          <a:bodyPr/>
+          <a:lstStyle/>
+          <a:p>
+            <a:r>
+              <a:rPr lang="en-IN" dirty="0"/>
+              <a:t> Valid Parentheses</a:t>
+            </a:r>
+          </a:p>
+          <a:p>
+            <a:r>
+              <a:rPr lang="en-IN" dirty="0"/>
+              <a:t> </a:t>
+            </a:r>
+            <a:r>
+              <a:rPr lang="en-GB" dirty="0"/>
+              <a:t>Reverse Vowels of a String</a:t>
+            </a:r>
+          </a:p>
+          <a:p>
+            <a:r>
+              <a:rPr lang="en-GB" dirty="0"/>
+              <a:t> </a:t>
+            </a:r>
+            <a:r>
+              <a:rPr lang="en-IN" dirty="0"/>
+              <a:t>Find the Difference (one character diff.)</a:t>
+            </a:r>
+          </a:p>
+          <a:p>
+            <a:r>
+              <a:rPr lang="en-IN" dirty="0"/>
+              <a:t> Keyboard Row</a:t>
+            </a:r>
+          </a:p>
+          <a:p>
+            <a:r>
+              <a:rPr lang="en-IN" dirty="0"/>
+              <a:t> Valid Palindrome by removing at-most one character</a:t>
+            </a:r>
+          </a:p>
+          <a:p>
+            <a:r>
+              <a:rPr lang="en-IN" dirty="0"/>
+              <a:t> Form words with </a:t>
+            </a:r>
+            <a:r>
+              <a:rPr lang="en-IN"/>
+              <a:t>diagonal flow</a:t>
+            </a:r>
+            <a:endParaRPr lang="en-IN" dirty="0"/>
+          </a:p>
+          <a:p>
+            <a:endParaRPr lang="en-IN" dirty="0"/>
+          </a:p>
+        </p:txBody>
+      </p:sp>
+      <p:sp>
+        <p:nvSpPr>
+          <p:cNvPr id="4" name="Footer Placeholder 3">
+            <a:extLst>
+              <a:ext uri="{FF2B5EF4-FFF2-40B4-BE49-F238E27FC236}">
+                <a16:creationId xmlns:a16="http://schemas.microsoft.com/office/drawing/2014/main" id="{4E75C686-45D5-51B5-CE9B-92CFD65EA4D6}"/>
+              </a:ext>
+            </a:extLst>
+          </p:cNvPr>
+          <p:cNvSpPr>
+            <a:spLocks noGrp="1"/>
+          </p:cNvSpPr>
+          <p:nvPr>
+            <p:ph type="ftr" sz="quarter" idx="11"/>
+          </p:nvPr>
+        </p:nvSpPr>
+        <p:spPr/>
+        <p:txBody>
+          <a:bodyPr/>
+          <a:lstStyle/>
+          <a:p>
+            <a:r>
+              <a:rPr lang="it-IT"/>
+              <a:t>Agnie Consulting India Pvt Limited</a:t>
+            </a:r>
+            <a:endParaRPr lang="en-IN" dirty="0"/>
+          </a:p>
+        </p:txBody>
+      </p:sp>
+      <p:sp>
+        <p:nvSpPr>
+          <p:cNvPr id="5" name="Slide Number Placeholder 4">
+            <a:extLst>
+              <a:ext uri="{FF2B5EF4-FFF2-40B4-BE49-F238E27FC236}">
+                <a16:creationId xmlns:a16="http://schemas.microsoft.com/office/drawing/2014/main" id="{4E967A4D-DE2A-311F-9BB5-EC319655B787}"/>
+              </a:ext>
+            </a:extLst>
+          </p:cNvPr>
+          <p:cNvSpPr>
+            <a:spLocks noGrp="1"/>
+          </p:cNvSpPr>
+          <p:nvPr>
+            <p:ph type="sldNum" sz="quarter" idx="12"/>
+          </p:nvPr>
+        </p:nvSpPr>
+        <p:spPr/>
+        <p:txBody>
+          <a:bodyPr/>
+          <a:lstStyle/>
+          <a:p>
+            <a:fld id="{F904C42B-FE65-422C-989C-AD3E5E2A1A20}" type="slidenum">
+              <a:rPr lang="en-IN" smtClean="0"/>
+              <a:t>38</a:t>
+            </a:fld>
+            <a:endParaRPr lang="en-IN" dirty="0"/>
+          </a:p>
+        </p:txBody>
+      </p:sp>
+    </p:spTree>
+    <p:extLst>
+      <p:ext uri="{BB962C8B-B14F-4D97-AF65-F5344CB8AC3E}">
+        <p14:creationId xmlns:p14="http://schemas.microsoft.com/office/powerpoint/2010/main" val="2943109998"/>
       </p:ext>
     </p:extLst>
   </p:cSld>
@@ -12346,15 +12410,7 @@
             </a:r>
             <a:r>
               <a:rPr lang="en-IN" dirty="0"/>
-              <a:t>where the loop wants to </a:t>
-            </a:r>
-            <a:r>
-              <a:rPr lang="en-IN" dirty="0" err="1"/>
-              <a:t>start,default</a:t>
-            </a:r>
-            <a:r>
-              <a:rPr lang="en-IN" dirty="0"/>
-              <a:t> is 0</a:t>
+              <a:t>where the loop wants to start,default is 0</a:t>
             </a:r>
             <a:r>
               <a:rPr lang="en-IN" b="1" dirty="0"/>
@@ -12378,17 +12434,8 @@
             </a:r>
             <a:r>
               <a:rPr lang="en-IN" dirty="0"/>
-              <a:t>how many steps skips within the </a:t>
-            </a:r>
-            <a:r>
-              <a:rPr lang="en-IN" dirty="0" err="1"/>
-              <a:t>range,default</a:t>
-            </a:r>
-            <a:r>
-              <a:rPr lang="en-IN"/>
-              <a:t> is 1.</a:t>
-            </a:r>
-            <a:endParaRPr lang="en-IN" dirty="0"/>
+              <a:t>how many steps skips within the range,default is 1.</a:t>
+            </a:r>
           </a:p>
         </p:txBody>
       </p:sp>
@@ -12831,13 +12878,8 @@
           <a:p>
             <a:r>
               <a:rPr lang="en-IN" dirty="0"/>
-              <a:t>Parameters : </a:t>
-            </a:r>
-            <a:r>
-              <a:rPr lang="en-IN" dirty="0" err="1"/>
-              <a:t>start,end,step</a:t>
-            </a:r>
-            <a:endParaRPr lang="en-IN" dirty="0"/>
+              <a:t>Parameters : start,end,step</a:t>
+            </a:r>
           </a:p>
           <a:p>
             <a:r>
@@ -12979,13 +13021,8 @@
           <a:p>
             <a:r>
               <a:rPr lang="en-IN" dirty="0"/>
-              <a:t>Parameters : </a:t>
-            </a:r>
-            <a:r>
-              <a:rPr lang="en-IN" dirty="0" err="1"/>
-              <a:t>start,end</a:t>
-            </a:r>
-            <a:endParaRPr lang="en-IN" dirty="0"/>
+              <a:t>Parameters : start,end</a:t>
+            </a:r>
           </a:p>
           <a:p>
             <a:r>
@@ -13510,15 +13547,7 @@
             <a:pPr lvl="1"/>
             <a:r>
               <a:rPr lang="en-IN" dirty="0"/>
-              <a:t> append(element) , index(element) , pop(index) , remove(element) , reverse() , count(element) , sort(</a:t>
-            </a:r>
-            <a:r>
-              <a:rPr lang="en-IN" dirty="0" err="1"/>
-              <a:t>key,reverse</a:t>
-            </a:r>
-            <a:r>
-              <a:rPr lang="en-IN" dirty="0"/>
-              <a:t>) , copy() , clear()</a:t>
+              <a:t> append(element) , index(element) , pop(index) , remove(element) , reverse() , count(element) , sort(key,reverse) , copy() , clear()</a:t>
             </a:r>
           </a:p>
         </p:txBody>

--- a/python class/Python Class.pptx
+++ b/python class/Python Class.pptx
@@ -234,7 +234,7 @@
           <a:p>
             <a:fld id="{C7300FFE-222E-424B-A24A-B86ADB1660A8}" type="datetimeFigureOut">
               <a:rPr lang="en-IN" smtClean="0"/>
-              <a:t>16-07-2026</a:t>
+              <a:t>17-07-2026</a:t>
             </a:fld>
             <a:endParaRPr lang="en-IN" dirty="0"/>
           </a:p>
@@ -662,7 +662,7 @@
           <a:p>
             <a:fld id="{AD501974-91E0-4A6C-BF4F-18DDA0DBE697}" type="datetime1">
               <a:rPr lang="en-IN" smtClean="0"/>
-              <a:t>16-07-2026</a:t>
+              <a:t>17-07-2026</a:t>
             </a:fld>
             <a:endParaRPr lang="en-IN" dirty="0"/>
           </a:p>
@@ -787,7 +787,7 @@
           <a:p>
             <a:fld id="{340C70EA-229A-4802-A7BC-A1799783BDD3}" type="datetime1">
               <a:rPr lang="en-IN" smtClean="0"/>
-              <a:t>16-07-2026</a:t>
+              <a:t>17-07-2026</a:t>
             </a:fld>
             <a:endParaRPr lang="en-IN" dirty="0"/>
           </a:p>
@@ -1074,7 +1074,7 @@
           <a:p>
             <a:fld id="{BD944048-9929-4BB2-BADE-62F9A707015B}" type="datetime1">
               <a:rPr lang="en-IN" smtClean="0"/>
-              <a:t>16-07-2026</a:t>
+              <a:t>17-07-2026</a:t>
             </a:fld>
             <a:endParaRPr lang="en-IN" dirty="0"/>
           </a:p>
@@ -1380,7 +1380,7 @@
           <a:p>
             <a:fld id="{09A388D1-7504-45FD-847C-EF9E921E08DF}" type="datetime1">
               <a:rPr lang="en-IN" smtClean="0"/>
-              <a:t>16-07-2026</a:t>
+              <a:t>17-07-2026</a:t>
             </a:fld>
             <a:endParaRPr lang="en-IN" dirty="0"/>
           </a:p>
@@ -1609,7 +1609,7 @@
           <a:p>
             <a:fld id="{6015BE80-B03C-48AB-B3E2-19C5F4D60D3C}" type="datetime1">
               <a:rPr lang="en-IN" smtClean="0"/>
-              <a:t>16-07-2026</a:t>
+              <a:t>17-07-2026</a:t>
             </a:fld>
             <a:endParaRPr lang="en-IN" dirty="0"/>
           </a:p>
@@ -1880,7 +1880,7 @@
           <a:p>
             <a:fld id="{450E9977-AF0E-4B1A-B2BF-2416B4828E95}" type="datetime1">
               <a:rPr lang="en-IN" smtClean="0"/>
-              <a:t>16-07-2026</a:t>
+              <a:t>17-07-2026</a:t>
             </a:fld>
             <a:endParaRPr lang="en-IN" dirty="0"/>
           </a:p>
@@ -2107,7 +2107,7 @@
           <a:p>
             <a:fld id="{972A712B-80AB-4FDB-AFE5-C959280677B9}" type="datetime1">
               <a:rPr lang="en-IN" smtClean="0"/>
-              <a:t>16-07-2026</a:t>
+              <a:t>17-07-2026</a:t>
             </a:fld>
             <a:endParaRPr lang="en-IN" dirty="0"/>
           </a:p>
@@ -2398,7 +2398,7 @@
           <a:p>
             <a:fld id="{78FC1D50-5769-4793-A6D0-4C61D943385E}" type="datetime1">
               <a:rPr lang="en-IN" smtClean="0"/>
-              <a:t>16-07-2026</a:t>
+              <a:t>17-07-2026</a:t>
             </a:fld>
             <a:endParaRPr lang="en-IN" dirty="0"/>
           </a:p>
@@ -2663,7 +2663,7 @@
           <a:p>
             <a:fld id="{1093E9E7-66F0-49C7-87AF-7A91F126A0CA}" type="datetime1">
               <a:rPr lang="en-IN" smtClean="0"/>
-              <a:t>16-07-2026</a:t>
+              <a:t>17-07-2026</a:t>
             </a:fld>
             <a:endParaRPr lang="en-IN" dirty="0"/>
           </a:p>
@@ -3109,7 +3109,7 @@
           <a:p>
             <a:fld id="{4802E001-56FE-4C01-9545-A69D840AB1F5}" type="datetime1">
               <a:rPr lang="en-IN" smtClean="0"/>
-              <a:t>16-07-2026</a:t>
+              <a:t>17-07-2026</a:t>
             </a:fld>
             <a:endParaRPr lang="en-IN" dirty="0"/>
           </a:p>
@@ -3273,7 +3273,7 @@
           <a:p>
             <a:fld id="{FC628212-ABC2-4EAF-BB21-53D61AEEEA49}" type="datetime1">
               <a:rPr lang="en-IN" smtClean="0"/>
-              <a:t>16-07-2026</a:t>
+              <a:t>17-07-2026</a:t>
             </a:fld>
             <a:endParaRPr lang="en-IN" dirty="0"/>
           </a:p>
@@ -3437,7 +3437,7 @@
           <a:p>
             <a:fld id="{83F0C27E-97BD-4ACD-AFDF-13985BE88ECF}" type="datetime1">
               <a:rPr lang="en-IN" smtClean="0"/>
-              <a:t>16-07-2026</a:t>
+              <a:t>17-07-2026</a:t>
             </a:fld>
             <a:endParaRPr lang="en-IN" dirty="0"/>
           </a:p>
@@ -3635,7 +3635,7 @@
           <a:p>
             <a:fld id="{10A04BDC-9A72-4B08-81B7-A336A5B4E254}" type="datetime1">
               <a:rPr lang="en-IN" smtClean="0"/>
-              <a:t>16-07-2026</a:t>
+              <a:t>17-07-2026</a:t>
             </a:fld>
             <a:endParaRPr lang="en-IN" dirty="0"/>
           </a:p>
@@ -3833,7 +3833,7 @@
           <a:p>
             <a:fld id="{2E5D08A3-D96A-4309-8AF3-C610782BB2D3}" type="datetime1">
               <a:rPr lang="en-IN" smtClean="0"/>
-              <a:t>16-07-2026</a:t>
+              <a:t>17-07-2026</a:t>
             </a:fld>
             <a:endParaRPr lang="en-IN" dirty="0"/>
           </a:p>
@@ -7426,12 +7426,6 @@
           <a:p>
             <a:r>
               <a:rPr lang="en-IN" dirty="0"/>
-              <a:t> dictionary keys.</a:t>
-            </a:r>
-          </a:p>
-          <a:p>
-            <a:r>
-              <a:rPr lang="en-IN" dirty="0"/>
               <a:t> file operations.</a:t>
             </a:r>
           </a:p>
@@ -8282,8 +8276,35 @@
               <a:t> Operations : </a:t>
             </a:r>
             <a:r>
-              <a:rPr lang="en-IN" dirty="0"/>
-              <a:t>makedir , listdir , system , path , startfile , getuid , rename , remove , rmdir</a:t>
+              <a:rPr lang="en-IN" dirty="0" err="1"/>
+              <a:t>makedir</a:t>
+            </a:r>
+            <a:r>
+              <a:rPr lang="en-IN" dirty="0"/>
+              <a:t> , listdir , system , path , startfile , getuid , rename , remove , </a:t>
+            </a:r>
+            <a:r>
+              <a:rPr lang="en-IN" dirty="0" err="1"/>
+              <a:t>rmdir</a:t>
+            </a:r>
+            <a:endParaRPr lang="en-IN" dirty="0"/>
+          </a:p>
+          <a:p>
+            <a:r>
+              <a:rPr lang="en-IN" b="1" dirty="0"/>
+              <a:t> </a:t>
+            </a:r>
+            <a:r>
+              <a:rPr lang="en-IN" dirty="0"/>
+              <a:t>also used to execute the </a:t>
+            </a:r>
+            <a:r>
+              <a:rPr lang="en-IN" dirty="0" err="1"/>
+              <a:t>cmd</a:t>
+            </a:r>
+            <a:r>
+              <a:rPr lang="en-IN" dirty="0"/>
+              <a:t> commands</a:t>
             </a:r>
             <a:endParaRPr lang="en-IN" b="1" dirty="0"/>
           </a:p>
@@ -8426,7 +8447,24 @@
           <a:bodyPr/>
           <a:lstStyle/>
           <a:p>
-            <a:endParaRPr lang="en-IN" dirty="0"/>
+            <a:r>
+              <a:rPr lang="en-IN" dirty="0"/>
+              <a:t> </a:t>
+            </a:r>
+            <a:r>
+              <a:rPr lang="en-IN" b="1" dirty="0"/>
+              <a:t>Package : </a:t>
+            </a:r>
+            <a:r>
+              <a:rPr lang="en-IN" dirty="0"/>
+              <a:t>math</a:t>
+            </a:r>
+          </a:p>
+          <a:p>
+            <a:r>
+              <a:rPr lang="en-IN" dirty="0"/>
+              <a:t> used for mathematical operations</a:t>
+            </a:r>
           </a:p>
         </p:txBody>
       </p:sp>
@@ -8747,6 +8785,21 @@
               <a:t>generates fake data</a:t>
             </a:r>
           </a:p>
+          <a:p>
+            <a:r>
+              <a:rPr lang="en-IN" dirty="0"/>
+              <a:t> </a:t>
+            </a:r>
+            <a:r>
+              <a:rPr lang="en-IN" b="1" dirty="0" err="1"/>
+              <a:t>cmd</a:t>
+            </a:r>
+            <a:r>
+              <a:rPr lang="en-IN" b="1" dirty="0"/>
+              <a:t> : pip install faker</a:t>
+            </a:r>
+            <a:endParaRPr lang="en-IN" dirty="0"/>
+          </a:p>
         </p:txBody>
       </p:sp>
       <p:sp>
@@ -8898,6 +8951,12 @@
             <a:r>
               <a:rPr lang="en-GB" dirty="0"/>
               <a:t>import datetime	or	from datetime import *</a:t>
+            </a:r>
+          </a:p>
+          <a:p>
+            <a:r>
+              <a:rPr lang="en-GB" dirty="0"/>
+              <a:t> </a:t>
             </a:r>
             <a:endParaRPr lang="en-IN" dirty="0"/>
           </a:p>
@@ -9998,6 +10057,14 @@
               <a:rPr lang="en-GB" dirty="0"/>
               <a:t> </a:t>
             </a:r>
+            <a:r>
+              <a:rPr lang="en-GB" b="1" dirty="0"/>
+              <a:t>Uses : </a:t>
+            </a:r>
+            <a:r>
+              <a:rPr lang="en-GB" dirty="0"/>
+              <a:t>send simple mail &amp; mail with attachments</a:t>
+            </a:r>
             <a:endParaRPr lang="en-IN" dirty="0"/>
           </a:p>
         </p:txBody>
@@ -10298,6 +10365,10 @@
               <a:rPr lang="en-IN" b="1" dirty="0"/>
               <a:t>Package : </a:t>
             </a:r>
+            <a:r>
+              <a:rPr lang="en-IN" dirty="0" err="1"/>
+              <a:t>pypdf</a:t>
+            </a:r>
             <a:endParaRPr lang="en-IN" dirty="0"/>
           </a:p>
         </p:txBody>
@@ -10880,7 +10951,10 @@
           <a:bodyPr/>
           <a:lstStyle/>
           <a:p>
-            <a:endParaRPr lang="en-IN" dirty="0"/>
+            <a:r>
+              <a:rPr lang="en-IN" dirty="0"/>
+              <a:t> </a:t>
+            </a:r>
           </a:p>
         </p:txBody>
       </p:sp>
@@ -11346,16 +11420,6 @@
           </a:p>
           <a:p>
             <a:r>
-              <a:rPr lang="en-GB" dirty="0"/>
-              <a:t> </a:t>
-            </a:r>
-            <a:r>
-              <a:rPr lang="en-IN" dirty="0"/>
-              <a:t>Find the Difference (one character diff.)</a:t>
-            </a:r>
-          </a:p>
-          <a:p>
-            <a:r>
               <a:rPr lang="en-IN" dirty="0"/>
               <a:t> Keyboard Row</a:t>
             </a:r>
@@ -11363,18 +11427,16 @@
           <a:p>
             <a:r>
               <a:rPr lang="en-IN" dirty="0"/>
-              <a:t> Valid Palindrome by removing at-most one character</a:t>
-            </a:r>
-          </a:p>
-          <a:p>
-            <a:r>
-              <a:rPr lang="en-IN" dirty="0"/>
-              <a:t> Form words with </a:t>
-            </a:r>
-            <a:r>
-              <a:rPr lang="en-IN"/>
-              <a:t>diagonal flow</a:t>
-            </a:r>
+              <a:t> Form words in diagonal flow</a:t>
+            </a:r>
+          </a:p>
+          <a:p>
+            <a:r>
+              <a:rPr lang="en-IN" dirty="0"/>
+              <a:t> Equal Score Substrings</a:t>
+            </a:r>
+          </a:p>
+          <a:p>
             <a:endParaRPr lang="en-IN" dirty="0"/>
           </a:p>
           <a:p>

--- a/python class/Python Class.pptx
+++ b/python class/Python Class.pptx
@@ -234,7 +234,7 @@
           <a:p>
             <a:fld id="{C7300FFE-222E-424B-A24A-B86ADB1660A8}" type="datetimeFigureOut">
               <a:rPr lang="en-IN" smtClean="0"/>
-              <a:t>17-07-2026</a:t>
+              <a:t>22-07-2026</a:t>
             </a:fld>
             <a:endParaRPr lang="en-IN" dirty="0"/>
           </a:p>
@@ -662,7 +662,7 @@
           <a:p>
             <a:fld id="{AD501974-91E0-4A6C-BF4F-18DDA0DBE697}" type="datetime1">
               <a:rPr lang="en-IN" smtClean="0"/>
-              <a:t>17-07-2026</a:t>
+              <a:t>22-07-2026</a:t>
             </a:fld>
             <a:endParaRPr lang="en-IN" dirty="0"/>
           </a:p>
@@ -787,7 +787,7 @@
           <a:p>
             <a:fld id="{340C70EA-229A-4802-A7BC-A1799783BDD3}" type="datetime1">
               <a:rPr lang="en-IN" smtClean="0"/>
-              <a:t>17-07-2026</a:t>
+              <a:t>22-07-2026</a:t>
             </a:fld>
             <a:endParaRPr lang="en-IN" dirty="0"/>
           </a:p>
@@ -1074,7 +1074,7 @@
           <a:p>
             <a:fld id="{BD944048-9929-4BB2-BADE-62F9A707015B}" type="datetime1">
               <a:rPr lang="en-IN" smtClean="0"/>
-              <a:t>17-07-2026</a:t>
+              <a:t>22-07-2026</a:t>
             </a:fld>
             <a:endParaRPr lang="en-IN" dirty="0"/>
           </a:p>
@@ -1380,7 +1380,7 @@
           <a:p>
             <a:fld id="{09A388D1-7504-45FD-847C-EF9E921E08DF}" type="datetime1">
               <a:rPr lang="en-IN" smtClean="0"/>
-              <a:t>17-07-2026</a:t>
+              <a:t>22-07-2026</a:t>
             </a:fld>
             <a:endParaRPr lang="en-IN" dirty="0"/>
           </a:p>
@@ -1609,7 +1609,7 @@
           <a:p>
             <a:fld id="{6015BE80-B03C-48AB-B3E2-19C5F4D60D3C}" type="datetime1">
               <a:rPr lang="en-IN" smtClean="0"/>
-              <a:t>17-07-2026</a:t>
+              <a:t>22-07-2026</a:t>
             </a:fld>
             <a:endParaRPr lang="en-IN" dirty="0"/>
           </a:p>
@@ -1880,7 +1880,7 @@
           <a:p>
             <a:fld id="{450E9977-AF0E-4B1A-B2BF-2416B4828E95}" type="datetime1">
               <a:rPr lang="en-IN" smtClean="0"/>
-              <a:t>17-07-2026</a:t>
+              <a:t>22-07-2026</a:t>
             </a:fld>
             <a:endParaRPr lang="en-IN" dirty="0"/>
           </a:p>
@@ -2107,7 +2107,7 @@
           <a:p>
             <a:fld id="{972A712B-80AB-4FDB-AFE5-C959280677B9}" type="datetime1">
               <a:rPr lang="en-IN" smtClean="0"/>
-              <a:t>17-07-2026</a:t>
+              <a:t>22-07-2026</a:t>
             </a:fld>
             <a:endParaRPr lang="en-IN" dirty="0"/>
           </a:p>
@@ -2398,7 +2398,7 @@
           <a:p>
             <a:fld id="{78FC1D50-5769-4793-A6D0-4C61D943385E}" type="datetime1">
               <a:rPr lang="en-IN" smtClean="0"/>
-              <a:t>17-07-2026</a:t>
+              <a:t>22-07-2026</a:t>
             </a:fld>
             <a:endParaRPr lang="en-IN" dirty="0"/>
           </a:p>
@@ -2663,7 +2663,7 @@
           <a:p>
             <a:fld id="{1093E9E7-66F0-49C7-87AF-7A91F126A0CA}" type="datetime1">
               <a:rPr lang="en-IN" smtClean="0"/>
-              <a:t>17-07-2026</a:t>
+              <a:t>22-07-2026</a:t>
             </a:fld>
             <a:endParaRPr lang="en-IN" dirty="0"/>
           </a:p>
@@ -3109,7 +3109,7 @@
           <a:p>
             <a:fld id="{4802E001-56FE-4C01-9545-A69D840AB1F5}" type="datetime1">
               <a:rPr lang="en-IN" smtClean="0"/>
-              <a:t>17-07-2026</a:t>
+              <a:t>22-07-2026</a:t>
             </a:fld>
             <a:endParaRPr lang="en-IN" dirty="0"/>
           </a:p>
@@ -3273,7 +3273,7 @@
           <a:p>
             <a:fld id="{FC628212-ABC2-4EAF-BB21-53D61AEEEA49}" type="datetime1">
               <a:rPr lang="en-IN" smtClean="0"/>
-              <a:t>17-07-2026</a:t>
+              <a:t>22-07-2026</a:t>
             </a:fld>
             <a:endParaRPr lang="en-IN" dirty="0"/>
           </a:p>
@@ -3437,7 +3437,7 @@
           <a:p>
             <a:fld id="{83F0C27E-97BD-4ACD-AFDF-13985BE88ECF}" type="datetime1">
               <a:rPr lang="en-IN" smtClean="0"/>
-              <a:t>17-07-2026</a:t>
+              <a:t>22-07-2026</a:t>
             </a:fld>
             <a:endParaRPr lang="en-IN" dirty="0"/>
           </a:p>
@@ -3635,7 +3635,7 @@
           <a:p>
             <a:fld id="{10A04BDC-9A72-4B08-81B7-A336A5B4E254}" type="datetime1">
               <a:rPr lang="en-IN" smtClean="0"/>
-              <a:t>17-07-2026</a:t>
+              <a:t>22-07-2026</a:t>
             </a:fld>
             <a:endParaRPr lang="en-IN" dirty="0"/>
           </a:p>
@@ -3833,7 +3833,7 @@
           <a:p>
             <a:fld id="{2E5D08A3-D96A-4309-8AF3-C610782BB2D3}" type="datetime1">
               <a:rPr lang="en-IN" smtClean="0"/>
-              <a:t>17-07-2026</a:t>
+              <a:t>22-07-2026</a:t>
             </a:fld>
             <a:endParaRPr lang="en-IN" dirty="0"/>
           </a:p>
@@ -8466,6 +8466,33 @@
               <a:t> used for mathematical operations</a:t>
             </a:r>
           </a:p>
+          <a:p>
+            <a:r>
+              <a:rPr lang="en-IN" dirty="0"/>
+              <a:t> </a:t>
+            </a:r>
+            <a:r>
+              <a:rPr lang="en-IN" b="1" dirty="0"/>
+              <a:t>Functions : </a:t>
+            </a:r>
+            <a:r>
+              <a:rPr lang="en-IN" dirty="0"/>
+              <a:t>sqrt() , </a:t>
+            </a:r>
+            <a:r>
+              <a:rPr lang="en-IN" dirty="0" err="1"/>
+              <a:t>gcd</a:t>
+            </a:r>
+            <a:r>
+              <a:rPr lang="en-IN" dirty="0"/>
+              <a:t>() , lcm() , factorial() , floor() , ceil() , log() , pow() , </a:t>
+            </a:r>
+            <a:r>
+              <a:rPr lang="en-IN"/>
+              <a:t>prod() .</a:t>
+            </a:r>
+            <a:endParaRPr lang="en-IN" dirty="0"/>
+          </a:p>
         </p:txBody>
       </p:sp>
       <p:sp>
@@ -8615,8 +8642,23 @@
               <a:t>Package : </a:t>
             </a:r>
             <a:r>
-              <a:rPr lang="en-IN" dirty="0"/>
+              <a:rPr lang="en-IN" dirty="0" err="1"/>
               <a:t>openpyxl</a:t>
+            </a:r>
+            <a:endParaRPr lang="en-IN" dirty="0"/>
+          </a:p>
+          <a:p>
+            <a:r>
+              <a:rPr lang="en-IN" dirty="0"/>
+              <a:t> </a:t>
+            </a:r>
+            <a:r>
+              <a:rPr lang="en-IN" b="1" dirty="0"/>
+              <a:t>Operations : </a:t>
+            </a:r>
+            <a:r>
+              <a:rPr lang="en-IN" dirty="0"/>
+              <a:t>read , write , excel formulas , excel automation</a:t>
             </a:r>
           </a:p>
         </p:txBody>
@@ -8951,6 +8993,20 @@
             <a:r>
               <a:rPr lang="en-GB" dirty="0"/>
               <a:t>import datetime	or	from datetime import *</a:t>
+            </a:r>
+          </a:p>
+          <a:p>
+            <a:r>
+              <a:rPr lang="en-GB" dirty="0"/>
+              <a:t> </a:t>
+            </a:r>
+            <a:r>
+              <a:rPr lang="en-GB" b="1" dirty="0"/>
+              <a:t>Uses : </a:t>
+            </a:r>
+            <a:r>
+              <a:rPr lang="en-GB" dirty="0"/>
+              <a:t>datetime parser , datetime operations </a:t>
             </a:r>
           </a:p>
           <a:p>
@@ -10049,7 +10105,15 @@
             </a:r>
             <a:r>
               <a:rPr lang="en-GB" dirty="0"/>
-              <a:t>smtplib , mimetype</a:t>
+              <a:t>smtplib , </a:t>
+            </a:r>
+            <a:r>
+              <a:rPr lang="en-GB" dirty="0" err="1"/>
+              <a:t>mimetype</a:t>
+            </a:r>
+            <a:r>
+              <a:rPr lang="en-GB" dirty="0"/>
+              <a:t> , email</a:t>
             </a:r>
           </a:p>
           <a:p>
@@ -10064,6 +10128,45 @@
             <a:r>
               <a:rPr lang="en-GB" dirty="0"/>
               <a:t>send simple mail &amp; mail with attachments</a:t>
+            </a:r>
+          </a:p>
+          <a:p>
+            <a:r>
+              <a:rPr lang="en-GB" dirty="0"/>
+              <a:t> </a:t>
+            </a:r>
+            <a:r>
+              <a:rPr lang="en-GB" b="1" dirty="0"/>
+              <a:t>Steps : </a:t>
+            </a:r>
+            <a:endParaRPr lang="en-GB" dirty="0"/>
+          </a:p>
+          <a:p>
+            <a:pPr lvl="1"/>
+            <a:r>
+              <a:rPr lang="en-GB" dirty="0"/>
+              <a:t> create the app password</a:t>
+            </a:r>
+          </a:p>
+          <a:p>
+            <a:pPr lvl="1"/>
+            <a:r>
+              <a:rPr lang="en-GB" dirty="0"/>
+              <a:t> two-step verification</a:t>
+            </a:r>
+          </a:p>
+          <a:p>
+            <a:pPr lvl="1"/>
+            <a:r>
+              <a:rPr lang="en-GB" dirty="0"/>
+              <a:t> securely store and read the password</a:t>
+            </a:r>
+          </a:p>
+          <a:p>
+            <a:pPr lvl="1"/>
+            <a:r>
+              <a:rPr lang="en-GB" dirty="0"/>
+              <a:t> </a:t>
             </a:r>
             <a:endParaRPr lang="en-IN" dirty="0"/>
           </a:p>
@@ -11435,12 +11538,6 @@
               <a:rPr lang="en-IN" dirty="0"/>
               <a:t> Equal Score Substrings</a:t>
             </a:r>
-          </a:p>
-          <a:p>
-            <a:endParaRPr lang="en-IN" dirty="0"/>
-          </a:p>
-          <a:p>
-            <a:endParaRPr lang="en-IN" dirty="0"/>
           </a:p>
         </p:txBody>
       </p:sp>

--- a/python class/Python Class.pptx
+++ b/python class/Python Class.pptx
@@ -8281,7 +8281,15 @@
             </a:r>
             <a:r>
               <a:rPr lang="en-IN" dirty="0"/>
-              <a:t> , listdir , system , path , startfile , getuid , rename , remove , </a:t>
+              <a:t> , listdir , system , path , startfile , </a:t>
+            </a:r>
+            <a:r>
+              <a:rPr lang="en-IN" dirty="0" err="1"/>
+              <a:t>getuser</a:t>
+            </a:r>
+            <a:r>
+              <a:rPr lang="en-IN" dirty="0"/>
+              <a:t> , rename , remove , </a:t>
             </a:r>
             <a:r>
               <a:rPr lang="en-IN" dirty="0" err="1"/>
@@ -10166,7 +10174,7 @@
             <a:pPr lvl="1"/>
             <a:r>
               <a:rPr lang="en-GB" dirty="0"/>
-              <a:t> </a:t>
+              <a:t> make smtp encrypted connection</a:t>
             </a:r>
             <a:endParaRPr lang="en-IN" dirty="0"/>
           </a:p>

--- a/python class/Python Class.pptx
+++ b/python class/Python Class.pptx
@@ -34,8 +34,8 @@
     <p:sldId id="273" r:id="rId25"/>
     <p:sldId id="282" r:id="rId26"/>
     <p:sldId id="292" r:id="rId27"/>
-    <p:sldId id="286" r:id="rId28"/>
-    <p:sldId id="291" r:id="rId29"/>
+    <p:sldId id="291" r:id="rId28"/>
+    <p:sldId id="286" r:id="rId29"/>
     <p:sldId id="283" r:id="rId30"/>
     <p:sldId id="288" r:id="rId31"/>
     <p:sldId id="275" r:id="rId32"/>
@@ -234,7 +234,7 @@
           <a:p>
             <a:fld id="{C7300FFE-222E-424B-A24A-B86ADB1660A8}" type="datetimeFigureOut">
               <a:rPr lang="en-IN" smtClean="0"/>
-              <a:t>22-07-2026</a:t>
+              <a:t>23-07-2026</a:t>
             </a:fld>
             <a:endParaRPr lang="en-IN" dirty="0"/>
           </a:p>
@@ -662,7 +662,7 @@
           <a:p>
             <a:fld id="{AD501974-91E0-4A6C-BF4F-18DDA0DBE697}" type="datetime1">
               <a:rPr lang="en-IN" smtClean="0"/>
-              <a:t>22-07-2026</a:t>
+              <a:t>23-07-2026</a:t>
             </a:fld>
             <a:endParaRPr lang="en-IN" dirty="0"/>
           </a:p>
@@ -787,7 +787,7 @@
           <a:p>
             <a:fld id="{340C70EA-229A-4802-A7BC-A1799783BDD3}" type="datetime1">
               <a:rPr lang="en-IN" smtClean="0"/>
-              <a:t>22-07-2026</a:t>
+              <a:t>23-07-2026</a:t>
             </a:fld>
             <a:endParaRPr lang="en-IN" dirty="0"/>
           </a:p>
@@ -1074,7 +1074,7 @@
           <a:p>
             <a:fld id="{BD944048-9929-4BB2-BADE-62F9A707015B}" type="datetime1">
               <a:rPr lang="en-IN" smtClean="0"/>
-              <a:t>22-07-2026</a:t>
+              <a:t>23-07-2026</a:t>
             </a:fld>
             <a:endParaRPr lang="en-IN" dirty="0"/>
           </a:p>
@@ -1380,7 +1380,7 @@
           <a:p>
             <a:fld id="{09A388D1-7504-45FD-847C-EF9E921E08DF}" type="datetime1">
               <a:rPr lang="en-IN" smtClean="0"/>
-              <a:t>22-07-2026</a:t>
+              <a:t>23-07-2026</a:t>
             </a:fld>
             <a:endParaRPr lang="en-IN" dirty="0"/>
           </a:p>
@@ -1609,7 +1609,7 @@
           <a:p>
             <a:fld id="{6015BE80-B03C-48AB-B3E2-19C5F4D60D3C}" type="datetime1">
               <a:rPr lang="en-IN" smtClean="0"/>
-              <a:t>22-07-2026</a:t>
+              <a:t>23-07-2026</a:t>
             </a:fld>
             <a:endParaRPr lang="en-IN" dirty="0"/>
           </a:p>
@@ -1880,7 +1880,7 @@
           <a:p>
             <a:fld id="{450E9977-AF0E-4B1A-B2BF-2416B4828E95}" type="datetime1">
               <a:rPr lang="en-IN" smtClean="0"/>
-              <a:t>22-07-2026</a:t>
+              <a:t>23-07-2026</a:t>
             </a:fld>
             <a:endParaRPr lang="en-IN" dirty="0"/>
           </a:p>
@@ -2107,7 +2107,7 @@
           <a:p>
             <a:fld id="{972A712B-80AB-4FDB-AFE5-C959280677B9}" type="datetime1">
               <a:rPr lang="en-IN" smtClean="0"/>
-              <a:t>22-07-2026</a:t>
+              <a:t>23-07-2026</a:t>
             </a:fld>
             <a:endParaRPr lang="en-IN" dirty="0"/>
           </a:p>
@@ -2398,7 +2398,7 @@
           <a:p>
             <a:fld id="{78FC1D50-5769-4793-A6D0-4C61D943385E}" type="datetime1">
               <a:rPr lang="en-IN" smtClean="0"/>
-              <a:t>22-07-2026</a:t>
+              <a:t>23-07-2026</a:t>
             </a:fld>
             <a:endParaRPr lang="en-IN" dirty="0"/>
           </a:p>
@@ -2663,7 +2663,7 @@
           <a:p>
             <a:fld id="{1093E9E7-66F0-49C7-87AF-7A91F126A0CA}" type="datetime1">
               <a:rPr lang="en-IN" smtClean="0"/>
-              <a:t>22-07-2026</a:t>
+              <a:t>23-07-2026</a:t>
             </a:fld>
             <a:endParaRPr lang="en-IN" dirty="0"/>
           </a:p>
@@ -3109,7 +3109,7 @@
           <a:p>
             <a:fld id="{4802E001-56FE-4C01-9545-A69D840AB1F5}" type="datetime1">
               <a:rPr lang="en-IN" smtClean="0"/>
-              <a:t>22-07-2026</a:t>
+              <a:t>23-07-2026</a:t>
             </a:fld>
             <a:endParaRPr lang="en-IN" dirty="0"/>
           </a:p>
@@ -3273,7 +3273,7 @@
           <a:p>
             <a:fld id="{FC628212-ABC2-4EAF-BB21-53D61AEEEA49}" type="datetime1">
               <a:rPr lang="en-IN" smtClean="0"/>
-              <a:t>22-07-2026</a:t>
+              <a:t>23-07-2026</a:t>
             </a:fld>
             <a:endParaRPr lang="en-IN" dirty="0"/>
           </a:p>
@@ -3437,7 +3437,7 @@
           <a:p>
             <a:fld id="{83F0C27E-97BD-4ACD-AFDF-13985BE88ECF}" type="datetime1">
               <a:rPr lang="en-IN" smtClean="0"/>
-              <a:t>22-07-2026</a:t>
+              <a:t>23-07-2026</a:t>
             </a:fld>
             <a:endParaRPr lang="en-IN" dirty="0"/>
           </a:p>
@@ -3635,7 +3635,7 @@
           <a:p>
             <a:fld id="{10A04BDC-9A72-4B08-81B7-A336A5B4E254}" type="datetime1">
               <a:rPr lang="en-IN" smtClean="0"/>
-              <a:t>22-07-2026</a:t>
+              <a:t>23-07-2026</a:t>
             </a:fld>
             <a:endParaRPr lang="en-IN" dirty="0"/>
           </a:p>
@@ -3833,7 +3833,7 @@
           <a:p>
             <a:fld id="{2E5D08A3-D96A-4309-8AF3-C610782BB2D3}" type="datetime1">
               <a:rPr lang="en-IN" smtClean="0"/>
-              <a:t>22-07-2026</a:t>
+              <a:t>23-07-2026</a:t>
             </a:fld>
             <a:endParaRPr lang="en-IN" dirty="0"/>
           </a:p>
@@ -8596,7 +8596,7 @@
           <p:cNvPr id="2" name="Title 1">
             <a:extLst>
               <a:ext uri="{FF2B5EF4-FFF2-40B4-BE49-F238E27FC236}">
-                <a16:creationId xmlns:a16="http://schemas.microsoft.com/office/drawing/2014/main" id="{9E6DD218-3F31-33F2-8CDB-7DA5BBC005B5}"/>
+                <a16:creationId xmlns:a16="http://schemas.microsoft.com/office/drawing/2014/main" id="{F4F099D4-75DE-2228-3253-ECEEA4A44245}"/>
               </a:ext>
             </a:extLst>
           </p:cNvPr>
@@ -8613,10 +8613,9 @@
           <a:lstStyle/>
           <a:p>
             <a:r>
-              <a:rPr lang="en-GB" dirty="0"/>
-              <a:t>Excel</a:t>
-            </a:r>
-            <a:endParaRPr lang="en-IN" dirty="0"/>
+              <a:rPr lang="en-IN" dirty="0"/>
+              <a:t>Data Generator</a:t>
+            </a:r>
           </a:p>
         </p:txBody>
       </p:sp>
@@ -8625,7 +8624,7 @@
           <p:cNvPr id="3" name="Content Placeholder 2">
             <a:extLst>
               <a:ext uri="{FF2B5EF4-FFF2-40B4-BE49-F238E27FC236}">
-                <a16:creationId xmlns:a16="http://schemas.microsoft.com/office/drawing/2014/main" id="{500E92CE-D89D-F2AE-C187-40E84467AA4A}"/>
+                <a16:creationId xmlns:a16="http://schemas.microsoft.com/office/drawing/2014/main" id="{A799FB1B-936E-83C0-D314-A9D32BEFDC25}"/>
               </a:ext>
             </a:extLst>
           </p:cNvPr>
@@ -8650,10 +8649,9 @@
               <a:t>Package : </a:t>
             </a:r>
             <a:r>
-              <a:rPr lang="en-IN" dirty="0" err="1"/>
-              <a:t>openpyxl</a:t>
-            </a:r>
-            <a:endParaRPr lang="en-IN" dirty="0"/>
+              <a:rPr lang="en-IN" dirty="0"/>
+              <a:t>faker</a:t>
+            </a:r>
           </a:p>
           <a:p>
             <a:r>
@@ -8662,12 +8660,27 @@
             </a:r>
             <a:r>
               <a:rPr lang="en-IN" b="1" dirty="0"/>
-              <a:t>Operations : </a:t>
-            </a:r>
-            <a:r>
-              <a:rPr lang="en-IN" dirty="0"/>
-              <a:t>read , write , excel formulas , excel automation</a:t>
-            </a:r>
+              <a:t>Usage : </a:t>
+            </a:r>
+            <a:r>
+              <a:rPr lang="en-IN" dirty="0"/>
+              <a:t>generates fake data</a:t>
+            </a:r>
+          </a:p>
+          <a:p>
+            <a:r>
+              <a:rPr lang="en-IN" dirty="0"/>
+              <a:t> </a:t>
+            </a:r>
+            <a:r>
+              <a:rPr lang="en-IN" b="1" dirty="0" err="1"/>
+              <a:t>cmd</a:t>
+            </a:r>
+            <a:r>
+              <a:rPr lang="en-IN" b="1" dirty="0"/>
+              <a:t> : pip install faker</a:t>
+            </a:r>
+            <a:endParaRPr lang="en-IN" dirty="0"/>
           </a:p>
         </p:txBody>
       </p:sp>
@@ -8676,7 +8689,7 @@
           <p:cNvPr id="4" name="Footer Placeholder 3">
             <a:extLst>
               <a:ext uri="{FF2B5EF4-FFF2-40B4-BE49-F238E27FC236}">
-                <a16:creationId xmlns:a16="http://schemas.microsoft.com/office/drawing/2014/main" id="{55C92561-856D-7F47-3708-294C94D9D3BA}"/>
+                <a16:creationId xmlns:a16="http://schemas.microsoft.com/office/drawing/2014/main" id="{707FD7A8-A650-29AB-1F96-AA998CE268BB}"/>
               </a:ext>
             </a:extLst>
           </p:cNvPr>
@@ -8705,7 +8718,7 @@
           <p:cNvPr id="5" name="Slide Number Placeholder 4">
             <a:extLst>
               <a:ext uri="{FF2B5EF4-FFF2-40B4-BE49-F238E27FC236}">
-                <a16:creationId xmlns:a16="http://schemas.microsoft.com/office/drawing/2014/main" id="{5A544846-71AE-4EED-7C71-69CBD266AB5B}"/>
+                <a16:creationId xmlns:a16="http://schemas.microsoft.com/office/drawing/2014/main" id="{4D8E87B5-D318-9AA5-634B-EFDFEA10639F}"/>
               </a:ext>
             </a:extLst>
           </p:cNvPr>
@@ -8732,7 +8745,7 @@
     </p:spTree>
     <p:extLst>
       <p:ext uri="{BB962C8B-B14F-4D97-AF65-F5344CB8AC3E}">
-        <p14:creationId xmlns:p14="http://schemas.microsoft.com/office/powerpoint/2010/main" val="1926792215"/>
+        <p14:creationId xmlns:p14="http://schemas.microsoft.com/office/powerpoint/2010/main" val="683650118"/>
       </p:ext>
     </p:extLst>
   </p:cSld>
@@ -8764,7 +8777,7 @@
           <p:cNvPr id="2" name="Title 1">
             <a:extLst>
               <a:ext uri="{FF2B5EF4-FFF2-40B4-BE49-F238E27FC236}">
-                <a16:creationId xmlns:a16="http://schemas.microsoft.com/office/drawing/2014/main" id="{F4F099D4-75DE-2228-3253-ECEEA4A44245}"/>
+                <a16:creationId xmlns:a16="http://schemas.microsoft.com/office/drawing/2014/main" id="{9E6DD218-3F31-33F2-8CDB-7DA5BBC005B5}"/>
               </a:ext>
             </a:extLst>
           </p:cNvPr>
@@ -8781,9 +8794,10 @@
           <a:lstStyle/>
           <a:p>
             <a:r>
-              <a:rPr lang="en-IN" dirty="0"/>
-              <a:t>Data Generator</a:t>
-            </a:r>
+              <a:rPr lang="en-GB" dirty="0"/>
+              <a:t>Excel</a:t>
+            </a:r>
+            <a:endParaRPr lang="en-IN" dirty="0"/>
           </a:p>
         </p:txBody>
       </p:sp>
@@ -8792,7 +8806,7 @@
           <p:cNvPr id="3" name="Content Placeholder 2">
             <a:extLst>
               <a:ext uri="{FF2B5EF4-FFF2-40B4-BE49-F238E27FC236}">
-                <a16:creationId xmlns:a16="http://schemas.microsoft.com/office/drawing/2014/main" id="{A799FB1B-936E-83C0-D314-A9D32BEFDC25}"/>
+                <a16:creationId xmlns:a16="http://schemas.microsoft.com/office/drawing/2014/main" id="{500E92CE-D89D-F2AE-C187-40E84467AA4A}"/>
               </a:ext>
             </a:extLst>
           </p:cNvPr>
@@ -8817,9 +8831,10 @@
               <a:t>Package : </a:t>
             </a:r>
             <a:r>
-              <a:rPr lang="en-IN" dirty="0"/>
-              <a:t>faker</a:t>
-            </a:r>
+              <a:rPr lang="en-IN" dirty="0" err="1"/>
+              <a:t>openpyxl</a:t>
+            </a:r>
+            <a:endParaRPr lang="en-IN" dirty="0"/>
           </a:p>
           <a:p>
             <a:r>
@@ -8828,11 +8843,11 @@
             </a:r>
             <a:r>
               <a:rPr lang="en-IN" b="1" dirty="0"/>
-              <a:t>Usage : </a:t>
-            </a:r>
-            <a:r>
-              <a:rPr lang="en-IN" dirty="0"/>
-              <a:t>generates fake data</a:t>
+              <a:t>Operations : </a:t>
+            </a:r>
+            <a:r>
+              <a:rPr lang="en-IN" dirty="0"/>
+              <a:t>read , write , excel formulas , excel automation</a:t>
             </a:r>
           </a:p>
           <a:p>
@@ -8840,15 +8855,6 @@
               <a:rPr lang="en-IN" dirty="0"/>
               <a:t> </a:t>
             </a:r>
-            <a:r>
-              <a:rPr lang="en-IN" b="1" dirty="0" err="1"/>
-              <a:t>cmd</a:t>
-            </a:r>
-            <a:r>
-              <a:rPr lang="en-IN" b="1" dirty="0"/>
-              <a:t> : pip install faker</a:t>
-            </a:r>
-            <a:endParaRPr lang="en-IN" dirty="0"/>
           </a:p>
         </p:txBody>
       </p:sp>
@@ -8857,7 +8863,7 @@
           <p:cNvPr id="4" name="Footer Placeholder 3">
             <a:extLst>
               <a:ext uri="{FF2B5EF4-FFF2-40B4-BE49-F238E27FC236}">
-                <a16:creationId xmlns:a16="http://schemas.microsoft.com/office/drawing/2014/main" id="{707FD7A8-A650-29AB-1F96-AA998CE268BB}"/>
+                <a16:creationId xmlns:a16="http://schemas.microsoft.com/office/drawing/2014/main" id="{55C92561-856D-7F47-3708-294C94D9D3BA}"/>
               </a:ext>
             </a:extLst>
           </p:cNvPr>
@@ -8886,7 +8892,7 @@
           <p:cNvPr id="5" name="Slide Number Placeholder 4">
             <a:extLst>
               <a:ext uri="{FF2B5EF4-FFF2-40B4-BE49-F238E27FC236}">
-                <a16:creationId xmlns:a16="http://schemas.microsoft.com/office/drawing/2014/main" id="{4D8E87B5-D318-9AA5-634B-EFDFEA10639F}"/>
+                <a16:creationId xmlns:a16="http://schemas.microsoft.com/office/drawing/2014/main" id="{5A544846-71AE-4EED-7C71-69CBD266AB5B}"/>
               </a:ext>
             </a:extLst>
           </p:cNvPr>
@@ -8913,7 +8919,7 @@
     </p:spTree>
     <p:extLst>
       <p:ext uri="{BB962C8B-B14F-4D97-AF65-F5344CB8AC3E}">
-        <p14:creationId xmlns:p14="http://schemas.microsoft.com/office/powerpoint/2010/main" val="683650118"/>
+        <p14:creationId xmlns:p14="http://schemas.microsoft.com/office/powerpoint/2010/main" val="1926792215"/>
       </p:ext>
     </p:extLst>
   </p:cSld>
@@ -10324,7 +10330,21 @@
             </a:r>
             <a:r>
               <a:rPr lang="en-GB" b="1" dirty="0"/>
-              <a:t>cmd : pip install mysql-connector-python</a:t>
+              <a:t>cmd : pip install </a:t>
+            </a:r>
+            <a:r>
+              <a:rPr lang="en-GB" b="1" dirty="0" err="1"/>
+              <a:t>mysql</a:t>
+            </a:r>
+            <a:r>
+              <a:rPr lang="en-GB" b="1" dirty="0"/>
+              <a:t>-connector-python</a:t>
+            </a:r>
+          </a:p>
+          <a:p>
+            <a:r>
+              <a:rPr lang="en-GB" b="1" dirty="0"/>
+              <a:t> </a:t>
             </a:r>
             <a:endParaRPr lang="en-IN" dirty="0"/>
           </a:p>

--- a/python class/Python Class.pptx
+++ b/python class/Python Class.pptx
@@ -234,7 +234,7 @@
           <a:p>
             <a:fld id="{C7300FFE-222E-424B-A24A-B86ADB1660A8}" type="datetimeFigureOut">
               <a:rPr lang="en-IN" smtClean="0"/>
-              <a:t>23-07-2026</a:t>
+              <a:t>24-07-2026</a:t>
             </a:fld>
             <a:endParaRPr lang="en-IN" dirty="0"/>
           </a:p>
@@ -662,7 +662,7 @@
           <a:p>
             <a:fld id="{AD501974-91E0-4A6C-BF4F-18DDA0DBE697}" type="datetime1">
               <a:rPr lang="en-IN" smtClean="0"/>
-              <a:t>23-07-2026</a:t>
+              <a:t>24-07-2026</a:t>
             </a:fld>
             <a:endParaRPr lang="en-IN" dirty="0"/>
           </a:p>
@@ -787,7 +787,7 @@
           <a:p>
             <a:fld id="{340C70EA-229A-4802-A7BC-A1799783BDD3}" type="datetime1">
               <a:rPr lang="en-IN" smtClean="0"/>
-              <a:t>23-07-2026</a:t>
+              <a:t>24-07-2026</a:t>
             </a:fld>
             <a:endParaRPr lang="en-IN" dirty="0"/>
           </a:p>
@@ -1074,7 +1074,7 @@
           <a:p>
             <a:fld id="{BD944048-9929-4BB2-BADE-62F9A707015B}" type="datetime1">
               <a:rPr lang="en-IN" smtClean="0"/>
-              <a:t>23-07-2026</a:t>
+              <a:t>24-07-2026</a:t>
             </a:fld>
             <a:endParaRPr lang="en-IN" dirty="0"/>
           </a:p>
@@ -1380,7 +1380,7 @@
           <a:p>
             <a:fld id="{09A388D1-7504-45FD-847C-EF9E921E08DF}" type="datetime1">
               <a:rPr lang="en-IN" smtClean="0"/>
-              <a:t>23-07-2026</a:t>
+              <a:t>24-07-2026</a:t>
             </a:fld>
             <a:endParaRPr lang="en-IN" dirty="0"/>
           </a:p>
@@ -1609,7 +1609,7 @@
           <a:p>
             <a:fld id="{6015BE80-B03C-48AB-B3E2-19C5F4D60D3C}" type="datetime1">
               <a:rPr lang="en-IN" smtClean="0"/>
-              <a:t>23-07-2026</a:t>
+              <a:t>24-07-2026</a:t>
             </a:fld>
             <a:endParaRPr lang="en-IN" dirty="0"/>
           </a:p>
@@ -1880,7 +1880,7 @@
           <a:p>
             <a:fld id="{450E9977-AF0E-4B1A-B2BF-2416B4828E95}" type="datetime1">
               <a:rPr lang="en-IN" smtClean="0"/>
-              <a:t>23-07-2026</a:t>
+              <a:t>24-07-2026</a:t>
             </a:fld>
             <a:endParaRPr lang="en-IN" dirty="0"/>
           </a:p>
@@ -2107,7 +2107,7 @@
           <a:p>
             <a:fld id="{972A712B-80AB-4FDB-AFE5-C959280677B9}" type="datetime1">
               <a:rPr lang="en-IN" smtClean="0"/>
-              <a:t>23-07-2026</a:t>
+              <a:t>24-07-2026</a:t>
             </a:fld>
             <a:endParaRPr lang="en-IN" dirty="0"/>
           </a:p>
@@ -2398,7 +2398,7 @@
           <a:p>
             <a:fld id="{78FC1D50-5769-4793-A6D0-4C61D943385E}" type="datetime1">
               <a:rPr lang="en-IN" smtClean="0"/>
-              <a:t>23-07-2026</a:t>
+              <a:t>24-07-2026</a:t>
             </a:fld>
             <a:endParaRPr lang="en-IN" dirty="0"/>
           </a:p>
@@ -2663,7 +2663,7 @@
           <a:p>
             <a:fld id="{1093E9E7-66F0-49C7-87AF-7A91F126A0CA}" type="datetime1">
               <a:rPr lang="en-IN" smtClean="0"/>
-              <a:t>23-07-2026</a:t>
+              <a:t>24-07-2026</a:t>
             </a:fld>
             <a:endParaRPr lang="en-IN" dirty="0"/>
           </a:p>
@@ -3109,7 +3109,7 @@
           <a:p>
             <a:fld id="{4802E001-56FE-4C01-9545-A69D840AB1F5}" type="datetime1">
               <a:rPr lang="en-IN" smtClean="0"/>
-              <a:t>23-07-2026</a:t>
+              <a:t>24-07-2026</a:t>
             </a:fld>
             <a:endParaRPr lang="en-IN" dirty="0"/>
           </a:p>
@@ -3273,7 +3273,7 @@
           <a:p>
             <a:fld id="{FC628212-ABC2-4EAF-BB21-53D61AEEEA49}" type="datetime1">
               <a:rPr lang="en-IN" smtClean="0"/>
-              <a:t>23-07-2026</a:t>
+              <a:t>24-07-2026</a:t>
             </a:fld>
             <a:endParaRPr lang="en-IN" dirty="0"/>
           </a:p>
@@ -3437,7 +3437,7 @@
           <a:p>
             <a:fld id="{83F0C27E-97BD-4ACD-AFDF-13985BE88ECF}" type="datetime1">
               <a:rPr lang="en-IN" smtClean="0"/>
-              <a:t>23-07-2026</a:t>
+              <a:t>24-07-2026</a:t>
             </a:fld>
             <a:endParaRPr lang="en-IN" dirty="0"/>
           </a:p>
@@ -3635,7 +3635,7 @@
           <a:p>
             <a:fld id="{10A04BDC-9A72-4B08-81B7-A336A5B4E254}" type="datetime1">
               <a:rPr lang="en-IN" smtClean="0"/>
-              <a:t>23-07-2026</a:t>
+              <a:t>24-07-2026</a:t>
             </a:fld>
             <a:endParaRPr lang="en-IN" dirty="0"/>
           </a:p>
@@ -3833,7 +3833,7 @@
           <a:p>
             <a:fld id="{2E5D08A3-D96A-4309-8AF3-C610782BB2D3}" type="datetime1">
               <a:rPr lang="en-IN" smtClean="0"/>
-              <a:t>23-07-2026</a:t>
+              <a:t>24-07-2026</a:t>
             </a:fld>
             <a:endParaRPr lang="en-IN" dirty="0"/>
           </a:p>

--- a/python class/Python Class.pptx
+++ b/python class/Python Class.pptx
@@ -234,7 +234,7 @@
           <a:p>
             <a:fld id="{C7300FFE-222E-424B-A24A-B86ADB1660A8}" type="datetimeFigureOut">
               <a:rPr lang="en-IN" smtClean="0"/>
-              <a:t>24-07-2026</a:t>
+              <a:t>07-08-2026</a:t>
             </a:fld>
             <a:endParaRPr lang="en-IN" dirty="0"/>
           </a:p>
@@ -662,7 +662,7 @@
           <a:p>
             <a:fld id="{AD501974-91E0-4A6C-BF4F-18DDA0DBE697}" type="datetime1">
               <a:rPr lang="en-IN" smtClean="0"/>
-              <a:t>24-07-2026</a:t>
+              <a:t>07-08-2026</a:t>
             </a:fld>
             <a:endParaRPr lang="en-IN" dirty="0"/>
           </a:p>
@@ -787,7 +787,7 @@
           <a:p>
             <a:fld id="{340C70EA-229A-4802-A7BC-A1799783BDD3}" type="datetime1">
               <a:rPr lang="en-IN" smtClean="0"/>
-              <a:t>24-07-2026</a:t>
+              <a:t>07-08-2026</a:t>
             </a:fld>
             <a:endParaRPr lang="en-IN" dirty="0"/>
           </a:p>
@@ -1074,7 +1074,7 @@
           <a:p>
             <a:fld id="{BD944048-9929-4BB2-BADE-62F9A707015B}" type="datetime1">
               <a:rPr lang="en-IN" smtClean="0"/>
-              <a:t>24-07-2026</a:t>
+              <a:t>07-08-2026</a:t>
             </a:fld>
             <a:endParaRPr lang="en-IN" dirty="0"/>
           </a:p>
@@ -1380,7 +1380,7 @@
           <a:p>
             <a:fld id="{09A388D1-7504-45FD-847C-EF9E921E08DF}" type="datetime1">
               <a:rPr lang="en-IN" smtClean="0"/>
-              <a:t>24-07-2026</a:t>
+              <a:t>07-08-2026</a:t>
             </a:fld>
             <a:endParaRPr lang="en-IN" dirty="0"/>
           </a:p>
@@ -1609,7 +1609,7 @@
           <a:p>
             <a:fld id="{6015BE80-B03C-48AB-B3E2-19C5F4D60D3C}" type="datetime1">
               <a:rPr lang="en-IN" smtClean="0"/>
-              <a:t>24-07-2026</a:t>
+              <a:t>07-08-2026</a:t>
             </a:fld>
             <a:endParaRPr lang="en-IN" dirty="0"/>
           </a:p>
@@ -1880,7 +1880,7 @@
           <a:p>
             <a:fld id="{450E9977-AF0E-4B1A-B2BF-2416B4828E95}" type="datetime1">
               <a:rPr lang="en-IN" smtClean="0"/>
-              <a:t>24-07-2026</a:t>
+              <a:t>07-08-2026</a:t>
             </a:fld>
             <a:endParaRPr lang="en-IN" dirty="0"/>
           </a:p>
@@ -2107,7 +2107,7 @@
           <a:p>
             <a:fld id="{972A712B-80AB-4FDB-AFE5-C959280677B9}" type="datetime1">
               <a:rPr lang="en-IN" smtClean="0"/>
-              <a:t>24-07-2026</a:t>
+              <a:t>07-08-2026</a:t>
             </a:fld>
             <a:endParaRPr lang="en-IN" dirty="0"/>
           </a:p>
@@ -2398,7 +2398,7 @@
           <a:p>
             <a:fld id="{78FC1D50-5769-4793-A6D0-4C61D943385E}" type="datetime1">
               <a:rPr lang="en-IN" smtClean="0"/>
-              <a:t>24-07-2026</a:t>
+              <a:t>07-08-2026</a:t>
             </a:fld>
             <a:endParaRPr lang="en-IN" dirty="0"/>
           </a:p>
@@ -2663,7 +2663,7 @@
           <a:p>
             <a:fld id="{1093E9E7-66F0-49C7-87AF-7A91F126A0CA}" type="datetime1">
               <a:rPr lang="en-IN" smtClean="0"/>
-              <a:t>24-07-2026</a:t>
+              <a:t>07-08-2026</a:t>
             </a:fld>
             <a:endParaRPr lang="en-IN" dirty="0"/>
           </a:p>
@@ -3109,7 +3109,7 @@
           <a:p>
             <a:fld id="{4802E001-56FE-4C01-9545-A69D840AB1F5}" type="datetime1">
               <a:rPr lang="en-IN" smtClean="0"/>
-              <a:t>24-07-2026</a:t>
+              <a:t>07-08-2026</a:t>
             </a:fld>
             <a:endParaRPr lang="en-IN" dirty="0"/>
           </a:p>
@@ -3273,7 +3273,7 @@
           <a:p>
             <a:fld id="{FC628212-ABC2-4EAF-BB21-53D61AEEEA49}" type="datetime1">
               <a:rPr lang="en-IN" smtClean="0"/>
-              <a:t>24-07-2026</a:t>
+              <a:t>07-08-2026</a:t>
             </a:fld>
             <a:endParaRPr lang="en-IN" dirty="0"/>
           </a:p>
@@ -3437,7 +3437,7 @@
           <a:p>
             <a:fld id="{83F0C27E-97BD-4ACD-AFDF-13985BE88ECF}" type="datetime1">
               <a:rPr lang="en-IN" smtClean="0"/>
-              <a:t>24-07-2026</a:t>
+              <a:t>07-08-2026</a:t>
             </a:fld>
             <a:endParaRPr lang="en-IN" dirty="0"/>
           </a:p>
@@ -3635,7 +3635,7 @@
           <a:p>
             <a:fld id="{10A04BDC-9A72-4B08-81B7-A336A5B4E254}" type="datetime1">
               <a:rPr lang="en-IN" smtClean="0"/>
-              <a:t>24-07-2026</a:t>
+              <a:t>07-08-2026</a:t>
             </a:fld>
             <a:endParaRPr lang="en-IN" dirty="0"/>
           </a:p>
@@ -3833,7 +3833,7 @@
           <a:p>
             <a:fld id="{2E5D08A3-D96A-4309-8AF3-C610782BB2D3}" type="datetime1">
               <a:rPr lang="en-IN" smtClean="0"/>
-              <a:t>24-07-2026</a:t>
+              <a:t>07-08-2026</a:t>
             </a:fld>
             <a:endParaRPr lang="en-IN" dirty="0"/>
           </a:p>
@@ -8847,13 +8847,97 @@
             </a:r>
             <a:r>
               <a:rPr lang="en-IN" dirty="0"/>
-              <a:t>read , write , excel formulas , excel automation</a:t>
+              <a:t>read , write , excel automation</a:t>
             </a:r>
           </a:p>
           <a:p>
             <a:r>
               <a:rPr lang="en-IN" dirty="0"/>
               <a:t> </a:t>
+            </a:r>
+            <a:r>
+              <a:rPr lang="en-IN" b="1" dirty="0"/>
+              <a:t>Sample Flow : </a:t>
+            </a:r>
+          </a:p>
+          <a:p>
+            <a:pPr lvl="1"/>
+            <a:r>
+              <a:rPr lang="en-IN" b="1" dirty="0"/>
+              <a:t> </a:t>
+            </a:r>
+            <a:r>
+              <a:rPr lang="en-IN" dirty="0"/>
+              <a:t>Create a </a:t>
+            </a:r>
+            <a:r>
+              <a:rPr lang="en-IN" dirty="0" err="1"/>
+              <a:t>WorkBook</a:t>
+            </a:r>
+            <a:r>
+              <a:rPr lang="en-IN" dirty="0"/>
+              <a:t> , Add </a:t>
+            </a:r>
+            <a:r>
+              <a:rPr lang="en-IN" dirty="0" err="1"/>
+              <a:t>WorkSheets</a:t>
+            </a:r>
+            <a:r>
+              <a:rPr lang="en-IN" dirty="0"/>
+              <a:t> , Rename Sheets , Create Tables.</a:t>
+            </a:r>
+          </a:p>
+          <a:p>
+            <a:pPr lvl="1"/>
+            <a:r>
+              <a:rPr lang="en-IN" dirty="0"/>
+              <a:t> When the </a:t>
+            </a:r>
+            <a:r>
+              <a:rPr lang="en-IN" dirty="0" err="1"/>
+              <a:t>WorkBook</a:t>
+            </a:r>
+            <a:r>
+              <a:rPr lang="en-IN" dirty="0"/>
+              <a:t> exists , load </a:t>
+            </a:r>
+            <a:r>
+              <a:rPr lang="en-IN" dirty="0" err="1"/>
+              <a:t>WorkBook</a:t>
+            </a:r>
+            <a:r>
+              <a:rPr lang="en-IN" dirty="0"/>
+              <a:t>.</a:t>
+            </a:r>
+          </a:p>
+          <a:p>
+            <a:pPr lvl="1"/>
+            <a:r>
+              <a:rPr lang="en-IN" dirty="0"/>
+              <a:t> Within </a:t>
+            </a:r>
+            <a:r>
+              <a:rPr lang="en-IN" dirty="0" err="1"/>
+              <a:t>WorkSheets</a:t>
+            </a:r>
+            <a:r>
+              <a:rPr lang="en-IN" dirty="0"/>
+              <a:t> add the data and read data.</a:t>
+            </a:r>
+          </a:p>
+          <a:p>
+            <a:pPr lvl="1"/>
+            <a:r>
+              <a:rPr lang="en-IN" dirty="0"/>
+              <a:t> Save the </a:t>
+            </a:r>
+            <a:r>
+              <a:rPr lang="en-IN" dirty="0" err="1"/>
+              <a:t>WorkBook</a:t>
+            </a:r>
+            <a:r>
+              <a:rPr lang="en-IN" dirty="0"/>
+              <a:t>.</a:t>
             </a:r>
           </a:p>
         </p:txBody>
@@ -10344,9 +10428,46 @@
           <a:p>
             <a:r>
               <a:rPr lang="en-GB" b="1" dirty="0"/>
+              <a:t> Connections : </a:t>
+            </a:r>
+          </a:p>
+          <a:p>
+            <a:pPr lvl="1"/>
+            <a:r>
+              <a:rPr lang="en-GB" b="1" dirty="0"/>
               <a:t> </a:t>
             </a:r>
-            <a:endParaRPr lang="en-IN" dirty="0"/>
+            <a:r>
+              <a:rPr lang="en-GB" dirty="0"/>
+              <a:t>Normal Connection</a:t>
+            </a:r>
+          </a:p>
+          <a:p>
+            <a:pPr lvl="1"/>
+            <a:r>
+              <a:rPr lang="en-GB" dirty="0"/>
+              <a:t> Connection Pooling</a:t>
+            </a:r>
+          </a:p>
+          <a:p>
+            <a:r>
+              <a:rPr lang="en-IN" dirty="0"/>
+              <a:t> </a:t>
+            </a:r>
+            <a:r>
+              <a:rPr lang="en-GB" b="1" dirty="0"/>
+              <a:t>CURD</a:t>
+            </a:r>
+            <a:r>
+              <a:rPr lang="en-GB" dirty="0"/>
+              <a:t> Operations.</a:t>
+            </a:r>
+          </a:p>
+          <a:p>
+            <a:r>
+              <a:rPr lang="en-IN" dirty="0"/>
+              <a:t> Safe Connection handling.</a:t>
+            </a:r>
           </a:p>
         </p:txBody>
       </p:sp>
@@ -10494,12 +10615,41 @@
             </a:r>
             <a:r>
               <a:rPr lang="en-IN" b="1" dirty="0"/>
-              <a:t>Package : </a:t>
+              <a:t>Packages : </a:t>
+            </a:r>
+          </a:p>
+          <a:p>
+            <a:pPr lvl="1"/>
+            <a:r>
+              <a:rPr lang="en-IN" b="1" dirty="0"/>
+              <a:t> </a:t>
             </a:r>
             <a:r>
               <a:rPr lang="en-IN" dirty="0" err="1"/>
               <a:t>pypdf</a:t>
             </a:r>
+            <a:endParaRPr lang="en-IN" dirty="0"/>
+          </a:p>
+          <a:p>
+            <a:pPr lvl="1"/>
+            <a:r>
+              <a:rPr lang="en-IN" dirty="0"/>
+              <a:t> fpdf2</a:t>
+            </a:r>
+          </a:p>
+          <a:p>
+            <a:pPr lvl="1"/>
+            <a:r>
+              <a:rPr lang="en-IN" dirty="0"/>
+              <a:t> </a:t>
+            </a:r>
+            <a:r>
+              <a:rPr lang="en-IN" dirty="0" err="1"/>
+              <a:t>borb</a:t>
+            </a:r>
+            <a:endParaRPr lang="en-IN" dirty="0"/>
+          </a:p>
+          <a:p>
             <a:endParaRPr lang="en-IN" dirty="0"/>
           </a:p>
         </p:txBody>
@@ -11565,6 +11715,12 @@
             <a:r>
               <a:rPr lang="en-IN" dirty="0"/>
               <a:t> Equal Score Substrings</a:t>
+            </a:r>
+          </a:p>
+          <a:p>
+            <a:r>
+              <a:rPr lang="en-IN" dirty="0"/>
+              <a:t> Zigzag Conversion</a:t>
             </a:r>
           </a:p>
         </p:txBody>

--- a/python class/Python Class.pptx
+++ b/python class/Python Class.pptx
@@ -42,10 +42,10 @@
     <p:sldId id="287" r:id="rId33"/>
     <p:sldId id="280" r:id="rId34"/>
     <p:sldId id="290" r:id="rId35"/>
-    <p:sldId id="279" r:id="rId36"/>
-    <p:sldId id="284" r:id="rId37"/>
-    <p:sldId id="285" r:id="rId38"/>
-    <p:sldId id="293" r:id="rId39"/>
+    <p:sldId id="293" r:id="rId36"/>
+    <p:sldId id="279" r:id="rId37"/>
+    <p:sldId id="284" r:id="rId38"/>
+    <p:sldId id="285" r:id="rId39"/>
   </p:sldIdLst>
   <p:sldSz cx="12192000" cy="6858000"/>
   <p:notesSz cx="7104063" cy="10234613"/>
@@ -234,7 +234,7 @@
           <a:p>
             <a:fld id="{C7300FFE-222E-424B-A24A-B86ADB1660A8}" type="datetimeFigureOut">
               <a:rPr lang="en-IN" smtClean="0"/>
-              <a:t>07-08-2026</a:t>
+              <a:t>10-08-2026</a:t>
             </a:fld>
             <a:endParaRPr lang="en-IN" dirty="0"/>
           </a:p>
@@ -662,7 +662,7 @@
           <a:p>
             <a:fld id="{AD501974-91E0-4A6C-BF4F-18DDA0DBE697}" type="datetime1">
               <a:rPr lang="en-IN" smtClean="0"/>
-              <a:t>07-08-2026</a:t>
+              <a:t>10-08-2026</a:t>
             </a:fld>
             <a:endParaRPr lang="en-IN" dirty="0"/>
           </a:p>
@@ -787,7 +787,7 @@
           <a:p>
             <a:fld id="{340C70EA-229A-4802-A7BC-A1799783BDD3}" type="datetime1">
               <a:rPr lang="en-IN" smtClean="0"/>
-              <a:t>07-08-2026</a:t>
+              <a:t>10-08-2026</a:t>
             </a:fld>
             <a:endParaRPr lang="en-IN" dirty="0"/>
           </a:p>
@@ -1074,7 +1074,7 @@
           <a:p>
             <a:fld id="{BD944048-9929-4BB2-BADE-62F9A707015B}" type="datetime1">
               <a:rPr lang="en-IN" smtClean="0"/>
-              <a:t>07-08-2026</a:t>
+              <a:t>10-08-2026</a:t>
             </a:fld>
             <a:endParaRPr lang="en-IN" dirty="0"/>
           </a:p>
@@ -1380,7 +1380,7 @@
           <a:p>
             <a:fld id="{09A388D1-7504-45FD-847C-EF9E921E08DF}" type="datetime1">
               <a:rPr lang="en-IN" smtClean="0"/>
-              <a:t>07-08-2026</a:t>
+              <a:t>10-08-2026</a:t>
             </a:fld>
             <a:endParaRPr lang="en-IN" dirty="0"/>
           </a:p>
@@ -1609,7 +1609,7 @@
           <a:p>
             <a:fld id="{6015BE80-B03C-48AB-B3E2-19C5F4D60D3C}" type="datetime1">
               <a:rPr lang="en-IN" smtClean="0"/>
-              <a:t>07-08-2026</a:t>
+              <a:t>10-08-2026</a:t>
             </a:fld>
             <a:endParaRPr lang="en-IN" dirty="0"/>
           </a:p>
@@ -1880,7 +1880,7 @@
           <a:p>
             <a:fld id="{450E9977-AF0E-4B1A-B2BF-2416B4828E95}" type="datetime1">
               <a:rPr lang="en-IN" smtClean="0"/>
-              <a:t>07-08-2026</a:t>
+              <a:t>10-08-2026</a:t>
             </a:fld>
             <a:endParaRPr lang="en-IN" dirty="0"/>
           </a:p>
@@ -2107,7 +2107,7 @@
           <a:p>
             <a:fld id="{972A712B-80AB-4FDB-AFE5-C959280677B9}" type="datetime1">
               <a:rPr lang="en-IN" smtClean="0"/>
-              <a:t>07-08-2026</a:t>
+              <a:t>10-08-2026</a:t>
             </a:fld>
             <a:endParaRPr lang="en-IN" dirty="0"/>
           </a:p>
@@ -2398,7 +2398,7 @@
           <a:p>
             <a:fld id="{78FC1D50-5769-4793-A6D0-4C61D943385E}" type="datetime1">
               <a:rPr lang="en-IN" smtClean="0"/>
-              <a:t>07-08-2026</a:t>
+              <a:t>10-08-2026</a:t>
             </a:fld>
             <a:endParaRPr lang="en-IN" dirty="0"/>
           </a:p>
@@ -2663,7 +2663,7 @@
           <a:p>
             <a:fld id="{1093E9E7-66F0-49C7-87AF-7A91F126A0CA}" type="datetime1">
               <a:rPr lang="en-IN" smtClean="0"/>
-              <a:t>07-08-2026</a:t>
+              <a:t>10-08-2026</a:t>
             </a:fld>
             <a:endParaRPr lang="en-IN" dirty="0"/>
           </a:p>
@@ -3109,7 +3109,7 @@
           <a:p>
             <a:fld id="{4802E001-56FE-4C01-9545-A69D840AB1F5}" type="datetime1">
               <a:rPr lang="en-IN" smtClean="0"/>
-              <a:t>07-08-2026</a:t>
+              <a:t>10-08-2026</a:t>
             </a:fld>
             <a:endParaRPr lang="en-IN" dirty="0"/>
           </a:p>
@@ -3273,7 +3273,7 @@
           <a:p>
             <a:fld id="{FC628212-ABC2-4EAF-BB21-53D61AEEEA49}" type="datetime1">
               <a:rPr lang="en-IN" smtClean="0"/>
-              <a:t>07-08-2026</a:t>
+              <a:t>10-08-2026</a:t>
             </a:fld>
             <a:endParaRPr lang="en-IN" dirty="0"/>
           </a:p>
@@ -3437,7 +3437,7 @@
           <a:p>
             <a:fld id="{83F0C27E-97BD-4ACD-AFDF-13985BE88ECF}" type="datetime1">
               <a:rPr lang="en-IN" smtClean="0"/>
-              <a:t>07-08-2026</a:t>
+              <a:t>10-08-2026</a:t>
             </a:fld>
             <a:endParaRPr lang="en-IN" dirty="0"/>
           </a:p>
@@ -3635,7 +3635,7 @@
           <a:p>
             <a:fld id="{10A04BDC-9A72-4B08-81B7-A336A5B4E254}" type="datetime1">
               <a:rPr lang="en-IN" smtClean="0"/>
-              <a:t>07-08-2026</a:t>
+              <a:t>10-08-2026</a:t>
             </a:fld>
             <a:endParaRPr lang="en-IN" dirty="0"/>
           </a:p>
@@ -3833,7 +3833,7 @@
           <a:p>
             <a:fld id="{2E5D08A3-D96A-4309-8AF3-C610782BB2D3}" type="datetime1">
               <a:rPr lang="en-IN" smtClean="0"/>
-              <a:t>07-08-2026</a:t>
+              <a:t>10-08-2026</a:t>
             </a:fld>
             <a:endParaRPr lang="en-IN" dirty="0"/>
           </a:p>
@@ -7576,7 +7576,11 @@
           <a:p>
             <a:r>
               <a:rPr lang="en-GB" dirty="0"/>
-              <a:t> 3 Types of Library Packages &amp; Modules : </a:t>
+              <a:t> </a:t>
+            </a:r>
+            <a:r>
+              <a:rPr lang="en-GB" b="1" dirty="0"/>
+              <a:t>3 Types of Library Packages &amp; Modules : </a:t>
             </a:r>
           </a:p>
           <a:p>
@@ -7611,7 +7615,7 @@
             </a:r>
             <a:r>
               <a:rPr lang="en-GB" dirty="0"/>
-              <a:t>pre-build python modules (os , datetime , math , random)</a:t>
+              <a:t>pre-build python modules (os , datetime , math , random).</a:t>
             </a:r>
             <a:endParaRPr lang="en-GB" b="1" dirty="0"/>
           </a:p>
@@ -7626,7 +7630,7 @@
             </a:r>
             <a:r>
               <a:rPr lang="en-IN" dirty="0"/>
-              <a:t>custom modules created by developers </a:t>
+              <a:t>custom modules created by developers.</a:t>
             </a:r>
             <a:endParaRPr lang="en-GB" dirty="0"/>
           </a:p>
@@ -7846,35 +7850,51 @@
             <a:pPr lvl="1"/>
             <a:r>
               <a:rPr lang="en-IN" dirty="0"/>
-              <a:t> numpy 0.0.1 already exists in global environment</a:t>
+              <a:t> numpy 0.0.1 already exists in global environment.</a:t>
             </a:r>
           </a:p>
           <a:p>
             <a:pPr lvl="1"/>
             <a:r>
               <a:rPr lang="en-IN" dirty="0"/>
-              <a:t> project 1 : requires numpy 0.0.1</a:t>
+              <a:t> project 1 : requires </a:t>
+            </a:r>
+            <a:r>
+              <a:rPr lang="en-IN" dirty="0" err="1"/>
+              <a:t>numpy</a:t>
+            </a:r>
+            <a:r>
+              <a:rPr lang="en-IN" dirty="0"/>
+              <a:t> 0.0.1.</a:t>
             </a:r>
           </a:p>
           <a:p>
             <a:pPr lvl="1"/>
             <a:r>
               <a:rPr lang="en-IN" dirty="0"/>
-              <a:t> project 2 : requires numpy 0.1.1</a:t>
+              <a:t> project 2 : requires </a:t>
+            </a:r>
+            <a:r>
+              <a:rPr lang="en-IN" dirty="0" err="1"/>
+              <a:t>numpy</a:t>
+            </a:r>
+            <a:r>
+              <a:rPr lang="en-IN" dirty="0"/>
+              <a:t> 0.1.1.</a:t>
             </a:r>
           </a:p>
           <a:p>
             <a:pPr lvl="1"/>
             <a:r>
               <a:rPr lang="en-IN" dirty="0"/>
-              <a:t> changes version of this package will affect any one of the projects</a:t>
+              <a:t> changes version of this package will affect any one of the projects.</a:t>
             </a:r>
           </a:p>
           <a:p>
             <a:pPr lvl="1"/>
             <a:r>
               <a:rPr lang="en-IN" dirty="0"/>
-              <a:t> to overcome those create project 2 in virtual environment</a:t>
+              <a:t> to overcome those create project 2 in virtual environment.</a:t>
             </a:r>
           </a:p>
           <a:p>
@@ -8108,7 +8128,7 @@
             </a:r>
             <a:r>
               <a:rPr lang="en-IN" dirty="0"/>
-              <a:t>Implements Queue</a:t>
+              <a:t>Implements Queue.</a:t>
             </a:r>
           </a:p>
         </p:txBody>
@@ -8312,7 +8332,7 @@
             </a:r>
             <a:r>
               <a:rPr lang="en-IN" dirty="0"/>
-              <a:t> commands</a:t>
+              <a:t> commands.</a:t>
             </a:r>
             <a:endParaRPr lang="en-IN" b="1" dirty="0"/>
           </a:p>
@@ -9102,17 +9122,44 @@
               <a:rPr lang="en-GB" b="1" dirty="0"/>
               <a:t>Uses : </a:t>
             </a:r>
+          </a:p>
+          <a:p>
+            <a:pPr lvl="1"/>
+            <a:r>
+              <a:rPr lang="en-GB" b="1" dirty="0"/>
+              <a:t> </a:t>
+            </a:r>
             <a:r>
               <a:rPr lang="en-GB" dirty="0"/>
-              <a:t>datetime parser , datetime operations </a:t>
-            </a:r>
-          </a:p>
-          <a:p>
+              <a:t>get current date &amp; time.</a:t>
+            </a:r>
+            <a:endParaRPr lang="en-GB" b="1" dirty="0"/>
+          </a:p>
+          <a:p>
+            <a:pPr lvl="1"/>
             <a:r>
               <a:rPr lang="en-GB" dirty="0"/>
-              <a:t> </a:t>
-            </a:r>
-            <a:endParaRPr lang="en-IN" dirty="0"/>
+              <a:t> datetime parser in different ways.</a:t>
+            </a:r>
+          </a:p>
+          <a:p>
+            <a:pPr lvl="1"/>
+            <a:r>
+              <a:rPr lang="en-GB" dirty="0"/>
+              <a:t> compare 2 dates.</a:t>
+            </a:r>
+          </a:p>
+          <a:p>
+            <a:pPr lvl="1"/>
+            <a:r>
+              <a:rPr lang="en-GB" dirty="0"/>
+              <a:t> date &amp; </a:t>
+            </a:r>
+            <a:r>
+              <a:rPr lang="en-GB"/>
+              <a:t>time calculations.</a:t>
+            </a:r>
+            <a:endParaRPr lang="en-GB" dirty="0"/>
           </a:p>
         </p:txBody>
       </p:sp>
@@ -10243,28 +10290,28 @@
             <a:pPr lvl="1"/>
             <a:r>
               <a:rPr lang="en-GB" dirty="0"/>
-              <a:t> create the app password</a:t>
+              <a:t> create the app password.</a:t>
             </a:r>
           </a:p>
           <a:p>
             <a:pPr lvl="1"/>
             <a:r>
               <a:rPr lang="en-GB" dirty="0"/>
-              <a:t> two-step verification</a:t>
+              <a:t> two-step verification.</a:t>
             </a:r>
           </a:p>
           <a:p>
             <a:pPr lvl="1"/>
             <a:r>
               <a:rPr lang="en-GB" dirty="0"/>
-              <a:t> securely store and read the password</a:t>
+              <a:t> securely store and read the password.</a:t>
             </a:r>
           </a:p>
           <a:p>
             <a:pPr lvl="1"/>
             <a:r>
               <a:rPr lang="en-GB" dirty="0"/>
-              <a:t> make smtp encrypted connection</a:t>
+              <a:t> make smtp encrypted connection.</a:t>
             </a:r>
             <a:endParaRPr lang="en-IN" dirty="0"/>
           </a:p>
@@ -10439,14 +10486,14 @@
             </a:r>
             <a:r>
               <a:rPr lang="en-GB" dirty="0"/>
-              <a:t>Normal Connection</a:t>
+              <a:t>Normal Connection.</a:t>
             </a:r>
           </a:p>
           <a:p>
             <a:pPr lvl="1"/>
             <a:r>
               <a:rPr lang="en-GB" dirty="0"/>
-              <a:t> Connection Pooling</a:t>
+              <a:t> Connection Pooling.</a:t>
             </a:r>
           </a:p>
           <a:p>
@@ -10628,13 +10675,16 @@
               <a:rPr lang="en-IN" dirty="0" err="1"/>
               <a:t>pypdf</a:t>
             </a:r>
-            <a:endParaRPr lang="en-IN" dirty="0"/>
+            <a:r>
+              <a:rPr lang="en-IN" dirty="0"/>
+              <a:t> (Reading PDF’s).</a:t>
+            </a:r>
           </a:p>
           <a:p>
             <a:pPr lvl="1"/>
             <a:r>
               <a:rPr lang="en-IN" dirty="0"/>
-              <a:t> fpdf2</a:t>
+              <a:t> fpdf2 (Creating PDF’s).</a:t>
             </a:r>
           </a:p>
           <a:p>
@@ -10647,7 +10697,46 @@
               <a:rPr lang="en-IN" dirty="0" err="1"/>
               <a:t>borb</a:t>
             </a:r>
-            <a:endParaRPr lang="en-IN" dirty="0"/>
+            <a:r>
+              <a:rPr lang="en-IN" dirty="0"/>
+              <a:t> (Advanced module for Creating &amp; Reading PDF’s).</a:t>
+            </a:r>
+          </a:p>
+          <a:p>
+            <a:r>
+              <a:rPr lang="en-IN" dirty="0"/>
+              <a:t> </a:t>
+            </a:r>
+            <a:r>
+              <a:rPr lang="en-IN" b="1" dirty="0"/>
+              <a:t>Functions : </a:t>
+            </a:r>
+          </a:p>
+          <a:p>
+            <a:pPr lvl="1"/>
+            <a:r>
+              <a:rPr lang="en-IN" b="1" dirty="0"/>
+              <a:t> </a:t>
+            </a:r>
+            <a:r>
+              <a:rPr lang="en-IN" dirty="0"/>
+              <a:t>Read Data (text , images , links , etc.,) from PDF.</a:t>
+            </a:r>
+            <a:endParaRPr lang="en-IN" b="1" dirty="0"/>
+          </a:p>
+          <a:p>
+            <a:pPr lvl="1"/>
+            <a:r>
+              <a:rPr lang="en-IN" dirty="0"/>
+              <a:t> Creating PDF ,  Adding Pages , Font Styles , Table Creation , Image Import , etc.,.</a:t>
+            </a:r>
+          </a:p>
+          <a:p>
+            <a:pPr lvl="1"/>
+            <a:r>
+              <a:rPr lang="en-IN" dirty="0"/>
+              <a:t> PDF’s with Input Features.</a:t>
+            </a:r>
           </a:p>
           <a:p>
             <a:endParaRPr lang="en-IN" dirty="0"/>
@@ -10815,21 +10904,29 @@
             </a:r>
             <a:r>
               <a:rPr lang="en-IN" dirty="0"/>
-              <a:t>create a folder</a:t>
+              <a:t>create a folder.</a:t>
             </a:r>
           </a:p>
           <a:p>
             <a:pPr lvl="1"/>
             <a:r>
               <a:rPr lang="en-IN" dirty="0"/>
-              <a:t> inside that folder add src folder , gitignore , readme , license , venv , pyproject.toml</a:t>
+              <a:t> inside that folder add src folder , gitignore , readme , license , venv , </a:t>
+            </a:r>
+            <a:r>
+              <a:rPr lang="en-IN" dirty="0" err="1"/>
+              <a:t>pyproject.toml</a:t>
+            </a:r>
+            <a:r>
+              <a:rPr lang="en-IN" dirty="0"/>
+              <a:t>.</a:t>
             </a:r>
           </a:p>
           <a:p>
             <a:pPr lvl="1"/>
             <a:r>
               <a:rPr lang="en-IN" dirty="0"/>
-              <a:t> pypi account login</a:t>
+              <a:t> pypi account login.</a:t>
             </a:r>
           </a:p>
           <a:p>
@@ -10843,7 +10940,7 @@
             <a:pPr lvl="1"/>
             <a:r>
               <a:rPr lang="en-IN" dirty="0"/>
-              <a:t> on cmd push the folder</a:t>
+              <a:t> on cmd push the folder.</a:t>
             </a:r>
           </a:p>
         </p:txBody>
@@ -11187,7 +11284,7 @@
           <p:cNvPr id="2" name="Title 1">
             <a:extLst>
               <a:ext uri="{FF2B5EF4-FFF2-40B4-BE49-F238E27FC236}">
-                <a16:creationId xmlns:a16="http://schemas.microsoft.com/office/drawing/2014/main" id="{2CEA5BDF-9F05-F624-FCF1-39C85E1A3DE7}"/>
+                <a16:creationId xmlns:a16="http://schemas.microsoft.com/office/drawing/2014/main" id="{89A40D6B-3A8E-67A6-6A68-010B58DAC4FC}"/>
               </a:ext>
             </a:extLst>
           </p:cNvPr>
@@ -11204,37 +11301,70 @@
           <a:lstStyle/>
           <a:p>
             <a:r>
+              <a:rPr lang="en-IN" dirty="0"/>
+              <a:t>Problems</a:t>
+            </a:r>
+          </a:p>
+        </p:txBody>
+      </p:sp>
+      <p:sp>
+        <p:nvSpPr>
+          <p:cNvPr id="3" name="Content Placeholder 2">
+            <a:extLst>
+              <a:ext uri="{FF2B5EF4-FFF2-40B4-BE49-F238E27FC236}">
+                <a16:creationId xmlns:a16="http://schemas.microsoft.com/office/drawing/2014/main" id="{2EA13D08-34E8-FF65-D42D-B7D8201AF8B5}"/>
+              </a:ext>
+            </a:extLst>
+          </p:cNvPr>
+          <p:cNvSpPr>
+            <a:spLocks noGrp="1"/>
+          </p:cNvSpPr>
+          <p:nvPr>
+            <p:ph idx="1"/>
+          </p:nvPr>
+        </p:nvSpPr>
+        <p:spPr/>
+        <p:txBody>
+          <a:bodyPr/>
+          <a:lstStyle/>
+          <a:p>
+            <a:r>
+              <a:rPr lang="en-IN" dirty="0"/>
+              <a:t> Valid Parentheses.</a:t>
+            </a:r>
+          </a:p>
+          <a:p>
+            <a:r>
+              <a:rPr lang="en-IN" dirty="0"/>
+              <a:t> </a:t>
+            </a:r>
+            <a:r>
               <a:rPr lang="en-GB" dirty="0"/>
-              <a:t>Web Development</a:t>
-            </a:r>
-            <a:endParaRPr lang="en-IN" dirty="0"/>
-          </a:p>
-        </p:txBody>
-      </p:sp>
-      <p:sp>
-        <p:nvSpPr>
-          <p:cNvPr id="3" name="Content Placeholder 2">
-            <a:extLst>
-              <a:ext uri="{FF2B5EF4-FFF2-40B4-BE49-F238E27FC236}">
-                <a16:creationId xmlns:a16="http://schemas.microsoft.com/office/drawing/2014/main" id="{3F654F39-106A-8921-8452-34F301506A96}"/>
-              </a:ext>
-            </a:extLst>
-          </p:cNvPr>
-          <p:cNvSpPr>
-            <a:spLocks noGrp="1"/>
-          </p:cNvSpPr>
-          <p:nvPr>
-            <p:ph idx="1"/>
-          </p:nvPr>
-        </p:nvSpPr>
-        <p:spPr/>
-        <p:txBody>
-          <a:bodyPr/>
-          <a:lstStyle/>
-          <a:p>
-            <a:r>
-              <a:rPr lang="en-IN" dirty="0"/>
-              <a:t> </a:t>
+              <a:t>Reverse Vowels of a String.</a:t>
+            </a:r>
+          </a:p>
+          <a:p>
+            <a:r>
+              <a:rPr lang="en-IN" dirty="0"/>
+              <a:t> Keyboard Row.</a:t>
+            </a:r>
+          </a:p>
+          <a:p>
+            <a:r>
+              <a:rPr lang="en-IN" dirty="0"/>
+              <a:t> Form words in diagonal flow.</a:t>
+            </a:r>
+          </a:p>
+          <a:p>
+            <a:r>
+              <a:rPr lang="en-IN" dirty="0"/>
+              <a:t> Equal Score Substrings.</a:t>
+            </a:r>
+          </a:p>
+          <a:p>
+            <a:r>
+              <a:rPr lang="en-IN" dirty="0"/>
+              <a:t> Zigzag Conversion.</a:t>
             </a:r>
           </a:p>
         </p:txBody>
@@ -11244,7 +11374,7 @@
           <p:cNvPr id="4" name="Footer Placeholder 3">
             <a:extLst>
               <a:ext uri="{FF2B5EF4-FFF2-40B4-BE49-F238E27FC236}">
-                <a16:creationId xmlns:a16="http://schemas.microsoft.com/office/drawing/2014/main" id="{B6211910-FFBC-E796-7537-DC267EB214BD}"/>
+                <a16:creationId xmlns:a16="http://schemas.microsoft.com/office/drawing/2014/main" id="{4E75C686-45D5-51B5-CE9B-92CFD65EA4D6}"/>
               </a:ext>
             </a:extLst>
           </p:cNvPr>
@@ -11273,7 +11403,7 @@
           <p:cNvPr id="5" name="Slide Number Placeholder 4">
             <a:extLst>
               <a:ext uri="{FF2B5EF4-FFF2-40B4-BE49-F238E27FC236}">
-                <a16:creationId xmlns:a16="http://schemas.microsoft.com/office/drawing/2014/main" id="{634CE741-738C-5294-3111-4971DF04E698}"/>
+                <a16:creationId xmlns:a16="http://schemas.microsoft.com/office/drawing/2014/main" id="{4E967A4D-DE2A-311F-9BB5-EC319655B787}"/>
               </a:ext>
             </a:extLst>
           </p:cNvPr>
@@ -11300,7 +11430,7 @@
     </p:spTree>
     <p:extLst>
       <p:ext uri="{BB962C8B-B14F-4D97-AF65-F5344CB8AC3E}">
-        <p14:creationId xmlns:p14="http://schemas.microsoft.com/office/powerpoint/2010/main" val="35491570"/>
+        <p14:creationId xmlns:p14="http://schemas.microsoft.com/office/powerpoint/2010/main" val="2943109998"/>
       </p:ext>
     </p:extLst>
   </p:cSld>
@@ -11332,7 +11462,7 @@
           <p:cNvPr id="2" name="Title 1">
             <a:extLst>
               <a:ext uri="{FF2B5EF4-FFF2-40B4-BE49-F238E27FC236}">
-                <a16:creationId xmlns:a16="http://schemas.microsoft.com/office/drawing/2014/main" id="{0FAC2044-7BC7-BE81-4358-3C5D49931A58}"/>
+                <a16:creationId xmlns:a16="http://schemas.microsoft.com/office/drawing/2014/main" id="{2CEA5BDF-9F05-F624-FCF1-39C85E1A3DE7}"/>
               </a:ext>
             </a:extLst>
           </p:cNvPr>
@@ -11350,7 +11480,7 @@
           <a:p>
             <a:r>
               <a:rPr lang="en-GB" dirty="0"/>
-              <a:t>GUI Development</a:t>
+              <a:t>Web Development</a:t>
             </a:r>
             <a:endParaRPr lang="en-IN" dirty="0"/>
           </a:p>
@@ -11361,7 +11491,7 @@
           <p:cNvPr id="3" name="Content Placeholder 2">
             <a:extLst>
               <a:ext uri="{FF2B5EF4-FFF2-40B4-BE49-F238E27FC236}">
-                <a16:creationId xmlns:a16="http://schemas.microsoft.com/office/drawing/2014/main" id="{69841D62-3F38-AD65-B1BF-48BF3A14F8B7}"/>
+                <a16:creationId xmlns:a16="http://schemas.microsoft.com/office/drawing/2014/main" id="{3F654F39-106A-8921-8452-34F301506A96}"/>
               </a:ext>
             </a:extLst>
           </p:cNvPr>
@@ -11378,22 +11508,9 @@
           <a:lstStyle/>
           <a:p>
             <a:r>
-              <a:rPr lang="en-GB" dirty="0"/>
+              <a:rPr lang="en-IN" dirty="0"/>
               <a:t> </a:t>
             </a:r>
-            <a:r>
-              <a:rPr lang="en-GB" b="1" dirty="0"/>
-              <a:t>Package : </a:t>
-            </a:r>
-            <a:r>
-              <a:rPr lang="en-GB" dirty="0"/>
-              <a:t>customtkinter &amp; </a:t>
-            </a:r>
-            <a:r>
-              <a:rPr lang="en-GB" dirty="0" err="1"/>
-              <a:t>tkinter</a:t>
-            </a:r>
-            <a:endParaRPr lang="en-IN" dirty="0"/>
           </a:p>
         </p:txBody>
       </p:sp>
@@ -11402,7 +11519,7 @@
           <p:cNvPr id="4" name="Footer Placeholder 3">
             <a:extLst>
               <a:ext uri="{FF2B5EF4-FFF2-40B4-BE49-F238E27FC236}">
-                <a16:creationId xmlns:a16="http://schemas.microsoft.com/office/drawing/2014/main" id="{889662F6-22D2-D1A9-DF10-54B94C79C5D2}"/>
+                <a16:creationId xmlns:a16="http://schemas.microsoft.com/office/drawing/2014/main" id="{B6211910-FFBC-E796-7537-DC267EB214BD}"/>
               </a:ext>
             </a:extLst>
           </p:cNvPr>
@@ -11431,7 +11548,7 @@
           <p:cNvPr id="5" name="Slide Number Placeholder 4">
             <a:extLst>
               <a:ext uri="{FF2B5EF4-FFF2-40B4-BE49-F238E27FC236}">
-                <a16:creationId xmlns:a16="http://schemas.microsoft.com/office/drawing/2014/main" id="{4FCBC552-3D1D-6F58-3410-DBE1BCE8AF7F}"/>
+                <a16:creationId xmlns:a16="http://schemas.microsoft.com/office/drawing/2014/main" id="{634CE741-738C-5294-3111-4971DF04E698}"/>
               </a:ext>
             </a:extLst>
           </p:cNvPr>
@@ -11458,7 +11575,7 @@
     </p:spTree>
     <p:extLst>
       <p:ext uri="{BB962C8B-B14F-4D97-AF65-F5344CB8AC3E}">
-        <p14:creationId xmlns:p14="http://schemas.microsoft.com/office/powerpoint/2010/main" val="3562287446"/>
+        <p14:creationId xmlns:p14="http://schemas.microsoft.com/office/powerpoint/2010/main" val="35491570"/>
       </p:ext>
     </p:extLst>
   </p:cSld>
@@ -11490,7 +11607,7 @@
           <p:cNvPr id="2" name="Title 1">
             <a:extLst>
               <a:ext uri="{FF2B5EF4-FFF2-40B4-BE49-F238E27FC236}">
-                <a16:creationId xmlns:a16="http://schemas.microsoft.com/office/drawing/2014/main" id="{76B7B38D-DCBD-9C6B-CD51-7A408A67FAD1}"/>
+                <a16:creationId xmlns:a16="http://schemas.microsoft.com/office/drawing/2014/main" id="{0FAC2044-7BC7-BE81-4358-3C5D49931A58}"/>
               </a:ext>
             </a:extLst>
           </p:cNvPr>
@@ -11508,7 +11625,7 @@
           <a:p>
             <a:r>
               <a:rPr lang="en-GB" dirty="0"/>
-              <a:t>Kivy &amp; Kivymd</a:t>
+              <a:t>GUI Development</a:t>
             </a:r>
             <a:endParaRPr lang="en-IN" dirty="0"/>
           </a:p>
@@ -11519,7 +11636,7 @@
           <p:cNvPr id="3" name="Content Placeholder 2">
             <a:extLst>
               <a:ext uri="{FF2B5EF4-FFF2-40B4-BE49-F238E27FC236}">
-                <a16:creationId xmlns:a16="http://schemas.microsoft.com/office/drawing/2014/main" id="{55BFC815-5867-C2BB-884C-F3691F93B019}"/>
+                <a16:creationId xmlns:a16="http://schemas.microsoft.com/office/drawing/2014/main" id="{69841D62-3F38-AD65-B1BF-48BF3A14F8B7}"/>
               </a:ext>
             </a:extLst>
           </p:cNvPr>
@@ -11541,7 +11658,15 @@
             </a:r>
             <a:r>
               <a:rPr lang="en-GB" b="1" dirty="0"/>
-              <a:t>cmd : pip install kivy kivymd</a:t>
+              <a:t>Package : </a:t>
+            </a:r>
+            <a:r>
+              <a:rPr lang="en-GB" dirty="0"/>
+              <a:t>customtkinter &amp; </a:t>
+            </a:r>
+            <a:r>
+              <a:rPr lang="en-GB" dirty="0" err="1"/>
+              <a:t>tkinter</a:t>
             </a:r>
             <a:endParaRPr lang="en-IN" dirty="0"/>
           </a:p>
@@ -11552,7 +11677,7 @@
           <p:cNvPr id="4" name="Footer Placeholder 3">
             <a:extLst>
               <a:ext uri="{FF2B5EF4-FFF2-40B4-BE49-F238E27FC236}">
-                <a16:creationId xmlns:a16="http://schemas.microsoft.com/office/drawing/2014/main" id="{747B2B24-B4CD-D9F0-D1F0-C426E572C6F6}"/>
+                <a16:creationId xmlns:a16="http://schemas.microsoft.com/office/drawing/2014/main" id="{889662F6-22D2-D1A9-DF10-54B94C79C5D2}"/>
               </a:ext>
             </a:extLst>
           </p:cNvPr>
@@ -11581,7 +11706,7 @@
           <p:cNvPr id="5" name="Slide Number Placeholder 4">
             <a:extLst>
               <a:ext uri="{FF2B5EF4-FFF2-40B4-BE49-F238E27FC236}">
-                <a16:creationId xmlns:a16="http://schemas.microsoft.com/office/drawing/2014/main" id="{8EC70CEB-FD02-B13C-90CC-1F1AACC0FCAC}"/>
+                <a16:creationId xmlns:a16="http://schemas.microsoft.com/office/drawing/2014/main" id="{4FCBC552-3D1D-6F58-3410-DBE1BCE8AF7F}"/>
               </a:ext>
             </a:extLst>
           </p:cNvPr>
@@ -11608,7 +11733,7 @@
     </p:spTree>
     <p:extLst>
       <p:ext uri="{BB962C8B-B14F-4D97-AF65-F5344CB8AC3E}">
-        <p14:creationId xmlns:p14="http://schemas.microsoft.com/office/powerpoint/2010/main" val="340499084"/>
+        <p14:creationId xmlns:p14="http://schemas.microsoft.com/office/powerpoint/2010/main" val="3562287446"/>
       </p:ext>
     </p:extLst>
   </p:cSld>
@@ -11640,7 +11765,7 @@
           <p:cNvPr id="2" name="Title 1">
             <a:extLst>
               <a:ext uri="{FF2B5EF4-FFF2-40B4-BE49-F238E27FC236}">
-                <a16:creationId xmlns:a16="http://schemas.microsoft.com/office/drawing/2014/main" id="{89A40D6B-3A8E-67A6-6A68-010B58DAC4FC}"/>
+                <a16:creationId xmlns:a16="http://schemas.microsoft.com/office/drawing/2014/main" id="{76B7B38D-DCBD-9C6B-CD51-7A408A67FAD1}"/>
               </a:ext>
             </a:extLst>
           </p:cNvPr>
@@ -11657,9 +11782,10 @@
           <a:lstStyle/>
           <a:p>
             <a:r>
-              <a:rPr lang="en-IN" dirty="0"/>
-              <a:t>Problems</a:t>
-            </a:r>
+              <a:rPr lang="en-GB" dirty="0"/>
+              <a:t>Kivy &amp; Kivymd</a:t>
+            </a:r>
+            <a:endParaRPr lang="en-IN" dirty="0"/>
           </a:p>
         </p:txBody>
       </p:sp>
@@ -11668,7 +11794,7 @@
           <p:cNvPr id="3" name="Content Placeholder 2">
             <a:extLst>
               <a:ext uri="{FF2B5EF4-FFF2-40B4-BE49-F238E27FC236}">
-                <a16:creationId xmlns:a16="http://schemas.microsoft.com/office/drawing/2014/main" id="{2EA13D08-34E8-FF65-D42D-B7D8201AF8B5}"/>
+                <a16:creationId xmlns:a16="http://schemas.microsoft.com/office/drawing/2014/main" id="{55BFC815-5867-C2BB-884C-F3691F93B019}"/>
               </a:ext>
             </a:extLst>
           </p:cNvPr>
@@ -11685,43 +11811,14 @@
           <a:lstStyle/>
           <a:p>
             <a:r>
-              <a:rPr lang="en-IN" dirty="0"/>
-              <a:t> Valid Parentheses</a:t>
-            </a:r>
-          </a:p>
-          <a:p>
-            <a:r>
-              <a:rPr lang="en-IN" dirty="0"/>
+              <a:rPr lang="en-GB" dirty="0"/>
               <a:t> </a:t>
             </a:r>
             <a:r>
-              <a:rPr lang="en-GB" dirty="0"/>
-              <a:t>Reverse Vowels of a String</a:t>
-            </a:r>
-          </a:p>
-          <a:p>
-            <a:r>
-              <a:rPr lang="en-IN" dirty="0"/>
-              <a:t> Keyboard Row</a:t>
-            </a:r>
-          </a:p>
-          <a:p>
-            <a:r>
-              <a:rPr lang="en-IN" dirty="0"/>
-              <a:t> Form words in diagonal flow</a:t>
-            </a:r>
-          </a:p>
-          <a:p>
-            <a:r>
-              <a:rPr lang="en-IN" dirty="0"/>
-              <a:t> Equal Score Substrings</a:t>
-            </a:r>
-          </a:p>
-          <a:p>
-            <a:r>
-              <a:rPr lang="en-IN" dirty="0"/>
-              <a:t> Zigzag Conversion</a:t>
-            </a:r>
+              <a:rPr lang="en-GB" b="1" dirty="0"/>
+              <a:t>cmd : pip install kivy kivymd</a:t>
+            </a:r>
+            <a:endParaRPr lang="en-IN" dirty="0"/>
           </a:p>
         </p:txBody>
       </p:sp>
@@ -11730,7 +11827,7 @@
           <p:cNvPr id="4" name="Footer Placeholder 3">
             <a:extLst>
               <a:ext uri="{FF2B5EF4-FFF2-40B4-BE49-F238E27FC236}">
-                <a16:creationId xmlns:a16="http://schemas.microsoft.com/office/drawing/2014/main" id="{4E75C686-45D5-51B5-CE9B-92CFD65EA4D6}"/>
+                <a16:creationId xmlns:a16="http://schemas.microsoft.com/office/drawing/2014/main" id="{747B2B24-B4CD-D9F0-D1F0-C426E572C6F6}"/>
               </a:ext>
             </a:extLst>
           </p:cNvPr>
@@ -11759,7 +11856,7 @@
           <p:cNvPr id="5" name="Slide Number Placeholder 4">
             <a:extLst>
               <a:ext uri="{FF2B5EF4-FFF2-40B4-BE49-F238E27FC236}">
-                <a16:creationId xmlns:a16="http://schemas.microsoft.com/office/drawing/2014/main" id="{4E967A4D-DE2A-311F-9BB5-EC319655B787}"/>
+                <a16:creationId xmlns:a16="http://schemas.microsoft.com/office/drawing/2014/main" id="{8EC70CEB-FD02-B13C-90CC-1F1AACC0FCAC}"/>
               </a:ext>
             </a:extLst>
           </p:cNvPr>
@@ -11786,7 +11883,7 @@
     </p:spTree>
     <p:extLst>
       <p:ext uri="{BB962C8B-B14F-4D97-AF65-F5344CB8AC3E}">
-        <p14:creationId xmlns:p14="http://schemas.microsoft.com/office/powerpoint/2010/main" val="2943109998"/>
+        <p14:creationId xmlns:p14="http://schemas.microsoft.com/office/powerpoint/2010/main" val="340499084"/>
       </p:ext>
     </p:extLst>
   </p:cSld>

--- a/python class/Python Class.pptx
+++ b/python class/Python Class.pptx
@@ -234,7 +234,7 @@
           <a:p>
             <a:fld id="{C7300FFE-222E-424B-A24A-B86ADB1660A8}" type="datetimeFigureOut">
               <a:rPr lang="en-IN" smtClean="0"/>
-              <a:t>10-08-2026</a:t>
+              <a:t>11-08-2026</a:t>
             </a:fld>
             <a:endParaRPr lang="en-IN" dirty="0"/>
           </a:p>
@@ -662,7 +662,7 @@
           <a:p>
             <a:fld id="{AD501974-91E0-4A6C-BF4F-18DDA0DBE697}" type="datetime1">
               <a:rPr lang="en-IN" smtClean="0"/>
-              <a:t>10-08-2026</a:t>
+              <a:t>11-08-2026</a:t>
             </a:fld>
             <a:endParaRPr lang="en-IN" dirty="0"/>
           </a:p>
@@ -787,7 +787,7 @@
           <a:p>
             <a:fld id="{340C70EA-229A-4802-A7BC-A1799783BDD3}" type="datetime1">
               <a:rPr lang="en-IN" smtClean="0"/>
-              <a:t>10-08-2026</a:t>
+              <a:t>11-08-2026</a:t>
             </a:fld>
             <a:endParaRPr lang="en-IN" dirty="0"/>
           </a:p>
@@ -1074,7 +1074,7 @@
           <a:p>
             <a:fld id="{BD944048-9929-4BB2-BADE-62F9A707015B}" type="datetime1">
               <a:rPr lang="en-IN" smtClean="0"/>
-              <a:t>10-08-2026</a:t>
+              <a:t>11-08-2026</a:t>
             </a:fld>
             <a:endParaRPr lang="en-IN" dirty="0"/>
           </a:p>
@@ -1380,7 +1380,7 @@
           <a:p>
             <a:fld id="{09A388D1-7504-45FD-847C-EF9E921E08DF}" type="datetime1">
               <a:rPr lang="en-IN" smtClean="0"/>
-              <a:t>10-08-2026</a:t>
+              <a:t>11-08-2026</a:t>
             </a:fld>
             <a:endParaRPr lang="en-IN" dirty="0"/>
           </a:p>
@@ -1609,7 +1609,7 @@
           <a:p>
             <a:fld id="{6015BE80-B03C-48AB-B3E2-19C5F4D60D3C}" type="datetime1">
               <a:rPr lang="en-IN" smtClean="0"/>
-              <a:t>10-08-2026</a:t>
+              <a:t>11-08-2026</a:t>
             </a:fld>
             <a:endParaRPr lang="en-IN" dirty="0"/>
           </a:p>
@@ -1880,7 +1880,7 @@
           <a:p>
             <a:fld id="{450E9977-AF0E-4B1A-B2BF-2416B4828E95}" type="datetime1">
               <a:rPr lang="en-IN" smtClean="0"/>
-              <a:t>10-08-2026</a:t>
+              <a:t>11-08-2026</a:t>
             </a:fld>
             <a:endParaRPr lang="en-IN" dirty="0"/>
           </a:p>
@@ -2107,7 +2107,7 @@
           <a:p>
             <a:fld id="{972A712B-80AB-4FDB-AFE5-C959280677B9}" type="datetime1">
               <a:rPr lang="en-IN" smtClean="0"/>
-              <a:t>10-08-2026</a:t>
+              <a:t>11-08-2026</a:t>
             </a:fld>
             <a:endParaRPr lang="en-IN" dirty="0"/>
           </a:p>
@@ -2398,7 +2398,7 @@
           <a:p>
             <a:fld id="{78FC1D50-5769-4793-A6D0-4C61D943385E}" type="datetime1">
               <a:rPr lang="en-IN" smtClean="0"/>
-              <a:t>10-08-2026</a:t>
+              <a:t>11-08-2026</a:t>
             </a:fld>
             <a:endParaRPr lang="en-IN" dirty="0"/>
           </a:p>
@@ -2663,7 +2663,7 @@
           <a:p>
             <a:fld id="{1093E9E7-66F0-49C7-87AF-7A91F126A0CA}" type="datetime1">
               <a:rPr lang="en-IN" smtClean="0"/>
-              <a:t>10-08-2026</a:t>
+              <a:t>11-08-2026</a:t>
             </a:fld>
             <a:endParaRPr lang="en-IN" dirty="0"/>
           </a:p>
@@ -3109,7 +3109,7 @@
           <a:p>
             <a:fld id="{4802E001-56FE-4C01-9545-A69D840AB1F5}" type="datetime1">
               <a:rPr lang="en-IN" smtClean="0"/>
-              <a:t>10-08-2026</a:t>
+              <a:t>11-08-2026</a:t>
             </a:fld>
             <a:endParaRPr lang="en-IN" dirty="0"/>
           </a:p>
@@ -3273,7 +3273,7 @@
           <a:p>
             <a:fld id="{FC628212-ABC2-4EAF-BB21-53D61AEEEA49}" type="datetime1">
               <a:rPr lang="en-IN" smtClean="0"/>
-              <a:t>10-08-2026</a:t>
+              <a:t>11-08-2026</a:t>
             </a:fld>
             <a:endParaRPr lang="en-IN" dirty="0"/>
           </a:p>
@@ -3437,7 +3437,7 @@
           <a:p>
             <a:fld id="{83F0C27E-97BD-4ACD-AFDF-13985BE88ECF}" type="datetime1">
               <a:rPr lang="en-IN" smtClean="0"/>
-              <a:t>10-08-2026</a:t>
+              <a:t>11-08-2026</a:t>
             </a:fld>
             <a:endParaRPr lang="en-IN" dirty="0"/>
           </a:p>
@@ -3635,7 +3635,7 @@
           <a:p>
             <a:fld id="{10A04BDC-9A72-4B08-81B7-A336A5B4E254}" type="datetime1">
               <a:rPr lang="en-IN" smtClean="0"/>
-              <a:t>10-08-2026</a:t>
+              <a:t>11-08-2026</a:t>
             </a:fld>
             <a:endParaRPr lang="en-IN" dirty="0"/>
           </a:p>
@@ -3833,7 +3833,7 @@
           <a:p>
             <a:fld id="{2E5D08A3-D96A-4309-8AF3-C610782BB2D3}" type="datetime1">
               <a:rPr lang="en-IN" smtClean="0"/>
-              <a:t>10-08-2026</a:t>
+              <a:t>11-08-2026</a:t>
             </a:fld>
             <a:endParaRPr lang="en-IN" dirty="0"/>
           </a:p>
@@ -7823,7 +7823,11 @@
           <a:p>
             <a:r>
               <a:rPr lang="en-IN" dirty="0"/>
-              <a:t> Python Main Environment Types : </a:t>
+              <a:t> </a:t>
+            </a:r>
+            <a:r>
+              <a:rPr lang="en-IN" b="1" dirty="0"/>
+              <a:t>Python Main Environment Types : </a:t>
             </a:r>
           </a:p>
           <a:p>
@@ -7843,7 +7847,11 @@
           <a:p>
             <a:r>
               <a:rPr lang="en-IN" dirty="0"/>
-              <a:t> Why Virtual Environment?</a:t>
+              <a:t> </a:t>
+            </a:r>
+            <a:r>
+              <a:rPr lang="en-IN" b="1" dirty="0"/>
+              <a:t>Why Virtual Environment?</a:t>
             </a:r>
           </a:p>
           <a:p>
@@ -7857,30 +7865,14 @@
             <a:pPr lvl="1"/>
             <a:r>
               <a:rPr lang="en-IN" dirty="0"/>
-              <a:t> project 1 : requires </a:t>
-            </a:r>
-            <a:r>
-              <a:rPr lang="en-IN" dirty="0" err="1"/>
-              <a:t>numpy</a:t>
-            </a:r>
-            <a:r>
-              <a:rPr lang="en-IN" dirty="0"/>
-              <a:t> 0.0.1.</a:t>
+              <a:t> project 1 : requires numpy 0.0.1.</a:t>
             </a:r>
           </a:p>
           <a:p>
             <a:pPr lvl="1"/>
             <a:r>
               <a:rPr lang="en-IN" dirty="0"/>
-              <a:t> project 2 : requires </a:t>
-            </a:r>
-            <a:r>
-              <a:rPr lang="en-IN" dirty="0" err="1"/>
-              <a:t>numpy</a:t>
-            </a:r>
-            <a:r>
-              <a:rPr lang="en-IN" dirty="0"/>
-              <a:t> 0.1.1.</a:t>
+              <a:t> project 2 : requires numpy 0.1.1.</a:t>
             </a:r>
           </a:p>
           <a:p>
@@ -8296,26 +8288,9 @@
               <a:t> Operations : </a:t>
             </a:r>
             <a:r>
-              <a:rPr lang="en-IN" dirty="0" err="1"/>
-              <a:t>makedir</a:t>
-            </a:r>
-            <a:r>
-              <a:rPr lang="en-IN" dirty="0"/>
-              <a:t> , listdir , system , path , startfile , </a:t>
-            </a:r>
-            <a:r>
-              <a:rPr lang="en-IN" dirty="0" err="1"/>
-              <a:t>getuser</a:t>
-            </a:r>
-            <a:r>
-              <a:rPr lang="en-IN" dirty="0"/>
-              <a:t> , rename , remove , </a:t>
-            </a:r>
-            <a:r>
-              <a:rPr lang="en-IN" dirty="0" err="1"/>
-              <a:t>rmdir</a:t>
-            </a:r>
-            <a:endParaRPr lang="en-IN" dirty="0"/>
+              <a:rPr lang="en-IN" dirty="0"/>
+              <a:t>makedir , listdir , system , path , startfile , getuser , rename , remove , rmdir</a:t>
+            </a:r>
           </a:p>
           <a:p>
             <a:r>
@@ -8324,15 +8299,7 @@
             </a:r>
             <a:r>
               <a:rPr lang="en-IN" dirty="0"/>
-              <a:t>also used to execute the </a:t>
-            </a:r>
-            <a:r>
-              <a:rPr lang="en-IN" dirty="0" err="1"/>
-              <a:t>cmd</a:t>
-            </a:r>
-            <a:r>
-              <a:rPr lang="en-IN" dirty="0"/>
-              <a:t> commands.</a:t>
+              <a:t>also used to execute the cmd commands.</a:t>
             </a:r>
             <a:endParaRPr lang="en-IN" b="1" dirty="0"/>
           </a:p>
@@ -8505,21 +8472,8 @@
             </a:r>
             <a:r>
               <a:rPr lang="en-IN" dirty="0"/>
-              <a:t>sqrt() , </a:t>
-            </a:r>
-            <a:r>
-              <a:rPr lang="en-IN" dirty="0" err="1"/>
-              <a:t>gcd</a:t>
-            </a:r>
-            <a:r>
-              <a:rPr lang="en-IN" dirty="0"/>
-              <a:t>() , lcm() , factorial() , floor() , ceil() , log() , pow() , </a:t>
-            </a:r>
-            <a:r>
-              <a:rPr lang="en-IN"/>
-              <a:t>prod() .</a:t>
-            </a:r>
-            <a:endParaRPr lang="en-IN" dirty="0"/>
+              <a:t>sqrt() , gcd() , lcm() , factorial() , floor() , ceil() , log() , pow() , prod() .</a:t>
+            </a:r>
           </a:p>
         </p:txBody>
       </p:sp>
@@ -8693,12 +8647,8 @@
               <a:t> </a:t>
             </a:r>
             <a:r>
-              <a:rPr lang="en-IN" b="1" dirty="0" err="1"/>
-              <a:t>cmd</a:t>
-            </a:r>
-            <a:r>
               <a:rPr lang="en-IN" b="1" dirty="0"/>
-              <a:t> : pip install faker</a:t>
+              <a:t>cmd : pip install faker</a:t>
             </a:r>
             <a:endParaRPr lang="en-IN" dirty="0"/>
           </a:p>
@@ -8851,10 +8801,9 @@
               <a:t>Package : </a:t>
             </a:r>
             <a:r>
-              <a:rPr lang="en-IN" dirty="0" err="1"/>
+              <a:rPr lang="en-IN" dirty="0"/>
               <a:t>openpyxl</a:t>
             </a:r>
-            <a:endParaRPr lang="en-IN" dirty="0"/>
           </a:p>
           <a:p>
             <a:r>
@@ -8888,76 +8837,28 @@
             </a:r>
             <a:r>
               <a:rPr lang="en-IN" dirty="0"/>
-              <a:t>Create a </a:t>
-            </a:r>
-            <a:r>
-              <a:rPr lang="en-IN" dirty="0" err="1"/>
-              <a:t>WorkBook</a:t>
-            </a:r>
-            <a:r>
-              <a:rPr lang="en-IN" dirty="0"/>
-              <a:t> , Add </a:t>
-            </a:r>
-            <a:r>
-              <a:rPr lang="en-IN" dirty="0" err="1"/>
-              <a:t>WorkSheets</a:t>
-            </a:r>
-            <a:r>
-              <a:rPr lang="en-IN" dirty="0"/>
-              <a:t> , Rename Sheets , Create Tables.</a:t>
+              <a:t>Create a WorkBook , Add WorkSheets , Rename Sheets , Create Tables.</a:t>
             </a:r>
           </a:p>
           <a:p>
             <a:pPr lvl="1"/>
             <a:r>
               <a:rPr lang="en-IN" dirty="0"/>
-              <a:t> When the </a:t>
-            </a:r>
-            <a:r>
-              <a:rPr lang="en-IN" dirty="0" err="1"/>
-              <a:t>WorkBook</a:t>
-            </a:r>
-            <a:r>
-              <a:rPr lang="en-IN" dirty="0"/>
-              <a:t> exists , load </a:t>
-            </a:r>
-            <a:r>
-              <a:rPr lang="en-IN" dirty="0" err="1"/>
-              <a:t>WorkBook</a:t>
-            </a:r>
-            <a:r>
-              <a:rPr lang="en-IN" dirty="0"/>
-              <a:t>.</a:t>
+              <a:t> When the WorkBook exists , load WorkBook.</a:t>
             </a:r>
           </a:p>
           <a:p>
             <a:pPr lvl="1"/>
             <a:r>
               <a:rPr lang="en-IN" dirty="0"/>
-              <a:t> Within </a:t>
-            </a:r>
-            <a:r>
-              <a:rPr lang="en-IN" dirty="0" err="1"/>
-              <a:t>WorkSheets</a:t>
-            </a:r>
-            <a:r>
-              <a:rPr lang="en-IN" dirty="0"/>
-              <a:t> add the data and read data.</a:t>
+              <a:t> Within WorkSheets add the data and read data.</a:t>
             </a:r>
           </a:p>
           <a:p>
             <a:pPr lvl="1"/>
             <a:r>
               <a:rPr lang="en-IN" dirty="0"/>
-              <a:t> Save the </a:t>
-            </a:r>
-            <a:r>
-              <a:rPr lang="en-IN" dirty="0" err="1"/>
-              <a:t>WorkBook</a:t>
-            </a:r>
-            <a:r>
-              <a:rPr lang="en-IN" dirty="0"/>
-              <a:t>.</a:t>
+              <a:t> Save the WorkBook.</a:t>
             </a:r>
           </a:p>
         </p:txBody>
@@ -9153,13 +9054,8 @@
             <a:pPr lvl="1"/>
             <a:r>
               <a:rPr lang="en-GB" dirty="0"/>
-              <a:t> date &amp; </a:t>
-            </a:r>
-            <a:r>
-              <a:rPr lang="en-GB"/>
-              <a:t>time calculations.</a:t>
-            </a:r>
-            <a:endParaRPr lang="en-GB" dirty="0"/>
+              <a:t> date &amp; time calculations.</a:t>
+            </a:r>
           </a:p>
         </p:txBody>
       </p:sp>
@@ -10250,15 +10146,7 @@
             </a:r>
             <a:r>
               <a:rPr lang="en-GB" dirty="0"/>
-              <a:t>smtplib , </a:t>
-            </a:r>
-            <a:r>
-              <a:rPr lang="en-GB" dirty="0" err="1"/>
-              <a:t>mimetype</a:t>
-            </a:r>
-            <a:r>
-              <a:rPr lang="en-GB" dirty="0"/>
-              <a:t> , email</a:t>
+              <a:t>smtplib , mimetype , email</a:t>
             </a:r>
           </a:p>
           <a:p>
@@ -10461,15 +10349,7 @@
             </a:r>
             <a:r>
               <a:rPr lang="en-GB" b="1" dirty="0"/>
-              <a:t>cmd : pip install </a:t>
-            </a:r>
-            <a:r>
-              <a:rPr lang="en-GB" b="1" dirty="0" err="1"/>
-              <a:t>mysql</a:t>
-            </a:r>
-            <a:r>
-              <a:rPr lang="en-GB" b="1" dirty="0"/>
-              <a:t>-connector-python</a:t>
+              <a:t>cmd : pip install mysql-connector-python</a:t>
             </a:r>
           </a:p>
           <a:p>
@@ -10668,38 +10548,15 @@
           <a:p>
             <a:pPr lvl="1"/>
             <a:r>
-              <a:rPr lang="en-IN" b="1" dirty="0"/>
-              <a:t> </a:t>
-            </a:r>
-            <a:r>
-              <a:rPr lang="en-IN" dirty="0" err="1"/>
-              <a:t>pypdf</a:t>
-            </a:r>
-            <a:r>
-              <a:rPr lang="en-IN" dirty="0"/>
-              <a:t> (Reading PDF’s).</a:t>
+              <a:rPr lang="en-IN" dirty="0"/>
+              <a:t> fpdf2 (Creating PDF’s).</a:t>
             </a:r>
           </a:p>
           <a:p>
             <a:pPr lvl="1"/>
             <a:r>
               <a:rPr lang="en-IN" dirty="0"/>
-              <a:t> fpdf2 (Creating PDF’s).</a:t>
-            </a:r>
-          </a:p>
-          <a:p>
-            <a:pPr lvl="1"/>
-            <a:r>
-              <a:rPr lang="en-IN" dirty="0"/>
-              <a:t> </a:t>
-            </a:r>
-            <a:r>
-              <a:rPr lang="en-IN" dirty="0" err="1"/>
-              <a:t>borb</a:t>
-            </a:r>
-            <a:r>
-              <a:rPr lang="en-IN" dirty="0"/>
-              <a:t> (Advanced module for Creating &amp; Reading PDF’s).</a:t>
+              <a:t> borb (Advanced module for Creating &amp; Reading PDF’s).</a:t>
             </a:r>
           </a:p>
           <a:p>
@@ -10711,18 +10568,6 @@
               <a:rPr lang="en-IN" b="1" dirty="0"/>
               <a:t>Functions : </a:t>
             </a:r>
-          </a:p>
-          <a:p>
-            <a:pPr lvl="1"/>
-            <a:r>
-              <a:rPr lang="en-IN" b="1" dirty="0"/>
-              <a:t> </a:t>
-            </a:r>
-            <a:r>
-              <a:rPr lang="en-IN" dirty="0"/>
-              <a:t>Read Data (text , images , links , etc.,) from PDF.</a:t>
-            </a:r>
-            <a:endParaRPr lang="en-IN" b="1" dirty="0"/>
           </a:p>
           <a:p>
             <a:pPr lvl="1"/>
@@ -10911,15 +10756,7 @@
             <a:pPr lvl="1"/>
             <a:r>
               <a:rPr lang="en-IN" dirty="0"/>
-              <a:t> inside that folder add src folder , gitignore , readme , license , venv , </a:t>
-            </a:r>
-            <a:r>
-              <a:rPr lang="en-IN" dirty="0" err="1"/>
-              <a:t>pyproject.toml</a:t>
-            </a:r>
-            <a:r>
-              <a:rPr lang="en-IN" dirty="0"/>
-              <a:t>.</a:t>
+              <a:t> inside that folder add src folder , gitignore , readme , license , venv , pyproject.toml.</a:t>
             </a:r>
           </a:p>
           <a:p>
@@ -11662,11 +11499,7 @@
             </a:r>
             <a:r>
               <a:rPr lang="en-GB" dirty="0"/>
-              <a:t>customtkinter &amp; </a:t>
-            </a:r>
-            <a:r>
-              <a:rPr lang="en-GB" dirty="0" err="1"/>
-              <a:t>tkinter</a:t>
+              <a:t>customtkinter &amp; tkinter</a:t>
             </a:r>
             <a:endParaRPr lang="en-IN" dirty="0"/>
           </a:p>

--- a/python class/Python Class.pptx
+++ b/python class/Python Class.pptx
@@ -234,7 +234,7 @@
           <a:p>
             <a:fld id="{C7300FFE-222E-424B-A24A-B86ADB1660A8}" type="datetimeFigureOut">
               <a:rPr lang="en-IN" smtClean="0"/>
-              <a:t>11-08-2026</a:t>
+              <a:t>12-08-2026</a:t>
             </a:fld>
             <a:endParaRPr lang="en-IN" dirty="0"/>
           </a:p>
@@ -662,7 +662,7 @@
           <a:p>
             <a:fld id="{AD501974-91E0-4A6C-BF4F-18DDA0DBE697}" type="datetime1">
               <a:rPr lang="en-IN" smtClean="0"/>
-              <a:t>11-08-2026</a:t>
+              <a:t>12-08-2026</a:t>
             </a:fld>
             <a:endParaRPr lang="en-IN" dirty="0"/>
           </a:p>
@@ -787,7 +787,7 @@
           <a:p>
             <a:fld id="{340C70EA-229A-4802-A7BC-A1799783BDD3}" type="datetime1">
               <a:rPr lang="en-IN" smtClean="0"/>
-              <a:t>11-08-2026</a:t>
+              <a:t>12-08-2026</a:t>
             </a:fld>
             <a:endParaRPr lang="en-IN" dirty="0"/>
           </a:p>
@@ -1074,7 +1074,7 @@
           <a:p>
             <a:fld id="{BD944048-9929-4BB2-BADE-62F9A707015B}" type="datetime1">
               <a:rPr lang="en-IN" smtClean="0"/>
-              <a:t>11-08-2026</a:t>
+              <a:t>12-08-2026</a:t>
             </a:fld>
             <a:endParaRPr lang="en-IN" dirty="0"/>
           </a:p>
@@ -1380,7 +1380,7 @@
           <a:p>
             <a:fld id="{09A388D1-7504-45FD-847C-EF9E921E08DF}" type="datetime1">
               <a:rPr lang="en-IN" smtClean="0"/>
-              <a:t>11-08-2026</a:t>
+              <a:t>12-08-2026</a:t>
             </a:fld>
             <a:endParaRPr lang="en-IN" dirty="0"/>
           </a:p>
@@ -1609,7 +1609,7 @@
           <a:p>
             <a:fld id="{6015BE80-B03C-48AB-B3E2-19C5F4D60D3C}" type="datetime1">
               <a:rPr lang="en-IN" smtClean="0"/>
-              <a:t>11-08-2026</a:t>
+              <a:t>12-08-2026</a:t>
             </a:fld>
             <a:endParaRPr lang="en-IN" dirty="0"/>
           </a:p>
@@ -1880,7 +1880,7 @@
           <a:p>
             <a:fld id="{450E9977-AF0E-4B1A-B2BF-2416B4828E95}" type="datetime1">
               <a:rPr lang="en-IN" smtClean="0"/>
-              <a:t>11-08-2026</a:t>
+              <a:t>12-08-2026</a:t>
             </a:fld>
             <a:endParaRPr lang="en-IN" dirty="0"/>
           </a:p>
@@ -2107,7 +2107,7 @@
           <a:p>
             <a:fld id="{972A712B-80AB-4FDB-AFE5-C959280677B9}" type="datetime1">
               <a:rPr lang="en-IN" smtClean="0"/>
-              <a:t>11-08-2026</a:t>
+              <a:t>12-08-2026</a:t>
             </a:fld>
             <a:endParaRPr lang="en-IN" dirty="0"/>
           </a:p>
@@ -2398,7 +2398,7 @@
           <a:p>
             <a:fld id="{78FC1D50-5769-4793-A6D0-4C61D943385E}" type="datetime1">
               <a:rPr lang="en-IN" smtClean="0"/>
-              <a:t>11-08-2026</a:t>
+              <a:t>12-08-2026</a:t>
             </a:fld>
             <a:endParaRPr lang="en-IN" dirty="0"/>
           </a:p>
@@ -2663,7 +2663,7 @@
           <a:p>
             <a:fld id="{1093E9E7-66F0-49C7-87AF-7A91F126A0CA}" type="datetime1">
               <a:rPr lang="en-IN" smtClean="0"/>
-              <a:t>11-08-2026</a:t>
+              <a:t>12-08-2026</a:t>
             </a:fld>
             <a:endParaRPr lang="en-IN" dirty="0"/>
           </a:p>
@@ -3109,7 +3109,7 @@
           <a:p>
             <a:fld id="{4802E001-56FE-4C01-9545-A69D840AB1F5}" type="datetime1">
               <a:rPr lang="en-IN" smtClean="0"/>
-              <a:t>11-08-2026</a:t>
+              <a:t>12-08-2026</a:t>
             </a:fld>
             <a:endParaRPr lang="en-IN" dirty="0"/>
           </a:p>
@@ -3273,7 +3273,7 @@
           <a:p>
             <a:fld id="{FC628212-ABC2-4EAF-BB21-53D61AEEEA49}" type="datetime1">
               <a:rPr lang="en-IN" smtClean="0"/>
-              <a:t>11-08-2026</a:t>
+              <a:t>12-08-2026</a:t>
             </a:fld>
             <a:endParaRPr lang="en-IN" dirty="0"/>
           </a:p>
@@ -3437,7 +3437,7 @@
           <a:p>
             <a:fld id="{83F0C27E-97BD-4ACD-AFDF-13985BE88ECF}" type="datetime1">
               <a:rPr lang="en-IN" smtClean="0"/>
-              <a:t>11-08-2026</a:t>
+              <a:t>12-08-2026</a:t>
             </a:fld>
             <a:endParaRPr lang="en-IN" dirty="0"/>
           </a:p>
@@ -3635,7 +3635,7 @@
           <a:p>
             <a:fld id="{10A04BDC-9A72-4B08-81B7-A336A5B4E254}" type="datetime1">
               <a:rPr lang="en-IN" smtClean="0"/>
-              <a:t>11-08-2026</a:t>
+              <a:t>12-08-2026</a:t>
             </a:fld>
             <a:endParaRPr lang="en-IN" dirty="0"/>
           </a:p>
@@ -3833,7 +3833,7 @@
           <a:p>
             <a:fld id="{2E5D08A3-D96A-4309-8AF3-C610782BB2D3}" type="datetime1">
               <a:rPr lang="en-IN" smtClean="0"/>
-              <a:t>11-08-2026</a:t>
+              <a:t>12-08-2026</a:t>
             </a:fld>
             <a:endParaRPr lang="en-IN" dirty="0"/>
           </a:p>

--- a/python class/Python Class.pptx
+++ b/python class/Python Class.pptx
@@ -234,7 +234,7 @@
           <a:p>
             <a:fld id="{C7300FFE-222E-424B-A24A-B86ADB1660A8}" type="datetimeFigureOut">
               <a:rPr lang="en-IN" smtClean="0"/>
-              <a:t>12-08-2026</a:t>
+              <a:t>14-08-2026</a:t>
             </a:fld>
             <a:endParaRPr lang="en-IN" dirty="0"/>
           </a:p>
@@ -662,7 +662,7 @@
           <a:p>
             <a:fld id="{AD501974-91E0-4A6C-BF4F-18DDA0DBE697}" type="datetime1">
               <a:rPr lang="en-IN" smtClean="0"/>
-              <a:t>12-08-2026</a:t>
+              <a:t>14-08-2026</a:t>
             </a:fld>
             <a:endParaRPr lang="en-IN" dirty="0"/>
           </a:p>
@@ -787,7 +787,7 @@
           <a:p>
             <a:fld id="{340C70EA-229A-4802-A7BC-A1799783BDD3}" type="datetime1">
               <a:rPr lang="en-IN" smtClean="0"/>
-              <a:t>12-08-2026</a:t>
+              <a:t>14-08-2026</a:t>
             </a:fld>
             <a:endParaRPr lang="en-IN" dirty="0"/>
           </a:p>
@@ -1074,7 +1074,7 @@
           <a:p>
             <a:fld id="{BD944048-9929-4BB2-BADE-62F9A707015B}" type="datetime1">
               <a:rPr lang="en-IN" smtClean="0"/>
-              <a:t>12-08-2026</a:t>
+              <a:t>14-08-2026</a:t>
             </a:fld>
             <a:endParaRPr lang="en-IN" dirty="0"/>
           </a:p>
@@ -1380,7 +1380,7 @@
           <a:p>
             <a:fld id="{09A388D1-7504-45FD-847C-EF9E921E08DF}" type="datetime1">
               <a:rPr lang="en-IN" smtClean="0"/>
-              <a:t>12-08-2026</a:t>
+              <a:t>14-08-2026</a:t>
             </a:fld>
             <a:endParaRPr lang="en-IN" dirty="0"/>
           </a:p>
@@ -1609,7 +1609,7 @@
           <a:p>
             <a:fld id="{6015BE80-B03C-48AB-B3E2-19C5F4D60D3C}" type="datetime1">
               <a:rPr lang="en-IN" smtClean="0"/>
-              <a:t>12-08-2026</a:t>
+              <a:t>14-08-2026</a:t>
             </a:fld>
             <a:endParaRPr lang="en-IN" dirty="0"/>
           </a:p>
@@ -1880,7 +1880,7 @@
           <a:p>
             <a:fld id="{450E9977-AF0E-4B1A-B2BF-2416B4828E95}" type="datetime1">
               <a:rPr lang="en-IN" smtClean="0"/>
-              <a:t>12-08-2026</a:t>
+              <a:t>14-08-2026</a:t>
             </a:fld>
             <a:endParaRPr lang="en-IN" dirty="0"/>
           </a:p>
@@ -2107,7 +2107,7 @@
           <a:p>
             <a:fld id="{972A712B-80AB-4FDB-AFE5-C959280677B9}" type="datetime1">
               <a:rPr lang="en-IN" smtClean="0"/>
-              <a:t>12-08-2026</a:t>
+              <a:t>14-08-2026</a:t>
             </a:fld>
             <a:endParaRPr lang="en-IN" dirty="0"/>
           </a:p>
@@ -2398,7 +2398,7 @@
           <a:p>
             <a:fld id="{78FC1D50-5769-4793-A6D0-4C61D943385E}" type="datetime1">
               <a:rPr lang="en-IN" smtClean="0"/>
-              <a:t>12-08-2026</a:t>
+              <a:t>14-08-2026</a:t>
             </a:fld>
             <a:endParaRPr lang="en-IN" dirty="0"/>
           </a:p>
@@ -2663,7 +2663,7 @@
           <a:p>
             <a:fld id="{1093E9E7-66F0-49C7-87AF-7A91F126A0CA}" type="datetime1">
               <a:rPr lang="en-IN" smtClean="0"/>
-              <a:t>12-08-2026</a:t>
+              <a:t>14-08-2026</a:t>
             </a:fld>
             <a:endParaRPr lang="en-IN" dirty="0"/>
           </a:p>
@@ -3109,7 +3109,7 @@
           <a:p>
             <a:fld id="{4802E001-56FE-4C01-9545-A69D840AB1F5}" type="datetime1">
               <a:rPr lang="en-IN" smtClean="0"/>
-              <a:t>12-08-2026</a:t>
+              <a:t>14-08-2026</a:t>
             </a:fld>
             <a:endParaRPr lang="en-IN" dirty="0"/>
           </a:p>
@@ -3273,7 +3273,7 @@
           <a:p>
             <a:fld id="{FC628212-ABC2-4EAF-BB21-53D61AEEEA49}" type="datetime1">
               <a:rPr lang="en-IN" smtClean="0"/>
-              <a:t>12-08-2026</a:t>
+              <a:t>14-08-2026</a:t>
             </a:fld>
             <a:endParaRPr lang="en-IN" dirty="0"/>
           </a:p>
@@ -3437,7 +3437,7 @@
           <a:p>
             <a:fld id="{83F0C27E-97BD-4ACD-AFDF-13985BE88ECF}" type="datetime1">
               <a:rPr lang="en-IN" smtClean="0"/>
-              <a:t>12-08-2026</a:t>
+              <a:t>14-08-2026</a:t>
             </a:fld>
             <a:endParaRPr lang="en-IN" dirty="0"/>
           </a:p>
@@ -3635,7 +3635,7 @@
           <a:p>
             <a:fld id="{10A04BDC-9A72-4B08-81B7-A336A5B4E254}" type="datetime1">
               <a:rPr lang="en-IN" smtClean="0"/>
-              <a:t>12-08-2026</a:t>
+              <a:t>14-08-2026</a:t>
             </a:fld>
             <a:endParaRPr lang="en-IN" dirty="0"/>
           </a:p>
@@ -3833,7 +3833,7 @@
           <a:p>
             <a:fld id="{2E5D08A3-D96A-4309-8AF3-C610782BB2D3}" type="datetime1">
               <a:rPr lang="en-IN" smtClean="0"/>
-              <a:t>12-08-2026</a:t>
+              <a:t>14-08-2026</a:t>
             </a:fld>
             <a:endParaRPr lang="en-IN" dirty="0"/>
           </a:p>
